--- a/Writing/thesis/results/results_figures.pptx
+++ b/Writing/thesis/results/results_figures.pptx
@@ -5,7 +5,7 @@
     <p:sldMasterId id="2147483684" r:id="rId1"/>
   </p:sldMasterIdLst>
   <p:notesMasterIdLst>
-    <p:notesMasterId r:id="rId8"/>
+    <p:notesMasterId r:id="rId12"/>
   </p:notesMasterIdLst>
   <p:sldIdLst>
     <p:sldId id="259" r:id="rId2"/>
@@ -14,6 +14,10 @@
     <p:sldId id="263" r:id="rId5"/>
     <p:sldId id="265" r:id="rId6"/>
     <p:sldId id="264" r:id="rId7"/>
+    <p:sldId id="266" r:id="rId8"/>
+    <p:sldId id="273" r:id="rId9"/>
+    <p:sldId id="274" r:id="rId10"/>
+    <p:sldId id="275" r:id="rId11"/>
   </p:sldIdLst>
   <p:sldSz cx="12179300" cy="12733338"/>
   <p:notesSz cx="6858000" cy="9144000"/>
@@ -202,7 +206,7 @@
           <a:p>
             <a:fld id="{51561201-B54B-9546-B2B5-5B57BF2ECE4E}" type="datetimeFigureOut">
               <a:rPr lang="en-US" smtClean="0"/>
-              <a:t>3/3/26</a:t>
+              <a:t>4/5/26</a:t>
             </a:fld>
             <a:endParaRPr lang="en-US"/>
           </a:p>
@@ -1315,6 +1319,474 @@
 </p:notes>
 </file>
 
+<file path=ppt/notesSlides/notesSlide6.xml><?xml version="1.0" encoding="utf-8"?>
+<p:notes xmlns:a="http://schemas.openxmlformats.org/drawingml/2006/main" xmlns:r="http://schemas.openxmlformats.org/officeDocument/2006/relationships" xmlns:p="http://schemas.openxmlformats.org/presentationml/2006/main">
+  <p:cSld>
+    <p:spTree>
+      <p:nvGrpSpPr>
+        <p:cNvPr id="1" name=""/>
+        <p:cNvGrpSpPr/>
+        <p:nvPr/>
+      </p:nvGrpSpPr>
+      <p:grpSpPr>
+        <a:xfrm>
+          <a:off x="0" y="0"/>
+          <a:ext cx="0" cy="0"/>
+          <a:chOff x="0" y="0"/>
+          <a:chExt cx="0" cy="0"/>
+        </a:xfrm>
+      </p:grpSpPr>
+      <p:sp>
+        <p:nvSpPr>
+          <p:cNvPr id="2" name="Slide Image Placeholder 1"/>
+          <p:cNvSpPr>
+            <a:spLocks noGrp="1" noRot="1" noChangeAspect="1"/>
+          </p:cNvSpPr>
+          <p:nvPr>
+            <p:ph type="sldImg"/>
+          </p:nvPr>
+        </p:nvSpPr>
+        <p:spPr/>
+      </p:sp>
+      <p:sp>
+        <p:nvSpPr>
+          <p:cNvPr id="3" name="Notes Placeholder 2"/>
+          <p:cNvSpPr>
+            <a:spLocks noGrp="1"/>
+          </p:cNvSpPr>
+          <p:nvPr>
+            <p:ph type="body" idx="1"/>
+          </p:nvPr>
+        </p:nvSpPr>
+        <p:spPr/>
+        <p:txBody>
+          <a:bodyPr/>
+          <a:lstStyle/>
+          <a:p>
+            <a:r>
+              <a:rPr lang="en-US" dirty="0"/>
+              <a:t>Traces</a:t>
+            </a:r>
+          </a:p>
+          <a:p>
+            <a:r>
+              <a:rPr lang="en-US" dirty="0"/>
+              <a:t>Rep cell</a:t>
+            </a:r>
+          </a:p>
+          <a:p>
+            <a:r>
+              <a:rPr lang="en-US" dirty="0"/>
+              <a:t>PPR and CV</a:t>
+            </a:r>
+          </a:p>
+        </p:txBody>
+      </p:sp>
+      <p:sp>
+        <p:nvSpPr>
+          <p:cNvPr id="4" name="Slide Number Placeholder 3"/>
+          <p:cNvSpPr>
+            <a:spLocks noGrp="1"/>
+          </p:cNvSpPr>
+          <p:nvPr>
+            <p:ph type="sldNum" sz="quarter" idx="5"/>
+          </p:nvPr>
+        </p:nvSpPr>
+        <p:spPr/>
+        <p:txBody>
+          <a:bodyPr/>
+          <a:lstStyle/>
+          <a:p>
+            <a:fld id="{F708F06A-076A-AB49-9E02-15A3C27D2EF7}" type="slidenum">
+              <a:rPr lang="en-US" smtClean="0"/>
+              <a:t>7</a:t>
+            </a:fld>
+            <a:endParaRPr lang="en-US"/>
+          </a:p>
+        </p:txBody>
+      </p:sp>
+    </p:spTree>
+    <p:extLst>
+      <p:ext uri="{BB962C8B-B14F-4D97-AF65-F5344CB8AC3E}">
+        <p14:creationId xmlns:p14="http://schemas.microsoft.com/office/powerpoint/2010/main" val="2188284980"/>
+      </p:ext>
+    </p:extLst>
+  </p:cSld>
+  <p:clrMapOvr>
+    <a:masterClrMapping/>
+  </p:clrMapOvr>
+</p:notes>
+</file>
+
+<file path=ppt/notesSlides/notesSlide7.xml><?xml version="1.0" encoding="utf-8"?>
+<p:notes xmlns:a="http://schemas.openxmlformats.org/drawingml/2006/main" xmlns:r="http://schemas.openxmlformats.org/officeDocument/2006/relationships" xmlns:p="http://schemas.openxmlformats.org/presentationml/2006/main">
+  <p:cSld>
+    <p:spTree>
+      <p:nvGrpSpPr>
+        <p:cNvPr id="1" name="">
+          <a:extLst>
+            <a:ext uri="{FF2B5EF4-FFF2-40B4-BE49-F238E27FC236}">
+              <a16:creationId xmlns:a16="http://schemas.microsoft.com/office/drawing/2014/main" id="{54F66BA1-76EF-F2D0-B0A3-2BECB91A517C}"/>
+            </a:ext>
+          </a:extLst>
+        </p:cNvPr>
+        <p:cNvGrpSpPr/>
+        <p:nvPr/>
+      </p:nvGrpSpPr>
+      <p:grpSpPr>
+        <a:xfrm>
+          <a:off x="0" y="0"/>
+          <a:ext cx="0" cy="0"/>
+          <a:chOff x="0" y="0"/>
+          <a:chExt cx="0" cy="0"/>
+        </a:xfrm>
+      </p:grpSpPr>
+      <p:sp>
+        <p:nvSpPr>
+          <p:cNvPr id="2" name="Slide Image Placeholder 1">
+            <a:extLst>
+              <a:ext uri="{FF2B5EF4-FFF2-40B4-BE49-F238E27FC236}">
+                <a16:creationId xmlns:a16="http://schemas.microsoft.com/office/drawing/2014/main" id="{ACD4C487-C49A-6203-2F7F-9A1AE8662828}"/>
+              </a:ext>
+            </a:extLst>
+          </p:cNvPr>
+          <p:cNvSpPr>
+            <a:spLocks noGrp="1" noRot="1" noChangeAspect="1"/>
+          </p:cNvSpPr>
+          <p:nvPr>
+            <p:ph type="sldImg"/>
+          </p:nvPr>
+        </p:nvSpPr>
+        <p:spPr/>
+      </p:sp>
+      <p:sp>
+        <p:nvSpPr>
+          <p:cNvPr id="3" name="Notes Placeholder 2">
+            <a:extLst>
+              <a:ext uri="{FF2B5EF4-FFF2-40B4-BE49-F238E27FC236}">
+                <a16:creationId xmlns:a16="http://schemas.microsoft.com/office/drawing/2014/main" id="{4301ACEC-48EB-2E2E-125B-8FFBCAA50ED4}"/>
+              </a:ext>
+            </a:extLst>
+          </p:cNvPr>
+          <p:cNvSpPr>
+            <a:spLocks noGrp="1"/>
+          </p:cNvSpPr>
+          <p:nvPr>
+            <p:ph type="body" idx="1"/>
+          </p:nvPr>
+        </p:nvSpPr>
+        <p:spPr/>
+        <p:txBody>
+          <a:bodyPr/>
+          <a:lstStyle/>
+          <a:p>
+            <a:r>
+              <a:rPr lang="en-US" dirty="0"/>
+              <a:t>Traces</a:t>
+            </a:r>
+          </a:p>
+          <a:p>
+            <a:r>
+              <a:rPr lang="en-US" dirty="0"/>
+              <a:t>Rep cell</a:t>
+            </a:r>
+          </a:p>
+          <a:p>
+            <a:r>
+              <a:rPr lang="en-US" dirty="0"/>
+              <a:t>PPR and CV</a:t>
+            </a:r>
+          </a:p>
+        </p:txBody>
+      </p:sp>
+      <p:sp>
+        <p:nvSpPr>
+          <p:cNvPr id="4" name="Slide Number Placeholder 3">
+            <a:extLst>
+              <a:ext uri="{FF2B5EF4-FFF2-40B4-BE49-F238E27FC236}">
+                <a16:creationId xmlns:a16="http://schemas.microsoft.com/office/drawing/2014/main" id="{055A50B9-5D5E-CFC0-57CD-255DBDB15704}"/>
+              </a:ext>
+            </a:extLst>
+          </p:cNvPr>
+          <p:cNvSpPr>
+            <a:spLocks noGrp="1"/>
+          </p:cNvSpPr>
+          <p:nvPr>
+            <p:ph type="sldNum" sz="quarter" idx="5"/>
+          </p:nvPr>
+        </p:nvSpPr>
+        <p:spPr/>
+        <p:txBody>
+          <a:bodyPr/>
+          <a:lstStyle/>
+          <a:p>
+            <a:fld id="{F708F06A-076A-AB49-9E02-15A3C27D2EF7}" type="slidenum">
+              <a:rPr lang="en-US" smtClean="0"/>
+              <a:t>8</a:t>
+            </a:fld>
+            <a:endParaRPr lang="en-US"/>
+          </a:p>
+        </p:txBody>
+      </p:sp>
+    </p:spTree>
+    <p:extLst>
+      <p:ext uri="{BB962C8B-B14F-4D97-AF65-F5344CB8AC3E}">
+        <p14:creationId xmlns:p14="http://schemas.microsoft.com/office/powerpoint/2010/main" val="727726667"/>
+      </p:ext>
+    </p:extLst>
+  </p:cSld>
+  <p:clrMapOvr>
+    <a:masterClrMapping/>
+  </p:clrMapOvr>
+</p:notes>
+</file>
+
+<file path=ppt/notesSlides/notesSlide8.xml><?xml version="1.0" encoding="utf-8"?>
+<p:notes xmlns:a="http://schemas.openxmlformats.org/drawingml/2006/main" xmlns:r="http://schemas.openxmlformats.org/officeDocument/2006/relationships" xmlns:p="http://schemas.openxmlformats.org/presentationml/2006/main">
+  <p:cSld>
+    <p:spTree>
+      <p:nvGrpSpPr>
+        <p:cNvPr id="1" name="">
+          <a:extLst>
+            <a:ext uri="{FF2B5EF4-FFF2-40B4-BE49-F238E27FC236}">
+              <a16:creationId xmlns:a16="http://schemas.microsoft.com/office/drawing/2014/main" id="{361C1861-6333-CF33-86DB-99096F16AC39}"/>
+            </a:ext>
+          </a:extLst>
+        </p:cNvPr>
+        <p:cNvGrpSpPr/>
+        <p:nvPr/>
+      </p:nvGrpSpPr>
+      <p:grpSpPr>
+        <a:xfrm>
+          <a:off x="0" y="0"/>
+          <a:ext cx="0" cy="0"/>
+          <a:chOff x="0" y="0"/>
+          <a:chExt cx="0" cy="0"/>
+        </a:xfrm>
+      </p:grpSpPr>
+      <p:sp>
+        <p:nvSpPr>
+          <p:cNvPr id="2" name="Slide Image Placeholder 1">
+            <a:extLst>
+              <a:ext uri="{FF2B5EF4-FFF2-40B4-BE49-F238E27FC236}">
+                <a16:creationId xmlns:a16="http://schemas.microsoft.com/office/drawing/2014/main" id="{B20E9660-0AE2-D107-C1E5-C05109A6F5A5}"/>
+              </a:ext>
+            </a:extLst>
+          </p:cNvPr>
+          <p:cNvSpPr>
+            <a:spLocks noGrp="1" noRot="1" noChangeAspect="1"/>
+          </p:cNvSpPr>
+          <p:nvPr>
+            <p:ph type="sldImg"/>
+          </p:nvPr>
+        </p:nvSpPr>
+        <p:spPr/>
+      </p:sp>
+      <p:sp>
+        <p:nvSpPr>
+          <p:cNvPr id="3" name="Notes Placeholder 2">
+            <a:extLst>
+              <a:ext uri="{FF2B5EF4-FFF2-40B4-BE49-F238E27FC236}">
+                <a16:creationId xmlns:a16="http://schemas.microsoft.com/office/drawing/2014/main" id="{07B7CAB0-B7C5-63E0-BF4D-C73A7996E4D6}"/>
+              </a:ext>
+            </a:extLst>
+          </p:cNvPr>
+          <p:cNvSpPr>
+            <a:spLocks noGrp="1"/>
+          </p:cNvSpPr>
+          <p:nvPr>
+            <p:ph type="body" idx="1"/>
+          </p:nvPr>
+        </p:nvSpPr>
+        <p:spPr/>
+        <p:txBody>
+          <a:bodyPr/>
+          <a:lstStyle/>
+          <a:p>
+            <a:r>
+              <a:rPr lang="en-US" dirty="0"/>
+              <a:t>Traces</a:t>
+            </a:r>
+          </a:p>
+          <a:p>
+            <a:r>
+              <a:rPr lang="en-US" dirty="0"/>
+              <a:t>Rep cell</a:t>
+            </a:r>
+          </a:p>
+          <a:p>
+            <a:r>
+              <a:rPr lang="en-US" dirty="0"/>
+              <a:t>PPR and CV</a:t>
+            </a:r>
+          </a:p>
+        </p:txBody>
+      </p:sp>
+      <p:sp>
+        <p:nvSpPr>
+          <p:cNvPr id="4" name="Slide Number Placeholder 3">
+            <a:extLst>
+              <a:ext uri="{FF2B5EF4-FFF2-40B4-BE49-F238E27FC236}">
+                <a16:creationId xmlns:a16="http://schemas.microsoft.com/office/drawing/2014/main" id="{66502CCE-1E7A-32BD-134A-334AA91EE634}"/>
+              </a:ext>
+            </a:extLst>
+          </p:cNvPr>
+          <p:cNvSpPr>
+            <a:spLocks noGrp="1"/>
+          </p:cNvSpPr>
+          <p:nvPr>
+            <p:ph type="sldNum" sz="quarter" idx="5"/>
+          </p:nvPr>
+        </p:nvSpPr>
+        <p:spPr/>
+        <p:txBody>
+          <a:bodyPr/>
+          <a:lstStyle/>
+          <a:p>
+            <a:fld id="{F708F06A-076A-AB49-9E02-15A3C27D2EF7}" type="slidenum">
+              <a:rPr lang="en-US" smtClean="0"/>
+              <a:t>9</a:t>
+            </a:fld>
+            <a:endParaRPr lang="en-US"/>
+          </a:p>
+        </p:txBody>
+      </p:sp>
+    </p:spTree>
+    <p:extLst>
+      <p:ext uri="{BB962C8B-B14F-4D97-AF65-F5344CB8AC3E}">
+        <p14:creationId xmlns:p14="http://schemas.microsoft.com/office/powerpoint/2010/main" val="1149316453"/>
+      </p:ext>
+    </p:extLst>
+  </p:cSld>
+  <p:clrMapOvr>
+    <a:masterClrMapping/>
+  </p:clrMapOvr>
+</p:notes>
+</file>
+
+<file path=ppt/notesSlides/notesSlide9.xml><?xml version="1.0" encoding="utf-8"?>
+<p:notes xmlns:a="http://schemas.openxmlformats.org/drawingml/2006/main" xmlns:r="http://schemas.openxmlformats.org/officeDocument/2006/relationships" xmlns:p="http://schemas.openxmlformats.org/presentationml/2006/main">
+  <p:cSld>
+    <p:spTree>
+      <p:nvGrpSpPr>
+        <p:cNvPr id="1" name="">
+          <a:extLst>
+            <a:ext uri="{FF2B5EF4-FFF2-40B4-BE49-F238E27FC236}">
+              <a16:creationId xmlns:a16="http://schemas.microsoft.com/office/drawing/2014/main" id="{23933D36-9617-4922-BBA0-DF9A6D4B4B55}"/>
+            </a:ext>
+          </a:extLst>
+        </p:cNvPr>
+        <p:cNvGrpSpPr/>
+        <p:nvPr/>
+      </p:nvGrpSpPr>
+      <p:grpSpPr>
+        <a:xfrm>
+          <a:off x="0" y="0"/>
+          <a:ext cx="0" cy="0"/>
+          <a:chOff x="0" y="0"/>
+          <a:chExt cx="0" cy="0"/>
+        </a:xfrm>
+      </p:grpSpPr>
+      <p:sp>
+        <p:nvSpPr>
+          <p:cNvPr id="2" name="Slide Image Placeholder 1">
+            <a:extLst>
+              <a:ext uri="{FF2B5EF4-FFF2-40B4-BE49-F238E27FC236}">
+                <a16:creationId xmlns:a16="http://schemas.microsoft.com/office/drawing/2014/main" id="{87F5D140-3394-2526-A45A-F326BF02D229}"/>
+              </a:ext>
+            </a:extLst>
+          </p:cNvPr>
+          <p:cNvSpPr>
+            <a:spLocks noGrp="1" noRot="1" noChangeAspect="1"/>
+          </p:cNvSpPr>
+          <p:nvPr>
+            <p:ph type="sldImg"/>
+          </p:nvPr>
+        </p:nvSpPr>
+        <p:spPr/>
+      </p:sp>
+      <p:sp>
+        <p:nvSpPr>
+          <p:cNvPr id="3" name="Notes Placeholder 2">
+            <a:extLst>
+              <a:ext uri="{FF2B5EF4-FFF2-40B4-BE49-F238E27FC236}">
+                <a16:creationId xmlns:a16="http://schemas.microsoft.com/office/drawing/2014/main" id="{0722751D-99FE-8DAC-8A2A-986CF6DD718F}"/>
+              </a:ext>
+            </a:extLst>
+          </p:cNvPr>
+          <p:cNvSpPr>
+            <a:spLocks noGrp="1"/>
+          </p:cNvSpPr>
+          <p:nvPr>
+            <p:ph type="body" idx="1"/>
+          </p:nvPr>
+        </p:nvSpPr>
+        <p:spPr/>
+        <p:txBody>
+          <a:bodyPr/>
+          <a:lstStyle/>
+          <a:p>
+            <a:r>
+              <a:rPr lang="en-US" dirty="0"/>
+              <a:t>Traces</a:t>
+            </a:r>
+          </a:p>
+          <a:p>
+            <a:r>
+              <a:rPr lang="en-US" dirty="0"/>
+              <a:t>Rep cell</a:t>
+            </a:r>
+          </a:p>
+          <a:p>
+            <a:r>
+              <a:rPr lang="en-US" dirty="0"/>
+              <a:t>PPR and CV</a:t>
+            </a:r>
+          </a:p>
+        </p:txBody>
+      </p:sp>
+      <p:sp>
+        <p:nvSpPr>
+          <p:cNvPr id="4" name="Slide Number Placeholder 3">
+            <a:extLst>
+              <a:ext uri="{FF2B5EF4-FFF2-40B4-BE49-F238E27FC236}">
+                <a16:creationId xmlns:a16="http://schemas.microsoft.com/office/drawing/2014/main" id="{5D563270-B8B0-2519-CA57-097FBE1BA4E1}"/>
+              </a:ext>
+            </a:extLst>
+          </p:cNvPr>
+          <p:cNvSpPr>
+            <a:spLocks noGrp="1"/>
+          </p:cNvSpPr>
+          <p:nvPr>
+            <p:ph type="sldNum" sz="quarter" idx="5"/>
+          </p:nvPr>
+        </p:nvSpPr>
+        <p:spPr/>
+        <p:txBody>
+          <a:bodyPr/>
+          <a:lstStyle/>
+          <a:p>
+            <a:fld id="{F708F06A-076A-AB49-9E02-15A3C27D2EF7}" type="slidenum">
+              <a:rPr lang="en-US" smtClean="0"/>
+              <a:t>10</a:t>
+            </a:fld>
+            <a:endParaRPr lang="en-US"/>
+          </a:p>
+        </p:txBody>
+      </p:sp>
+    </p:spTree>
+    <p:extLst>
+      <p:ext uri="{BB962C8B-B14F-4D97-AF65-F5344CB8AC3E}">
+        <p14:creationId xmlns:p14="http://schemas.microsoft.com/office/powerpoint/2010/main" val="1872765867"/>
+      </p:ext>
+    </p:extLst>
+  </p:cSld>
+  <p:clrMapOvr>
+    <a:masterClrMapping/>
+  </p:clrMapOvr>
+</p:notes>
+</file>
+
 <file path=ppt/slideLayouts/slideLayout1.xml><?xml version="1.0" encoding="utf-8"?>
 <p:sldLayout xmlns:a="http://schemas.openxmlformats.org/drawingml/2006/main" xmlns:r="http://schemas.openxmlformats.org/officeDocument/2006/relationships" xmlns:p="http://schemas.openxmlformats.org/presentationml/2006/main" type="title" preserve="1">
   <p:cSld name="Title Slide">
@@ -1446,7 +1918,7 @@
           <a:p>
             <a:fld id="{423AA46A-6E9F-7141-8668-6D3EB019C2A9}" type="datetimeFigureOut">
               <a:rPr lang="en-US" smtClean="0"/>
-              <a:t>3/3/26</a:t>
+              <a:t>4/5/26</a:t>
             </a:fld>
             <a:endParaRPr lang="en-US"/>
           </a:p>
@@ -1616,7 +2088,7 @@
           <a:p>
             <a:fld id="{423AA46A-6E9F-7141-8668-6D3EB019C2A9}" type="datetimeFigureOut">
               <a:rPr lang="en-US" smtClean="0"/>
-              <a:t>3/3/26</a:t>
+              <a:t>4/5/26</a:t>
             </a:fld>
             <a:endParaRPr lang="en-US"/>
           </a:p>
@@ -1796,7 +2268,7 @@
           <a:p>
             <a:fld id="{423AA46A-6E9F-7141-8668-6D3EB019C2A9}" type="datetimeFigureOut">
               <a:rPr lang="en-US" smtClean="0"/>
-              <a:t>3/3/26</a:t>
+              <a:t>4/5/26</a:t>
             </a:fld>
             <a:endParaRPr lang="en-US"/>
           </a:p>
@@ -1966,7 +2438,7 @@
           <a:p>
             <a:fld id="{423AA46A-6E9F-7141-8668-6D3EB019C2A9}" type="datetimeFigureOut">
               <a:rPr lang="en-US" smtClean="0"/>
-              <a:t>3/3/26</a:t>
+              <a:t>4/5/26</a:t>
             </a:fld>
             <a:endParaRPr lang="en-US"/>
           </a:p>
@@ -2212,7 +2684,7 @@
           <a:p>
             <a:fld id="{423AA46A-6E9F-7141-8668-6D3EB019C2A9}" type="datetimeFigureOut">
               <a:rPr lang="en-US" smtClean="0"/>
-              <a:t>3/3/26</a:t>
+              <a:t>4/5/26</a:t>
             </a:fld>
             <a:endParaRPr lang="en-US"/>
           </a:p>
@@ -2444,7 +2916,7 @@
           <a:p>
             <a:fld id="{423AA46A-6E9F-7141-8668-6D3EB019C2A9}" type="datetimeFigureOut">
               <a:rPr lang="en-US" smtClean="0"/>
-              <a:t>3/3/26</a:t>
+              <a:t>4/5/26</a:t>
             </a:fld>
             <a:endParaRPr lang="en-US"/>
           </a:p>
@@ -2811,7 +3283,7 @@
           <a:p>
             <a:fld id="{423AA46A-6E9F-7141-8668-6D3EB019C2A9}" type="datetimeFigureOut">
               <a:rPr lang="en-US" smtClean="0"/>
-              <a:t>3/3/26</a:t>
+              <a:t>4/5/26</a:t>
             </a:fld>
             <a:endParaRPr lang="en-US"/>
           </a:p>
@@ -2929,7 +3401,7 @@
           <a:p>
             <a:fld id="{423AA46A-6E9F-7141-8668-6D3EB019C2A9}" type="datetimeFigureOut">
               <a:rPr lang="en-US" smtClean="0"/>
-              <a:t>3/3/26</a:t>
+              <a:t>4/5/26</a:t>
             </a:fld>
             <a:endParaRPr lang="en-US"/>
           </a:p>
@@ -3024,7 +3496,7 @@
           <a:p>
             <a:fld id="{423AA46A-6E9F-7141-8668-6D3EB019C2A9}" type="datetimeFigureOut">
               <a:rPr lang="en-US" smtClean="0"/>
-              <a:t>3/3/26</a:t>
+              <a:t>4/5/26</a:t>
             </a:fld>
             <a:endParaRPr lang="en-US"/>
           </a:p>
@@ -3301,7 +3773,7 @@
           <a:p>
             <a:fld id="{423AA46A-6E9F-7141-8668-6D3EB019C2A9}" type="datetimeFigureOut">
               <a:rPr lang="en-US" smtClean="0"/>
-              <a:t>3/3/26</a:t>
+              <a:t>4/5/26</a:t>
             </a:fld>
             <a:endParaRPr lang="en-US"/>
           </a:p>
@@ -3558,7 +4030,7 @@
           <a:p>
             <a:fld id="{423AA46A-6E9F-7141-8668-6D3EB019C2A9}" type="datetimeFigureOut">
               <a:rPr lang="en-US" smtClean="0"/>
-              <a:t>3/3/26</a:t>
+              <a:t>4/5/26</a:t>
             </a:fld>
             <a:endParaRPr lang="en-US"/>
           </a:p>
@@ -3771,7 +4243,7 @@
           <a:p>
             <a:fld id="{423AA46A-6E9F-7141-8668-6D3EB019C2A9}" type="datetimeFigureOut">
               <a:rPr lang="en-US" smtClean="0"/>
-              <a:t>3/3/26</a:t>
+              <a:t>4/5/26</a:t>
             </a:fld>
             <a:endParaRPr lang="en-US"/>
           </a:p>
@@ -4593,6 +5065,329 @@
 </p:sld>
 </file>
 
+<file path=ppt/slides/slide10.xml><?xml version="1.0" encoding="utf-8"?>
+<p:sld xmlns:a="http://schemas.openxmlformats.org/drawingml/2006/main" xmlns:r="http://schemas.openxmlformats.org/officeDocument/2006/relationships" xmlns:p="http://schemas.openxmlformats.org/presentationml/2006/main">
+  <p:cSld>
+    <p:spTree>
+      <p:nvGrpSpPr>
+        <p:cNvPr id="1" name="">
+          <a:extLst>
+            <a:ext uri="{FF2B5EF4-FFF2-40B4-BE49-F238E27FC236}">
+              <a16:creationId xmlns:a16="http://schemas.microsoft.com/office/drawing/2014/main" id="{40C96E2F-B9A6-3702-240D-A7CEF015B4EC}"/>
+            </a:ext>
+          </a:extLst>
+        </p:cNvPr>
+        <p:cNvGrpSpPr/>
+        <p:nvPr/>
+      </p:nvGrpSpPr>
+      <p:grpSpPr>
+        <a:xfrm>
+          <a:off x="0" y="0"/>
+          <a:ext cx="0" cy="0"/>
+          <a:chOff x="0" y="0"/>
+          <a:chExt cx="0" cy="0"/>
+        </a:xfrm>
+      </p:grpSpPr>
+      <p:pic>
+        <p:nvPicPr>
+          <p:cNvPr id="4" name="Picture 3">
+            <a:extLst>
+              <a:ext uri="{FF2B5EF4-FFF2-40B4-BE49-F238E27FC236}">
+                <a16:creationId xmlns:a16="http://schemas.microsoft.com/office/drawing/2014/main" id="{041FE609-C7D0-B081-689E-638808D7145D}"/>
+              </a:ext>
+            </a:extLst>
+          </p:cNvPr>
+          <p:cNvPicPr>
+            <a:picLocks noChangeAspect="1"/>
+          </p:cNvPicPr>
+          <p:nvPr/>
+        </p:nvPicPr>
+        <p:blipFill>
+          <a:blip r:embed="rId3"/>
+          <a:srcRect/>
+          <a:stretch/>
+        </p:blipFill>
+        <p:spPr>
+          <a:xfrm>
+            <a:off x="4017659" y="6619159"/>
+            <a:ext cx="5123458" cy="1448298"/>
+          </a:xfrm>
+          <a:prstGeom prst="rect">
+            <a:avLst/>
+          </a:prstGeom>
+        </p:spPr>
+      </p:pic>
+      <p:pic>
+        <p:nvPicPr>
+          <p:cNvPr id="3" name="Picture 2">
+            <a:extLst>
+              <a:ext uri="{FF2B5EF4-FFF2-40B4-BE49-F238E27FC236}">
+                <a16:creationId xmlns:a16="http://schemas.microsoft.com/office/drawing/2014/main" id="{A7A2742D-B137-4497-87B4-B96BE1373A9F}"/>
+              </a:ext>
+            </a:extLst>
+          </p:cNvPr>
+          <p:cNvPicPr>
+            <a:picLocks noChangeAspect="1"/>
+          </p:cNvPicPr>
+          <p:nvPr/>
+        </p:nvPicPr>
+        <p:blipFill>
+          <a:blip r:embed="rId4"/>
+          <a:srcRect/>
+          <a:stretch/>
+        </p:blipFill>
+        <p:spPr>
+          <a:xfrm>
+            <a:off x="2753737" y="8161338"/>
+            <a:ext cx="6383067" cy="4571999"/>
+          </a:xfrm>
+          <a:prstGeom prst="rect">
+            <a:avLst/>
+          </a:prstGeom>
+        </p:spPr>
+      </p:pic>
+      <p:pic>
+        <p:nvPicPr>
+          <p:cNvPr id="7" name="Picture 6">
+            <a:extLst>
+              <a:ext uri="{FF2B5EF4-FFF2-40B4-BE49-F238E27FC236}">
+                <a16:creationId xmlns:a16="http://schemas.microsoft.com/office/drawing/2014/main" id="{4A1441D1-DB59-1D1E-CFF2-4C758561C743}"/>
+              </a:ext>
+            </a:extLst>
+          </p:cNvPr>
+          <p:cNvPicPr>
+            <a:picLocks noChangeAspect="1"/>
+          </p:cNvPicPr>
+          <p:nvPr/>
+        </p:nvPicPr>
+        <p:blipFill>
+          <a:blip r:embed="rId5"/>
+          <a:srcRect/>
+          <a:stretch/>
+        </p:blipFill>
+        <p:spPr>
+          <a:xfrm>
+            <a:off x="2766401" y="1794669"/>
+            <a:ext cx="6357739" cy="4571999"/>
+          </a:xfrm>
+          <a:prstGeom prst="rect">
+            <a:avLst/>
+          </a:prstGeom>
+        </p:spPr>
+      </p:pic>
+      <p:sp>
+        <p:nvSpPr>
+          <p:cNvPr id="8" name="TextBox 7">
+            <a:extLst>
+              <a:ext uri="{FF2B5EF4-FFF2-40B4-BE49-F238E27FC236}">
+                <a16:creationId xmlns:a16="http://schemas.microsoft.com/office/drawing/2014/main" id="{F83CF755-1063-4F86-C19D-A56C17756E51}"/>
+              </a:ext>
+            </a:extLst>
+          </p:cNvPr>
+          <p:cNvSpPr txBox="1"/>
+          <p:nvPr/>
+        </p:nvSpPr>
+        <p:spPr>
+          <a:xfrm>
+            <a:off x="2523718" y="1610163"/>
+            <a:ext cx="442301" cy="369012"/>
+          </a:xfrm>
+          <a:prstGeom prst="rect">
+            <a:avLst/>
+          </a:prstGeom>
+          <a:noFill/>
+        </p:spPr>
+        <p:txBody>
+          <a:bodyPr wrap="square" rtlCol="0">
+            <a:spAutoFit/>
+          </a:bodyPr>
+          <a:lstStyle/>
+          <a:p>
+            <a:r>
+              <a:rPr lang="en-US" sz="1798" b="1" dirty="0">
+                <a:latin typeface="Arial" panose="020B0604020202020204" pitchFamily="34" charset="0"/>
+                <a:cs typeface="Arial" panose="020B0604020202020204" pitchFamily="34" charset="0"/>
+              </a:rPr>
+              <a:t>A.</a:t>
+            </a:r>
+          </a:p>
+        </p:txBody>
+      </p:sp>
+      <p:sp>
+        <p:nvSpPr>
+          <p:cNvPr id="9" name="TextBox 8">
+            <a:extLst>
+              <a:ext uri="{FF2B5EF4-FFF2-40B4-BE49-F238E27FC236}">
+                <a16:creationId xmlns:a16="http://schemas.microsoft.com/office/drawing/2014/main" id="{03BFD00E-4D33-0433-5977-4844009545C4}"/>
+              </a:ext>
+            </a:extLst>
+          </p:cNvPr>
+          <p:cNvSpPr txBox="1"/>
+          <p:nvPr/>
+        </p:nvSpPr>
+        <p:spPr>
+          <a:xfrm>
+            <a:off x="2523718" y="5997657"/>
+            <a:ext cx="442301" cy="369012"/>
+          </a:xfrm>
+          <a:prstGeom prst="rect">
+            <a:avLst/>
+          </a:prstGeom>
+          <a:noFill/>
+        </p:spPr>
+        <p:txBody>
+          <a:bodyPr wrap="square" rtlCol="0">
+            <a:spAutoFit/>
+          </a:bodyPr>
+          <a:lstStyle/>
+          <a:p>
+            <a:r>
+              <a:rPr lang="en-US" sz="1798" b="1" dirty="0">
+                <a:latin typeface="Arial" panose="020B0604020202020204" pitchFamily="34" charset="0"/>
+                <a:cs typeface="Arial" panose="020B0604020202020204" pitchFamily="34" charset="0"/>
+              </a:rPr>
+              <a:t>B.</a:t>
+            </a:r>
+          </a:p>
+        </p:txBody>
+      </p:sp>
+      <p:sp>
+        <p:nvSpPr>
+          <p:cNvPr id="19" name="TextBox 18">
+            <a:extLst>
+              <a:ext uri="{FF2B5EF4-FFF2-40B4-BE49-F238E27FC236}">
+                <a16:creationId xmlns:a16="http://schemas.microsoft.com/office/drawing/2014/main" id="{AA491169-603F-0021-5738-B1FD86720F86}"/>
+              </a:ext>
+            </a:extLst>
+          </p:cNvPr>
+          <p:cNvSpPr txBox="1"/>
+          <p:nvPr/>
+        </p:nvSpPr>
+        <p:spPr>
+          <a:xfrm>
+            <a:off x="4218657" y="6448595"/>
+            <a:ext cx="951229" cy="338554"/>
+          </a:xfrm>
+          <a:prstGeom prst="rect">
+            <a:avLst/>
+          </a:prstGeom>
+          <a:noFill/>
+        </p:spPr>
+        <p:txBody>
+          <a:bodyPr wrap="square" rtlCol="0">
+            <a:spAutoFit/>
+          </a:bodyPr>
+          <a:lstStyle/>
+          <a:p>
+            <a:pPr algn="ctr"/>
+            <a:r>
+              <a:rPr lang="en-US" sz="1600" dirty="0">
+                <a:latin typeface="Segoe UI" panose="020B0502040204020203" pitchFamily="34" charset="0"/>
+                <a:cs typeface="Segoe UI" panose="020B0502040204020203" pitchFamily="34" charset="0"/>
+              </a:rPr>
+              <a:t>Baseline</a:t>
+            </a:r>
+            <a:endParaRPr lang="en-US" dirty="0">
+              <a:latin typeface="Segoe UI" panose="020B0502040204020203" pitchFamily="34" charset="0"/>
+              <a:cs typeface="Segoe UI" panose="020B0502040204020203" pitchFamily="34" charset="0"/>
+            </a:endParaRPr>
+          </a:p>
+        </p:txBody>
+      </p:sp>
+      <p:sp>
+        <p:nvSpPr>
+          <p:cNvPr id="20" name="TextBox 19">
+            <a:extLst>
+              <a:ext uri="{FF2B5EF4-FFF2-40B4-BE49-F238E27FC236}">
+                <a16:creationId xmlns:a16="http://schemas.microsoft.com/office/drawing/2014/main" id="{BDBB865D-889E-E10B-C428-333E270C1402}"/>
+              </a:ext>
+            </a:extLst>
+          </p:cNvPr>
+          <p:cNvSpPr txBox="1"/>
+          <p:nvPr/>
+        </p:nvSpPr>
+        <p:spPr>
+          <a:xfrm>
+            <a:off x="6184287" y="6448595"/>
+            <a:ext cx="1071546" cy="338554"/>
+          </a:xfrm>
+          <a:prstGeom prst="rect">
+            <a:avLst/>
+          </a:prstGeom>
+          <a:noFill/>
+        </p:spPr>
+        <p:txBody>
+          <a:bodyPr wrap="square" rtlCol="0">
+            <a:spAutoFit/>
+          </a:bodyPr>
+          <a:lstStyle/>
+          <a:p>
+            <a:pPr algn="ctr"/>
+            <a:r>
+              <a:rPr lang="en-US" sz="1600" dirty="0">
+                <a:latin typeface="Segoe UI" panose="020B0502040204020203" pitchFamily="34" charset="0"/>
+                <a:cs typeface="Segoe UI" panose="020B0502040204020203" pitchFamily="34" charset="0"/>
+              </a:rPr>
+              <a:t>Post-HFS</a:t>
+            </a:r>
+            <a:endParaRPr lang="en-US" dirty="0">
+              <a:latin typeface="Segoe UI" panose="020B0502040204020203" pitchFamily="34" charset="0"/>
+              <a:cs typeface="Segoe UI" panose="020B0502040204020203" pitchFamily="34" charset="0"/>
+            </a:endParaRPr>
+          </a:p>
+        </p:txBody>
+      </p:sp>
+      <p:sp>
+        <p:nvSpPr>
+          <p:cNvPr id="21" name="TextBox 20">
+            <a:extLst>
+              <a:ext uri="{FF2B5EF4-FFF2-40B4-BE49-F238E27FC236}">
+                <a16:creationId xmlns:a16="http://schemas.microsoft.com/office/drawing/2014/main" id="{3022C2CA-9CAF-1BBD-BB69-6C75E25366BE}"/>
+              </a:ext>
+            </a:extLst>
+          </p:cNvPr>
+          <p:cNvSpPr txBox="1"/>
+          <p:nvPr/>
+        </p:nvSpPr>
+        <p:spPr>
+          <a:xfrm>
+            <a:off x="2523718" y="7884238"/>
+            <a:ext cx="442301" cy="369012"/>
+          </a:xfrm>
+          <a:prstGeom prst="rect">
+            <a:avLst/>
+          </a:prstGeom>
+          <a:noFill/>
+        </p:spPr>
+        <p:txBody>
+          <a:bodyPr wrap="square" rtlCol="0">
+            <a:spAutoFit/>
+          </a:bodyPr>
+          <a:lstStyle/>
+          <a:p>
+            <a:r>
+              <a:rPr lang="en-US" sz="1798" b="1" dirty="0">
+                <a:latin typeface="Arial" panose="020B0604020202020204" pitchFamily="34" charset="0"/>
+                <a:cs typeface="Arial" panose="020B0604020202020204" pitchFamily="34" charset="0"/>
+              </a:rPr>
+              <a:t>C.</a:t>
+            </a:r>
+          </a:p>
+        </p:txBody>
+      </p:sp>
+    </p:spTree>
+    <p:extLst>
+      <p:ext uri="{BB962C8B-B14F-4D97-AF65-F5344CB8AC3E}">
+        <p14:creationId xmlns:p14="http://schemas.microsoft.com/office/powerpoint/2010/main" val="850732629"/>
+      </p:ext>
+    </p:extLst>
+  </p:cSld>
+  <p:clrMapOvr>
+    <a:masterClrMapping/>
+  </p:clrMapOvr>
+</p:sld>
+</file>
+
 <file path=ppt/slides/slide2.xml><?xml version="1.0" encoding="utf-8"?>
 <p:sld xmlns:a="http://schemas.openxmlformats.org/drawingml/2006/main" xmlns:r="http://schemas.openxmlformats.org/officeDocument/2006/relationships" xmlns:p="http://schemas.openxmlformats.org/presentationml/2006/main">
   <p:cSld>
@@ -5728,6 +6523,971 @@
     <p:extLst>
       <p:ext uri="{BB962C8B-B14F-4D97-AF65-F5344CB8AC3E}">
         <p14:creationId xmlns:p14="http://schemas.microsoft.com/office/powerpoint/2010/main" val="4168312661"/>
+      </p:ext>
+    </p:extLst>
+  </p:cSld>
+  <p:clrMapOvr>
+    <a:masterClrMapping/>
+  </p:clrMapOvr>
+</p:sld>
+</file>
+
+<file path=ppt/slides/slide7.xml><?xml version="1.0" encoding="utf-8"?>
+<p:sld xmlns:a="http://schemas.openxmlformats.org/drawingml/2006/main" xmlns:r="http://schemas.openxmlformats.org/officeDocument/2006/relationships" xmlns:p="http://schemas.openxmlformats.org/presentationml/2006/main">
+  <p:cSld>
+    <p:spTree>
+      <p:nvGrpSpPr>
+        <p:cNvPr id="1" name=""/>
+        <p:cNvGrpSpPr/>
+        <p:nvPr/>
+      </p:nvGrpSpPr>
+      <p:grpSpPr>
+        <a:xfrm>
+          <a:off x="0" y="0"/>
+          <a:ext cx="0" cy="0"/>
+          <a:chOff x="0" y="0"/>
+          <a:chExt cx="0" cy="0"/>
+        </a:xfrm>
+      </p:grpSpPr>
+      <p:pic>
+        <p:nvPicPr>
+          <p:cNvPr id="3" name="Picture 2">
+            <a:extLst>
+              <a:ext uri="{FF2B5EF4-FFF2-40B4-BE49-F238E27FC236}">
+                <a16:creationId xmlns:a16="http://schemas.microsoft.com/office/drawing/2014/main" id="{139E3991-F91C-0A33-8B5F-3BFF95493073}"/>
+              </a:ext>
+            </a:extLst>
+          </p:cNvPr>
+          <p:cNvPicPr>
+            <a:picLocks noChangeAspect="1"/>
+          </p:cNvPicPr>
+          <p:nvPr/>
+        </p:nvPicPr>
+        <p:blipFill>
+          <a:blip r:embed="rId3"/>
+          <a:stretch>
+            <a:fillRect/>
+          </a:stretch>
+        </p:blipFill>
+        <p:spPr>
+          <a:xfrm>
+            <a:off x="2744871" y="8161338"/>
+            <a:ext cx="6400800" cy="4572000"/>
+          </a:xfrm>
+          <a:prstGeom prst="rect">
+            <a:avLst/>
+          </a:prstGeom>
+        </p:spPr>
+      </p:pic>
+      <p:pic>
+        <p:nvPicPr>
+          <p:cNvPr id="7" name="Picture 6">
+            <a:extLst>
+              <a:ext uri="{FF2B5EF4-FFF2-40B4-BE49-F238E27FC236}">
+                <a16:creationId xmlns:a16="http://schemas.microsoft.com/office/drawing/2014/main" id="{83014362-6086-BB23-ABD3-D492511B7670}"/>
+              </a:ext>
+            </a:extLst>
+          </p:cNvPr>
+          <p:cNvPicPr>
+            <a:picLocks noChangeAspect="1"/>
+          </p:cNvPicPr>
+          <p:nvPr/>
+        </p:nvPicPr>
+        <p:blipFill>
+          <a:blip r:embed="rId4"/>
+          <a:stretch>
+            <a:fillRect/>
+          </a:stretch>
+        </p:blipFill>
+        <p:spPr>
+          <a:xfrm>
+            <a:off x="2744871" y="1794669"/>
+            <a:ext cx="6400800" cy="4572000"/>
+          </a:xfrm>
+          <a:prstGeom prst="rect">
+            <a:avLst/>
+          </a:prstGeom>
+        </p:spPr>
+      </p:pic>
+      <p:sp>
+        <p:nvSpPr>
+          <p:cNvPr id="8" name="TextBox 7">
+            <a:extLst>
+              <a:ext uri="{FF2B5EF4-FFF2-40B4-BE49-F238E27FC236}">
+                <a16:creationId xmlns:a16="http://schemas.microsoft.com/office/drawing/2014/main" id="{518656C9-7DDE-AA92-9A6F-B86984C97952}"/>
+              </a:ext>
+            </a:extLst>
+          </p:cNvPr>
+          <p:cNvSpPr txBox="1"/>
+          <p:nvPr/>
+        </p:nvSpPr>
+        <p:spPr>
+          <a:xfrm>
+            <a:off x="2523718" y="1610163"/>
+            <a:ext cx="442301" cy="369012"/>
+          </a:xfrm>
+          <a:prstGeom prst="rect">
+            <a:avLst/>
+          </a:prstGeom>
+          <a:noFill/>
+        </p:spPr>
+        <p:txBody>
+          <a:bodyPr wrap="square" rtlCol="0">
+            <a:spAutoFit/>
+          </a:bodyPr>
+          <a:lstStyle/>
+          <a:p>
+            <a:r>
+              <a:rPr lang="en-US" sz="1798" b="1" dirty="0">
+                <a:latin typeface="Arial" panose="020B0604020202020204" pitchFamily="34" charset="0"/>
+                <a:cs typeface="Arial" panose="020B0604020202020204" pitchFamily="34" charset="0"/>
+              </a:rPr>
+              <a:t>A.</a:t>
+            </a:r>
+          </a:p>
+        </p:txBody>
+      </p:sp>
+      <p:sp>
+        <p:nvSpPr>
+          <p:cNvPr id="9" name="TextBox 8">
+            <a:extLst>
+              <a:ext uri="{FF2B5EF4-FFF2-40B4-BE49-F238E27FC236}">
+                <a16:creationId xmlns:a16="http://schemas.microsoft.com/office/drawing/2014/main" id="{8F33D50D-3EDA-3259-F433-6359C59353A2}"/>
+              </a:ext>
+            </a:extLst>
+          </p:cNvPr>
+          <p:cNvSpPr txBox="1"/>
+          <p:nvPr/>
+        </p:nvSpPr>
+        <p:spPr>
+          <a:xfrm>
+            <a:off x="2523718" y="5997657"/>
+            <a:ext cx="442301" cy="369012"/>
+          </a:xfrm>
+          <a:prstGeom prst="rect">
+            <a:avLst/>
+          </a:prstGeom>
+          <a:noFill/>
+        </p:spPr>
+        <p:txBody>
+          <a:bodyPr wrap="square" rtlCol="0">
+            <a:spAutoFit/>
+          </a:bodyPr>
+          <a:lstStyle/>
+          <a:p>
+            <a:r>
+              <a:rPr lang="en-US" sz="1798" b="1" dirty="0">
+                <a:latin typeface="Arial" panose="020B0604020202020204" pitchFamily="34" charset="0"/>
+                <a:cs typeface="Arial" panose="020B0604020202020204" pitchFamily="34" charset="0"/>
+              </a:rPr>
+              <a:t>B.</a:t>
+            </a:r>
+          </a:p>
+        </p:txBody>
+      </p:sp>
+      <p:pic>
+        <p:nvPicPr>
+          <p:cNvPr id="18" name="Picture 17">
+            <a:extLst>
+              <a:ext uri="{FF2B5EF4-FFF2-40B4-BE49-F238E27FC236}">
+                <a16:creationId xmlns:a16="http://schemas.microsoft.com/office/drawing/2014/main" id="{EC68AC3F-A8D5-5784-E4E3-2E49AB381641}"/>
+              </a:ext>
+            </a:extLst>
+          </p:cNvPr>
+          <p:cNvPicPr>
+            <a:picLocks noChangeAspect="1"/>
+          </p:cNvPicPr>
+          <p:nvPr/>
+        </p:nvPicPr>
+        <p:blipFill>
+          <a:blip r:embed="rId5"/>
+          <a:srcRect/>
+          <a:stretch/>
+        </p:blipFill>
+        <p:spPr>
+          <a:xfrm>
+            <a:off x="4013105" y="6617872"/>
+            <a:ext cx="5132566" cy="1450872"/>
+          </a:xfrm>
+          <a:prstGeom prst="rect">
+            <a:avLst/>
+          </a:prstGeom>
+        </p:spPr>
+      </p:pic>
+      <p:sp>
+        <p:nvSpPr>
+          <p:cNvPr id="19" name="TextBox 18">
+            <a:extLst>
+              <a:ext uri="{FF2B5EF4-FFF2-40B4-BE49-F238E27FC236}">
+                <a16:creationId xmlns:a16="http://schemas.microsoft.com/office/drawing/2014/main" id="{315674EE-39E8-5A0E-4840-41FF5FCBE0D3}"/>
+              </a:ext>
+            </a:extLst>
+          </p:cNvPr>
+          <p:cNvSpPr txBox="1"/>
+          <p:nvPr/>
+        </p:nvSpPr>
+        <p:spPr>
+          <a:xfrm>
+            <a:off x="4218657" y="6448595"/>
+            <a:ext cx="951229" cy="338554"/>
+          </a:xfrm>
+          <a:prstGeom prst="rect">
+            <a:avLst/>
+          </a:prstGeom>
+          <a:noFill/>
+        </p:spPr>
+        <p:txBody>
+          <a:bodyPr wrap="square" rtlCol="0">
+            <a:spAutoFit/>
+          </a:bodyPr>
+          <a:lstStyle/>
+          <a:p>
+            <a:pPr algn="ctr"/>
+            <a:r>
+              <a:rPr lang="en-US" sz="1600" dirty="0">
+                <a:latin typeface="Segoe UI" panose="020B0502040204020203" pitchFamily="34" charset="0"/>
+                <a:cs typeface="Segoe UI" panose="020B0502040204020203" pitchFamily="34" charset="0"/>
+              </a:rPr>
+              <a:t>Baseline</a:t>
+            </a:r>
+            <a:endParaRPr lang="en-US" dirty="0">
+              <a:latin typeface="Segoe UI" panose="020B0502040204020203" pitchFamily="34" charset="0"/>
+              <a:cs typeface="Segoe UI" panose="020B0502040204020203" pitchFamily="34" charset="0"/>
+            </a:endParaRPr>
+          </a:p>
+        </p:txBody>
+      </p:sp>
+      <p:sp>
+        <p:nvSpPr>
+          <p:cNvPr id="20" name="TextBox 19">
+            <a:extLst>
+              <a:ext uri="{FF2B5EF4-FFF2-40B4-BE49-F238E27FC236}">
+                <a16:creationId xmlns:a16="http://schemas.microsoft.com/office/drawing/2014/main" id="{98FB0E35-D2B3-A754-A053-6C9AE9B2B42C}"/>
+              </a:ext>
+            </a:extLst>
+          </p:cNvPr>
+          <p:cNvSpPr txBox="1"/>
+          <p:nvPr/>
+        </p:nvSpPr>
+        <p:spPr>
+          <a:xfrm>
+            <a:off x="6184287" y="6448595"/>
+            <a:ext cx="1071546" cy="338554"/>
+          </a:xfrm>
+          <a:prstGeom prst="rect">
+            <a:avLst/>
+          </a:prstGeom>
+          <a:noFill/>
+        </p:spPr>
+        <p:txBody>
+          <a:bodyPr wrap="square" rtlCol="0">
+            <a:spAutoFit/>
+          </a:bodyPr>
+          <a:lstStyle/>
+          <a:p>
+            <a:pPr algn="ctr"/>
+            <a:r>
+              <a:rPr lang="en-US" sz="1600" dirty="0">
+                <a:latin typeface="Segoe UI" panose="020B0502040204020203" pitchFamily="34" charset="0"/>
+                <a:cs typeface="Segoe UI" panose="020B0502040204020203" pitchFamily="34" charset="0"/>
+              </a:rPr>
+              <a:t>Post-HFS</a:t>
+            </a:r>
+            <a:endParaRPr lang="en-US" dirty="0">
+              <a:latin typeface="Segoe UI" panose="020B0502040204020203" pitchFamily="34" charset="0"/>
+              <a:cs typeface="Segoe UI" panose="020B0502040204020203" pitchFamily="34" charset="0"/>
+            </a:endParaRPr>
+          </a:p>
+        </p:txBody>
+      </p:sp>
+      <p:sp>
+        <p:nvSpPr>
+          <p:cNvPr id="21" name="TextBox 20">
+            <a:extLst>
+              <a:ext uri="{FF2B5EF4-FFF2-40B4-BE49-F238E27FC236}">
+                <a16:creationId xmlns:a16="http://schemas.microsoft.com/office/drawing/2014/main" id="{AE3CC6D3-AB43-1E7F-F8F4-EB407E5FEAD4}"/>
+              </a:ext>
+            </a:extLst>
+          </p:cNvPr>
+          <p:cNvSpPr txBox="1"/>
+          <p:nvPr/>
+        </p:nvSpPr>
+        <p:spPr>
+          <a:xfrm>
+            <a:off x="2523718" y="7884238"/>
+            <a:ext cx="442301" cy="369012"/>
+          </a:xfrm>
+          <a:prstGeom prst="rect">
+            <a:avLst/>
+          </a:prstGeom>
+          <a:noFill/>
+        </p:spPr>
+        <p:txBody>
+          <a:bodyPr wrap="square" rtlCol="0">
+            <a:spAutoFit/>
+          </a:bodyPr>
+          <a:lstStyle/>
+          <a:p>
+            <a:r>
+              <a:rPr lang="en-US" sz="1798" b="1" dirty="0">
+                <a:latin typeface="Arial" panose="020B0604020202020204" pitchFamily="34" charset="0"/>
+                <a:cs typeface="Arial" panose="020B0604020202020204" pitchFamily="34" charset="0"/>
+              </a:rPr>
+              <a:t>C.</a:t>
+            </a:r>
+          </a:p>
+        </p:txBody>
+      </p:sp>
+    </p:spTree>
+    <p:extLst>
+      <p:ext uri="{BB962C8B-B14F-4D97-AF65-F5344CB8AC3E}">
+        <p14:creationId xmlns:p14="http://schemas.microsoft.com/office/powerpoint/2010/main" val="1340584193"/>
+      </p:ext>
+    </p:extLst>
+  </p:cSld>
+  <p:clrMapOvr>
+    <a:masterClrMapping/>
+  </p:clrMapOvr>
+</p:sld>
+</file>
+
+<file path=ppt/slides/slide8.xml><?xml version="1.0" encoding="utf-8"?>
+<p:sld xmlns:a="http://schemas.openxmlformats.org/drawingml/2006/main" xmlns:r="http://schemas.openxmlformats.org/officeDocument/2006/relationships" xmlns:p="http://schemas.openxmlformats.org/presentationml/2006/main">
+  <p:cSld>
+    <p:spTree>
+      <p:nvGrpSpPr>
+        <p:cNvPr id="1" name="">
+          <a:extLst>
+            <a:ext uri="{FF2B5EF4-FFF2-40B4-BE49-F238E27FC236}">
+              <a16:creationId xmlns:a16="http://schemas.microsoft.com/office/drawing/2014/main" id="{AE009488-6750-E636-3C4C-84FDBBF1783E}"/>
+            </a:ext>
+          </a:extLst>
+        </p:cNvPr>
+        <p:cNvGrpSpPr/>
+        <p:nvPr/>
+      </p:nvGrpSpPr>
+      <p:grpSpPr>
+        <a:xfrm>
+          <a:off x="0" y="0"/>
+          <a:ext cx="0" cy="0"/>
+          <a:chOff x="0" y="0"/>
+          <a:chExt cx="0" cy="0"/>
+        </a:xfrm>
+      </p:grpSpPr>
+      <p:pic>
+        <p:nvPicPr>
+          <p:cNvPr id="3" name="Picture 2">
+            <a:extLst>
+              <a:ext uri="{FF2B5EF4-FFF2-40B4-BE49-F238E27FC236}">
+                <a16:creationId xmlns:a16="http://schemas.microsoft.com/office/drawing/2014/main" id="{9B69B228-8A4E-137F-FD80-E00059299F6E}"/>
+              </a:ext>
+            </a:extLst>
+          </p:cNvPr>
+          <p:cNvPicPr>
+            <a:picLocks noChangeAspect="1"/>
+          </p:cNvPicPr>
+          <p:nvPr/>
+        </p:nvPicPr>
+        <p:blipFill>
+          <a:blip r:embed="rId3"/>
+          <a:srcRect/>
+          <a:stretch/>
+        </p:blipFill>
+        <p:spPr>
+          <a:xfrm>
+            <a:off x="2753736" y="8161338"/>
+            <a:ext cx="6383069" cy="4572000"/>
+          </a:xfrm>
+          <a:prstGeom prst="rect">
+            <a:avLst/>
+          </a:prstGeom>
+        </p:spPr>
+      </p:pic>
+      <p:pic>
+        <p:nvPicPr>
+          <p:cNvPr id="7" name="Picture 6">
+            <a:extLst>
+              <a:ext uri="{FF2B5EF4-FFF2-40B4-BE49-F238E27FC236}">
+                <a16:creationId xmlns:a16="http://schemas.microsoft.com/office/drawing/2014/main" id="{CC6EADE1-4E2A-F6B0-4F2B-184978D6A847}"/>
+              </a:ext>
+            </a:extLst>
+          </p:cNvPr>
+          <p:cNvPicPr>
+            <a:picLocks noChangeAspect="1"/>
+          </p:cNvPicPr>
+          <p:nvPr/>
+        </p:nvPicPr>
+        <p:blipFill>
+          <a:blip r:embed="rId4"/>
+          <a:srcRect/>
+          <a:stretch/>
+        </p:blipFill>
+        <p:spPr>
+          <a:xfrm>
+            <a:off x="2760069" y="1794669"/>
+            <a:ext cx="6370404" cy="4572000"/>
+          </a:xfrm>
+          <a:prstGeom prst="rect">
+            <a:avLst/>
+          </a:prstGeom>
+        </p:spPr>
+      </p:pic>
+      <p:sp>
+        <p:nvSpPr>
+          <p:cNvPr id="8" name="TextBox 7">
+            <a:extLst>
+              <a:ext uri="{FF2B5EF4-FFF2-40B4-BE49-F238E27FC236}">
+                <a16:creationId xmlns:a16="http://schemas.microsoft.com/office/drawing/2014/main" id="{526FF42C-EE63-A09B-8579-3C3FC82A4FC4}"/>
+              </a:ext>
+            </a:extLst>
+          </p:cNvPr>
+          <p:cNvSpPr txBox="1"/>
+          <p:nvPr/>
+        </p:nvSpPr>
+        <p:spPr>
+          <a:xfrm>
+            <a:off x="2523718" y="1610163"/>
+            <a:ext cx="442301" cy="369012"/>
+          </a:xfrm>
+          <a:prstGeom prst="rect">
+            <a:avLst/>
+          </a:prstGeom>
+          <a:noFill/>
+        </p:spPr>
+        <p:txBody>
+          <a:bodyPr wrap="square" rtlCol="0">
+            <a:spAutoFit/>
+          </a:bodyPr>
+          <a:lstStyle/>
+          <a:p>
+            <a:r>
+              <a:rPr lang="en-US" sz="1798" b="1" dirty="0">
+                <a:latin typeface="Arial" panose="020B0604020202020204" pitchFamily="34" charset="0"/>
+                <a:cs typeface="Arial" panose="020B0604020202020204" pitchFamily="34" charset="0"/>
+              </a:rPr>
+              <a:t>A.</a:t>
+            </a:r>
+          </a:p>
+        </p:txBody>
+      </p:sp>
+      <p:sp>
+        <p:nvSpPr>
+          <p:cNvPr id="9" name="TextBox 8">
+            <a:extLst>
+              <a:ext uri="{FF2B5EF4-FFF2-40B4-BE49-F238E27FC236}">
+                <a16:creationId xmlns:a16="http://schemas.microsoft.com/office/drawing/2014/main" id="{9F228C08-5C6D-C0AB-EB74-B5B4098C7CF0}"/>
+              </a:ext>
+            </a:extLst>
+          </p:cNvPr>
+          <p:cNvSpPr txBox="1"/>
+          <p:nvPr/>
+        </p:nvSpPr>
+        <p:spPr>
+          <a:xfrm>
+            <a:off x="2523718" y="5997657"/>
+            <a:ext cx="442301" cy="369012"/>
+          </a:xfrm>
+          <a:prstGeom prst="rect">
+            <a:avLst/>
+          </a:prstGeom>
+          <a:noFill/>
+        </p:spPr>
+        <p:txBody>
+          <a:bodyPr wrap="square" rtlCol="0">
+            <a:spAutoFit/>
+          </a:bodyPr>
+          <a:lstStyle/>
+          <a:p>
+            <a:r>
+              <a:rPr lang="en-US" sz="1798" b="1" dirty="0">
+                <a:latin typeface="Arial" panose="020B0604020202020204" pitchFamily="34" charset="0"/>
+                <a:cs typeface="Arial" panose="020B0604020202020204" pitchFamily="34" charset="0"/>
+              </a:rPr>
+              <a:t>B.</a:t>
+            </a:r>
+          </a:p>
+        </p:txBody>
+      </p:sp>
+      <p:pic>
+        <p:nvPicPr>
+          <p:cNvPr id="18" name="Picture 17">
+            <a:extLst>
+              <a:ext uri="{FF2B5EF4-FFF2-40B4-BE49-F238E27FC236}">
+                <a16:creationId xmlns:a16="http://schemas.microsoft.com/office/drawing/2014/main" id="{6C336446-D2F9-1E17-EA9E-59D98FEBE412}"/>
+              </a:ext>
+            </a:extLst>
+          </p:cNvPr>
+          <p:cNvPicPr>
+            <a:picLocks noChangeAspect="1"/>
+          </p:cNvPicPr>
+          <p:nvPr/>
+        </p:nvPicPr>
+        <p:blipFill>
+          <a:blip r:embed="rId5"/>
+          <a:srcRect/>
+          <a:stretch/>
+        </p:blipFill>
+        <p:spPr>
+          <a:xfrm>
+            <a:off x="4013105" y="6619159"/>
+            <a:ext cx="5132566" cy="1448298"/>
+          </a:xfrm>
+          <a:prstGeom prst="rect">
+            <a:avLst/>
+          </a:prstGeom>
+        </p:spPr>
+      </p:pic>
+      <p:sp>
+        <p:nvSpPr>
+          <p:cNvPr id="19" name="TextBox 18">
+            <a:extLst>
+              <a:ext uri="{FF2B5EF4-FFF2-40B4-BE49-F238E27FC236}">
+                <a16:creationId xmlns:a16="http://schemas.microsoft.com/office/drawing/2014/main" id="{F464DBB6-D776-53EC-FB5D-31636CA75ED9}"/>
+              </a:ext>
+            </a:extLst>
+          </p:cNvPr>
+          <p:cNvSpPr txBox="1"/>
+          <p:nvPr/>
+        </p:nvSpPr>
+        <p:spPr>
+          <a:xfrm>
+            <a:off x="4218657" y="6448595"/>
+            <a:ext cx="951229" cy="338554"/>
+          </a:xfrm>
+          <a:prstGeom prst="rect">
+            <a:avLst/>
+          </a:prstGeom>
+          <a:noFill/>
+        </p:spPr>
+        <p:txBody>
+          <a:bodyPr wrap="square" rtlCol="0">
+            <a:spAutoFit/>
+          </a:bodyPr>
+          <a:lstStyle/>
+          <a:p>
+            <a:pPr algn="ctr"/>
+            <a:r>
+              <a:rPr lang="en-US" sz="1600" dirty="0">
+                <a:latin typeface="Segoe UI" panose="020B0502040204020203" pitchFamily="34" charset="0"/>
+                <a:cs typeface="Segoe UI" panose="020B0502040204020203" pitchFamily="34" charset="0"/>
+              </a:rPr>
+              <a:t>Baseline</a:t>
+            </a:r>
+            <a:endParaRPr lang="en-US" dirty="0">
+              <a:latin typeface="Segoe UI" panose="020B0502040204020203" pitchFamily="34" charset="0"/>
+              <a:cs typeface="Segoe UI" panose="020B0502040204020203" pitchFamily="34" charset="0"/>
+            </a:endParaRPr>
+          </a:p>
+        </p:txBody>
+      </p:sp>
+      <p:sp>
+        <p:nvSpPr>
+          <p:cNvPr id="20" name="TextBox 19">
+            <a:extLst>
+              <a:ext uri="{FF2B5EF4-FFF2-40B4-BE49-F238E27FC236}">
+                <a16:creationId xmlns:a16="http://schemas.microsoft.com/office/drawing/2014/main" id="{43510C4B-0301-8885-455B-D20AAD1D85B6}"/>
+              </a:ext>
+            </a:extLst>
+          </p:cNvPr>
+          <p:cNvSpPr txBox="1"/>
+          <p:nvPr/>
+        </p:nvSpPr>
+        <p:spPr>
+          <a:xfrm>
+            <a:off x="6184287" y="6448595"/>
+            <a:ext cx="1071546" cy="338554"/>
+          </a:xfrm>
+          <a:prstGeom prst="rect">
+            <a:avLst/>
+          </a:prstGeom>
+          <a:noFill/>
+        </p:spPr>
+        <p:txBody>
+          <a:bodyPr wrap="square" rtlCol="0">
+            <a:spAutoFit/>
+          </a:bodyPr>
+          <a:lstStyle/>
+          <a:p>
+            <a:pPr algn="ctr"/>
+            <a:r>
+              <a:rPr lang="en-US" sz="1600" dirty="0">
+                <a:latin typeface="Segoe UI" panose="020B0502040204020203" pitchFamily="34" charset="0"/>
+                <a:cs typeface="Segoe UI" panose="020B0502040204020203" pitchFamily="34" charset="0"/>
+              </a:rPr>
+              <a:t>Post-HFS</a:t>
+            </a:r>
+            <a:endParaRPr lang="en-US" dirty="0">
+              <a:latin typeface="Segoe UI" panose="020B0502040204020203" pitchFamily="34" charset="0"/>
+              <a:cs typeface="Segoe UI" panose="020B0502040204020203" pitchFamily="34" charset="0"/>
+            </a:endParaRPr>
+          </a:p>
+        </p:txBody>
+      </p:sp>
+      <p:sp>
+        <p:nvSpPr>
+          <p:cNvPr id="21" name="TextBox 20">
+            <a:extLst>
+              <a:ext uri="{FF2B5EF4-FFF2-40B4-BE49-F238E27FC236}">
+                <a16:creationId xmlns:a16="http://schemas.microsoft.com/office/drawing/2014/main" id="{7BFE4CEA-0832-699F-3D66-4159DC369D7F}"/>
+              </a:ext>
+            </a:extLst>
+          </p:cNvPr>
+          <p:cNvSpPr txBox="1"/>
+          <p:nvPr/>
+        </p:nvSpPr>
+        <p:spPr>
+          <a:xfrm>
+            <a:off x="2523718" y="7884238"/>
+            <a:ext cx="442301" cy="369012"/>
+          </a:xfrm>
+          <a:prstGeom prst="rect">
+            <a:avLst/>
+          </a:prstGeom>
+          <a:noFill/>
+        </p:spPr>
+        <p:txBody>
+          <a:bodyPr wrap="square" rtlCol="0">
+            <a:spAutoFit/>
+          </a:bodyPr>
+          <a:lstStyle/>
+          <a:p>
+            <a:r>
+              <a:rPr lang="en-US" sz="1798" b="1" dirty="0">
+                <a:latin typeface="Arial" panose="020B0604020202020204" pitchFamily="34" charset="0"/>
+                <a:cs typeface="Arial" panose="020B0604020202020204" pitchFamily="34" charset="0"/>
+              </a:rPr>
+              <a:t>C.</a:t>
+            </a:r>
+          </a:p>
+        </p:txBody>
+      </p:sp>
+    </p:spTree>
+    <p:extLst>
+      <p:ext uri="{BB962C8B-B14F-4D97-AF65-F5344CB8AC3E}">
+        <p14:creationId xmlns:p14="http://schemas.microsoft.com/office/powerpoint/2010/main" val="2689135982"/>
+      </p:ext>
+    </p:extLst>
+  </p:cSld>
+  <p:clrMapOvr>
+    <a:masterClrMapping/>
+  </p:clrMapOvr>
+</p:sld>
+</file>
+
+<file path=ppt/slides/slide9.xml><?xml version="1.0" encoding="utf-8"?>
+<p:sld xmlns:a="http://schemas.openxmlformats.org/drawingml/2006/main" xmlns:r="http://schemas.openxmlformats.org/officeDocument/2006/relationships" xmlns:p="http://schemas.openxmlformats.org/presentationml/2006/main">
+  <p:cSld>
+    <p:spTree>
+      <p:nvGrpSpPr>
+        <p:cNvPr id="1" name="">
+          <a:extLst>
+            <a:ext uri="{FF2B5EF4-FFF2-40B4-BE49-F238E27FC236}">
+              <a16:creationId xmlns:a16="http://schemas.microsoft.com/office/drawing/2014/main" id="{A062D1D4-6826-F620-B10A-784FC5BF51AC}"/>
+            </a:ext>
+          </a:extLst>
+        </p:cNvPr>
+        <p:cNvGrpSpPr/>
+        <p:nvPr/>
+      </p:nvGrpSpPr>
+      <p:grpSpPr>
+        <a:xfrm>
+          <a:off x="0" y="0"/>
+          <a:ext cx="0" cy="0"/>
+          <a:chOff x="0" y="0"/>
+          <a:chExt cx="0" cy="0"/>
+        </a:xfrm>
+      </p:grpSpPr>
+      <p:pic>
+        <p:nvPicPr>
+          <p:cNvPr id="3" name="Picture 2">
+            <a:extLst>
+              <a:ext uri="{FF2B5EF4-FFF2-40B4-BE49-F238E27FC236}">
+                <a16:creationId xmlns:a16="http://schemas.microsoft.com/office/drawing/2014/main" id="{DCA7BD25-3893-16E8-50D3-96F5DC450AB5}"/>
+              </a:ext>
+            </a:extLst>
+          </p:cNvPr>
+          <p:cNvPicPr>
+            <a:picLocks noChangeAspect="1"/>
+          </p:cNvPicPr>
+          <p:nvPr/>
+        </p:nvPicPr>
+        <p:blipFill>
+          <a:blip r:embed="rId3"/>
+          <a:srcRect/>
+          <a:stretch/>
+        </p:blipFill>
+        <p:spPr>
+          <a:xfrm>
+            <a:off x="2753736" y="8161338"/>
+            <a:ext cx="6383069" cy="4571999"/>
+          </a:xfrm>
+          <a:prstGeom prst="rect">
+            <a:avLst/>
+          </a:prstGeom>
+        </p:spPr>
+      </p:pic>
+      <p:pic>
+        <p:nvPicPr>
+          <p:cNvPr id="7" name="Picture 6">
+            <a:extLst>
+              <a:ext uri="{FF2B5EF4-FFF2-40B4-BE49-F238E27FC236}">
+                <a16:creationId xmlns:a16="http://schemas.microsoft.com/office/drawing/2014/main" id="{26442BF3-2E38-C0D4-F101-98AC5033DE28}"/>
+              </a:ext>
+            </a:extLst>
+          </p:cNvPr>
+          <p:cNvPicPr>
+            <a:picLocks noChangeAspect="1"/>
+          </p:cNvPicPr>
+          <p:nvPr/>
+        </p:nvPicPr>
+        <p:blipFill>
+          <a:blip r:embed="rId4"/>
+          <a:srcRect/>
+          <a:stretch/>
+        </p:blipFill>
+        <p:spPr>
+          <a:xfrm>
+            <a:off x="2766401" y="1794669"/>
+            <a:ext cx="6357739" cy="4572000"/>
+          </a:xfrm>
+          <a:prstGeom prst="rect">
+            <a:avLst/>
+          </a:prstGeom>
+        </p:spPr>
+      </p:pic>
+      <p:sp>
+        <p:nvSpPr>
+          <p:cNvPr id="8" name="TextBox 7">
+            <a:extLst>
+              <a:ext uri="{FF2B5EF4-FFF2-40B4-BE49-F238E27FC236}">
+                <a16:creationId xmlns:a16="http://schemas.microsoft.com/office/drawing/2014/main" id="{A56BEC6A-47CB-F436-4913-67FCED4CB003}"/>
+              </a:ext>
+            </a:extLst>
+          </p:cNvPr>
+          <p:cNvSpPr txBox="1"/>
+          <p:nvPr/>
+        </p:nvSpPr>
+        <p:spPr>
+          <a:xfrm>
+            <a:off x="2523718" y="1610163"/>
+            <a:ext cx="442301" cy="369012"/>
+          </a:xfrm>
+          <a:prstGeom prst="rect">
+            <a:avLst/>
+          </a:prstGeom>
+          <a:noFill/>
+        </p:spPr>
+        <p:txBody>
+          <a:bodyPr wrap="square" rtlCol="0">
+            <a:spAutoFit/>
+          </a:bodyPr>
+          <a:lstStyle/>
+          <a:p>
+            <a:r>
+              <a:rPr lang="en-US" sz="1798" b="1" dirty="0">
+                <a:latin typeface="Arial" panose="020B0604020202020204" pitchFamily="34" charset="0"/>
+                <a:cs typeface="Arial" panose="020B0604020202020204" pitchFamily="34" charset="0"/>
+              </a:rPr>
+              <a:t>A.</a:t>
+            </a:r>
+          </a:p>
+        </p:txBody>
+      </p:sp>
+      <p:sp>
+        <p:nvSpPr>
+          <p:cNvPr id="9" name="TextBox 8">
+            <a:extLst>
+              <a:ext uri="{FF2B5EF4-FFF2-40B4-BE49-F238E27FC236}">
+                <a16:creationId xmlns:a16="http://schemas.microsoft.com/office/drawing/2014/main" id="{49E28428-4C66-9E54-C23C-52FF8C2B8609}"/>
+              </a:ext>
+            </a:extLst>
+          </p:cNvPr>
+          <p:cNvSpPr txBox="1"/>
+          <p:nvPr/>
+        </p:nvSpPr>
+        <p:spPr>
+          <a:xfrm>
+            <a:off x="2523718" y="5997657"/>
+            <a:ext cx="442301" cy="369012"/>
+          </a:xfrm>
+          <a:prstGeom prst="rect">
+            <a:avLst/>
+          </a:prstGeom>
+          <a:noFill/>
+        </p:spPr>
+        <p:txBody>
+          <a:bodyPr wrap="square" rtlCol="0">
+            <a:spAutoFit/>
+          </a:bodyPr>
+          <a:lstStyle/>
+          <a:p>
+            <a:r>
+              <a:rPr lang="en-US" sz="1798" b="1" dirty="0">
+                <a:latin typeface="Arial" panose="020B0604020202020204" pitchFamily="34" charset="0"/>
+                <a:cs typeface="Arial" panose="020B0604020202020204" pitchFamily="34" charset="0"/>
+              </a:rPr>
+              <a:t>B.</a:t>
+            </a:r>
+          </a:p>
+        </p:txBody>
+      </p:sp>
+      <p:pic>
+        <p:nvPicPr>
+          <p:cNvPr id="18" name="Picture 17">
+            <a:extLst>
+              <a:ext uri="{FF2B5EF4-FFF2-40B4-BE49-F238E27FC236}">
+                <a16:creationId xmlns:a16="http://schemas.microsoft.com/office/drawing/2014/main" id="{9FFCC96E-5C71-5BD9-2B52-2755E50BAF35}"/>
+              </a:ext>
+            </a:extLst>
+          </p:cNvPr>
+          <p:cNvPicPr>
+            <a:picLocks noChangeAspect="1"/>
+          </p:cNvPicPr>
+          <p:nvPr/>
+        </p:nvPicPr>
+        <p:blipFill>
+          <a:blip r:embed="rId5"/>
+          <a:srcRect/>
+          <a:stretch/>
+        </p:blipFill>
+        <p:spPr>
+          <a:xfrm>
+            <a:off x="4013106" y="6619159"/>
+            <a:ext cx="5132564" cy="1448298"/>
+          </a:xfrm>
+          <a:prstGeom prst="rect">
+            <a:avLst/>
+          </a:prstGeom>
+        </p:spPr>
+      </p:pic>
+      <p:sp>
+        <p:nvSpPr>
+          <p:cNvPr id="19" name="TextBox 18">
+            <a:extLst>
+              <a:ext uri="{FF2B5EF4-FFF2-40B4-BE49-F238E27FC236}">
+                <a16:creationId xmlns:a16="http://schemas.microsoft.com/office/drawing/2014/main" id="{21C6AE5F-E412-D9D1-BA87-282802AC0C2E}"/>
+              </a:ext>
+            </a:extLst>
+          </p:cNvPr>
+          <p:cNvSpPr txBox="1"/>
+          <p:nvPr/>
+        </p:nvSpPr>
+        <p:spPr>
+          <a:xfrm>
+            <a:off x="4218657" y="6448595"/>
+            <a:ext cx="951229" cy="338554"/>
+          </a:xfrm>
+          <a:prstGeom prst="rect">
+            <a:avLst/>
+          </a:prstGeom>
+          <a:noFill/>
+        </p:spPr>
+        <p:txBody>
+          <a:bodyPr wrap="square" rtlCol="0">
+            <a:spAutoFit/>
+          </a:bodyPr>
+          <a:lstStyle/>
+          <a:p>
+            <a:pPr algn="ctr"/>
+            <a:r>
+              <a:rPr lang="en-US" sz="1600" dirty="0">
+                <a:latin typeface="Segoe UI" panose="020B0502040204020203" pitchFamily="34" charset="0"/>
+                <a:cs typeface="Segoe UI" panose="020B0502040204020203" pitchFamily="34" charset="0"/>
+              </a:rPr>
+              <a:t>Baseline</a:t>
+            </a:r>
+            <a:endParaRPr lang="en-US" dirty="0">
+              <a:latin typeface="Segoe UI" panose="020B0502040204020203" pitchFamily="34" charset="0"/>
+              <a:cs typeface="Segoe UI" panose="020B0502040204020203" pitchFamily="34" charset="0"/>
+            </a:endParaRPr>
+          </a:p>
+        </p:txBody>
+      </p:sp>
+      <p:sp>
+        <p:nvSpPr>
+          <p:cNvPr id="20" name="TextBox 19">
+            <a:extLst>
+              <a:ext uri="{FF2B5EF4-FFF2-40B4-BE49-F238E27FC236}">
+                <a16:creationId xmlns:a16="http://schemas.microsoft.com/office/drawing/2014/main" id="{81178A97-7400-7D29-1E61-2ABC3D1A78D0}"/>
+              </a:ext>
+            </a:extLst>
+          </p:cNvPr>
+          <p:cNvSpPr txBox="1"/>
+          <p:nvPr/>
+        </p:nvSpPr>
+        <p:spPr>
+          <a:xfrm>
+            <a:off x="6184287" y="6448595"/>
+            <a:ext cx="1071546" cy="338554"/>
+          </a:xfrm>
+          <a:prstGeom prst="rect">
+            <a:avLst/>
+          </a:prstGeom>
+          <a:noFill/>
+        </p:spPr>
+        <p:txBody>
+          <a:bodyPr wrap="square" rtlCol="0">
+            <a:spAutoFit/>
+          </a:bodyPr>
+          <a:lstStyle/>
+          <a:p>
+            <a:pPr algn="ctr"/>
+            <a:r>
+              <a:rPr lang="en-US" sz="1600" dirty="0">
+                <a:latin typeface="Segoe UI" panose="020B0502040204020203" pitchFamily="34" charset="0"/>
+                <a:cs typeface="Segoe UI" panose="020B0502040204020203" pitchFamily="34" charset="0"/>
+              </a:rPr>
+              <a:t>Post-HFS</a:t>
+            </a:r>
+            <a:endParaRPr lang="en-US" dirty="0">
+              <a:latin typeface="Segoe UI" panose="020B0502040204020203" pitchFamily="34" charset="0"/>
+              <a:cs typeface="Segoe UI" panose="020B0502040204020203" pitchFamily="34" charset="0"/>
+            </a:endParaRPr>
+          </a:p>
+        </p:txBody>
+      </p:sp>
+      <p:sp>
+        <p:nvSpPr>
+          <p:cNvPr id="21" name="TextBox 20">
+            <a:extLst>
+              <a:ext uri="{FF2B5EF4-FFF2-40B4-BE49-F238E27FC236}">
+                <a16:creationId xmlns:a16="http://schemas.microsoft.com/office/drawing/2014/main" id="{BA15E6DA-046A-1350-2D59-07A0A5115FCE}"/>
+              </a:ext>
+            </a:extLst>
+          </p:cNvPr>
+          <p:cNvSpPr txBox="1"/>
+          <p:nvPr/>
+        </p:nvSpPr>
+        <p:spPr>
+          <a:xfrm>
+            <a:off x="2523718" y="7884238"/>
+            <a:ext cx="442301" cy="369012"/>
+          </a:xfrm>
+          <a:prstGeom prst="rect">
+            <a:avLst/>
+          </a:prstGeom>
+          <a:noFill/>
+        </p:spPr>
+        <p:txBody>
+          <a:bodyPr wrap="square" rtlCol="0">
+            <a:spAutoFit/>
+          </a:bodyPr>
+          <a:lstStyle/>
+          <a:p>
+            <a:r>
+              <a:rPr lang="en-US" sz="1798" b="1" dirty="0">
+                <a:latin typeface="Arial" panose="020B0604020202020204" pitchFamily="34" charset="0"/>
+                <a:cs typeface="Arial" panose="020B0604020202020204" pitchFamily="34" charset="0"/>
+              </a:rPr>
+              <a:t>C.</a:t>
+            </a:r>
+          </a:p>
+        </p:txBody>
+      </p:sp>
+    </p:spTree>
+    <p:extLst>
+      <p:ext uri="{BB962C8B-B14F-4D97-AF65-F5344CB8AC3E}">
+        <p14:creationId xmlns:p14="http://schemas.microsoft.com/office/powerpoint/2010/main" val="2874536972"/>
       </p:ext>
     </p:extLst>
   </p:cSld>

--- a/Writing/thesis/results/results_figures.pptx
+++ b/Writing/thesis/results/results_figures.pptx
@@ -5,19 +5,23 @@
     <p:sldMasterId id="2147483684" r:id="rId1"/>
   </p:sldMasterIdLst>
   <p:notesMasterIdLst>
-    <p:notesMasterId r:id="rId12"/>
+    <p:notesMasterId r:id="rId16"/>
   </p:notesMasterIdLst>
   <p:sldIdLst>
-    <p:sldId id="259" r:id="rId2"/>
-    <p:sldId id="260" r:id="rId3"/>
-    <p:sldId id="262" r:id="rId4"/>
-    <p:sldId id="263" r:id="rId5"/>
-    <p:sldId id="265" r:id="rId6"/>
-    <p:sldId id="264" r:id="rId7"/>
-    <p:sldId id="266" r:id="rId8"/>
-    <p:sldId id="273" r:id="rId9"/>
-    <p:sldId id="274" r:id="rId10"/>
-    <p:sldId id="275" r:id="rId11"/>
+    <p:sldId id="281" r:id="rId2"/>
+    <p:sldId id="294" r:id="rId3"/>
+    <p:sldId id="293" r:id="rId4"/>
+    <p:sldId id="295" r:id="rId5"/>
+    <p:sldId id="284" r:id="rId6"/>
+    <p:sldId id="285" r:id="rId7"/>
+    <p:sldId id="276" r:id="rId8"/>
+    <p:sldId id="277" r:id="rId9"/>
+    <p:sldId id="278" r:id="rId10"/>
+    <p:sldId id="279" r:id="rId11"/>
+    <p:sldId id="286" r:id="rId12"/>
+    <p:sldId id="290" r:id="rId13"/>
+    <p:sldId id="291" r:id="rId14"/>
+    <p:sldId id="292" r:id="rId15"/>
   </p:sldIdLst>
   <p:sldSz cx="12179300" cy="12733338"/>
   <p:notesSz cx="6858000" cy="9144000"/>
@@ -206,7 +210,7 @@
           <a:p>
             <a:fld id="{51561201-B54B-9546-B2B5-5B57BF2ECE4E}" type="datetimeFigureOut">
               <a:rPr lang="en-US" smtClean="0"/>
-              <a:t>4/5/26</a:t>
+              <a:t>4/22/26</a:t>
             </a:fld>
             <a:endParaRPr lang="en-US"/>
           </a:p>
@@ -478,6 +482,114 @@
   <p:cSld>
     <p:spTree>
       <p:nvGrpSpPr>
+        <p:cNvPr id="1" name="">
+          <a:extLst>
+            <a:ext uri="{FF2B5EF4-FFF2-40B4-BE49-F238E27FC236}">
+              <a16:creationId xmlns:a16="http://schemas.microsoft.com/office/drawing/2014/main" id="{36F09DA2-3002-73A8-7D03-7263296DAA91}"/>
+            </a:ext>
+          </a:extLst>
+        </p:cNvPr>
+        <p:cNvGrpSpPr/>
+        <p:nvPr/>
+      </p:nvGrpSpPr>
+      <p:grpSpPr>
+        <a:xfrm>
+          <a:off x="0" y="0"/>
+          <a:ext cx="0" cy="0"/>
+          <a:chOff x="0" y="0"/>
+          <a:chExt cx="0" cy="0"/>
+        </a:xfrm>
+      </p:grpSpPr>
+      <p:sp>
+        <p:nvSpPr>
+          <p:cNvPr id="2" name="Slide Image Placeholder 1">
+            <a:extLst>
+              <a:ext uri="{FF2B5EF4-FFF2-40B4-BE49-F238E27FC236}">
+                <a16:creationId xmlns:a16="http://schemas.microsoft.com/office/drawing/2014/main" id="{F4440792-294C-C467-0399-40B7797AAFB8}"/>
+              </a:ext>
+            </a:extLst>
+          </p:cNvPr>
+          <p:cNvSpPr>
+            <a:spLocks noGrp="1" noRot="1" noChangeAspect="1"/>
+          </p:cNvSpPr>
+          <p:nvPr>
+            <p:ph type="sldImg"/>
+          </p:nvPr>
+        </p:nvSpPr>
+        <p:spPr/>
+      </p:sp>
+      <p:sp>
+        <p:nvSpPr>
+          <p:cNvPr id="3" name="Notes Placeholder 2">
+            <a:extLst>
+              <a:ext uri="{FF2B5EF4-FFF2-40B4-BE49-F238E27FC236}">
+                <a16:creationId xmlns:a16="http://schemas.microsoft.com/office/drawing/2014/main" id="{524E6D63-BB97-3443-E8FB-868481187475}"/>
+              </a:ext>
+            </a:extLst>
+          </p:cNvPr>
+          <p:cNvSpPr>
+            <a:spLocks noGrp="1"/>
+          </p:cNvSpPr>
+          <p:nvPr>
+            <p:ph type="body" idx="1"/>
+          </p:nvPr>
+        </p:nvSpPr>
+        <p:spPr/>
+        <p:txBody>
+          <a:bodyPr/>
+          <a:lstStyle/>
+          <a:p>
+            <a:endParaRPr lang="en-US" dirty="0"/>
+          </a:p>
+        </p:txBody>
+      </p:sp>
+      <p:sp>
+        <p:nvSpPr>
+          <p:cNvPr id="4" name="Slide Number Placeholder 3">
+            <a:extLst>
+              <a:ext uri="{FF2B5EF4-FFF2-40B4-BE49-F238E27FC236}">
+                <a16:creationId xmlns:a16="http://schemas.microsoft.com/office/drawing/2014/main" id="{9CB49042-3ED7-64B1-11C7-62CDDCEBECAF}"/>
+              </a:ext>
+            </a:extLst>
+          </p:cNvPr>
+          <p:cNvSpPr>
+            <a:spLocks noGrp="1"/>
+          </p:cNvSpPr>
+          <p:nvPr>
+            <p:ph type="sldNum" sz="quarter" idx="5"/>
+          </p:nvPr>
+        </p:nvSpPr>
+        <p:spPr/>
+        <p:txBody>
+          <a:bodyPr/>
+          <a:lstStyle/>
+          <a:p>
+            <a:fld id="{F708F06A-076A-AB49-9E02-15A3C27D2EF7}" type="slidenum">
+              <a:rPr lang="en-US" smtClean="0"/>
+              <a:t>1</a:t>
+            </a:fld>
+            <a:endParaRPr lang="en-US"/>
+          </a:p>
+        </p:txBody>
+      </p:sp>
+    </p:spTree>
+    <p:extLst>
+      <p:ext uri="{BB962C8B-B14F-4D97-AF65-F5344CB8AC3E}">
+        <p14:creationId xmlns:p14="http://schemas.microsoft.com/office/powerpoint/2010/main" val="2382793367"/>
+      </p:ext>
+    </p:extLst>
+  </p:cSld>
+  <p:clrMapOvr>
+    <a:masterClrMapping/>
+  </p:clrMapOvr>
+</p:notes>
+</file>
+
+<file path=ppt/notesSlides/notesSlide10.xml><?xml version="1.0" encoding="utf-8"?>
+<p:notes xmlns:a="http://schemas.openxmlformats.org/drawingml/2006/main" xmlns:r="http://schemas.openxmlformats.org/officeDocument/2006/relationships" xmlns:p="http://schemas.openxmlformats.org/presentationml/2006/main">
+  <p:cSld>
+    <p:spTree>
+      <p:nvGrpSpPr>
         <p:cNvPr id="1" name=""/>
         <p:cNvGrpSpPr/>
         <p:nvPr/>
@@ -519,68 +631,139 @@
           <a:p>
             <a:r>
               <a:rPr lang="en-US" dirty="0"/>
-              <a:t>AP AMPLITUDE</a:t>
-            </a:r>
-          </a:p>
-          <a:p>
-            <a:r>
-              <a:rPr lang="en-US" dirty="0"/>
-              <a:t>Acute: n=5, p= 0.01216</a:t>
-            </a:r>
-          </a:p>
-          <a:p>
-            <a:r>
-              <a:rPr lang="en-US" dirty="0"/>
-              <a:t>Acute with AM251: n=6, p=0.1024</a:t>
-            </a:r>
-          </a:p>
-          <a:p>
-            <a:r>
-              <a:rPr lang="en-US" dirty="0"/>
-              <a:t>Repeated: n=9, p=0.2531</a:t>
-            </a:r>
-          </a:p>
-          <a:p>
-            <a:r>
-              <a:rPr lang="en-US" dirty="0"/>
-              <a:t>PAIRED T-TEST comparing before and after </a:t>
+              <a:t>PPR: </a:t>
+            </a:r>
+            <a:r>
+              <a:rPr lang="en-CA" sz="1598" kern="1200" dirty="0">
+                <a:solidFill>
+                  <a:schemeClr val="tx1"/>
+                </a:solidFill>
+                <a:effectLst/>
+                <a:latin typeface="+mn-lt"/>
+                <a:ea typeface="+mn-ea"/>
+                <a:cs typeface="+mn-cs"/>
+              </a:rPr>
+              <a:t>1.29 ± 0.18 to 1.35 ± 0.22, n = 9, paired t-test</a:t>
+            </a:r>
+          </a:p>
+          <a:p>
+            <a:pPr marL="0" marR="0" lvl="0" indent="0" algn="l" defTabSz="1217889" rtl="0" eaLnBrk="1" fontAlgn="auto" latinLnBrk="0" hangingPunct="1">
+              <a:lnSpc>
+                <a:spcPct val="100000"/>
+              </a:lnSpc>
+              <a:spcBef>
+                <a:spcPts val="0"/>
+              </a:spcBef>
+              <a:spcAft>
+                <a:spcPts val="0"/>
+              </a:spcAft>
+              <a:buClrTx/>
+              <a:buSzTx/>
+              <a:buFontTx/>
+              <a:buNone/>
+              <a:tabLst/>
+              <a:defRPr/>
+            </a:pPr>
+            <a:r>
+              <a:rPr lang="en-CA" sz="1598" b="0" i="0" kern="1200" dirty="0">
+                <a:solidFill>
+                  <a:schemeClr val="tx1"/>
+                </a:solidFill>
+                <a:effectLst/>
+                <a:latin typeface="+mn-lt"/>
+                <a:ea typeface="+mn-ea"/>
+                <a:cs typeface="+mn-cs"/>
+              </a:rPr>
+              <a:t>t = 0.53352, </a:t>
+            </a:r>
+            <a:r>
+              <a:rPr lang="en-CA" sz="1598" b="0" i="0" kern="1200" dirty="0" err="1">
+                <a:solidFill>
+                  <a:schemeClr val="tx1"/>
+                </a:solidFill>
+                <a:effectLst/>
+                <a:latin typeface="+mn-lt"/>
+                <a:ea typeface="+mn-ea"/>
+                <a:cs typeface="+mn-cs"/>
+              </a:rPr>
+              <a:t>df</a:t>
+            </a:r>
+            <a:r>
+              <a:rPr lang="en-CA" sz="1598" b="0" i="0" kern="1200" dirty="0">
+                <a:solidFill>
+                  <a:schemeClr val="tx1"/>
+                </a:solidFill>
+                <a:effectLst/>
+                <a:latin typeface="+mn-lt"/>
+                <a:ea typeface="+mn-ea"/>
+                <a:cs typeface="+mn-cs"/>
+              </a:rPr>
+              <a:t> = 8, p-value = 0.6082</a:t>
             </a:r>
           </a:p>
           <a:p>
             <a:endParaRPr lang="en-US" dirty="0"/>
           </a:p>
           <a:p>
-            <a:r>
-              <a:rPr lang="en-US" dirty="0"/>
-              <a:t>AP FREQUENCY</a:t>
-            </a:r>
-          </a:p>
-          <a:p>
-            <a:r>
-              <a:rPr lang="en-US" dirty="0"/>
-              <a:t>Acute: starting at sweep 5 p= 0.031, 0.021, 0.022, 0.022, 0.022, 0.025</a:t>
-            </a:r>
-          </a:p>
-          <a:p>
-            <a:r>
-              <a:rPr lang="en-US" dirty="0"/>
-              <a:t>Acute with AM251: starting at sweep 5 p= 0.37, 0.35, 0.30, 0.35, 0.83, 0.90</a:t>
-            </a:r>
-          </a:p>
-          <a:p>
-            <a:r>
-              <a:rPr lang="en-US" dirty="0"/>
-              <a:t>Repeated: starting at sweep 5 p= 0.37, 0.17, 0.090, 0.074, 0.16, 0.089</a:t>
-            </a:r>
-          </a:p>
-          <a:p>
-            <a:r>
-              <a:rPr lang="en-US" dirty="0"/>
-              <a:t>Wilcoxon signed rank test comparing before and after for each sweep</a:t>
-            </a:r>
-          </a:p>
-          <a:p>
             <a:endParaRPr lang="en-US" dirty="0"/>
+          </a:p>
+          <a:p>
+            <a:endParaRPr lang="en-US" dirty="0"/>
+          </a:p>
+          <a:p>
+            <a:pPr marL="0" marR="0" lvl="0" indent="0" algn="l" defTabSz="1217889" rtl="0" eaLnBrk="1" fontAlgn="auto" latinLnBrk="0" hangingPunct="1">
+              <a:lnSpc>
+                <a:spcPct val="100000"/>
+              </a:lnSpc>
+              <a:spcBef>
+                <a:spcPts val="0"/>
+              </a:spcBef>
+              <a:spcAft>
+                <a:spcPts val="0"/>
+              </a:spcAft>
+              <a:buClrTx/>
+              <a:buSzTx/>
+              <a:buFontTx/>
+              <a:buNone/>
+              <a:tabLst/>
+              <a:defRPr/>
+            </a:pPr>
+            <a:r>
+              <a:rPr lang="en-CA" sz="1598" b="0" i="0" kern="1200" dirty="0">
+                <a:solidFill>
+                  <a:schemeClr val="tx1"/>
+                </a:solidFill>
+                <a:effectLst/>
+                <a:latin typeface="+mn-lt"/>
+                <a:ea typeface="+mn-ea"/>
+                <a:cs typeface="+mn-cs"/>
+              </a:rPr>
+              <a:t>t = 0.32925, </a:t>
+            </a:r>
+            <a:r>
+              <a:rPr lang="en-CA" sz="1598" b="0" i="0" kern="1200" dirty="0" err="1">
+                <a:solidFill>
+                  <a:schemeClr val="tx1"/>
+                </a:solidFill>
+                <a:effectLst/>
+                <a:latin typeface="+mn-lt"/>
+                <a:ea typeface="+mn-ea"/>
+                <a:cs typeface="+mn-cs"/>
+              </a:rPr>
+              <a:t>df</a:t>
+            </a:r>
+            <a:r>
+              <a:rPr lang="en-CA" sz="1598" b="0" i="0" kern="1200">
+                <a:solidFill>
+                  <a:schemeClr val="tx1"/>
+                </a:solidFill>
+                <a:effectLst/>
+                <a:latin typeface="+mn-lt"/>
+                <a:ea typeface="+mn-ea"/>
+                <a:cs typeface="+mn-cs"/>
+              </a:rPr>
+              <a:t> = 8, p-value = 0.7504</a:t>
+            </a:r>
           </a:p>
           <a:p>
             <a:endParaRPr lang="en-US" dirty="0"/>
@@ -604,7 +787,7 @@
           <a:p>
             <a:fld id="{F708F06A-076A-AB49-9E02-15A3C27D2EF7}" type="slidenum">
               <a:rPr lang="en-US" smtClean="0"/>
-              <a:t>1</a:t>
+              <a:t>10</a:t>
             </a:fld>
             <a:endParaRPr lang="en-US"/>
           </a:p>
@@ -613,7 +796,439 @@
     </p:spTree>
     <p:extLst>
       <p:ext uri="{BB962C8B-B14F-4D97-AF65-F5344CB8AC3E}">
-        <p14:creationId xmlns:p14="http://schemas.microsoft.com/office/powerpoint/2010/main" val="1589849340"/>
+        <p14:creationId xmlns:p14="http://schemas.microsoft.com/office/powerpoint/2010/main" val="1289648427"/>
+      </p:ext>
+    </p:extLst>
+  </p:cSld>
+  <p:clrMapOvr>
+    <a:masterClrMapping/>
+  </p:clrMapOvr>
+</p:notes>
+</file>
+
+<file path=ppt/notesSlides/notesSlide11.xml><?xml version="1.0" encoding="utf-8"?>
+<p:notes xmlns:a="http://schemas.openxmlformats.org/drawingml/2006/main" xmlns:r="http://schemas.openxmlformats.org/officeDocument/2006/relationships" xmlns:p="http://schemas.openxmlformats.org/presentationml/2006/main">
+  <p:cSld>
+    <p:spTree>
+      <p:nvGrpSpPr>
+        <p:cNvPr id="1" name="">
+          <a:extLst>
+            <a:ext uri="{FF2B5EF4-FFF2-40B4-BE49-F238E27FC236}">
+              <a16:creationId xmlns:a16="http://schemas.microsoft.com/office/drawing/2014/main" id="{E6089A06-0CE7-7C73-BDF2-3A5EC89C5404}"/>
+            </a:ext>
+          </a:extLst>
+        </p:cNvPr>
+        <p:cNvGrpSpPr/>
+        <p:nvPr/>
+      </p:nvGrpSpPr>
+      <p:grpSpPr>
+        <a:xfrm>
+          <a:off x="0" y="0"/>
+          <a:ext cx="0" cy="0"/>
+          <a:chOff x="0" y="0"/>
+          <a:chExt cx="0" cy="0"/>
+        </a:xfrm>
+      </p:grpSpPr>
+      <p:sp>
+        <p:nvSpPr>
+          <p:cNvPr id="2" name="Slide Image Placeholder 1">
+            <a:extLst>
+              <a:ext uri="{FF2B5EF4-FFF2-40B4-BE49-F238E27FC236}">
+                <a16:creationId xmlns:a16="http://schemas.microsoft.com/office/drawing/2014/main" id="{5967F0A2-06A6-9BBF-7A70-2759B0DDDE89}"/>
+              </a:ext>
+            </a:extLst>
+          </p:cNvPr>
+          <p:cNvSpPr>
+            <a:spLocks noGrp="1" noRot="1" noChangeAspect="1"/>
+          </p:cNvSpPr>
+          <p:nvPr>
+            <p:ph type="sldImg"/>
+          </p:nvPr>
+        </p:nvSpPr>
+        <p:spPr/>
+      </p:sp>
+      <p:sp>
+        <p:nvSpPr>
+          <p:cNvPr id="3" name="Notes Placeholder 2">
+            <a:extLst>
+              <a:ext uri="{FF2B5EF4-FFF2-40B4-BE49-F238E27FC236}">
+                <a16:creationId xmlns:a16="http://schemas.microsoft.com/office/drawing/2014/main" id="{B318225D-E445-E36C-0C00-ACB8AAB827A5}"/>
+              </a:ext>
+            </a:extLst>
+          </p:cNvPr>
+          <p:cNvSpPr>
+            <a:spLocks noGrp="1"/>
+          </p:cNvSpPr>
+          <p:nvPr>
+            <p:ph type="body" idx="1"/>
+          </p:nvPr>
+        </p:nvSpPr>
+        <p:spPr/>
+        <p:txBody>
+          <a:bodyPr/>
+          <a:lstStyle/>
+          <a:p>
+            <a:endParaRPr lang="en-US" dirty="0"/>
+          </a:p>
+        </p:txBody>
+      </p:sp>
+      <p:sp>
+        <p:nvSpPr>
+          <p:cNvPr id="4" name="Slide Number Placeholder 3">
+            <a:extLst>
+              <a:ext uri="{FF2B5EF4-FFF2-40B4-BE49-F238E27FC236}">
+                <a16:creationId xmlns:a16="http://schemas.microsoft.com/office/drawing/2014/main" id="{F79698B3-D980-3167-DE5C-DF82570B33BE}"/>
+              </a:ext>
+            </a:extLst>
+          </p:cNvPr>
+          <p:cNvSpPr>
+            <a:spLocks noGrp="1"/>
+          </p:cNvSpPr>
+          <p:nvPr>
+            <p:ph type="sldNum" sz="quarter" idx="5"/>
+          </p:nvPr>
+        </p:nvSpPr>
+        <p:spPr/>
+        <p:txBody>
+          <a:bodyPr/>
+          <a:lstStyle/>
+          <a:p>
+            <a:fld id="{F708F06A-076A-AB49-9E02-15A3C27D2EF7}" type="slidenum">
+              <a:rPr lang="en-US" smtClean="0"/>
+              <a:t>11</a:t>
+            </a:fld>
+            <a:endParaRPr lang="en-US"/>
+          </a:p>
+        </p:txBody>
+      </p:sp>
+    </p:spTree>
+    <p:extLst>
+      <p:ext uri="{BB962C8B-B14F-4D97-AF65-F5344CB8AC3E}">
+        <p14:creationId xmlns:p14="http://schemas.microsoft.com/office/powerpoint/2010/main" val="1642148457"/>
+      </p:ext>
+    </p:extLst>
+  </p:cSld>
+  <p:clrMapOvr>
+    <a:masterClrMapping/>
+  </p:clrMapOvr>
+</p:notes>
+</file>
+
+<file path=ppt/notesSlides/notesSlide12.xml><?xml version="1.0" encoding="utf-8"?>
+<p:notes xmlns:a="http://schemas.openxmlformats.org/drawingml/2006/main" xmlns:r="http://schemas.openxmlformats.org/officeDocument/2006/relationships" xmlns:p="http://schemas.openxmlformats.org/presentationml/2006/main">
+  <p:cSld>
+    <p:spTree>
+      <p:nvGrpSpPr>
+        <p:cNvPr id="1" name="">
+          <a:extLst>
+            <a:ext uri="{FF2B5EF4-FFF2-40B4-BE49-F238E27FC236}">
+              <a16:creationId xmlns:a16="http://schemas.microsoft.com/office/drawing/2014/main" id="{418B5C47-B4EB-E52B-4963-D78F5A81E88B}"/>
+            </a:ext>
+          </a:extLst>
+        </p:cNvPr>
+        <p:cNvGrpSpPr/>
+        <p:nvPr/>
+      </p:nvGrpSpPr>
+      <p:grpSpPr>
+        <a:xfrm>
+          <a:off x="0" y="0"/>
+          <a:ext cx="0" cy="0"/>
+          <a:chOff x="0" y="0"/>
+          <a:chExt cx="0" cy="0"/>
+        </a:xfrm>
+      </p:grpSpPr>
+      <p:sp>
+        <p:nvSpPr>
+          <p:cNvPr id="2" name="Slide Image Placeholder 1">
+            <a:extLst>
+              <a:ext uri="{FF2B5EF4-FFF2-40B4-BE49-F238E27FC236}">
+                <a16:creationId xmlns:a16="http://schemas.microsoft.com/office/drawing/2014/main" id="{38245154-0B7E-7F2B-3716-EB81122CBBF7}"/>
+              </a:ext>
+            </a:extLst>
+          </p:cNvPr>
+          <p:cNvSpPr>
+            <a:spLocks noGrp="1" noRot="1" noChangeAspect="1"/>
+          </p:cNvSpPr>
+          <p:nvPr>
+            <p:ph type="sldImg"/>
+          </p:nvPr>
+        </p:nvSpPr>
+        <p:spPr/>
+      </p:sp>
+      <p:sp>
+        <p:nvSpPr>
+          <p:cNvPr id="3" name="Notes Placeholder 2">
+            <a:extLst>
+              <a:ext uri="{FF2B5EF4-FFF2-40B4-BE49-F238E27FC236}">
+                <a16:creationId xmlns:a16="http://schemas.microsoft.com/office/drawing/2014/main" id="{5F45FA48-153E-448F-B5F5-0F9078C144A5}"/>
+              </a:ext>
+            </a:extLst>
+          </p:cNvPr>
+          <p:cNvSpPr>
+            <a:spLocks noGrp="1"/>
+          </p:cNvSpPr>
+          <p:nvPr>
+            <p:ph type="body" idx="1"/>
+          </p:nvPr>
+        </p:nvSpPr>
+        <p:spPr/>
+        <p:txBody>
+          <a:bodyPr/>
+          <a:lstStyle/>
+          <a:p>
+            <a:endParaRPr lang="en-US" dirty="0"/>
+          </a:p>
+        </p:txBody>
+      </p:sp>
+      <p:sp>
+        <p:nvSpPr>
+          <p:cNvPr id="4" name="Slide Number Placeholder 3">
+            <a:extLst>
+              <a:ext uri="{FF2B5EF4-FFF2-40B4-BE49-F238E27FC236}">
+                <a16:creationId xmlns:a16="http://schemas.microsoft.com/office/drawing/2014/main" id="{74B305F4-A6D2-AD92-14BF-D4AB8CA09D09}"/>
+              </a:ext>
+            </a:extLst>
+          </p:cNvPr>
+          <p:cNvSpPr>
+            <a:spLocks noGrp="1"/>
+          </p:cNvSpPr>
+          <p:nvPr>
+            <p:ph type="sldNum" sz="quarter" idx="5"/>
+          </p:nvPr>
+        </p:nvSpPr>
+        <p:spPr/>
+        <p:txBody>
+          <a:bodyPr/>
+          <a:lstStyle/>
+          <a:p>
+            <a:fld id="{F708F06A-076A-AB49-9E02-15A3C27D2EF7}" type="slidenum">
+              <a:rPr lang="en-US" smtClean="0"/>
+              <a:t>12</a:t>
+            </a:fld>
+            <a:endParaRPr lang="en-US"/>
+          </a:p>
+        </p:txBody>
+      </p:sp>
+    </p:spTree>
+    <p:extLst>
+      <p:ext uri="{BB962C8B-B14F-4D97-AF65-F5344CB8AC3E}">
+        <p14:creationId xmlns:p14="http://schemas.microsoft.com/office/powerpoint/2010/main" val="3930366096"/>
+      </p:ext>
+    </p:extLst>
+  </p:cSld>
+  <p:clrMapOvr>
+    <a:masterClrMapping/>
+  </p:clrMapOvr>
+</p:notes>
+</file>
+
+<file path=ppt/notesSlides/notesSlide13.xml><?xml version="1.0" encoding="utf-8"?>
+<p:notes xmlns:a="http://schemas.openxmlformats.org/drawingml/2006/main" xmlns:r="http://schemas.openxmlformats.org/officeDocument/2006/relationships" xmlns:p="http://schemas.openxmlformats.org/presentationml/2006/main">
+  <p:cSld>
+    <p:spTree>
+      <p:nvGrpSpPr>
+        <p:cNvPr id="1" name="">
+          <a:extLst>
+            <a:ext uri="{FF2B5EF4-FFF2-40B4-BE49-F238E27FC236}">
+              <a16:creationId xmlns:a16="http://schemas.microsoft.com/office/drawing/2014/main" id="{BBC000B7-FF69-C82F-EFF2-3BA025AFEFA1}"/>
+            </a:ext>
+          </a:extLst>
+        </p:cNvPr>
+        <p:cNvGrpSpPr/>
+        <p:nvPr/>
+      </p:nvGrpSpPr>
+      <p:grpSpPr>
+        <a:xfrm>
+          <a:off x="0" y="0"/>
+          <a:ext cx="0" cy="0"/>
+          <a:chOff x="0" y="0"/>
+          <a:chExt cx="0" cy="0"/>
+        </a:xfrm>
+      </p:grpSpPr>
+      <p:sp>
+        <p:nvSpPr>
+          <p:cNvPr id="2" name="Slide Image Placeholder 1">
+            <a:extLst>
+              <a:ext uri="{FF2B5EF4-FFF2-40B4-BE49-F238E27FC236}">
+                <a16:creationId xmlns:a16="http://schemas.microsoft.com/office/drawing/2014/main" id="{A068979C-3ECE-80BA-810D-04EEF66702F2}"/>
+              </a:ext>
+            </a:extLst>
+          </p:cNvPr>
+          <p:cNvSpPr>
+            <a:spLocks noGrp="1" noRot="1" noChangeAspect="1"/>
+          </p:cNvSpPr>
+          <p:nvPr>
+            <p:ph type="sldImg"/>
+          </p:nvPr>
+        </p:nvSpPr>
+        <p:spPr/>
+      </p:sp>
+      <p:sp>
+        <p:nvSpPr>
+          <p:cNvPr id="3" name="Notes Placeholder 2">
+            <a:extLst>
+              <a:ext uri="{FF2B5EF4-FFF2-40B4-BE49-F238E27FC236}">
+                <a16:creationId xmlns:a16="http://schemas.microsoft.com/office/drawing/2014/main" id="{CC6F26F6-A3EA-54F1-02D9-C4F47FCB6FEB}"/>
+              </a:ext>
+            </a:extLst>
+          </p:cNvPr>
+          <p:cNvSpPr>
+            <a:spLocks noGrp="1"/>
+          </p:cNvSpPr>
+          <p:nvPr>
+            <p:ph type="body" idx="1"/>
+          </p:nvPr>
+        </p:nvSpPr>
+        <p:spPr/>
+        <p:txBody>
+          <a:bodyPr/>
+          <a:lstStyle/>
+          <a:p>
+            <a:endParaRPr lang="en-US" dirty="0"/>
+          </a:p>
+        </p:txBody>
+      </p:sp>
+      <p:sp>
+        <p:nvSpPr>
+          <p:cNvPr id="4" name="Slide Number Placeholder 3">
+            <a:extLst>
+              <a:ext uri="{FF2B5EF4-FFF2-40B4-BE49-F238E27FC236}">
+                <a16:creationId xmlns:a16="http://schemas.microsoft.com/office/drawing/2014/main" id="{E1CA189A-C932-8A5B-2B56-D4744591D142}"/>
+              </a:ext>
+            </a:extLst>
+          </p:cNvPr>
+          <p:cNvSpPr>
+            <a:spLocks noGrp="1"/>
+          </p:cNvSpPr>
+          <p:nvPr>
+            <p:ph type="sldNum" sz="quarter" idx="5"/>
+          </p:nvPr>
+        </p:nvSpPr>
+        <p:spPr/>
+        <p:txBody>
+          <a:bodyPr/>
+          <a:lstStyle/>
+          <a:p>
+            <a:fld id="{F708F06A-076A-AB49-9E02-15A3C27D2EF7}" type="slidenum">
+              <a:rPr lang="en-US" smtClean="0"/>
+              <a:t>13</a:t>
+            </a:fld>
+            <a:endParaRPr lang="en-US"/>
+          </a:p>
+        </p:txBody>
+      </p:sp>
+    </p:spTree>
+    <p:extLst>
+      <p:ext uri="{BB962C8B-B14F-4D97-AF65-F5344CB8AC3E}">
+        <p14:creationId xmlns:p14="http://schemas.microsoft.com/office/powerpoint/2010/main" val="2784906709"/>
+      </p:ext>
+    </p:extLst>
+  </p:cSld>
+  <p:clrMapOvr>
+    <a:masterClrMapping/>
+  </p:clrMapOvr>
+</p:notes>
+</file>
+
+<file path=ppt/notesSlides/notesSlide14.xml><?xml version="1.0" encoding="utf-8"?>
+<p:notes xmlns:a="http://schemas.openxmlformats.org/drawingml/2006/main" xmlns:r="http://schemas.openxmlformats.org/officeDocument/2006/relationships" xmlns:p="http://schemas.openxmlformats.org/presentationml/2006/main">
+  <p:cSld>
+    <p:spTree>
+      <p:nvGrpSpPr>
+        <p:cNvPr id="1" name="">
+          <a:extLst>
+            <a:ext uri="{FF2B5EF4-FFF2-40B4-BE49-F238E27FC236}">
+              <a16:creationId xmlns:a16="http://schemas.microsoft.com/office/drawing/2014/main" id="{ACAF2AAB-B0BB-138C-4111-52341809CFFA}"/>
+            </a:ext>
+          </a:extLst>
+        </p:cNvPr>
+        <p:cNvGrpSpPr/>
+        <p:nvPr/>
+      </p:nvGrpSpPr>
+      <p:grpSpPr>
+        <a:xfrm>
+          <a:off x="0" y="0"/>
+          <a:ext cx="0" cy="0"/>
+          <a:chOff x="0" y="0"/>
+          <a:chExt cx="0" cy="0"/>
+        </a:xfrm>
+      </p:grpSpPr>
+      <p:sp>
+        <p:nvSpPr>
+          <p:cNvPr id="2" name="Slide Image Placeholder 1">
+            <a:extLst>
+              <a:ext uri="{FF2B5EF4-FFF2-40B4-BE49-F238E27FC236}">
+                <a16:creationId xmlns:a16="http://schemas.microsoft.com/office/drawing/2014/main" id="{0D7546A1-9DC5-B0FB-2228-9B9645FAF1EB}"/>
+              </a:ext>
+            </a:extLst>
+          </p:cNvPr>
+          <p:cNvSpPr>
+            <a:spLocks noGrp="1" noRot="1" noChangeAspect="1"/>
+          </p:cNvSpPr>
+          <p:nvPr>
+            <p:ph type="sldImg"/>
+          </p:nvPr>
+        </p:nvSpPr>
+        <p:spPr/>
+      </p:sp>
+      <p:sp>
+        <p:nvSpPr>
+          <p:cNvPr id="3" name="Notes Placeholder 2">
+            <a:extLst>
+              <a:ext uri="{FF2B5EF4-FFF2-40B4-BE49-F238E27FC236}">
+                <a16:creationId xmlns:a16="http://schemas.microsoft.com/office/drawing/2014/main" id="{AFFB809A-B589-0301-A3DD-864F84C3B117}"/>
+              </a:ext>
+            </a:extLst>
+          </p:cNvPr>
+          <p:cNvSpPr>
+            <a:spLocks noGrp="1"/>
+          </p:cNvSpPr>
+          <p:nvPr>
+            <p:ph type="body" idx="1"/>
+          </p:nvPr>
+        </p:nvSpPr>
+        <p:spPr/>
+        <p:txBody>
+          <a:bodyPr/>
+          <a:lstStyle/>
+          <a:p>
+            <a:endParaRPr lang="en-US" dirty="0"/>
+          </a:p>
+        </p:txBody>
+      </p:sp>
+      <p:sp>
+        <p:nvSpPr>
+          <p:cNvPr id="4" name="Slide Number Placeholder 3">
+            <a:extLst>
+              <a:ext uri="{FF2B5EF4-FFF2-40B4-BE49-F238E27FC236}">
+                <a16:creationId xmlns:a16="http://schemas.microsoft.com/office/drawing/2014/main" id="{668F8C57-C86C-D4A5-6D7F-73211F6A1843}"/>
+              </a:ext>
+            </a:extLst>
+          </p:cNvPr>
+          <p:cNvSpPr>
+            <a:spLocks noGrp="1"/>
+          </p:cNvSpPr>
+          <p:nvPr>
+            <p:ph type="sldNum" sz="quarter" idx="5"/>
+          </p:nvPr>
+        </p:nvSpPr>
+        <p:spPr/>
+        <p:txBody>
+          <a:bodyPr/>
+          <a:lstStyle/>
+          <a:p>
+            <a:fld id="{F708F06A-076A-AB49-9E02-15A3C27D2EF7}" type="slidenum">
+              <a:rPr lang="en-US" smtClean="0"/>
+              <a:t>14</a:t>
+            </a:fld>
+            <a:endParaRPr lang="en-US"/>
+          </a:p>
+        </p:txBody>
+      </p:sp>
+    </p:spTree>
+    <p:extLst>
+      <p:ext uri="{BB962C8B-B14F-4D97-AF65-F5344CB8AC3E}">
+        <p14:creationId xmlns:p14="http://schemas.microsoft.com/office/powerpoint/2010/main" val="3564589966"/>
       </p:ext>
     </p:extLst>
   </p:cSld>
@@ -631,7 +1246,7 @@
         <p:cNvPr id="1" name="">
           <a:extLst>
             <a:ext uri="{FF2B5EF4-FFF2-40B4-BE49-F238E27FC236}">
-              <a16:creationId xmlns:a16="http://schemas.microsoft.com/office/drawing/2014/main" id="{7057DF73-3273-5CA1-B756-90CC8772686D}"/>
+              <a16:creationId xmlns:a16="http://schemas.microsoft.com/office/drawing/2014/main" id="{C77B859A-7052-95CC-709C-52BA99E30B4F}"/>
             </a:ext>
           </a:extLst>
         </p:cNvPr>
@@ -651,7 +1266,7 @@
           <p:cNvPr id="2" name="Slide Image Placeholder 1">
             <a:extLst>
               <a:ext uri="{FF2B5EF4-FFF2-40B4-BE49-F238E27FC236}">
-                <a16:creationId xmlns:a16="http://schemas.microsoft.com/office/drawing/2014/main" id="{B9DD04CC-2749-0EC0-983D-C4BF94DCDA21}"/>
+                <a16:creationId xmlns:a16="http://schemas.microsoft.com/office/drawing/2014/main" id="{34F40888-4DD8-9116-E249-AF7CDCAA7DC1}"/>
               </a:ext>
             </a:extLst>
           </p:cNvPr>
@@ -669,7 +1284,7 @@
           <p:cNvPr id="3" name="Notes Placeholder 2">
             <a:extLst>
               <a:ext uri="{FF2B5EF4-FFF2-40B4-BE49-F238E27FC236}">
-                <a16:creationId xmlns:a16="http://schemas.microsoft.com/office/drawing/2014/main" id="{5350BB88-9818-4FBD-B11A-7357A8EC7537}"/>
+                <a16:creationId xmlns:a16="http://schemas.microsoft.com/office/drawing/2014/main" id="{F69DACE1-7DFB-2004-E2DE-47419D6EBDF9}"/>
               </a:ext>
             </a:extLst>
           </p:cNvPr>
@@ -685,74 +1300,8 @@
           <a:bodyPr/>
           <a:lstStyle/>
           <a:p>
-            <a:r>
-              <a:rPr lang="en-US" dirty="0"/>
-              <a:t>AP AMPLITUDE</a:t>
-            </a:r>
-          </a:p>
-          <a:p>
-            <a:r>
-              <a:rPr lang="en-US" dirty="0"/>
-              <a:t>Acute: n=5, p= 0.01216</a:t>
-            </a:r>
-          </a:p>
-          <a:p>
-            <a:r>
-              <a:rPr lang="en-US" dirty="0"/>
-              <a:t>Acute with AM251: n=6, p=0.1024</a:t>
-            </a:r>
-          </a:p>
-          <a:p>
-            <a:r>
-              <a:rPr lang="en-US" dirty="0"/>
-              <a:t>Repeated: n=9, p=0.2531</a:t>
-            </a:r>
-          </a:p>
-          <a:p>
-            <a:r>
-              <a:rPr lang="en-US" dirty="0"/>
-              <a:t>PAIRED T-TEST comparing before and after </a:t>
-            </a:r>
-          </a:p>
-          <a:p>
             <a:endParaRPr lang="en-US" dirty="0"/>
           </a:p>
-          <a:p>
-            <a:r>
-              <a:rPr lang="en-US" dirty="0"/>
-              <a:t>AP FREQUENCY</a:t>
-            </a:r>
-          </a:p>
-          <a:p>
-            <a:r>
-              <a:rPr lang="en-US" dirty="0"/>
-              <a:t>Acute: starting at sweep 5 p= 0.031, 0.021, 0.022, 0.022, 0.022, 0.025</a:t>
-            </a:r>
-          </a:p>
-          <a:p>
-            <a:r>
-              <a:rPr lang="en-US" dirty="0"/>
-              <a:t>Acute with AM251: starting at sweep 5 p= 0.37, 0.35, 0.30, 0.35, 0.83, 0.90</a:t>
-            </a:r>
-          </a:p>
-          <a:p>
-            <a:r>
-              <a:rPr lang="en-US" dirty="0"/>
-              <a:t>Repeated: starting at sweep 5 p= 0.37, 0.17, 0.090, 0.074, 0.16, 0.089</a:t>
-            </a:r>
-          </a:p>
-          <a:p>
-            <a:r>
-              <a:rPr lang="en-US" dirty="0"/>
-              <a:t>Wilcoxon signed rank test comparing before and after for each sweep</a:t>
-            </a:r>
-          </a:p>
-          <a:p>
-            <a:endParaRPr lang="en-US" dirty="0"/>
-          </a:p>
-          <a:p>
-            <a:endParaRPr lang="en-US" dirty="0"/>
-          </a:p>
         </p:txBody>
       </p:sp>
       <p:sp>
@@ -760,7 +1309,7 @@
           <p:cNvPr id="4" name="Slide Number Placeholder 3">
             <a:extLst>
               <a:ext uri="{FF2B5EF4-FFF2-40B4-BE49-F238E27FC236}">
-                <a16:creationId xmlns:a16="http://schemas.microsoft.com/office/drawing/2014/main" id="{CCD46002-3BB8-D1FD-22F4-8C8FED58936C}"/>
+                <a16:creationId xmlns:a16="http://schemas.microsoft.com/office/drawing/2014/main" id="{849DCA3A-687A-6F7D-5268-D862B9D52C7E}"/>
               </a:ext>
             </a:extLst>
           </p:cNvPr>
@@ -778,7 +1327,7 @@
           <a:p>
             <a:fld id="{F708F06A-076A-AB49-9E02-15A3C27D2EF7}" type="slidenum">
               <a:rPr lang="en-US" smtClean="0"/>
-              <a:t>3</a:t>
+              <a:t>2</a:t>
             </a:fld>
             <a:endParaRPr lang="en-US"/>
           </a:p>
@@ -787,7 +1336,7 @@
     </p:spTree>
     <p:extLst>
       <p:ext uri="{BB962C8B-B14F-4D97-AF65-F5344CB8AC3E}">
-        <p14:creationId xmlns:p14="http://schemas.microsoft.com/office/powerpoint/2010/main" val="2353179729"/>
+        <p14:creationId xmlns:p14="http://schemas.microsoft.com/office/powerpoint/2010/main" val="627562846"/>
       </p:ext>
     </p:extLst>
   </p:cSld>
@@ -805,7 +1354,7 @@
         <p:cNvPr id="1" name="">
           <a:extLst>
             <a:ext uri="{FF2B5EF4-FFF2-40B4-BE49-F238E27FC236}">
-              <a16:creationId xmlns:a16="http://schemas.microsoft.com/office/drawing/2014/main" id="{D3BE1523-DC2D-065F-B4C0-75382D0DA79C}"/>
+              <a16:creationId xmlns:a16="http://schemas.microsoft.com/office/drawing/2014/main" id="{BABD0DB6-629C-AB33-FB1D-47A286B93D0B}"/>
             </a:ext>
           </a:extLst>
         </p:cNvPr>
@@ -825,7 +1374,7 @@
           <p:cNvPr id="2" name="Slide Image Placeholder 1">
             <a:extLst>
               <a:ext uri="{FF2B5EF4-FFF2-40B4-BE49-F238E27FC236}">
-                <a16:creationId xmlns:a16="http://schemas.microsoft.com/office/drawing/2014/main" id="{6A1EC0CA-4DFD-AB52-7781-20244DADD1A8}"/>
+                <a16:creationId xmlns:a16="http://schemas.microsoft.com/office/drawing/2014/main" id="{3DB5D568-DEFE-0B2D-D8B8-21E93345AB38}"/>
               </a:ext>
             </a:extLst>
           </p:cNvPr>
@@ -843,7 +1392,7 @@
           <p:cNvPr id="3" name="Notes Placeholder 2">
             <a:extLst>
               <a:ext uri="{FF2B5EF4-FFF2-40B4-BE49-F238E27FC236}">
-                <a16:creationId xmlns:a16="http://schemas.microsoft.com/office/drawing/2014/main" id="{3621BFE8-EBC8-12B4-E5C2-A98CB292BB4A}"/>
+                <a16:creationId xmlns:a16="http://schemas.microsoft.com/office/drawing/2014/main" id="{DB9C9148-6625-0E9E-0421-E112C007EC1E}"/>
               </a:ext>
             </a:extLst>
           </p:cNvPr>
@@ -859,74 +1408,8 @@
           <a:bodyPr/>
           <a:lstStyle/>
           <a:p>
-            <a:r>
-              <a:rPr lang="en-US" dirty="0"/>
-              <a:t>AP AMPLITUDE</a:t>
-            </a:r>
-          </a:p>
-          <a:p>
-            <a:r>
-              <a:rPr lang="en-US" dirty="0"/>
-              <a:t>Acute: n=5, p= 0.01216</a:t>
-            </a:r>
-          </a:p>
-          <a:p>
-            <a:r>
-              <a:rPr lang="en-US" dirty="0"/>
-              <a:t>Acute with AM251: n=6, p=0.1024</a:t>
-            </a:r>
-          </a:p>
-          <a:p>
-            <a:r>
-              <a:rPr lang="en-US" dirty="0"/>
-              <a:t>Repeated: n=9, p=0.2531</a:t>
-            </a:r>
-          </a:p>
-          <a:p>
-            <a:r>
-              <a:rPr lang="en-US" dirty="0"/>
-              <a:t>PAIRED T-TEST comparing before and after </a:t>
-            </a:r>
-          </a:p>
-          <a:p>
             <a:endParaRPr lang="en-US" dirty="0"/>
           </a:p>
-          <a:p>
-            <a:r>
-              <a:rPr lang="en-US" dirty="0"/>
-              <a:t>AP FREQUENCY</a:t>
-            </a:r>
-          </a:p>
-          <a:p>
-            <a:r>
-              <a:rPr lang="en-US" dirty="0"/>
-              <a:t>Acute: starting at sweep 5 p= 0.031, 0.021, 0.022, 0.022, 0.022, 0.025</a:t>
-            </a:r>
-          </a:p>
-          <a:p>
-            <a:r>
-              <a:rPr lang="en-US" dirty="0"/>
-              <a:t>Acute with AM251: starting at sweep 5 p= 0.37, 0.35, 0.30, 0.35, 0.83, 0.90</a:t>
-            </a:r>
-          </a:p>
-          <a:p>
-            <a:r>
-              <a:rPr lang="en-US" dirty="0"/>
-              <a:t>Repeated: starting at sweep 5 p= 0.37, 0.17, 0.090, 0.074, 0.16, 0.089</a:t>
-            </a:r>
-          </a:p>
-          <a:p>
-            <a:r>
-              <a:rPr lang="en-US" dirty="0"/>
-              <a:t>Wilcoxon signed rank test comparing before and after for each sweep</a:t>
-            </a:r>
-          </a:p>
-          <a:p>
-            <a:endParaRPr lang="en-US" dirty="0"/>
-          </a:p>
-          <a:p>
-            <a:endParaRPr lang="en-US" dirty="0"/>
-          </a:p>
         </p:txBody>
       </p:sp>
       <p:sp>
@@ -934,7 +1417,7 @@
           <p:cNvPr id="4" name="Slide Number Placeholder 3">
             <a:extLst>
               <a:ext uri="{FF2B5EF4-FFF2-40B4-BE49-F238E27FC236}">
-                <a16:creationId xmlns:a16="http://schemas.microsoft.com/office/drawing/2014/main" id="{E4E1B9DC-61EC-0447-8430-D131F173F639}"/>
+                <a16:creationId xmlns:a16="http://schemas.microsoft.com/office/drawing/2014/main" id="{C6D59363-15FA-79F8-9F51-9BBA447D3FFE}"/>
               </a:ext>
             </a:extLst>
           </p:cNvPr>
@@ -952,7 +1435,7 @@
           <a:p>
             <a:fld id="{F708F06A-076A-AB49-9E02-15A3C27D2EF7}" type="slidenum">
               <a:rPr lang="en-US" smtClean="0"/>
-              <a:t>4</a:t>
+              <a:t>3</a:t>
             </a:fld>
             <a:endParaRPr lang="en-US"/>
           </a:p>
@@ -961,7 +1444,7 @@
     </p:spTree>
     <p:extLst>
       <p:ext uri="{BB962C8B-B14F-4D97-AF65-F5344CB8AC3E}">
-        <p14:creationId xmlns:p14="http://schemas.microsoft.com/office/powerpoint/2010/main" val="1822485008"/>
+        <p14:creationId xmlns:p14="http://schemas.microsoft.com/office/powerpoint/2010/main" val="3561079939"/>
       </p:ext>
     </p:extLst>
   </p:cSld>
@@ -979,7 +1462,7 @@
         <p:cNvPr id="1" name="">
           <a:extLst>
             <a:ext uri="{FF2B5EF4-FFF2-40B4-BE49-F238E27FC236}">
-              <a16:creationId xmlns:a16="http://schemas.microsoft.com/office/drawing/2014/main" id="{BC3C72DB-9815-477F-8173-178C6247CB85}"/>
+              <a16:creationId xmlns:a16="http://schemas.microsoft.com/office/drawing/2014/main" id="{6CE1AECC-3561-69F6-47AE-C0FE0EAFB07C}"/>
             </a:ext>
           </a:extLst>
         </p:cNvPr>
@@ -999,7 +1482,7 @@
           <p:cNvPr id="2" name="Slide Image Placeholder 1">
             <a:extLst>
               <a:ext uri="{FF2B5EF4-FFF2-40B4-BE49-F238E27FC236}">
-                <a16:creationId xmlns:a16="http://schemas.microsoft.com/office/drawing/2014/main" id="{10EE97D8-9DBA-6B44-D996-839827B7C30B}"/>
+                <a16:creationId xmlns:a16="http://schemas.microsoft.com/office/drawing/2014/main" id="{2A509AF1-B2D1-0C48-71B4-7D5A86A122E1}"/>
               </a:ext>
             </a:extLst>
           </p:cNvPr>
@@ -1017,7 +1500,7 @@
           <p:cNvPr id="3" name="Notes Placeholder 2">
             <a:extLst>
               <a:ext uri="{FF2B5EF4-FFF2-40B4-BE49-F238E27FC236}">
-                <a16:creationId xmlns:a16="http://schemas.microsoft.com/office/drawing/2014/main" id="{FCF9C62A-28B7-C850-6093-36E93BFA8067}"/>
+                <a16:creationId xmlns:a16="http://schemas.microsoft.com/office/drawing/2014/main" id="{96D25F5C-AF0C-5B9C-71D1-78EC212731C6}"/>
               </a:ext>
             </a:extLst>
           </p:cNvPr>
@@ -1033,74 +1516,8 @@
           <a:bodyPr/>
           <a:lstStyle/>
           <a:p>
-            <a:r>
-              <a:rPr lang="en-US" dirty="0"/>
-              <a:t>AP AMPLITUDE</a:t>
-            </a:r>
-          </a:p>
-          <a:p>
-            <a:r>
-              <a:rPr lang="en-US" dirty="0"/>
-              <a:t>Acute: n=5, p= 0.01216</a:t>
-            </a:r>
-          </a:p>
-          <a:p>
-            <a:r>
-              <a:rPr lang="en-US" dirty="0"/>
-              <a:t>Acute with AM251: n=6, p=0.1024</a:t>
-            </a:r>
-          </a:p>
-          <a:p>
-            <a:r>
-              <a:rPr lang="en-US" dirty="0"/>
-              <a:t>Repeated: n=9, p=0.2531</a:t>
-            </a:r>
-          </a:p>
-          <a:p>
-            <a:r>
-              <a:rPr lang="en-US" dirty="0"/>
-              <a:t>PAIRED T-TEST comparing before and after </a:t>
-            </a:r>
-          </a:p>
-          <a:p>
             <a:endParaRPr lang="en-US" dirty="0"/>
           </a:p>
-          <a:p>
-            <a:r>
-              <a:rPr lang="en-US" dirty="0"/>
-              <a:t>AP FREQUENCY</a:t>
-            </a:r>
-          </a:p>
-          <a:p>
-            <a:r>
-              <a:rPr lang="en-US" dirty="0"/>
-              <a:t>Acute: starting at sweep 5 p= 0.031, 0.021, 0.022, 0.022, 0.022, 0.025</a:t>
-            </a:r>
-          </a:p>
-          <a:p>
-            <a:r>
-              <a:rPr lang="en-US" dirty="0"/>
-              <a:t>Acute with AM251: starting at sweep 5 p= 0.37, 0.35, 0.30, 0.35, 0.83, 0.90</a:t>
-            </a:r>
-          </a:p>
-          <a:p>
-            <a:r>
-              <a:rPr lang="en-US" dirty="0"/>
-              <a:t>Repeated: starting at sweep 5 p= 0.37, 0.17, 0.090, 0.074, 0.16, 0.089</a:t>
-            </a:r>
-          </a:p>
-          <a:p>
-            <a:r>
-              <a:rPr lang="en-US" dirty="0"/>
-              <a:t>Wilcoxon signed rank test comparing before and after for each sweep</a:t>
-            </a:r>
-          </a:p>
-          <a:p>
-            <a:endParaRPr lang="en-US" dirty="0"/>
-          </a:p>
-          <a:p>
-            <a:endParaRPr lang="en-US" dirty="0"/>
-          </a:p>
         </p:txBody>
       </p:sp>
       <p:sp>
@@ -1108,7 +1525,7 @@
           <p:cNvPr id="4" name="Slide Number Placeholder 3">
             <a:extLst>
               <a:ext uri="{FF2B5EF4-FFF2-40B4-BE49-F238E27FC236}">
-                <a16:creationId xmlns:a16="http://schemas.microsoft.com/office/drawing/2014/main" id="{6644C779-6782-7407-2E94-C458FC795340}"/>
+                <a16:creationId xmlns:a16="http://schemas.microsoft.com/office/drawing/2014/main" id="{5B74ACA2-DB0E-B93E-4CD1-6E5D21272DD9}"/>
               </a:ext>
             </a:extLst>
           </p:cNvPr>
@@ -1126,7 +1543,7 @@
           <a:p>
             <a:fld id="{F708F06A-076A-AB49-9E02-15A3C27D2EF7}" type="slidenum">
               <a:rPr lang="en-US" smtClean="0"/>
-              <a:t>5</a:t>
+              <a:t>4</a:t>
             </a:fld>
             <a:endParaRPr lang="en-US"/>
           </a:p>
@@ -1135,7 +1552,7 @@
     </p:spTree>
     <p:extLst>
       <p:ext uri="{BB962C8B-B14F-4D97-AF65-F5344CB8AC3E}">
-        <p14:creationId xmlns:p14="http://schemas.microsoft.com/office/powerpoint/2010/main" val="4022887238"/>
+        <p14:creationId xmlns:p14="http://schemas.microsoft.com/office/powerpoint/2010/main" val="121513138"/>
       </p:ext>
     </p:extLst>
   </p:cSld>
@@ -1153,7 +1570,7 @@
         <p:cNvPr id="1" name="">
           <a:extLst>
             <a:ext uri="{FF2B5EF4-FFF2-40B4-BE49-F238E27FC236}">
-              <a16:creationId xmlns:a16="http://schemas.microsoft.com/office/drawing/2014/main" id="{D69EE697-FFDB-0CAB-6F5B-AC475D04A65E}"/>
+              <a16:creationId xmlns:a16="http://schemas.microsoft.com/office/drawing/2014/main" id="{FD7569EB-950F-7462-7CF1-0EF121E2AC00}"/>
             </a:ext>
           </a:extLst>
         </p:cNvPr>
@@ -1173,7 +1590,7 @@
           <p:cNvPr id="2" name="Slide Image Placeholder 1">
             <a:extLst>
               <a:ext uri="{FF2B5EF4-FFF2-40B4-BE49-F238E27FC236}">
-                <a16:creationId xmlns:a16="http://schemas.microsoft.com/office/drawing/2014/main" id="{1D6EFDD3-D206-BC73-4E4D-61726958F613}"/>
+                <a16:creationId xmlns:a16="http://schemas.microsoft.com/office/drawing/2014/main" id="{38E4C353-145B-19A6-CADC-945EC64410E1}"/>
               </a:ext>
             </a:extLst>
           </p:cNvPr>
@@ -1191,7 +1608,7 @@
           <p:cNvPr id="3" name="Notes Placeholder 2">
             <a:extLst>
               <a:ext uri="{FF2B5EF4-FFF2-40B4-BE49-F238E27FC236}">
-                <a16:creationId xmlns:a16="http://schemas.microsoft.com/office/drawing/2014/main" id="{BBF946DE-C517-49BB-7D72-76F3EB17AFF3}"/>
+                <a16:creationId xmlns:a16="http://schemas.microsoft.com/office/drawing/2014/main" id="{E1926833-C3AC-A983-21D9-815F660F5758}"/>
               </a:ext>
             </a:extLst>
           </p:cNvPr>
@@ -1207,74 +1624,285 @@
           <a:bodyPr/>
           <a:lstStyle/>
           <a:p>
+            <a:pPr marL="0" marR="0" lvl="0" indent="0" algn="l" defTabSz="1217889" rtl="0" eaLnBrk="1" fontAlgn="auto" latinLnBrk="0" hangingPunct="1">
+              <a:lnSpc>
+                <a:spcPct val="100000"/>
+              </a:lnSpc>
+              <a:spcBef>
+                <a:spcPts val="0"/>
+              </a:spcBef>
+              <a:spcAft>
+                <a:spcPts val="0"/>
+              </a:spcAft>
+              <a:buClrTx/>
+              <a:buSzTx/>
+              <a:buFontTx/>
+              <a:buNone/>
+              <a:tabLst/>
+              <a:defRPr/>
+            </a:pPr>
             <a:r>
               <a:rPr lang="en-US" dirty="0"/>
-              <a:t>AP AMPLITUDE</a:t>
-            </a:r>
-          </a:p>
-          <a:p>
-            <a:r>
-              <a:rPr lang="en-US" dirty="0"/>
-              <a:t>Acute: n=5, p= 0.01216</a:t>
-            </a:r>
-          </a:p>
-          <a:p>
-            <a:r>
-              <a:rPr lang="en-US" dirty="0"/>
-              <a:t>Acute with AM251: n=6, p=0.1024</a:t>
-            </a:r>
-          </a:p>
-          <a:p>
-            <a:r>
-              <a:rPr lang="en-US" dirty="0"/>
-              <a:t>Repeated: n=9, p=0.2531</a:t>
-            </a:r>
-          </a:p>
-          <a:p>
-            <a:r>
-              <a:rPr lang="en-US" dirty="0"/>
-              <a:t>PAIRED T-TEST comparing before and after </a:t>
-            </a:r>
-          </a:p>
-          <a:p>
+              <a:t>PPR: </a:t>
+            </a:r>
+            <a:r>
+              <a:rPr lang="en-CA" sz="1598" kern="1200" dirty="0">
+                <a:solidFill>
+                  <a:schemeClr val="tx1"/>
+                </a:solidFill>
+                <a:effectLst/>
+                <a:latin typeface="+mn-lt"/>
+                <a:ea typeface="+mn-ea"/>
+                <a:cs typeface="+mn-cs"/>
+              </a:rPr>
+              <a:t>1.02 ± 0.10 at baseline to 1.46 ± 0.17 post-HFS, n = 8, paired t-test</a:t>
+            </a:r>
+          </a:p>
+          <a:p>
+            <a:pPr marL="0" marR="0" lvl="0" indent="0" algn="l" defTabSz="1217889" rtl="0" eaLnBrk="1" fontAlgn="auto" latinLnBrk="0" hangingPunct="1">
+              <a:lnSpc>
+                <a:spcPct val="100000"/>
+              </a:lnSpc>
+              <a:spcBef>
+                <a:spcPts val="0"/>
+              </a:spcBef>
+              <a:spcAft>
+                <a:spcPts val="0"/>
+              </a:spcAft>
+              <a:buClrTx/>
+              <a:buSzTx/>
+              <a:buFontTx/>
+              <a:buNone/>
+              <a:tabLst/>
+              <a:defRPr/>
+            </a:pPr>
+            <a:r>
+              <a:rPr lang="en-CA" sz="1598" b="0" i="0" kern="1200" dirty="0">
+                <a:solidFill>
+                  <a:schemeClr val="tx1"/>
+                </a:solidFill>
+                <a:effectLst/>
+                <a:latin typeface="+mn-lt"/>
+                <a:ea typeface="+mn-ea"/>
+                <a:cs typeface="+mn-cs"/>
+              </a:rPr>
+              <a:t>t = 2.8363, </a:t>
+            </a:r>
+            <a:r>
+              <a:rPr lang="en-CA" sz="1598" b="0" i="0" kern="1200" dirty="0" err="1">
+                <a:solidFill>
+                  <a:schemeClr val="tx1"/>
+                </a:solidFill>
+                <a:effectLst/>
+                <a:latin typeface="+mn-lt"/>
+                <a:ea typeface="+mn-ea"/>
+                <a:cs typeface="+mn-cs"/>
+              </a:rPr>
+              <a:t>df</a:t>
+            </a:r>
+            <a:r>
+              <a:rPr lang="en-CA" sz="1598" b="0" i="0" kern="1200" dirty="0">
+                <a:solidFill>
+                  <a:schemeClr val="tx1"/>
+                </a:solidFill>
+                <a:effectLst/>
+                <a:latin typeface="+mn-lt"/>
+                <a:ea typeface="+mn-ea"/>
+                <a:cs typeface="+mn-cs"/>
+              </a:rPr>
+              <a:t> = 7, p-value = 0.02518</a:t>
+            </a:r>
+          </a:p>
+          <a:p>
+            <a:pPr marL="0" marR="0" lvl="0" indent="0" algn="l" defTabSz="1217889" rtl="0" eaLnBrk="1" fontAlgn="auto" latinLnBrk="0" hangingPunct="1">
+              <a:lnSpc>
+                <a:spcPct val="100000"/>
+              </a:lnSpc>
+              <a:spcBef>
+                <a:spcPts val="0"/>
+              </a:spcBef>
+              <a:spcAft>
+                <a:spcPts val="0"/>
+              </a:spcAft>
+              <a:buClrTx/>
+              <a:buSzTx/>
+              <a:buFontTx/>
+              <a:buNone/>
+              <a:tabLst/>
+              <a:defRPr/>
+            </a:pPr>
+            <a:endParaRPr lang="en-CA" sz="1598" b="0" i="0" kern="1200" dirty="0">
+              <a:solidFill>
+                <a:schemeClr val="tx1"/>
+              </a:solidFill>
+              <a:effectLst/>
+              <a:latin typeface="+mn-lt"/>
+              <a:ea typeface="+mn-ea"/>
+              <a:cs typeface="+mn-cs"/>
+            </a:endParaRPr>
+          </a:p>
+          <a:p>
+            <a:pPr marL="0" marR="0" lvl="0" indent="0" algn="l" defTabSz="1217889" rtl="0" eaLnBrk="1" fontAlgn="auto" latinLnBrk="0" hangingPunct="1">
+              <a:lnSpc>
+                <a:spcPct val="100000"/>
+              </a:lnSpc>
+              <a:spcBef>
+                <a:spcPts val="0"/>
+              </a:spcBef>
+              <a:spcAft>
+                <a:spcPts val="0"/>
+              </a:spcAft>
+              <a:buClrTx/>
+              <a:buSzTx/>
+              <a:buFontTx/>
+              <a:buNone/>
+              <a:tabLst/>
+              <a:defRPr/>
+            </a:pPr>
+            <a:endParaRPr lang="en-CA" sz="1598" b="0" i="0" kern="1200" dirty="0">
+              <a:solidFill>
+                <a:schemeClr val="tx1"/>
+              </a:solidFill>
+              <a:effectLst/>
+              <a:latin typeface="+mn-lt"/>
+              <a:ea typeface="+mn-ea"/>
+              <a:cs typeface="+mn-cs"/>
+            </a:endParaRPr>
+          </a:p>
+          <a:p>
+            <a:pPr marL="0" marR="0" lvl="0" indent="0" algn="l" defTabSz="1217889" rtl="0" eaLnBrk="1" fontAlgn="auto" latinLnBrk="0" hangingPunct="1">
+              <a:lnSpc>
+                <a:spcPct val="100000"/>
+              </a:lnSpc>
+              <a:spcBef>
+                <a:spcPts val="0"/>
+              </a:spcBef>
+              <a:spcAft>
+                <a:spcPts val="0"/>
+              </a:spcAft>
+              <a:buClrTx/>
+              <a:buSzTx/>
+              <a:buFontTx/>
+              <a:buNone/>
+              <a:tabLst/>
+              <a:defRPr/>
+            </a:pPr>
+            <a:endParaRPr lang="en-CA" sz="1598" b="0" i="0" kern="1200" dirty="0">
+              <a:solidFill>
+                <a:schemeClr val="tx1"/>
+              </a:solidFill>
+              <a:effectLst/>
+              <a:latin typeface="+mn-lt"/>
+              <a:ea typeface="+mn-ea"/>
+              <a:cs typeface="+mn-cs"/>
+            </a:endParaRPr>
+          </a:p>
+          <a:p>
+            <a:pPr marL="0" marR="0" lvl="0" indent="0" algn="l" defTabSz="1217889" rtl="0" eaLnBrk="1" fontAlgn="auto" latinLnBrk="0" hangingPunct="1">
+              <a:lnSpc>
+                <a:spcPct val="100000"/>
+              </a:lnSpc>
+              <a:spcBef>
+                <a:spcPts val="0"/>
+              </a:spcBef>
+              <a:spcAft>
+                <a:spcPts val="0"/>
+              </a:spcAft>
+              <a:buClrTx/>
+              <a:buSzTx/>
+              <a:buFontTx/>
+              <a:buNone/>
+              <a:tabLst/>
+              <a:defRPr/>
+            </a:pPr>
+            <a:r>
+              <a:rPr lang="en-CA" sz="1598" b="0" i="0" kern="1200" dirty="0">
+                <a:solidFill>
+                  <a:schemeClr val="tx1"/>
+                </a:solidFill>
+                <a:effectLst/>
+                <a:latin typeface="+mn-lt"/>
+                <a:ea typeface="+mn-ea"/>
+                <a:cs typeface="+mn-cs"/>
+              </a:rPr>
+              <a:t>t = -2.2068, </a:t>
+            </a:r>
+            <a:r>
+              <a:rPr lang="en-CA" sz="1598" b="0" i="0" kern="1200" dirty="0" err="1">
+                <a:solidFill>
+                  <a:schemeClr val="tx1"/>
+                </a:solidFill>
+                <a:effectLst/>
+                <a:latin typeface="+mn-lt"/>
+                <a:ea typeface="+mn-ea"/>
+                <a:cs typeface="+mn-cs"/>
+              </a:rPr>
+              <a:t>df</a:t>
+            </a:r>
+            <a:r>
+              <a:rPr lang="en-CA" sz="1598" b="0" i="0" kern="1200" dirty="0">
+                <a:solidFill>
+                  <a:schemeClr val="tx1"/>
+                </a:solidFill>
+                <a:effectLst/>
+                <a:latin typeface="+mn-lt"/>
+                <a:ea typeface="+mn-ea"/>
+                <a:cs typeface="+mn-cs"/>
+              </a:rPr>
+              <a:t> = 7, p-value = 0.06309</a:t>
+            </a:r>
+          </a:p>
+          <a:p>
+            <a:pPr marL="0" marR="0" lvl="0" indent="0" algn="l" defTabSz="1217889" rtl="0" eaLnBrk="1" fontAlgn="auto" latinLnBrk="0" hangingPunct="1">
+              <a:lnSpc>
+                <a:spcPct val="100000"/>
+              </a:lnSpc>
+              <a:spcBef>
+                <a:spcPts val="0"/>
+              </a:spcBef>
+              <a:spcAft>
+                <a:spcPts val="0"/>
+              </a:spcAft>
+              <a:buClrTx/>
+              <a:buSzTx/>
+              <a:buFontTx/>
+              <a:buNone/>
+              <a:tabLst/>
+              <a:defRPr/>
+            </a:pPr>
+            <a:endParaRPr lang="en-CA" sz="1598" b="0" i="0" kern="1200" dirty="0">
+              <a:solidFill>
+                <a:schemeClr val="tx1"/>
+              </a:solidFill>
+              <a:effectLst/>
+              <a:latin typeface="+mn-lt"/>
+              <a:ea typeface="+mn-ea"/>
+              <a:cs typeface="+mn-cs"/>
+            </a:endParaRPr>
+          </a:p>
+          <a:p>
+            <a:pPr marL="0" marR="0" lvl="0" indent="0" algn="l" defTabSz="1217889" rtl="0" eaLnBrk="1" fontAlgn="auto" latinLnBrk="0" hangingPunct="1">
+              <a:lnSpc>
+                <a:spcPct val="100000"/>
+              </a:lnSpc>
+              <a:spcBef>
+                <a:spcPts val="0"/>
+              </a:spcBef>
+              <a:spcAft>
+                <a:spcPts val="0"/>
+              </a:spcAft>
+              <a:buClrTx/>
+              <a:buSzTx/>
+              <a:buFontTx/>
+              <a:buNone/>
+              <a:tabLst/>
+              <a:defRPr/>
+            </a:pPr>
             <a:endParaRPr lang="en-US" dirty="0"/>
           </a:p>
           <a:p>
-            <a:r>
-              <a:rPr lang="en-US" dirty="0"/>
-              <a:t>AP FREQUENCY</a:t>
-            </a:r>
-          </a:p>
-          <a:p>
-            <a:r>
-              <a:rPr lang="en-US" dirty="0"/>
-              <a:t>Acute: starting at sweep 5 p= 0.031, 0.021, 0.022, 0.022, 0.022, 0.025</a:t>
-            </a:r>
-          </a:p>
-          <a:p>
-            <a:r>
-              <a:rPr lang="en-US" dirty="0"/>
-              <a:t>Acute with AM251: starting at sweep 5 p= 0.37, 0.35, 0.30, 0.35, 0.83, 0.90</a:t>
-            </a:r>
-          </a:p>
-          <a:p>
-            <a:r>
-              <a:rPr lang="en-US" dirty="0"/>
-              <a:t>Repeated: starting at sweep 5 p= 0.37, 0.17, 0.090, 0.074, 0.16, 0.089</a:t>
-            </a:r>
-          </a:p>
-          <a:p>
-            <a:r>
-              <a:rPr lang="en-US" dirty="0"/>
-              <a:t>Wilcoxon signed rank test comparing before and after for each sweep</a:t>
-            </a:r>
-          </a:p>
-          <a:p>
             <a:endParaRPr lang="en-US" dirty="0"/>
           </a:p>
-          <a:p>
-            <a:endParaRPr lang="en-US" dirty="0"/>
-          </a:p>
         </p:txBody>
       </p:sp>
       <p:sp>
@@ -1282,7 +1910,7 @@
           <p:cNvPr id="4" name="Slide Number Placeholder 3">
             <a:extLst>
               <a:ext uri="{FF2B5EF4-FFF2-40B4-BE49-F238E27FC236}">
-                <a16:creationId xmlns:a16="http://schemas.microsoft.com/office/drawing/2014/main" id="{822ABE78-CCB3-9CD3-C5D0-C60AFA75B5B9}"/>
+                <a16:creationId xmlns:a16="http://schemas.microsoft.com/office/drawing/2014/main" id="{63FE3735-5213-55EF-0289-5FBE56E91009}"/>
               </a:ext>
             </a:extLst>
           </p:cNvPr>
@@ -1300,7 +1928,7 @@
           <a:p>
             <a:fld id="{F708F06A-076A-AB49-9E02-15A3C27D2EF7}" type="slidenum">
               <a:rPr lang="en-US" smtClean="0"/>
-              <a:t>6</a:t>
+              <a:t>5</a:t>
             </a:fld>
             <a:endParaRPr lang="en-US"/>
           </a:p>
@@ -1309,7 +1937,7 @@
     </p:spTree>
     <p:extLst>
       <p:ext uri="{BB962C8B-B14F-4D97-AF65-F5344CB8AC3E}">
-        <p14:creationId xmlns:p14="http://schemas.microsoft.com/office/powerpoint/2010/main" val="3714291611"/>
+        <p14:creationId xmlns:p14="http://schemas.microsoft.com/office/powerpoint/2010/main" val="3058761142"/>
       </p:ext>
     </p:extLst>
   </p:cSld>
@@ -1320,6 +1948,391 @@
 </file>
 
 <file path=ppt/notesSlides/notesSlide6.xml><?xml version="1.0" encoding="utf-8"?>
+<p:notes xmlns:a="http://schemas.openxmlformats.org/drawingml/2006/main" xmlns:r="http://schemas.openxmlformats.org/officeDocument/2006/relationships" xmlns:p="http://schemas.openxmlformats.org/presentationml/2006/main">
+  <p:cSld>
+    <p:spTree>
+      <p:nvGrpSpPr>
+        <p:cNvPr id="1" name="">
+          <a:extLst>
+            <a:ext uri="{FF2B5EF4-FFF2-40B4-BE49-F238E27FC236}">
+              <a16:creationId xmlns:a16="http://schemas.microsoft.com/office/drawing/2014/main" id="{5BB5FA6B-7601-983F-C73F-470D3964E770}"/>
+            </a:ext>
+          </a:extLst>
+        </p:cNvPr>
+        <p:cNvGrpSpPr/>
+        <p:nvPr/>
+      </p:nvGrpSpPr>
+      <p:grpSpPr>
+        <a:xfrm>
+          <a:off x="0" y="0"/>
+          <a:ext cx="0" cy="0"/>
+          <a:chOff x="0" y="0"/>
+          <a:chExt cx="0" cy="0"/>
+        </a:xfrm>
+      </p:grpSpPr>
+      <p:sp>
+        <p:nvSpPr>
+          <p:cNvPr id="2" name="Slide Image Placeholder 1">
+            <a:extLst>
+              <a:ext uri="{FF2B5EF4-FFF2-40B4-BE49-F238E27FC236}">
+                <a16:creationId xmlns:a16="http://schemas.microsoft.com/office/drawing/2014/main" id="{53621E7F-08F2-072D-8337-AD19AFD97CFB}"/>
+              </a:ext>
+            </a:extLst>
+          </p:cNvPr>
+          <p:cNvSpPr>
+            <a:spLocks noGrp="1" noRot="1" noChangeAspect="1"/>
+          </p:cNvSpPr>
+          <p:nvPr>
+            <p:ph type="sldImg"/>
+          </p:nvPr>
+        </p:nvSpPr>
+        <p:spPr/>
+      </p:sp>
+      <p:sp>
+        <p:nvSpPr>
+          <p:cNvPr id="3" name="Notes Placeholder 2">
+            <a:extLst>
+              <a:ext uri="{FF2B5EF4-FFF2-40B4-BE49-F238E27FC236}">
+                <a16:creationId xmlns:a16="http://schemas.microsoft.com/office/drawing/2014/main" id="{48B81209-5EF0-17BC-8E22-8A9AFD34E68F}"/>
+              </a:ext>
+            </a:extLst>
+          </p:cNvPr>
+          <p:cNvSpPr>
+            <a:spLocks noGrp="1"/>
+          </p:cNvSpPr>
+          <p:nvPr>
+            <p:ph type="body" idx="1"/>
+          </p:nvPr>
+        </p:nvSpPr>
+        <p:spPr/>
+        <p:txBody>
+          <a:bodyPr/>
+          <a:lstStyle/>
+          <a:p>
+            <a:pPr marL="0" marR="0" lvl="0" indent="0" algn="l" defTabSz="1217889" rtl="0" eaLnBrk="1" fontAlgn="auto" latinLnBrk="0" hangingPunct="1">
+              <a:lnSpc>
+                <a:spcPct val="100000"/>
+              </a:lnSpc>
+              <a:spcBef>
+                <a:spcPts val="0"/>
+              </a:spcBef>
+              <a:spcAft>
+                <a:spcPts val="0"/>
+              </a:spcAft>
+              <a:buClrTx/>
+              <a:buSzTx/>
+              <a:buFontTx/>
+              <a:buNone/>
+              <a:tabLst/>
+              <a:defRPr/>
+            </a:pPr>
+            <a:r>
+              <a:rPr lang="en-US" dirty="0"/>
+              <a:t>PPR: </a:t>
+            </a:r>
+            <a:r>
+              <a:rPr lang="en-CA" sz="1598" kern="1200" dirty="0">
+                <a:solidFill>
+                  <a:schemeClr val="tx1"/>
+                </a:solidFill>
+                <a:effectLst/>
+                <a:latin typeface="+mn-lt"/>
+                <a:ea typeface="+mn-ea"/>
+                <a:cs typeface="+mn-cs"/>
+              </a:rPr>
+              <a:t>1.02 ± 0.10 at baseline to 1.46 ± 0.17 post-HFS, n = 8, paired t-test</a:t>
+            </a:r>
+          </a:p>
+          <a:p>
+            <a:pPr marL="0" marR="0" lvl="0" indent="0" algn="l" defTabSz="1217889" rtl="0" eaLnBrk="1" fontAlgn="auto" latinLnBrk="0" hangingPunct="1">
+              <a:lnSpc>
+                <a:spcPct val="100000"/>
+              </a:lnSpc>
+              <a:spcBef>
+                <a:spcPts val="0"/>
+              </a:spcBef>
+              <a:spcAft>
+                <a:spcPts val="0"/>
+              </a:spcAft>
+              <a:buClrTx/>
+              <a:buSzTx/>
+              <a:buFontTx/>
+              <a:buNone/>
+              <a:tabLst/>
+              <a:defRPr/>
+            </a:pPr>
+            <a:r>
+              <a:rPr lang="en-CA" sz="1598" b="0" i="0" kern="1200" dirty="0">
+                <a:solidFill>
+                  <a:schemeClr val="tx1"/>
+                </a:solidFill>
+                <a:effectLst/>
+                <a:latin typeface="+mn-lt"/>
+                <a:ea typeface="+mn-ea"/>
+                <a:cs typeface="+mn-cs"/>
+              </a:rPr>
+              <a:t>t = 2.8363, </a:t>
+            </a:r>
+            <a:r>
+              <a:rPr lang="en-CA" sz="1598" b="0" i="0" kern="1200" dirty="0" err="1">
+                <a:solidFill>
+                  <a:schemeClr val="tx1"/>
+                </a:solidFill>
+                <a:effectLst/>
+                <a:latin typeface="+mn-lt"/>
+                <a:ea typeface="+mn-ea"/>
+                <a:cs typeface="+mn-cs"/>
+              </a:rPr>
+              <a:t>df</a:t>
+            </a:r>
+            <a:r>
+              <a:rPr lang="en-CA" sz="1598" b="0" i="0" kern="1200" dirty="0">
+                <a:solidFill>
+                  <a:schemeClr val="tx1"/>
+                </a:solidFill>
+                <a:effectLst/>
+                <a:latin typeface="+mn-lt"/>
+                <a:ea typeface="+mn-ea"/>
+                <a:cs typeface="+mn-cs"/>
+              </a:rPr>
+              <a:t> = 7, p-value = 0.02518</a:t>
+            </a:r>
+          </a:p>
+          <a:p>
+            <a:pPr marL="0" marR="0" lvl="0" indent="0" algn="l" defTabSz="1217889" rtl="0" eaLnBrk="1" fontAlgn="auto" latinLnBrk="0" hangingPunct="1">
+              <a:lnSpc>
+                <a:spcPct val="100000"/>
+              </a:lnSpc>
+              <a:spcBef>
+                <a:spcPts val="0"/>
+              </a:spcBef>
+              <a:spcAft>
+                <a:spcPts val="0"/>
+              </a:spcAft>
+              <a:buClrTx/>
+              <a:buSzTx/>
+              <a:buFontTx/>
+              <a:buNone/>
+              <a:tabLst/>
+              <a:defRPr/>
+            </a:pPr>
+            <a:endParaRPr lang="en-CA" sz="1598" b="0" i="0" kern="1200" dirty="0">
+              <a:solidFill>
+                <a:schemeClr val="tx1"/>
+              </a:solidFill>
+              <a:effectLst/>
+              <a:latin typeface="+mn-lt"/>
+              <a:ea typeface="+mn-ea"/>
+              <a:cs typeface="+mn-cs"/>
+            </a:endParaRPr>
+          </a:p>
+          <a:p>
+            <a:pPr marL="0" marR="0" lvl="0" indent="0" algn="l" defTabSz="1217889" rtl="0" eaLnBrk="1" fontAlgn="auto" latinLnBrk="0" hangingPunct="1">
+              <a:lnSpc>
+                <a:spcPct val="100000"/>
+              </a:lnSpc>
+              <a:spcBef>
+                <a:spcPts val="0"/>
+              </a:spcBef>
+              <a:spcAft>
+                <a:spcPts val="0"/>
+              </a:spcAft>
+              <a:buClrTx/>
+              <a:buSzTx/>
+              <a:buFontTx/>
+              <a:buNone/>
+              <a:tabLst/>
+              <a:defRPr/>
+            </a:pPr>
+            <a:endParaRPr lang="en-CA" sz="1598" b="0" i="0" kern="1200" dirty="0">
+              <a:solidFill>
+                <a:schemeClr val="tx1"/>
+              </a:solidFill>
+              <a:effectLst/>
+              <a:latin typeface="+mn-lt"/>
+              <a:ea typeface="+mn-ea"/>
+              <a:cs typeface="+mn-cs"/>
+            </a:endParaRPr>
+          </a:p>
+          <a:p>
+            <a:pPr marL="0" marR="0" lvl="0" indent="0" algn="l" defTabSz="1217889" rtl="0" eaLnBrk="1" fontAlgn="auto" latinLnBrk="0" hangingPunct="1">
+              <a:lnSpc>
+                <a:spcPct val="100000"/>
+              </a:lnSpc>
+              <a:spcBef>
+                <a:spcPts val="0"/>
+              </a:spcBef>
+              <a:spcAft>
+                <a:spcPts val="0"/>
+              </a:spcAft>
+              <a:buClrTx/>
+              <a:buSzTx/>
+              <a:buFontTx/>
+              <a:buNone/>
+              <a:tabLst/>
+              <a:defRPr/>
+            </a:pPr>
+            <a:endParaRPr lang="en-CA" sz="1598" b="0" i="0" kern="1200" dirty="0">
+              <a:solidFill>
+                <a:schemeClr val="tx1"/>
+              </a:solidFill>
+              <a:effectLst/>
+              <a:latin typeface="+mn-lt"/>
+              <a:ea typeface="+mn-ea"/>
+              <a:cs typeface="+mn-cs"/>
+            </a:endParaRPr>
+          </a:p>
+          <a:p>
+            <a:pPr marL="0" marR="0" lvl="0" indent="0" algn="l" defTabSz="1217889" rtl="0" eaLnBrk="1" fontAlgn="auto" latinLnBrk="0" hangingPunct="1">
+              <a:lnSpc>
+                <a:spcPct val="100000"/>
+              </a:lnSpc>
+              <a:spcBef>
+                <a:spcPts val="0"/>
+              </a:spcBef>
+              <a:spcAft>
+                <a:spcPts val="0"/>
+              </a:spcAft>
+              <a:buClrTx/>
+              <a:buSzTx/>
+              <a:buFontTx/>
+              <a:buNone/>
+              <a:tabLst/>
+              <a:defRPr/>
+            </a:pPr>
+            <a:r>
+              <a:rPr lang="en-CA" sz="1598" b="0" i="0" kern="1200" dirty="0">
+                <a:solidFill>
+                  <a:schemeClr val="tx1"/>
+                </a:solidFill>
+                <a:effectLst/>
+                <a:latin typeface="+mn-lt"/>
+                <a:ea typeface="+mn-ea"/>
+                <a:cs typeface="+mn-cs"/>
+              </a:rPr>
+              <a:t>t = -2.2068, </a:t>
+            </a:r>
+            <a:r>
+              <a:rPr lang="en-CA" sz="1598" b="0" i="0" kern="1200" dirty="0" err="1">
+                <a:solidFill>
+                  <a:schemeClr val="tx1"/>
+                </a:solidFill>
+                <a:effectLst/>
+                <a:latin typeface="+mn-lt"/>
+                <a:ea typeface="+mn-ea"/>
+                <a:cs typeface="+mn-cs"/>
+              </a:rPr>
+              <a:t>df</a:t>
+            </a:r>
+            <a:r>
+              <a:rPr lang="en-CA" sz="1598" b="0" i="0" kern="1200" dirty="0">
+                <a:solidFill>
+                  <a:schemeClr val="tx1"/>
+                </a:solidFill>
+                <a:effectLst/>
+                <a:latin typeface="+mn-lt"/>
+                <a:ea typeface="+mn-ea"/>
+                <a:cs typeface="+mn-cs"/>
+              </a:rPr>
+              <a:t> = 7, p-value = 0.06309</a:t>
+            </a:r>
+          </a:p>
+          <a:p>
+            <a:pPr marL="0" marR="0" lvl="0" indent="0" algn="l" defTabSz="1217889" rtl="0" eaLnBrk="1" fontAlgn="auto" latinLnBrk="0" hangingPunct="1">
+              <a:lnSpc>
+                <a:spcPct val="100000"/>
+              </a:lnSpc>
+              <a:spcBef>
+                <a:spcPts val="0"/>
+              </a:spcBef>
+              <a:spcAft>
+                <a:spcPts val="0"/>
+              </a:spcAft>
+              <a:buClrTx/>
+              <a:buSzTx/>
+              <a:buFontTx/>
+              <a:buNone/>
+              <a:tabLst/>
+              <a:defRPr/>
+            </a:pPr>
+            <a:endParaRPr lang="en-CA" sz="1598" b="0" i="0" kern="1200" dirty="0">
+              <a:solidFill>
+                <a:schemeClr val="tx1"/>
+              </a:solidFill>
+              <a:effectLst/>
+              <a:latin typeface="+mn-lt"/>
+              <a:ea typeface="+mn-ea"/>
+              <a:cs typeface="+mn-cs"/>
+            </a:endParaRPr>
+          </a:p>
+          <a:p>
+            <a:pPr marL="0" marR="0" lvl="0" indent="0" algn="l" defTabSz="1217889" rtl="0" eaLnBrk="1" fontAlgn="auto" latinLnBrk="0" hangingPunct="1">
+              <a:lnSpc>
+                <a:spcPct val="100000"/>
+              </a:lnSpc>
+              <a:spcBef>
+                <a:spcPts val="0"/>
+              </a:spcBef>
+              <a:spcAft>
+                <a:spcPts val="0"/>
+              </a:spcAft>
+              <a:buClrTx/>
+              <a:buSzTx/>
+              <a:buFontTx/>
+              <a:buNone/>
+              <a:tabLst/>
+              <a:defRPr/>
+            </a:pPr>
+            <a:endParaRPr lang="en-US" dirty="0"/>
+          </a:p>
+          <a:p>
+            <a:endParaRPr lang="en-US" dirty="0"/>
+          </a:p>
+        </p:txBody>
+      </p:sp>
+      <p:sp>
+        <p:nvSpPr>
+          <p:cNvPr id="4" name="Slide Number Placeholder 3">
+            <a:extLst>
+              <a:ext uri="{FF2B5EF4-FFF2-40B4-BE49-F238E27FC236}">
+                <a16:creationId xmlns:a16="http://schemas.microsoft.com/office/drawing/2014/main" id="{494E65E9-CD2B-D21F-AD78-05B6FCD5CAA4}"/>
+              </a:ext>
+            </a:extLst>
+          </p:cNvPr>
+          <p:cNvSpPr>
+            <a:spLocks noGrp="1"/>
+          </p:cNvSpPr>
+          <p:nvPr>
+            <p:ph type="sldNum" sz="quarter" idx="5"/>
+          </p:nvPr>
+        </p:nvSpPr>
+        <p:spPr/>
+        <p:txBody>
+          <a:bodyPr/>
+          <a:lstStyle/>
+          <a:p>
+            <a:fld id="{F708F06A-076A-AB49-9E02-15A3C27D2EF7}" type="slidenum">
+              <a:rPr lang="en-US" smtClean="0"/>
+              <a:t>6</a:t>
+            </a:fld>
+            <a:endParaRPr lang="en-US"/>
+          </a:p>
+        </p:txBody>
+      </p:sp>
+    </p:spTree>
+    <p:extLst>
+      <p:ext uri="{BB962C8B-B14F-4D97-AF65-F5344CB8AC3E}">
+        <p14:creationId xmlns:p14="http://schemas.microsoft.com/office/powerpoint/2010/main" val="1942398735"/>
+      </p:ext>
+    </p:extLst>
+  </p:cSld>
+  <p:clrMapOvr>
+    <a:masterClrMapping/>
+  </p:clrMapOvr>
+</p:notes>
+</file>
+
+<file path=ppt/notesSlides/notesSlide7.xml><?xml version="1.0" encoding="utf-8"?>
 <p:notes xmlns:a="http://schemas.openxmlformats.org/drawingml/2006/main" xmlns:r="http://schemas.openxmlformats.org/officeDocument/2006/relationships" xmlns:p="http://schemas.openxmlformats.org/presentationml/2006/main">
   <p:cSld>
     <p:spTree>
@@ -1363,22 +2376,109 @@
           <a:bodyPr/>
           <a:lstStyle/>
           <a:p>
+            <a:pPr marL="0" marR="0" lvl="0" indent="0" algn="l" defTabSz="1217889" rtl="0" eaLnBrk="1" fontAlgn="auto" latinLnBrk="0" hangingPunct="1">
+              <a:lnSpc>
+                <a:spcPct val="100000"/>
+              </a:lnSpc>
+              <a:spcBef>
+                <a:spcPts val="0"/>
+              </a:spcBef>
+              <a:spcAft>
+                <a:spcPts val="0"/>
+              </a:spcAft>
+              <a:buClrTx/>
+              <a:buSzTx/>
+              <a:buFontTx/>
+              <a:buNone/>
+              <a:tabLst/>
+              <a:defRPr/>
+            </a:pPr>
             <a:r>
               <a:rPr lang="en-US" dirty="0"/>
-              <a:t>Traces</a:t>
-            </a:r>
-          </a:p>
-          <a:p>
-            <a:r>
-              <a:rPr lang="en-US" dirty="0"/>
-              <a:t>Rep cell</a:t>
-            </a:r>
-          </a:p>
-          <a:p>
-            <a:r>
-              <a:rPr lang="en-US" dirty="0"/>
-              <a:t>PPR and CV</a:t>
-            </a:r>
+              <a:t>PPR: </a:t>
+            </a:r>
+            <a:r>
+              <a:rPr lang="en-CA" sz="1598" kern="1200" dirty="0">
+                <a:solidFill>
+                  <a:schemeClr val="tx1"/>
+                </a:solidFill>
+                <a:effectLst/>
+                <a:latin typeface="+mn-lt"/>
+                <a:ea typeface="+mn-ea"/>
+                <a:cs typeface="+mn-cs"/>
+              </a:rPr>
+              <a:t>1.02 ± 0.12 at baseline to 1.00 ± 0.12 post-HFS,  n = 10, paired t-test</a:t>
+            </a:r>
+            <a:endParaRPr lang="en-CA" dirty="0">
+              <a:effectLst/>
+            </a:endParaRPr>
+          </a:p>
+          <a:p>
+            <a:pPr marL="0" marR="0" lvl="0" indent="0" algn="l" defTabSz="1217889" rtl="0" eaLnBrk="1" fontAlgn="auto" latinLnBrk="0" hangingPunct="1">
+              <a:lnSpc>
+                <a:spcPct val="100000"/>
+              </a:lnSpc>
+              <a:spcBef>
+                <a:spcPts val="0"/>
+              </a:spcBef>
+              <a:spcAft>
+                <a:spcPts val="0"/>
+              </a:spcAft>
+              <a:buClrTx/>
+              <a:buSzTx/>
+              <a:buFontTx/>
+              <a:buNone/>
+              <a:tabLst/>
+              <a:defRPr/>
+            </a:pPr>
+            <a:r>
+              <a:rPr lang="en-CA" dirty="0">
+                <a:effectLst/>
+              </a:rPr>
+              <a:t>PPR: </a:t>
+            </a:r>
+            <a:r>
+              <a:rPr lang="en-CA" sz="1598" b="0" i="0" kern="1200" dirty="0">
+                <a:solidFill>
+                  <a:schemeClr val="tx1"/>
+                </a:solidFill>
+                <a:effectLst/>
+                <a:latin typeface="+mn-lt"/>
+                <a:ea typeface="+mn-ea"/>
+                <a:cs typeface="+mn-cs"/>
+              </a:rPr>
+              <a:t>t = -0.28857, </a:t>
+            </a:r>
+            <a:r>
+              <a:rPr lang="en-CA" sz="1598" b="0" i="0" kern="1200" dirty="0" err="1">
+                <a:solidFill>
+                  <a:schemeClr val="tx1"/>
+                </a:solidFill>
+                <a:effectLst/>
+                <a:latin typeface="+mn-lt"/>
+                <a:ea typeface="+mn-ea"/>
+                <a:cs typeface="+mn-cs"/>
+              </a:rPr>
+              <a:t>df</a:t>
+            </a:r>
+            <a:r>
+              <a:rPr lang="en-CA" sz="1598" b="0" i="0" kern="1200" dirty="0">
+                <a:solidFill>
+                  <a:schemeClr val="tx1"/>
+                </a:solidFill>
+                <a:effectLst/>
+                <a:latin typeface="+mn-lt"/>
+                <a:ea typeface="+mn-ea"/>
+                <a:cs typeface="+mn-cs"/>
+              </a:rPr>
+              <a:t> = 9, p-value = 0.7794</a:t>
+            </a:r>
+            <a:endParaRPr lang="en-CA" dirty="0">
+              <a:effectLst/>
+            </a:endParaRPr>
+          </a:p>
+          <a:p>
+            <a:endParaRPr lang="en-US" dirty="0"/>
           </a:p>
         </p:txBody>
       </p:sp>
@@ -1408,130 +2508,7 @@
     </p:spTree>
     <p:extLst>
       <p:ext uri="{BB962C8B-B14F-4D97-AF65-F5344CB8AC3E}">
-        <p14:creationId xmlns:p14="http://schemas.microsoft.com/office/powerpoint/2010/main" val="2188284980"/>
-      </p:ext>
-    </p:extLst>
-  </p:cSld>
-  <p:clrMapOvr>
-    <a:masterClrMapping/>
-  </p:clrMapOvr>
-</p:notes>
-</file>
-
-<file path=ppt/notesSlides/notesSlide7.xml><?xml version="1.0" encoding="utf-8"?>
-<p:notes xmlns:a="http://schemas.openxmlformats.org/drawingml/2006/main" xmlns:r="http://schemas.openxmlformats.org/officeDocument/2006/relationships" xmlns:p="http://schemas.openxmlformats.org/presentationml/2006/main">
-  <p:cSld>
-    <p:spTree>
-      <p:nvGrpSpPr>
-        <p:cNvPr id="1" name="">
-          <a:extLst>
-            <a:ext uri="{FF2B5EF4-FFF2-40B4-BE49-F238E27FC236}">
-              <a16:creationId xmlns:a16="http://schemas.microsoft.com/office/drawing/2014/main" id="{54F66BA1-76EF-F2D0-B0A3-2BECB91A517C}"/>
-            </a:ext>
-          </a:extLst>
-        </p:cNvPr>
-        <p:cNvGrpSpPr/>
-        <p:nvPr/>
-      </p:nvGrpSpPr>
-      <p:grpSpPr>
-        <a:xfrm>
-          <a:off x="0" y="0"/>
-          <a:ext cx="0" cy="0"/>
-          <a:chOff x="0" y="0"/>
-          <a:chExt cx="0" cy="0"/>
-        </a:xfrm>
-      </p:grpSpPr>
-      <p:sp>
-        <p:nvSpPr>
-          <p:cNvPr id="2" name="Slide Image Placeholder 1">
-            <a:extLst>
-              <a:ext uri="{FF2B5EF4-FFF2-40B4-BE49-F238E27FC236}">
-                <a16:creationId xmlns:a16="http://schemas.microsoft.com/office/drawing/2014/main" id="{ACD4C487-C49A-6203-2F7F-9A1AE8662828}"/>
-              </a:ext>
-            </a:extLst>
-          </p:cNvPr>
-          <p:cNvSpPr>
-            <a:spLocks noGrp="1" noRot="1" noChangeAspect="1"/>
-          </p:cNvSpPr>
-          <p:nvPr>
-            <p:ph type="sldImg"/>
-          </p:nvPr>
-        </p:nvSpPr>
-        <p:spPr/>
-      </p:sp>
-      <p:sp>
-        <p:nvSpPr>
-          <p:cNvPr id="3" name="Notes Placeholder 2">
-            <a:extLst>
-              <a:ext uri="{FF2B5EF4-FFF2-40B4-BE49-F238E27FC236}">
-                <a16:creationId xmlns:a16="http://schemas.microsoft.com/office/drawing/2014/main" id="{4301ACEC-48EB-2E2E-125B-8FFBCAA50ED4}"/>
-              </a:ext>
-            </a:extLst>
-          </p:cNvPr>
-          <p:cNvSpPr>
-            <a:spLocks noGrp="1"/>
-          </p:cNvSpPr>
-          <p:nvPr>
-            <p:ph type="body" idx="1"/>
-          </p:nvPr>
-        </p:nvSpPr>
-        <p:spPr/>
-        <p:txBody>
-          <a:bodyPr/>
-          <a:lstStyle/>
-          <a:p>
-            <a:r>
-              <a:rPr lang="en-US" dirty="0"/>
-              <a:t>Traces</a:t>
-            </a:r>
-          </a:p>
-          <a:p>
-            <a:r>
-              <a:rPr lang="en-US" dirty="0"/>
-              <a:t>Rep cell</a:t>
-            </a:r>
-          </a:p>
-          <a:p>
-            <a:r>
-              <a:rPr lang="en-US" dirty="0"/>
-              <a:t>PPR and CV</a:t>
-            </a:r>
-          </a:p>
-        </p:txBody>
-      </p:sp>
-      <p:sp>
-        <p:nvSpPr>
-          <p:cNvPr id="4" name="Slide Number Placeholder 3">
-            <a:extLst>
-              <a:ext uri="{FF2B5EF4-FFF2-40B4-BE49-F238E27FC236}">
-                <a16:creationId xmlns:a16="http://schemas.microsoft.com/office/drawing/2014/main" id="{055A50B9-5D5E-CFC0-57CD-255DBDB15704}"/>
-              </a:ext>
-            </a:extLst>
-          </p:cNvPr>
-          <p:cNvSpPr>
-            <a:spLocks noGrp="1"/>
-          </p:cNvSpPr>
-          <p:nvPr>
-            <p:ph type="sldNum" sz="quarter" idx="5"/>
-          </p:nvPr>
-        </p:nvSpPr>
-        <p:spPr/>
-        <p:txBody>
-          <a:bodyPr/>
-          <a:lstStyle/>
-          <a:p>
-            <a:fld id="{F708F06A-076A-AB49-9E02-15A3C27D2EF7}" type="slidenum">
-              <a:rPr lang="en-US" smtClean="0"/>
-              <a:t>8</a:t>
-            </a:fld>
-            <a:endParaRPr lang="en-US"/>
-          </a:p>
-        </p:txBody>
-      </p:sp>
-    </p:spTree>
-    <p:extLst>
-      <p:ext uri="{BB962C8B-B14F-4D97-AF65-F5344CB8AC3E}">
-        <p14:creationId xmlns:p14="http://schemas.microsoft.com/office/powerpoint/2010/main" val="727726667"/>
+        <p14:creationId xmlns:p14="http://schemas.microsoft.com/office/powerpoint/2010/main" val="2167216359"/>
       </p:ext>
     </p:extLst>
   </p:cSld>
@@ -1546,13 +2523,7 @@
   <p:cSld>
     <p:spTree>
       <p:nvGrpSpPr>
-        <p:cNvPr id="1" name="">
-          <a:extLst>
-            <a:ext uri="{FF2B5EF4-FFF2-40B4-BE49-F238E27FC236}">
-              <a16:creationId xmlns:a16="http://schemas.microsoft.com/office/drawing/2014/main" id="{361C1861-6333-CF33-86DB-99096F16AC39}"/>
-            </a:ext>
-          </a:extLst>
-        </p:cNvPr>
+        <p:cNvPr id="1" name=""/>
         <p:cNvGrpSpPr/>
         <p:nvPr/>
       </p:nvGrpSpPr>
@@ -1566,13 +2537,7 @@
       </p:grpSpPr>
       <p:sp>
         <p:nvSpPr>
-          <p:cNvPr id="2" name="Slide Image Placeholder 1">
-            <a:extLst>
-              <a:ext uri="{FF2B5EF4-FFF2-40B4-BE49-F238E27FC236}">
-                <a16:creationId xmlns:a16="http://schemas.microsoft.com/office/drawing/2014/main" id="{B20E9660-0AE2-D107-C1E5-C05109A6F5A5}"/>
-              </a:ext>
-            </a:extLst>
-          </p:cNvPr>
+          <p:cNvPr id="2" name="Slide Image Placeholder 1"/>
           <p:cNvSpPr>
             <a:spLocks noGrp="1" noRot="1" noChangeAspect="1"/>
           </p:cNvSpPr>
@@ -1584,13 +2549,7 @@
       </p:sp>
       <p:sp>
         <p:nvSpPr>
-          <p:cNvPr id="3" name="Notes Placeholder 2">
-            <a:extLst>
-              <a:ext uri="{FF2B5EF4-FFF2-40B4-BE49-F238E27FC236}">
-                <a16:creationId xmlns:a16="http://schemas.microsoft.com/office/drawing/2014/main" id="{07B7CAB0-B7C5-63E0-BF4D-C73A7996E4D6}"/>
-              </a:ext>
-            </a:extLst>
-          </p:cNvPr>
+          <p:cNvPr id="3" name="Notes Placeholder 2"/>
           <p:cNvSpPr>
             <a:spLocks noGrp="1"/>
           </p:cNvSpPr>
@@ -1603,34 +2562,290 @@
           <a:bodyPr/>
           <a:lstStyle/>
           <a:p>
+            <a:pPr marL="0" marR="0" lvl="0" indent="0" algn="l" defTabSz="1217889" rtl="0" eaLnBrk="1" fontAlgn="auto" latinLnBrk="0" hangingPunct="1">
+              <a:lnSpc>
+                <a:spcPct val="100000"/>
+              </a:lnSpc>
+              <a:spcBef>
+                <a:spcPts val="0"/>
+              </a:spcBef>
+              <a:spcAft>
+                <a:spcPts val="0"/>
+              </a:spcAft>
+              <a:buClrTx/>
+              <a:buSzTx/>
+              <a:buFontTx/>
+              <a:buNone/>
+              <a:tabLst/>
+              <a:defRPr/>
+            </a:pPr>
             <a:r>
               <a:rPr lang="en-US" dirty="0"/>
-              <a:t>Traces</a:t>
-            </a:r>
-          </a:p>
-          <a:p>
-            <a:r>
-              <a:rPr lang="en-US" dirty="0"/>
-              <a:t>Rep cell</a:t>
-            </a:r>
-          </a:p>
-          <a:p>
-            <a:r>
-              <a:rPr lang="en-US" dirty="0"/>
-              <a:t>PPR and CV</a:t>
-            </a:r>
-          </a:p>
-        </p:txBody>
-      </p:sp>
-      <p:sp>
-        <p:nvSpPr>
-          <p:cNvPr id="4" name="Slide Number Placeholder 3">
-            <a:extLst>
-              <a:ext uri="{FF2B5EF4-FFF2-40B4-BE49-F238E27FC236}">
-                <a16:creationId xmlns:a16="http://schemas.microsoft.com/office/drawing/2014/main" id="{66502CCE-1E7A-32BD-134A-334AA91EE634}"/>
-              </a:ext>
-            </a:extLst>
-          </p:cNvPr>
+              <a:t>PPR: </a:t>
+            </a:r>
+            <a:r>
+              <a:rPr lang="en-CA" sz="1598" kern="1200" dirty="0">
+                <a:solidFill>
+                  <a:schemeClr val="tx1"/>
+                </a:solidFill>
+                <a:effectLst/>
+                <a:latin typeface="+mn-lt"/>
+                <a:ea typeface="+mn-ea"/>
+                <a:cs typeface="+mn-cs"/>
+              </a:rPr>
+              <a:t>1.02 ± 0.10 at baseline to 1.46 ± 0.17 post-HFS, n = 8, paired t-test</a:t>
+            </a:r>
+          </a:p>
+          <a:p>
+            <a:pPr marL="0" marR="0" lvl="0" indent="0" algn="l" defTabSz="1217889" rtl="0" eaLnBrk="1" fontAlgn="auto" latinLnBrk="0" hangingPunct="1">
+              <a:lnSpc>
+                <a:spcPct val="100000"/>
+              </a:lnSpc>
+              <a:spcBef>
+                <a:spcPts val="0"/>
+              </a:spcBef>
+              <a:spcAft>
+                <a:spcPts val="0"/>
+              </a:spcAft>
+              <a:buClrTx/>
+              <a:buSzTx/>
+              <a:buFontTx/>
+              <a:buNone/>
+              <a:tabLst/>
+              <a:defRPr/>
+            </a:pPr>
+            <a:r>
+              <a:rPr lang="en-CA" sz="1598" b="0" i="0" kern="1200" dirty="0">
+                <a:solidFill>
+                  <a:schemeClr val="tx1"/>
+                </a:solidFill>
+                <a:effectLst/>
+                <a:latin typeface="+mn-lt"/>
+                <a:ea typeface="+mn-ea"/>
+                <a:cs typeface="+mn-cs"/>
+              </a:rPr>
+              <a:t>t = 2.8363, </a:t>
+            </a:r>
+            <a:r>
+              <a:rPr lang="en-CA" sz="1598" b="0" i="0" kern="1200" dirty="0" err="1">
+                <a:solidFill>
+                  <a:schemeClr val="tx1"/>
+                </a:solidFill>
+                <a:effectLst/>
+                <a:latin typeface="+mn-lt"/>
+                <a:ea typeface="+mn-ea"/>
+                <a:cs typeface="+mn-cs"/>
+              </a:rPr>
+              <a:t>df</a:t>
+            </a:r>
+            <a:r>
+              <a:rPr lang="en-CA" sz="1598" b="0" i="0" kern="1200" dirty="0">
+                <a:solidFill>
+                  <a:schemeClr val="tx1"/>
+                </a:solidFill>
+                <a:effectLst/>
+                <a:latin typeface="+mn-lt"/>
+                <a:ea typeface="+mn-ea"/>
+                <a:cs typeface="+mn-cs"/>
+              </a:rPr>
+              <a:t> = 7, p-value = 0.02518</a:t>
+            </a:r>
+          </a:p>
+          <a:p>
+            <a:pPr marL="0" marR="0" lvl="0" indent="0" algn="l" defTabSz="1217889" rtl="0" eaLnBrk="1" fontAlgn="auto" latinLnBrk="0" hangingPunct="1">
+              <a:lnSpc>
+                <a:spcPct val="100000"/>
+              </a:lnSpc>
+              <a:spcBef>
+                <a:spcPts val="0"/>
+              </a:spcBef>
+              <a:spcAft>
+                <a:spcPts val="0"/>
+              </a:spcAft>
+              <a:buClrTx/>
+              <a:buSzTx/>
+              <a:buFontTx/>
+              <a:buNone/>
+              <a:tabLst/>
+              <a:defRPr/>
+            </a:pPr>
+            <a:endParaRPr lang="en-CA" sz="1598" b="0" i="0" kern="1200" dirty="0">
+              <a:solidFill>
+                <a:schemeClr val="tx1"/>
+              </a:solidFill>
+              <a:effectLst/>
+              <a:latin typeface="+mn-lt"/>
+              <a:ea typeface="+mn-ea"/>
+              <a:cs typeface="+mn-cs"/>
+            </a:endParaRPr>
+          </a:p>
+          <a:p>
+            <a:pPr marL="0" marR="0" lvl="0" indent="0" algn="l" defTabSz="1217889" rtl="0" eaLnBrk="1" fontAlgn="auto" latinLnBrk="0" hangingPunct="1">
+              <a:lnSpc>
+                <a:spcPct val="100000"/>
+              </a:lnSpc>
+              <a:spcBef>
+                <a:spcPts val="0"/>
+              </a:spcBef>
+              <a:spcAft>
+                <a:spcPts val="0"/>
+              </a:spcAft>
+              <a:buClrTx/>
+              <a:buSzTx/>
+              <a:buFontTx/>
+              <a:buNone/>
+              <a:tabLst/>
+              <a:defRPr/>
+            </a:pPr>
+            <a:endParaRPr lang="en-CA" sz="1598" b="0" i="0" kern="1200" dirty="0">
+              <a:solidFill>
+                <a:schemeClr val="tx1"/>
+              </a:solidFill>
+              <a:effectLst/>
+              <a:latin typeface="+mn-lt"/>
+              <a:ea typeface="+mn-ea"/>
+              <a:cs typeface="+mn-cs"/>
+            </a:endParaRPr>
+          </a:p>
+          <a:p>
+            <a:pPr marL="0" marR="0" lvl="0" indent="0" algn="l" defTabSz="1217889" rtl="0" eaLnBrk="1" fontAlgn="auto" latinLnBrk="0" hangingPunct="1">
+              <a:lnSpc>
+                <a:spcPct val="100000"/>
+              </a:lnSpc>
+              <a:spcBef>
+                <a:spcPts val="0"/>
+              </a:spcBef>
+              <a:spcAft>
+                <a:spcPts val="0"/>
+              </a:spcAft>
+              <a:buClrTx/>
+              <a:buSzTx/>
+              <a:buFontTx/>
+              <a:buNone/>
+              <a:tabLst/>
+              <a:defRPr/>
+            </a:pPr>
+            <a:endParaRPr lang="en-CA" sz="1598" b="0" i="0" kern="1200" dirty="0">
+              <a:solidFill>
+                <a:schemeClr val="tx1"/>
+              </a:solidFill>
+              <a:effectLst/>
+              <a:latin typeface="+mn-lt"/>
+              <a:ea typeface="+mn-ea"/>
+              <a:cs typeface="+mn-cs"/>
+            </a:endParaRPr>
+          </a:p>
+          <a:p>
+            <a:pPr marL="0" marR="0" lvl="0" indent="0" algn="l" defTabSz="1217889" rtl="0" eaLnBrk="1" fontAlgn="auto" latinLnBrk="0" hangingPunct="1">
+              <a:lnSpc>
+                <a:spcPct val="100000"/>
+              </a:lnSpc>
+              <a:spcBef>
+                <a:spcPts val="0"/>
+              </a:spcBef>
+              <a:spcAft>
+                <a:spcPts val="0"/>
+              </a:spcAft>
+              <a:buClrTx/>
+              <a:buSzTx/>
+              <a:buFontTx/>
+              <a:buNone/>
+              <a:tabLst/>
+              <a:defRPr/>
+            </a:pPr>
+            <a:r>
+              <a:rPr lang="en-CA" sz="1598" b="0" i="0" kern="1200" dirty="0">
+                <a:solidFill>
+                  <a:schemeClr val="tx1"/>
+                </a:solidFill>
+                <a:effectLst/>
+                <a:latin typeface="+mn-lt"/>
+                <a:ea typeface="+mn-ea"/>
+                <a:cs typeface="+mn-cs"/>
+              </a:rPr>
+              <a:t>t = -2.2068, </a:t>
+            </a:r>
+            <a:r>
+              <a:rPr lang="en-CA" sz="1598" b="0" i="0" kern="1200" dirty="0" err="1">
+                <a:solidFill>
+                  <a:schemeClr val="tx1"/>
+                </a:solidFill>
+                <a:effectLst/>
+                <a:latin typeface="+mn-lt"/>
+                <a:ea typeface="+mn-ea"/>
+                <a:cs typeface="+mn-cs"/>
+              </a:rPr>
+              <a:t>df</a:t>
+            </a:r>
+            <a:r>
+              <a:rPr lang="en-CA" sz="1598" b="0" i="0" kern="1200" dirty="0">
+                <a:solidFill>
+                  <a:schemeClr val="tx1"/>
+                </a:solidFill>
+                <a:effectLst/>
+                <a:latin typeface="+mn-lt"/>
+                <a:ea typeface="+mn-ea"/>
+                <a:cs typeface="+mn-cs"/>
+              </a:rPr>
+              <a:t> = 7, p-value = 0.06309</a:t>
+            </a:r>
+          </a:p>
+          <a:p>
+            <a:pPr marL="0" marR="0" lvl="0" indent="0" algn="l" defTabSz="1217889" rtl="0" eaLnBrk="1" fontAlgn="auto" latinLnBrk="0" hangingPunct="1">
+              <a:lnSpc>
+                <a:spcPct val="100000"/>
+              </a:lnSpc>
+              <a:spcBef>
+                <a:spcPts val="0"/>
+              </a:spcBef>
+              <a:spcAft>
+                <a:spcPts val="0"/>
+              </a:spcAft>
+              <a:buClrTx/>
+              <a:buSzTx/>
+              <a:buFontTx/>
+              <a:buNone/>
+              <a:tabLst/>
+              <a:defRPr/>
+            </a:pPr>
+            <a:endParaRPr lang="en-CA" sz="1598" b="0" i="0" kern="1200" dirty="0">
+              <a:solidFill>
+                <a:schemeClr val="tx1"/>
+              </a:solidFill>
+              <a:effectLst/>
+              <a:latin typeface="+mn-lt"/>
+              <a:ea typeface="+mn-ea"/>
+              <a:cs typeface="+mn-cs"/>
+            </a:endParaRPr>
+          </a:p>
+          <a:p>
+            <a:pPr marL="0" marR="0" lvl="0" indent="0" algn="l" defTabSz="1217889" rtl="0" eaLnBrk="1" fontAlgn="auto" latinLnBrk="0" hangingPunct="1">
+              <a:lnSpc>
+                <a:spcPct val="100000"/>
+              </a:lnSpc>
+              <a:spcBef>
+                <a:spcPts val="0"/>
+              </a:spcBef>
+              <a:spcAft>
+                <a:spcPts val="0"/>
+              </a:spcAft>
+              <a:buClrTx/>
+              <a:buSzTx/>
+              <a:buFontTx/>
+              <a:buNone/>
+              <a:tabLst/>
+              <a:defRPr/>
+            </a:pPr>
+            <a:endParaRPr lang="en-US" dirty="0"/>
+          </a:p>
+          <a:p>
+            <a:endParaRPr lang="en-US" dirty="0"/>
+          </a:p>
+        </p:txBody>
+      </p:sp>
+      <p:sp>
+        <p:nvSpPr>
+          <p:cNvPr id="4" name="Slide Number Placeholder 3"/>
           <p:cNvSpPr>
             <a:spLocks noGrp="1"/>
           </p:cNvSpPr>
@@ -1645,7 +2860,7 @@
           <a:p>
             <a:fld id="{F708F06A-076A-AB49-9E02-15A3C27D2EF7}" type="slidenum">
               <a:rPr lang="en-US" smtClean="0"/>
-              <a:t>9</a:t>
+              <a:t>8</a:t>
             </a:fld>
             <a:endParaRPr lang="en-US"/>
           </a:p>
@@ -1654,7 +2869,7 @@
     </p:spTree>
     <p:extLst>
       <p:ext uri="{BB962C8B-B14F-4D97-AF65-F5344CB8AC3E}">
-        <p14:creationId xmlns:p14="http://schemas.microsoft.com/office/powerpoint/2010/main" val="1149316453"/>
+        <p14:creationId xmlns:p14="http://schemas.microsoft.com/office/powerpoint/2010/main" val="3502296170"/>
       </p:ext>
     </p:extLst>
   </p:cSld>
@@ -1669,13 +2884,7 @@
   <p:cSld>
     <p:spTree>
       <p:nvGrpSpPr>
-        <p:cNvPr id="1" name="">
-          <a:extLst>
-            <a:ext uri="{FF2B5EF4-FFF2-40B4-BE49-F238E27FC236}">
-              <a16:creationId xmlns:a16="http://schemas.microsoft.com/office/drawing/2014/main" id="{23933D36-9617-4922-BBA0-DF9A6D4B4B55}"/>
-            </a:ext>
-          </a:extLst>
-        </p:cNvPr>
+        <p:cNvPr id="1" name=""/>
         <p:cNvGrpSpPr/>
         <p:nvPr/>
       </p:nvGrpSpPr>
@@ -1689,13 +2898,7 @@
       </p:grpSpPr>
       <p:sp>
         <p:nvSpPr>
-          <p:cNvPr id="2" name="Slide Image Placeholder 1">
-            <a:extLst>
-              <a:ext uri="{FF2B5EF4-FFF2-40B4-BE49-F238E27FC236}">
-                <a16:creationId xmlns:a16="http://schemas.microsoft.com/office/drawing/2014/main" id="{87F5D140-3394-2526-A45A-F326BF02D229}"/>
-              </a:ext>
-            </a:extLst>
-          </p:cNvPr>
+          <p:cNvPr id="2" name="Slide Image Placeholder 1"/>
           <p:cNvSpPr>
             <a:spLocks noGrp="1" noRot="1" noChangeAspect="1"/>
           </p:cNvSpPr>
@@ -1707,13 +2910,7 @@
       </p:sp>
       <p:sp>
         <p:nvSpPr>
-          <p:cNvPr id="3" name="Notes Placeholder 2">
-            <a:extLst>
-              <a:ext uri="{FF2B5EF4-FFF2-40B4-BE49-F238E27FC236}">
-                <a16:creationId xmlns:a16="http://schemas.microsoft.com/office/drawing/2014/main" id="{0722751D-99FE-8DAC-8A2A-986CF6DD718F}"/>
-              </a:ext>
-            </a:extLst>
-          </p:cNvPr>
+          <p:cNvPr id="3" name="Notes Placeholder 2"/>
           <p:cNvSpPr>
             <a:spLocks noGrp="1"/>
           </p:cNvSpPr>
@@ -1728,32 +2925,148 @@
           <a:p>
             <a:r>
               <a:rPr lang="en-US" dirty="0"/>
-              <a:t>Traces</a:t>
-            </a:r>
-          </a:p>
-          <a:p>
-            <a:r>
-              <a:rPr lang="en-US" dirty="0"/>
-              <a:t>Rep cell</a:t>
-            </a:r>
-          </a:p>
-          <a:p>
-            <a:r>
-              <a:rPr lang="en-US" dirty="0"/>
-              <a:t>PPR and CV</a:t>
-            </a:r>
-          </a:p>
-        </p:txBody>
-      </p:sp>
-      <p:sp>
-        <p:nvSpPr>
-          <p:cNvPr id="4" name="Slide Number Placeholder 3">
-            <a:extLst>
-              <a:ext uri="{FF2B5EF4-FFF2-40B4-BE49-F238E27FC236}">
-                <a16:creationId xmlns:a16="http://schemas.microsoft.com/office/drawing/2014/main" id="{5D563270-B8B0-2519-CA57-097FBE1BA4E1}"/>
-              </a:ext>
-            </a:extLst>
-          </p:cNvPr>
+              <a:t>PPR: 1</a:t>
+            </a:r>
+            <a:r>
+              <a:rPr lang="en-CA" sz="1598" kern="1200" dirty="0">
+                <a:solidFill>
+                  <a:schemeClr val="tx1"/>
+                </a:solidFill>
+                <a:effectLst/>
+                <a:latin typeface="+mn-lt"/>
+                <a:ea typeface="+mn-ea"/>
+                <a:cs typeface="+mn-cs"/>
+              </a:rPr>
+              <a:t>.05 ± 0.09 to 1.07 ± 0.13, n = 10, paired t-test</a:t>
+            </a:r>
+          </a:p>
+          <a:p>
+            <a:pPr marL="0" marR="0" lvl="0" indent="0" algn="l" defTabSz="1217889" rtl="0" eaLnBrk="1" fontAlgn="auto" latinLnBrk="0" hangingPunct="1">
+              <a:lnSpc>
+                <a:spcPct val="100000"/>
+              </a:lnSpc>
+              <a:spcBef>
+                <a:spcPts val="0"/>
+              </a:spcBef>
+              <a:spcAft>
+                <a:spcPts val="0"/>
+              </a:spcAft>
+              <a:buClrTx/>
+              <a:buSzTx/>
+              <a:buFontTx/>
+              <a:buNone/>
+              <a:tabLst/>
+              <a:defRPr/>
+            </a:pPr>
+            <a:r>
+              <a:rPr lang="en-CA" sz="1598" b="0" i="0" kern="1200" dirty="0">
+                <a:solidFill>
+                  <a:schemeClr val="tx1"/>
+                </a:solidFill>
+                <a:effectLst/>
+                <a:latin typeface="+mn-lt"/>
+                <a:ea typeface="+mn-ea"/>
+                <a:cs typeface="+mn-cs"/>
+              </a:rPr>
+              <a:t>t = 0.29187, </a:t>
+            </a:r>
+            <a:r>
+              <a:rPr lang="en-CA" sz="1598" b="0" i="0" kern="1200" dirty="0" err="1">
+                <a:solidFill>
+                  <a:schemeClr val="tx1"/>
+                </a:solidFill>
+                <a:effectLst/>
+                <a:latin typeface="+mn-lt"/>
+                <a:ea typeface="+mn-ea"/>
+                <a:cs typeface="+mn-cs"/>
+              </a:rPr>
+              <a:t>df</a:t>
+            </a:r>
+            <a:r>
+              <a:rPr lang="en-CA" sz="1598" b="0" i="0" kern="1200" dirty="0">
+                <a:solidFill>
+                  <a:schemeClr val="tx1"/>
+                </a:solidFill>
+                <a:effectLst/>
+                <a:latin typeface="+mn-lt"/>
+                <a:ea typeface="+mn-ea"/>
+                <a:cs typeface="+mn-cs"/>
+              </a:rPr>
+              <a:t> = 9, p-value = 0.777</a:t>
+            </a:r>
+          </a:p>
+          <a:p>
+            <a:endParaRPr lang="en-US" dirty="0"/>
+          </a:p>
+          <a:p>
+            <a:endParaRPr lang="en-US" dirty="0"/>
+          </a:p>
+          <a:p>
+            <a:endParaRPr lang="en-US" dirty="0"/>
+          </a:p>
+          <a:p>
+            <a:pPr marL="0" marR="0" lvl="0" indent="0" algn="l" defTabSz="1217889" rtl="0" eaLnBrk="1" fontAlgn="auto" latinLnBrk="0" hangingPunct="1">
+              <a:lnSpc>
+                <a:spcPct val="100000"/>
+              </a:lnSpc>
+              <a:spcBef>
+                <a:spcPts val="0"/>
+              </a:spcBef>
+              <a:spcAft>
+                <a:spcPts val="0"/>
+              </a:spcAft>
+              <a:buClrTx/>
+              <a:buSzTx/>
+              <a:buFontTx/>
+              <a:buNone/>
+              <a:tabLst/>
+              <a:defRPr/>
+            </a:pPr>
+            <a:r>
+              <a:rPr lang="en-CA" sz="1598" b="0" i="0" kern="1200" dirty="0">
+                <a:solidFill>
+                  <a:schemeClr val="tx1"/>
+                </a:solidFill>
+                <a:effectLst/>
+                <a:latin typeface="+mn-lt"/>
+                <a:ea typeface="+mn-ea"/>
+                <a:cs typeface="+mn-cs"/>
+              </a:rPr>
+              <a:t>t = 1.0427, </a:t>
+            </a:r>
+            <a:r>
+              <a:rPr lang="en-CA" sz="1598" b="0" i="0" kern="1200" dirty="0" err="1">
+                <a:solidFill>
+                  <a:schemeClr val="tx1"/>
+                </a:solidFill>
+                <a:effectLst/>
+                <a:latin typeface="+mn-lt"/>
+                <a:ea typeface="+mn-ea"/>
+                <a:cs typeface="+mn-cs"/>
+              </a:rPr>
+              <a:t>df</a:t>
+            </a:r>
+            <a:r>
+              <a:rPr lang="en-CA" sz="1598" b="0" i="0" kern="1200" dirty="0">
+                <a:solidFill>
+                  <a:schemeClr val="tx1"/>
+                </a:solidFill>
+                <a:effectLst/>
+                <a:latin typeface="+mn-lt"/>
+                <a:ea typeface="+mn-ea"/>
+                <a:cs typeface="+mn-cs"/>
+              </a:rPr>
+              <a:t> = 9, p-value = 0.3243</a:t>
+            </a:r>
+          </a:p>
+          <a:p>
+            <a:endParaRPr lang="en-US" dirty="0"/>
+          </a:p>
+        </p:txBody>
+      </p:sp>
+      <p:sp>
+        <p:nvSpPr>
+          <p:cNvPr id="4" name="Slide Number Placeholder 3"/>
           <p:cNvSpPr>
             <a:spLocks noGrp="1"/>
           </p:cNvSpPr>
@@ -1768,7 +3081,7 @@
           <a:p>
             <a:fld id="{F708F06A-076A-AB49-9E02-15A3C27D2EF7}" type="slidenum">
               <a:rPr lang="en-US" smtClean="0"/>
-              <a:t>10</a:t>
+              <a:t>9</a:t>
             </a:fld>
             <a:endParaRPr lang="en-US"/>
           </a:p>
@@ -1777,7 +3090,7 @@
     </p:spTree>
     <p:extLst>
       <p:ext uri="{BB962C8B-B14F-4D97-AF65-F5344CB8AC3E}">
-        <p14:creationId xmlns:p14="http://schemas.microsoft.com/office/powerpoint/2010/main" val="1872765867"/>
+        <p14:creationId xmlns:p14="http://schemas.microsoft.com/office/powerpoint/2010/main" val="404514399"/>
       </p:ext>
     </p:extLst>
   </p:cSld>
@@ -1918,7 +3231,7 @@
           <a:p>
             <a:fld id="{423AA46A-6E9F-7141-8668-6D3EB019C2A9}" type="datetimeFigureOut">
               <a:rPr lang="en-US" smtClean="0"/>
-              <a:t>4/5/26</a:t>
+              <a:t>4/22/26</a:t>
             </a:fld>
             <a:endParaRPr lang="en-US"/>
           </a:p>
@@ -2088,7 +3401,7 @@
           <a:p>
             <a:fld id="{423AA46A-6E9F-7141-8668-6D3EB019C2A9}" type="datetimeFigureOut">
               <a:rPr lang="en-US" smtClean="0"/>
-              <a:t>4/5/26</a:t>
+              <a:t>4/22/26</a:t>
             </a:fld>
             <a:endParaRPr lang="en-US"/>
           </a:p>
@@ -2268,7 +3581,7 @@
           <a:p>
             <a:fld id="{423AA46A-6E9F-7141-8668-6D3EB019C2A9}" type="datetimeFigureOut">
               <a:rPr lang="en-US" smtClean="0"/>
-              <a:t>4/5/26</a:t>
+              <a:t>4/22/26</a:t>
             </a:fld>
             <a:endParaRPr lang="en-US"/>
           </a:p>
@@ -2438,7 +3751,7 @@
           <a:p>
             <a:fld id="{423AA46A-6E9F-7141-8668-6D3EB019C2A9}" type="datetimeFigureOut">
               <a:rPr lang="en-US" smtClean="0"/>
-              <a:t>4/5/26</a:t>
+              <a:t>4/22/26</a:t>
             </a:fld>
             <a:endParaRPr lang="en-US"/>
           </a:p>
@@ -2684,7 +3997,7 @@
           <a:p>
             <a:fld id="{423AA46A-6E9F-7141-8668-6D3EB019C2A9}" type="datetimeFigureOut">
               <a:rPr lang="en-US" smtClean="0"/>
-              <a:t>4/5/26</a:t>
+              <a:t>4/22/26</a:t>
             </a:fld>
             <a:endParaRPr lang="en-US"/>
           </a:p>
@@ -2916,7 +4229,7 @@
           <a:p>
             <a:fld id="{423AA46A-6E9F-7141-8668-6D3EB019C2A9}" type="datetimeFigureOut">
               <a:rPr lang="en-US" smtClean="0"/>
-              <a:t>4/5/26</a:t>
+              <a:t>4/22/26</a:t>
             </a:fld>
             <a:endParaRPr lang="en-US"/>
           </a:p>
@@ -3283,7 +4596,7 @@
           <a:p>
             <a:fld id="{423AA46A-6E9F-7141-8668-6D3EB019C2A9}" type="datetimeFigureOut">
               <a:rPr lang="en-US" smtClean="0"/>
-              <a:t>4/5/26</a:t>
+              <a:t>4/22/26</a:t>
             </a:fld>
             <a:endParaRPr lang="en-US"/>
           </a:p>
@@ -3401,7 +4714,7 @@
           <a:p>
             <a:fld id="{423AA46A-6E9F-7141-8668-6D3EB019C2A9}" type="datetimeFigureOut">
               <a:rPr lang="en-US" smtClean="0"/>
-              <a:t>4/5/26</a:t>
+              <a:t>4/22/26</a:t>
             </a:fld>
             <a:endParaRPr lang="en-US"/>
           </a:p>
@@ -3496,7 +4809,7 @@
           <a:p>
             <a:fld id="{423AA46A-6E9F-7141-8668-6D3EB019C2A9}" type="datetimeFigureOut">
               <a:rPr lang="en-US" smtClean="0"/>
-              <a:t>4/5/26</a:t>
+              <a:t>4/22/26</a:t>
             </a:fld>
             <a:endParaRPr lang="en-US"/>
           </a:p>
@@ -3773,7 +5086,7 @@
           <a:p>
             <a:fld id="{423AA46A-6E9F-7141-8668-6D3EB019C2A9}" type="datetimeFigureOut">
               <a:rPr lang="en-US" smtClean="0"/>
-              <a:t>4/5/26</a:t>
+              <a:t>4/22/26</a:t>
             </a:fld>
             <a:endParaRPr lang="en-US"/>
           </a:p>
@@ -4030,7 +5343,7 @@
           <a:p>
             <a:fld id="{423AA46A-6E9F-7141-8668-6D3EB019C2A9}" type="datetimeFigureOut">
               <a:rPr lang="en-US" smtClean="0"/>
-              <a:t>4/5/26</a:t>
+              <a:t>4/22/26</a:t>
             </a:fld>
             <a:endParaRPr lang="en-US"/>
           </a:p>
@@ -4243,7 +5556,7 @@
           <a:p>
             <a:fld id="{423AA46A-6E9F-7141-8668-6D3EB019C2A9}" type="datetimeFigureOut">
               <a:rPr lang="en-US" smtClean="0"/>
-              <a:t>4/5/26</a:t>
+              <a:t>4/22/26</a:t>
             </a:fld>
             <a:endParaRPr lang="en-US"/>
           </a:p>
@@ -4636,7 +5949,13 @@
   <p:cSld>
     <p:spTree>
       <p:nvGrpSpPr>
-        <p:cNvPr id="1" name=""/>
+        <p:cNvPr id="1" name="">
+          <a:extLst>
+            <a:ext uri="{FF2B5EF4-FFF2-40B4-BE49-F238E27FC236}">
+              <a16:creationId xmlns:a16="http://schemas.microsoft.com/office/drawing/2014/main" id="{03C9223A-6E15-1D5C-B405-901AE56A94B8}"/>
+            </a:ext>
+          </a:extLst>
+        </p:cNvPr>
         <p:cNvGrpSpPr/>
         <p:nvPr/>
       </p:nvGrpSpPr>
@@ -4650,10 +5969,10 @@
       </p:grpSpPr>
       <p:pic>
         <p:nvPicPr>
-          <p:cNvPr id="2" name="Picture 1" descr="A graph with lines and numbers&#10;&#10;AI-generated content may be incorrect.">
-            <a:extLst>
-              <a:ext uri="{FF2B5EF4-FFF2-40B4-BE49-F238E27FC236}">
-                <a16:creationId xmlns:a16="http://schemas.microsoft.com/office/drawing/2014/main" id="{733F0BAD-9FA8-12AD-A061-6CB138E24788}"/>
+          <p:cNvPr id="3" name="Picture 2">
+            <a:extLst>
+              <a:ext uri="{FF2B5EF4-FFF2-40B4-BE49-F238E27FC236}">
+                <a16:creationId xmlns:a16="http://schemas.microsoft.com/office/drawing/2014/main" id="{83EC6067-3EF0-103B-3E6E-51C00AC6C68D}"/>
               </a:ext>
             </a:extLst>
           </p:cNvPr>
@@ -4664,14 +5983,13 @@
         </p:nvPicPr>
         <p:blipFill>
           <a:blip r:embed="rId3"/>
-          <a:stretch>
-            <a:fillRect/>
-          </a:stretch>
+          <a:srcRect/>
+          <a:stretch/>
         </p:blipFill>
         <p:spPr>
           <a:xfrm>
-            <a:off x="1389629" y="1755158"/>
-            <a:ext cx="4177770" cy="2984122"/>
+            <a:off x="2753736" y="7801578"/>
+            <a:ext cx="6383069" cy="4571999"/>
           </a:xfrm>
           <a:prstGeom prst="rect">
             <a:avLst/>
@@ -4680,10 +5998,10 @@
       </p:pic>
       <p:pic>
         <p:nvPicPr>
-          <p:cNvPr id="3" name="Picture 2" descr="A graph with a line and a line&#10;&#10;AI-generated content may be incorrect.">
-            <a:extLst>
-              <a:ext uri="{FF2B5EF4-FFF2-40B4-BE49-F238E27FC236}">
-                <a16:creationId xmlns:a16="http://schemas.microsoft.com/office/drawing/2014/main" id="{67373C21-16D1-9BED-0A31-D07F24FED581}"/>
+          <p:cNvPr id="7" name="Picture 6">
+            <a:extLst>
+              <a:ext uri="{FF2B5EF4-FFF2-40B4-BE49-F238E27FC236}">
+                <a16:creationId xmlns:a16="http://schemas.microsoft.com/office/drawing/2014/main" id="{70A2C8BF-2437-9E6B-AB29-BA9AD744DB6D}"/>
               </a:ext>
             </a:extLst>
           </p:cNvPr>
@@ -4694,26 +6012,225 @@
         </p:nvPicPr>
         <p:blipFill>
           <a:blip r:embed="rId4"/>
-          <a:stretch>
-            <a:fillRect/>
-          </a:stretch>
+          <a:srcRect/>
+          <a:stretch/>
         </p:blipFill>
         <p:spPr>
           <a:xfrm>
-            <a:off x="1389627" y="4818698"/>
-            <a:ext cx="4177770" cy="2984122"/>
+            <a:off x="2766401" y="3735825"/>
+            <a:ext cx="6357739" cy="4541242"/>
           </a:xfrm>
           <a:prstGeom prst="rect">
             <a:avLst/>
           </a:prstGeom>
         </p:spPr>
       </p:pic>
+      <p:sp>
+        <p:nvSpPr>
+          <p:cNvPr id="8" name="TextBox 7">
+            <a:extLst>
+              <a:ext uri="{FF2B5EF4-FFF2-40B4-BE49-F238E27FC236}">
+                <a16:creationId xmlns:a16="http://schemas.microsoft.com/office/drawing/2014/main" id="{07D48760-38E4-989E-5740-28D8C2677283}"/>
+              </a:ext>
+            </a:extLst>
+          </p:cNvPr>
+          <p:cNvSpPr txBox="1"/>
+          <p:nvPr/>
+        </p:nvSpPr>
+        <p:spPr>
+          <a:xfrm>
+            <a:off x="2523718" y="3535940"/>
+            <a:ext cx="442301" cy="369012"/>
+          </a:xfrm>
+          <a:prstGeom prst="rect">
+            <a:avLst/>
+          </a:prstGeom>
+          <a:noFill/>
+        </p:spPr>
+        <p:txBody>
+          <a:bodyPr wrap="square" rtlCol="0">
+            <a:spAutoFit/>
+          </a:bodyPr>
+          <a:lstStyle/>
+          <a:p>
+            <a:r>
+              <a:rPr lang="en-US" sz="1798" b="1" dirty="0">
+                <a:latin typeface="Arial" panose="020B0604020202020204" pitchFamily="34" charset="0"/>
+                <a:cs typeface="Arial" panose="020B0604020202020204" pitchFamily="34" charset="0"/>
+              </a:rPr>
+              <a:t>B.</a:t>
+            </a:r>
+          </a:p>
+        </p:txBody>
+      </p:sp>
+      <p:sp>
+        <p:nvSpPr>
+          <p:cNvPr id="19" name="TextBox 18">
+            <a:extLst>
+              <a:ext uri="{FF2B5EF4-FFF2-40B4-BE49-F238E27FC236}">
+                <a16:creationId xmlns:a16="http://schemas.microsoft.com/office/drawing/2014/main" id="{E772EA1F-F46D-9175-56F9-36C10493AF5B}"/>
+              </a:ext>
+            </a:extLst>
+          </p:cNvPr>
+          <p:cNvSpPr txBox="1"/>
+          <p:nvPr/>
+        </p:nvSpPr>
+        <p:spPr>
+          <a:xfrm>
+            <a:off x="4144919" y="1790652"/>
+            <a:ext cx="951229" cy="338554"/>
+          </a:xfrm>
+          <a:prstGeom prst="rect">
+            <a:avLst/>
+          </a:prstGeom>
+          <a:noFill/>
+        </p:spPr>
+        <p:txBody>
+          <a:bodyPr wrap="square" rtlCol="0">
+            <a:spAutoFit/>
+          </a:bodyPr>
+          <a:lstStyle/>
+          <a:p>
+            <a:pPr algn="ctr"/>
+            <a:r>
+              <a:rPr lang="en-US" sz="1600" dirty="0">
+                <a:latin typeface="Segoe UI" panose="020B0502040204020203" pitchFamily="34" charset="0"/>
+                <a:cs typeface="Segoe UI" panose="020B0502040204020203" pitchFamily="34" charset="0"/>
+              </a:rPr>
+              <a:t>Baseline</a:t>
+            </a:r>
+            <a:endParaRPr lang="en-US" dirty="0">
+              <a:latin typeface="Segoe UI" panose="020B0502040204020203" pitchFamily="34" charset="0"/>
+              <a:cs typeface="Segoe UI" panose="020B0502040204020203" pitchFamily="34" charset="0"/>
+            </a:endParaRPr>
+          </a:p>
+        </p:txBody>
+      </p:sp>
+      <p:sp>
+        <p:nvSpPr>
+          <p:cNvPr id="20" name="TextBox 19">
+            <a:extLst>
+              <a:ext uri="{FF2B5EF4-FFF2-40B4-BE49-F238E27FC236}">
+                <a16:creationId xmlns:a16="http://schemas.microsoft.com/office/drawing/2014/main" id="{8618098C-E82E-1B74-1270-464273148D04}"/>
+              </a:ext>
+            </a:extLst>
+          </p:cNvPr>
+          <p:cNvSpPr txBox="1"/>
+          <p:nvPr/>
+        </p:nvSpPr>
+        <p:spPr>
+          <a:xfrm>
+            <a:off x="7635123" y="1797474"/>
+            <a:ext cx="1071546" cy="338554"/>
+          </a:xfrm>
+          <a:prstGeom prst="rect">
+            <a:avLst/>
+          </a:prstGeom>
+          <a:noFill/>
+        </p:spPr>
+        <p:txBody>
+          <a:bodyPr wrap="square" rtlCol="0">
+            <a:spAutoFit/>
+          </a:bodyPr>
+          <a:lstStyle/>
+          <a:p>
+            <a:pPr algn="ctr"/>
+            <a:r>
+              <a:rPr lang="en-US" sz="1600" dirty="0">
+                <a:latin typeface="Segoe UI" panose="020B0502040204020203" pitchFamily="34" charset="0"/>
+                <a:cs typeface="Segoe UI" panose="020B0502040204020203" pitchFamily="34" charset="0"/>
+              </a:rPr>
+              <a:t>Post-HFS</a:t>
+            </a:r>
+            <a:endParaRPr lang="en-US" dirty="0">
+              <a:latin typeface="Segoe UI" panose="020B0502040204020203" pitchFamily="34" charset="0"/>
+              <a:cs typeface="Segoe UI" panose="020B0502040204020203" pitchFamily="34" charset="0"/>
+            </a:endParaRPr>
+          </a:p>
+        </p:txBody>
+      </p:sp>
+      <p:sp>
+        <p:nvSpPr>
+          <p:cNvPr id="21" name="TextBox 20">
+            <a:extLst>
+              <a:ext uri="{FF2B5EF4-FFF2-40B4-BE49-F238E27FC236}">
+                <a16:creationId xmlns:a16="http://schemas.microsoft.com/office/drawing/2014/main" id="{E40887E6-F8AC-2144-9C13-0C0CBA0C84BE}"/>
+              </a:ext>
+            </a:extLst>
+          </p:cNvPr>
+          <p:cNvSpPr txBox="1"/>
+          <p:nvPr/>
+        </p:nvSpPr>
+        <p:spPr>
+          <a:xfrm>
+            <a:off x="2523718" y="7524478"/>
+            <a:ext cx="442301" cy="369012"/>
+          </a:xfrm>
+          <a:prstGeom prst="rect">
+            <a:avLst/>
+          </a:prstGeom>
+          <a:noFill/>
+        </p:spPr>
+        <p:txBody>
+          <a:bodyPr wrap="square" rtlCol="0">
+            <a:spAutoFit/>
+          </a:bodyPr>
+          <a:lstStyle/>
+          <a:p>
+            <a:r>
+              <a:rPr lang="en-US" sz="1798" b="1" dirty="0">
+                <a:latin typeface="Arial" panose="020B0604020202020204" pitchFamily="34" charset="0"/>
+                <a:cs typeface="Arial" panose="020B0604020202020204" pitchFamily="34" charset="0"/>
+              </a:rPr>
+              <a:t>C.</a:t>
+            </a:r>
+          </a:p>
+        </p:txBody>
+      </p:sp>
+      <p:sp>
+        <p:nvSpPr>
+          <p:cNvPr id="11" name="TextBox 10">
+            <a:extLst>
+              <a:ext uri="{FF2B5EF4-FFF2-40B4-BE49-F238E27FC236}">
+                <a16:creationId xmlns:a16="http://schemas.microsoft.com/office/drawing/2014/main" id="{FF775C89-423B-9ADF-8B86-3B616C507EE4}"/>
+              </a:ext>
+            </a:extLst>
+          </p:cNvPr>
+          <p:cNvSpPr txBox="1"/>
+          <p:nvPr/>
+        </p:nvSpPr>
+        <p:spPr>
+          <a:xfrm>
+            <a:off x="2523718" y="1875726"/>
+            <a:ext cx="442301" cy="369012"/>
+          </a:xfrm>
+          <a:prstGeom prst="rect">
+            <a:avLst/>
+          </a:prstGeom>
+          <a:noFill/>
+        </p:spPr>
+        <p:txBody>
+          <a:bodyPr wrap="square" rtlCol="0">
+            <a:spAutoFit/>
+          </a:bodyPr>
+          <a:lstStyle/>
+          <a:p>
+            <a:r>
+              <a:rPr lang="en-US" sz="1798" b="1" dirty="0">
+                <a:latin typeface="Arial" panose="020B0604020202020204" pitchFamily="34" charset="0"/>
+                <a:cs typeface="Arial" panose="020B0604020202020204" pitchFamily="34" charset="0"/>
+              </a:rPr>
+              <a:t>A.</a:t>
+            </a:r>
+          </a:p>
+        </p:txBody>
+      </p:sp>
       <p:pic>
         <p:nvPicPr>
           <p:cNvPr id="4" name="Picture 3">
             <a:extLst>
               <a:ext uri="{FF2B5EF4-FFF2-40B4-BE49-F238E27FC236}">
-                <a16:creationId xmlns:a16="http://schemas.microsoft.com/office/drawing/2014/main" id="{9878A55B-2FA3-F34F-CE04-A6B9E76BFF85}"/>
+                <a16:creationId xmlns:a16="http://schemas.microsoft.com/office/drawing/2014/main" id="{A9EA766D-5F9E-EB96-8645-570283D7821C}"/>
               </a:ext>
             </a:extLst>
           </p:cNvPr>
@@ -4724,139 +6241,27 @@
         </p:nvPicPr>
         <p:blipFill>
           <a:blip r:embed="rId5"/>
-          <a:srcRect/>
-          <a:stretch/>
+          <a:srcRect t="25470" r="57702" b="47529"/>
+          <a:stretch>
+            <a:fillRect/>
+          </a:stretch>
         </p:blipFill>
         <p:spPr>
           <a:xfrm>
-            <a:off x="1389627" y="7802820"/>
-            <a:ext cx="4177770" cy="2984120"/>
+            <a:off x="4058244" y="2057800"/>
+            <a:ext cx="1353001" cy="2016342"/>
           </a:xfrm>
           <a:prstGeom prst="rect">
             <a:avLst/>
           </a:prstGeom>
         </p:spPr>
       </p:pic>
-      <p:sp>
-        <p:nvSpPr>
-          <p:cNvPr id="5" name="TextBox 4">
-            <a:extLst>
-              <a:ext uri="{FF2B5EF4-FFF2-40B4-BE49-F238E27FC236}">
-                <a16:creationId xmlns:a16="http://schemas.microsoft.com/office/drawing/2014/main" id="{0114D4B5-2B3D-DFF7-5A46-F654D0CA1634}"/>
-              </a:ext>
-            </a:extLst>
-          </p:cNvPr>
-          <p:cNvSpPr txBox="1"/>
-          <p:nvPr/>
-        </p:nvSpPr>
-        <p:spPr>
-          <a:xfrm>
-            <a:off x="947329" y="1933679"/>
-            <a:ext cx="442301" cy="369012"/>
-          </a:xfrm>
-          <a:prstGeom prst="rect">
-            <a:avLst/>
-          </a:prstGeom>
-          <a:noFill/>
-        </p:spPr>
-        <p:txBody>
-          <a:bodyPr wrap="square" rtlCol="0">
-            <a:spAutoFit/>
-          </a:bodyPr>
-          <a:lstStyle/>
-          <a:p>
-            <a:r>
-              <a:rPr lang="en-US" sz="1798" b="1" dirty="0">
-                <a:latin typeface="Arial" panose="020B0604020202020204" pitchFamily="34" charset="0"/>
-                <a:cs typeface="Arial" panose="020B0604020202020204" pitchFamily="34" charset="0"/>
-              </a:rPr>
-              <a:t>A.</a:t>
-            </a:r>
-          </a:p>
-        </p:txBody>
-      </p:sp>
-      <p:sp>
-        <p:nvSpPr>
-          <p:cNvPr id="6" name="TextBox 5">
-            <a:extLst>
-              <a:ext uri="{FF2B5EF4-FFF2-40B4-BE49-F238E27FC236}">
-                <a16:creationId xmlns:a16="http://schemas.microsoft.com/office/drawing/2014/main" id="{67D23337-F0CA-02EC-4972-DE98BF2AA3B4}"/>
-              </a:ext>
-            </a:extLst>
-          </p:cNvPr>
-          <p:cNvSpPr txBox="1"/>
-          <p:nvPr/>
-        </p:nvSpPr>
-        <p:spPr>
-          <a:xfrm>
-            <a:off x="947327" y="7981342"/>
-            <a:ext cx="442301" cy="369012"/>
-          </a:xfrm>
-          <a:prstGeom prst="rect">
-            <a:avLst/>
-          </a:prstGeom>
-          <a:noFill/>
-        </p:spPr>
-        <p:txBody>
-          <a:bodyPr wrap="square" rtlCol="0">
-            <a:spAutoFit/>
-          </a:bodyPr>
-          <a:lstStyle/>
-          <a:p>
-            <a:r>
-              <a:rPr lang="en-US" sz="1798" b="1" dirty="0">
-                <a:latin typeface="Arial" panose="020B0604020202020204" pitchFamily="34" charset="0"/>
-                <a:cs typeface="Arial" panose="020B0604020202020204" pitchFamily="34" charset="0"/>
-              </a:rPr>
-              <a:t>E.</a:t>
-            </a:r>
-          </a:p>
-        </p:txBody>
-      </p:sp>
-      <p:sp>
-        <p:nvSpPr>
-          <p:cNvPr id="7" name="TextBox 6">
-            <a:extLst>
-              <a:ext uri="{FF2B5EF4-FFF2-40B4-BE49-F238E27FC236}">
-                <a16:creationId xmlns:a16="http://schemas.microsoft.com/office/drawing/2014/main" id="{97EBFDE2-4FA4-3A0A-A4AD-15DE9278FF38}"/>
-              </a:ext>
-            </a:extLst>
-          </p:cNvPr>
-          <p:cNvSpPr txBox="1"/>
-          <p:nvPr/>
-        </p:nvSpPr>
-        <p:spPr>
-          <a:xfrm>
-            <a:off x="947329" y="4997218"/>
-            <a:ext cx="442301" cy="369012"/>
-          </a:xfrm>
-          <a:prstGeom prst="rect">
-            <a:avLst/>
-          </a:prstGeom>
-          <a:noFill/>
-        </p:spPr>
-        <p:txBody>
-          <a:bodyPr wrap="square" rtlCol="0">
-            <a:spAutoFit/>
-          </a:bodyPr>
-          <a:lstStyle/>
-          <a:p>
-            <a:r>
-              <a:rPr lang="en-US" sz="1798" b="1" dirty="0">
-                <a:latin typeface="Arial" panose="020B0604020202020204" pitchFamily="34" charset="0"/>
-                <a:cs typeface="Arial" panose="020B0604020202020204" pitchFamily="34" charset="0"/>
-              </a:rPr>
-              <a:t>C.</a:t>
-            </a:r>
-          </a:p>
-        </p:txBody>
-      </p:sp>
       <p:pic>
         <p:nvPicPr>
-          <p:cNvPr id="8" name="Picture 7">
-            <a:extLst>
-              <a:ext uri="{FF2B5EF4-FFF2-40B4-BE49-F238E27FC236}">
-                <a16:creationId xmlns:a16="http://schemas.microsoft.com/office/drawing/2014/main" id="{AC0BD33C-E590-6BB7-E634-8F9E03FCB7EB}"/>
+          <p:cNvPr id="6" name="Picture 5">
+            <a:extLst>
+              <a:ext uri="{FF2B5EF4-FFF2-40B4-BE49-F238E27FC236}">
+                <a16:creationId xmlns:a16="http://schemas.microsoft.com/office/drawing/2014/main" id="{EE2DF777-3285-D0B4-AB05-B3EBECB8B749}"/>
               </a:ext>
             </a:extLst>
           </p:cNvPr>
@@ -4866,14 +6271,16 @@
           <p:nvPr/>
         </p:nvPicPr>
         <p:blipFill>
-          <a:blip r:embed="rId6"/>
-          <a:srcRect/>
-          <a:stretch/>
+          <a:blip r:embed="rId5"/>
+          <a:srcRect l="38592" t="25470" r="32863" b="47529"/>
+          <a:stretch>
+            <a:fillRect/>
+          </a:stretch>
         </p:blipFill>
         <p:spPr>
           <a:xfrm>
-            <a:off x="6009695" y="2013096"/>
-            <a:ext cx="4674496" cy="3353134"/>
+            <a:off x="7622458" y="2057800"/>
+            <a:ext cx="913036" cy="2016342"/>
           </a:xfrm>
           <a:prstGeom prst="rect">
             <a:avLst/>
@@ -4882,10 +6289,10 @@
       </p:pic>
       <p:pic>
         <p:nvPicPr>
-          <p:cNvPr id="9" name="Picture 8">
-            <a:extLst>
-              <a:ext uri="{FF2B5EF4-FFF2-40B4-BE49-F238E27FC236}">
-                <a16:creationId xmlns:a16="http://schemas.microsoft.com/office/drawing/2014/main" id="{64344B89-741A-72BB-43FF-CBA605A1E5E4}"/>
+          <p:cNvPr id="10" name="Picture 9">
+            <a:extLst>
+              <a:ext uri="{FF2B5EF4-FFF2-40B4-BE49-F238E27FC236}">
+                <a16:creationId xmlns:a16="http://schemas.microsoft.com/office/drawing/2014/main" id="{D94288F9-4061-5B12-E793-2D9488784461}"/>
               </a:ext>
             </a:extLst>
           </p:cNvPr>
@@ -4895,167 +6302,26 @@
           <p:nvPr/>
         </p:nvPicPr>
         <p:blipFill>
-          <a:blip r:embed="rId7"/>
-          <a:srcRect/>
-          <a:stretch/>
+          <a:blip r:embed="rId5"/>
+          <a:srcRect l="66499" t="25470" b="47529"/>
+          <a:stretch>
+            <a:fillRect/>
+          </a:stretch>
         </p:blipFill>
         <p:spPr>
           <a:xfrm>
-            <a:off x="5995488" y="5036928"/>
-            <a:ext cx="4688703" cy="3353134"/>
+            <a:off x="9210815" y="2057800"/>
+            <a:ext cx="1071589" cy="2016342"/>
           </a:xfrm>
           <a:prstGeom prst="rect">
             <a:avLst/>
           </a:prstGeom>
         </p:spPr>
       </p:pic>
-      <p:pic>
-        <p:nvPicPr>
-          <p:cNvPr id="10" name="Picture 9">
-            <a:extLst>
-              <a:ext uri="{FF2B5EF4-FFF2-40B4-BE49-F238E27FC236}">
-                <a16:creationId xmlns:a16="http://schemas.microsoft.com/office/drawing/2014/main" id="{682E8103-6E00-CBE2-B3A8-411D2A69955F}"/>
-              </a:ext>
-            </a:extLst>
-          </p:cNvPr>
-          <p:cNvPicPr>
-            <a:picLocks noChangeAspect="1"/>
-          </p:cNvPicPr>
-          <p:nvPr/>
-        </p:nvPicPr>
-        <p:blipFill>
-          <a:blip r:embed="rId8"/>
-          <a:srcRect/>
-          <a:stretch/>
-        </p:blipFill>
-        <p:spPr>
-          <a:xfrm>
-            <a:off x="5989806" y="8021050"/>
-            <a:ext cx="4694385" cy="3353132"/>
-          </a:xfrm>
-          <a:prstGeom prst="rect">
-            <a:avLst/>
-          </a:prstGeom>
-        </p:spPr>
-      </p:pic>
-      <p:sp>
-        <p:nvSpPr>
-          <p:cNvPr id="11" name="TextBox 10">
-            <a:extLst>
-              <a:ext uri="{FF2B5EF4-FFF2-40B4-BE49-F238E27FC236}">
-                <a16:creationId xmlns:a16="http://schemas.microsoft.com/office/drawing/2014/main" id="{02E8C92A-2414-4C32-A10D-202DC4C676F6}"/>
-              </a:ext>
-            </a:extLst>
-          </p:cNvPr>
-          <p:cNvSpPr txBox="1"/>
-          <p:nvPr/>
-        </p:nvSpPr>
-        <p:spPr>
-          <a:xfrm>
-            <a:off x="5781440" y="1933679"/>
-            <a:ext cx="442301" cy="369012"/>
-          </a:xfrm>
-          <a:prstGeom prst="rect">
-            <a:avLst/>
-          </a:prstGeom>
-          <a:noFill/>
-        </p:spPr>
-        <p:txBody>
-          <a:bodyPr wrap="square" rtlCol="0">
-            <a:spAutoFit/>
-          </a:bodyPr>
-          <a:lstStyle/>
-          <a:p>
-            <a:r>
-              <a:rPr lang="en-US" sz="1798" b="1" dirty="0">
-                <a:latin typeface="Arial" panose="020B0604020202020204" pitchFamily="34" charset="0"/>
-                <a:cs typeface="Arial" panose="020B0604020202020204" pitchFamily="34" charset="0"/>
-              </a:rPr>
-              <a:t>B.</a:t>
-            </a:r>
-          </a:p>
-        </p:txBody>
-      </p:sp>
-      <p:sp>
-        <p:nvSpPr>
-          <p:cNvPr id="12" name="TextBox 11">
-            <a:extLst>
-              <a:ext uri="{FF2B5EF4-FFF2-40B4-BE49-F238E27FC236}">
-                <a16:creationId xmlns:a16="http://schemas.microsoft.com/office/drawing/2014/main" id="{F5EC483E-0189-00AD-D8BA-1008AF7F623B}"/>
-              </a:ext>
-            </a:extLst>
-          </p:cNvPr>
-          <p:cNvSpPr txBox="1"/>
-          <p:nvPr/>
-        </p:nvSpPr>
-        <p:spPr>
-          <a:xfrm>
-            <a:off x="5781438" y="7981342"/>
-            <a:ext cx="442301" cy="369012"/>
-          </a:xfrm>
-          <a:prstGeom prst="rect">
-            <a:avLst/>
-          </a:prstGeom>
-          <a:noFill/>
-        </p:spPr>
-        <p:txBody>
-          <a:bodyPr wrap="square" rtlCol="0">
-            <a:spAutoFit/>
-          </a:bodyPr>
-          <a:lstStyle/>
-          <a:p>
-            <a:r>
-              <a:rPr lang="en-US" sz="1798" b="1" dirty="0">
-                <a:latin typeface="Arial" panose="020B0604020202020204" pitchFamily="34" charset="0"/>
-                <a:cs typeface="Arial" panose="020B0604020202020204" pitchFamily="34" charset="0"/>
-              </a:rPr>
-              <a:t>F.</a:t>
-            </a:r>
-          </a:p>
-        </p:txBody>
-      </p:sp>
-      <p:sp>
-        <p:nvSpPr>
-          <p:cNvPr id="13" name="TextBox 12">
-            <a:extLst>
-              <a:ext uri="{FF2B5EF4-FFF2-40B4-BE49-F238E27FC236}">
-                <a16:creationId xmlns:a16="http://schemas.microsoft.com/office/drawing/2014/main" id="{2EA4D2C9-88F4-C1AB-0E99-A016CB5E76A3}"/>
-              </a:ext>
-            </a:extLst>
-          </p:cNvPr>
-          <p:cNvSpPr txBox="1"/>
-          <p:nvPr/>
-        </p:nvSpPr>
-        <p:spPr>
-          <a:xfrm>
-            <a:off x="5781440" y="4997218"/>
-            <a:ext cx="442301" cy="369012"/>
-          </a:xfrm>
-          <a:prstGeom prst="rect">
-            <a:avLst/>
-          </a:prstGeom>
-          <a:noFill/>
-        </p:spPr>
-        <p:txBody>
-          <a:bodyPr wrap="square" rtlCol="0">
-            <a:spAutoFit/>
-          </a:bodyPr>
-          <a:lstStyle/>
-          <a:p>
-            <a:r>
-              <a:rPr lang="en-US" sz="1798" b="1" dirty="0">
-                <a:latin typeface="Arial" panose="020B0604020202020204" pitchFamily="34" charset="0"/>
-                <a:cs typeface="Arial" panose="020B0604020202020204" pitchFamily="34" charset="0"/>
-              </a:rPr>
-              <a:t>D.</a:t>
-            </a:r>
-          </a:p>
-        </p:txBody>
-      </p:sp>
     </p:spTree>
     <p:extLst>
       <p:ext uri="{BB962C8B-B14F-4D97-AF65-F5344CB8AC3E}">
-        <p14:creationId xmlns:p14="http://schemas.microsoft.com/office/powerpoint/2010/main" val="1359310721"/>
+        <p14:creationId xmlns:p14="http://schemas.microsoft.com/office/powerpoint/2010/main" val="2891851849"/>
       </p:ext>
     </p:extLst>
   </p:cSld>
@@ -5073,7 +6339,7 @@
         <p:cNvPr id="1" name="">
           <a:extLst>
             <a:ext uri="{FF2B5EF4-FFF2-40B4-BE49-F238E27FC236}">
-              <a16:creationId xmlns:a16="http://schemas.microsoft.com/office/drawing/2014/main" id="{40C96E2F-B9A6-3702-240D-A7CEF015B4EC}"/>
+              <a16:creationId xmlns:a16="http://schemas.microsoft.com/office/drawing/2014/main" id="{56A35F97-E4C9-A963-DA6F-E5D39B1D82F8}"/>
             </a:ext>
           </a:extLst>
         </p:cNvPr>
@@ -5090,10 +6356,10 @@
       </p:grpSpPr>
       <p:pic>
         <p:nvPicPr>
-          <p:cNvPr id="4" name="Picture 3">
-            <a:extLst>
-              <a:ext uri="{FF2B5EF4-FFF2-40B4-BE49-F238E27FC236}">
-                <a16:creationId xmlns:a16="http://schemas.microsoft.com/office/drawing/2014/main" id="{041FE609-C7D0-B081-689E-638808D7145D}"/>
+          <p:cNvPr id="3" name="Picture 2">
+            <a:extLst>
+              <a:ext uri="{FF2B5EF4-FFF2-40B4-BE49-F238E27FC236}">
+                <a16:creationId xmlns:a16="http://schemas.microsoft.com/office/drawing/2014/main" id="{3C5D35B4-23E7-4E86-A075-0944B8A75F16}"/>
               </a:ext>
             </a:extLst>
           </p:cNvPr>
@@ -5109,8 +6375,8 @@
         </p:blipFill>
         <p:spPr>
           <a:xfrm>
-            <a:off x="4017659" y="6619159"/>
-            <a:ext cx="5123458" cy="1448298"/>
+            <a:off x="1073823" y="4812457"/>
+            <a:ext cx="5364589" cy="3834885"/>
           </a:xfrm>
           <a:prstGeom prst="rect">
             <a:avLst/>
@@ -5119,10 +6385,10 @@
       </p:pic>
       <p:pic>
         <p:nvPicPr>
-          <p:cNvPr id="3" name="Picture 2">
-            <a:extLst>
-              <a:ext uri="{FF2B5EF4-FFF2-40B4-BE49-F238E27FC236}">
-                <a16:creationId xmlns:a16="http://schemas.microsoft.com/office/drawing/2014/main" id="{A7A2742D-B137-4497-87B4-B96BE1373A9F}"/>
+          <p:cNvPr id="5" name="Picture 4">
+            <a:extLst>
+              <a:ext uri="{FF2B5EF4-FFF2-40B4-BE49-F238E27FC236}">
+                <a16:creationId xmlns:a16="http://schemas.microsoft.com/office/drawing/2014/main" id="{4A307697-575F-D7B2-B4BA-B943A5745B59}"/>
               </a:ext>
             </a:extLst>
           </p:cNvPr>
@@ -5138,49 +6404,20 @@
         </p:blipFill>
         <p:spPr>
           <a:xfrm>
-            <a:off x="2753737" y="8161338"/>
-            <a:ext cx="6383067" cy="4571999"/>
+            <a:off x="6181062" y="4812457"/>
+            <a:ext cx="5368839" cy="3834885"/>
           </a:xfrm>
           <a:prstGeom prst="rect">
             <a:avLst/>
           </a:prstGeom>
         </p:spPr>
       </p:pic>
-      <p:pic>
-        <p:nvPicPr>
-          <p:cNvPr id="7" name="Picture 6">
-            <a:extLst>
-              <a:ext uri="{FF2B5EF4-FFF2-40B4-BE49-F238E27FC236}">
-                <a16:creationId xmlns:a16="http://schemas.microsoft.com/office/drawing/2014/main" id="{4A1441D1-DB59-1D1E-CFF2-4C758561C743}"/>
-              </a:ext>
-            </a:extLst>
-          </p:cNvPr>
-          <p:cNvPicPr>
-            <a:picLocks noChangeAspect="1"/>
-          </p:cNvPicPr>
-          <p:nvPr/>
-        </p:nvPicPr>
-        <p:blipFill>
-          <a:blip r:embed="rId5"/>
-          <a:srcRect/>
-          <a:stretch/>
-        </p:blipFill>
-        <p:spPr>
-          <a:xfrm>
-            <a:off x="2766401" y="1794669"/>
-            <a:ext cx="6357739" cy="4571999"/>
-          </a:xfrm>
-          <a:prstGeom prst="rect">
-            <a:avLst/>
-          </a:prstGeom>
-        </p:spPr>
-      </p:pic>
-      <p:sp>
-        <p:nvSpPr>
-          <p:cNvPr id="8" name="TextBox 7">
-            <a:extLst>
-              <a:ext uri="{FF2B5EF4-FFF2-40B4-BE49-F238E27FC236}">
-                <a16:creationId xmlns:a16="http://schemas.microsoft.com/office/drawing/2014/main" id="{F83CF755-1063-4F86-C19D-A56C17756E51}"/>
+      <p:sp>
+        <p:nvSpPr>
+          <p:cNvPr id="6" name="TextBox 5">
+            <a:extLst>
+              <a:ext uri="{FF2B5EF4-FFF2-40B4-BE49-F238E27FC236}">
+                <a16:creationId xmlns:a16="http://schemas.microsoft.com/office/drawing/2014/main" id="{35C814B5-8289-E7B3-3879-0E2BF57FA4BD}"/>
               </a:ext>
             </a:extLst>
           </p:cNvPr>
@@ -5189,7 +6426,7 @@
         </p:nvSpPr>
         <p:spPr>
           <a:xfrm>
-            <a:off x="2523718" y="1610163"/>
+            <a:off x="843091" y="4807131"/>
             <a:ext cx="442301" cy="369012"/>
           </a:xfrm>
           <a:prstGeom prst="rect">
@@ -5215,10 +6452,10 @@
       </p:sp>
       <p:sp>
         <p:nvSpPr>
-          <p:cNvPr id="9" name="TextBox 8">
-            <a:extLst>
-              <a:ext uri="{FF2B5EF4-FFF2-40B4-BE49-F238E27FC236}">
-                <a16:creationId xmlns:a16="http://schemas.microsoft.com/office/drawing/2014/main" id="{03BFD00E-4D33-0433-5977-4844009545C4}"/>
+          <p:cNvPr id="7" name="TextBox 6">
+            <a:extLst>
+              <a:ext uri="{FF2B5EF4-FFF2-40B4-BE49-F238E27FC236}">
+                <a16:creationId xmlns:a16="http://schemas.microsoft.com/office/drawing/2014/main" id="{52C6C4C5-5AA8-9909-4906-780DF1588E54}"/>
               </a:ext>
             </a:extLst>
           </p:cNvPr>
@@ -5227,7 +6464,7 @@
         </p:nvSpPr>
         <p:spPr>
           <a:xfrm>
-            <a:off x="2523718" y="5997657"/>
+            <a:off x="6089650" y="4807131"/>
             <a:ext cx="442301" cy="369012"/>
           </a:xfrm>
           <a:prstGeom prst="rect">
@@ -5251,134 +6488,10 @@
           </a:p>
         </p:txBody>
       </p:sp>
-      <p:sp>
-        <p:nvSpPr>
-          <p:cNvPr id="19" name="TextBox 18">
-            <a:extLst>
-              <a:ext uri="{FF2B5EF4-FFF2-40B4-BE49-F238E27FC236}">
-                <a16:creationId xmlns:a16="http://schemas.microsoft.com/office/drawing/2014/main" id="{AA491169-603F-0021-5738-B1FD86720F86}"/>
-              </a:ext>
-            </a:extLst>
-          </p:cNvPr>
-          <p:cNvSpPr txBox="1"/>
-          <p:nvPr/>
-        </p:nvSpPr>
-        <p:spPr>
-          <a:xfrm>
-            <a:off x="4218657" y="6448595"/>
-            <a:ext cx="951229" cy="338554"/>
-          </a:xfrm>
-          <a:prstGeom prst="rect">
-            <a:avLst/>
-          </a:prstGeom>
-          <a:noFill/>
-        </p:spPr>
-        <p:txBody>
-          <a:bodyPr wrap="square" rtlCol="0">
-            <a:spAutoFit/>
-          </a:bodyPr>
-          <a:lstStyle/>
-          <a:p>
-            <a:pPr algn="ctr"/>
-            <a:r>
-              <a:rPr lang="en-US" sz="1600" dirty="0">
-                <a:latin typeface="Segoe UI" panose="020B0502040204020203" pitchFamily="34" charset="0"/>
-                <a:cs typeface="Segoe UI" panose="020B0502040204020203" pitchFamily="34" charset="0"/>
-              </a:rPr>
-              <a:t>Baseline</a:t>
-            </a:r>
-            <a:endParaRPr lang="en-US" dirty="0">
-              <a:latin typeface="Segoe UI" panose="020B0502040204020203" pitchFamily="34" charset="0"/>
-              <a:cs typeface="Segoe UI" panose="020B0502040204020203" pitchFamily="34" charset="0"/>
-            </a:endParaRPr>
-          </a:p>
-        </p:txBody>
-      </p:sp>
-      <p:sp>
-        <p:nvSpPr>
-          <p:cNvPr id="20" name="TextBox 19">
-            <a:extLst>
-              <a:ext uri="{FF2B5EF4-FFF2-40B4-BE49-F238E27FC236}">
-                <a16:creationId xmlns:a16="http://schemas.microsoft.com/office/drawing/2014/main" id="{BDBB865D-889E-E10B-C428-333E270C1402}"/>
-              </a:ext>
-            </a:extLst>
-          </p:cNvPr>
-          <p:cNvSpPr txBox="1"/>
-          <p:nvPr/>
-        </p:nvSpPr>
-        <p:spPr>
-          <a:xfrm>
-            <a:off x="6184287" y="6448595"/>
-            <a:ext cx="1071546" cy="338554"/>
-          </a:xfrm>
-          <a:prstGeom prst="rect">
-            <a:avLst/>
-          </a:prstGeom>
-          <a:noFill/>
-        </p:spPr>
-        <p:txBody>
-          <a:bodyPr wrap="square" rtlCol="0">
-            <a:spAutoFit/>
-          </a:bodyPr>
-          <a:lstStyle/>
-          <a:p>
-            <a:pPr algn="ctr"/>
-            <a:r>
-              <a:rPr lang="en-US" sz="1600" dirty="0">
-                <a:latin typeface="Segoe UI" panose="020B0502040204020203" pitchFamily="34" charset="0"/>
-                <a:cs typeface="Segoe UI" panose="020B0502040204020203" pitchFamily="34" charset="0"/>
-              </a:rPr>
-              <a:t>Post-HFS</a:t>
-            </a:r>
-            <a:endParaRPr lang="en-US" dirty="0">
-              <a:latin typeface="Segoe UI" panose="020B0502040204020203" pitchFamily="34" charset="0"/>
-              <a:cs typeface="Segoe UI" panose="020B0502040204020203" pitchFamily="34" charset="0"/>
-            </a:endParaRPr>
-          </a:p>
-        </p:txBody>
-      </p:sp>
-      <p:sp>
-        <p:nvSpPr>
-          <p:cNvPr id="21" name="TextBox 20">
-            <a:extLst>
-              <a:ext uri="{FF2B5EF4-FFF2-40B4-BE49-F238E27FC236}">
-                <a16:creationId xmlns:a16="http://schemas.microsoft.com/office/drawing/2014/main" id="{3022C2CA-9CAF-1BBD-BB69-6C75E25366BE}"/>
-              </a:ext>
-            </a:extLst>
-          </p:cNvPr>
-          <p:cNvSpPr txBox="1"/>
-          <p:nvPr/>
-        </p:nvSpPr>
-        <p:spPr>
-          <a:xfrm>
-            <a:off x="2523718" y="7884238"/>
-            <a:ext cx="442301" cy="369012"/>
-          </a:xfrm>
-          <a:prstGeom prst="rect">
-            <a:avLst/>
-          </a:prstGeom>
-          <a:noFill/>
-        </p:spPr>
-        <p:txBody>
-          <a:bodyPr wrap="square" rtlCol="0">
-            <a:spAutoFit/>
-          </a:bodyPr>
-          <a:lstStyle/>
-          <a:p>
-            <a:r>
-              <a:rPr lang="en-US" sz="1798" b="1" dirty="0">
-                <a:latin typeface="Arial" panose="020B0604020202020204" pitchFamily="34" charset="0"/>
-                <a:cs typeface="Arial" panose="020B0604020202020204" pitchFamily="34" charset="0"/>
-              </a:rPr>
-              <a:t>C.</a:t>
-            </a:r>
-          </a:p>
-        </p:txBody>
-      </p:sp>
     </p:spTree>
     <p:extLst>
       <p:ext uri="{BB962C8B-B14F-4D97-AF65-F5344CB8AC3E}">
-        <p14:creationId xmlns:p14="http://schemas.microsoft.com/office/powerpoint/2010/main" val="850732629"/>
+        <p14:creationId xmlns:p14="http://schemas.microsoft.com/office/powerpoint/2010/main" val="1159563749"/>
       </p:ext>
     </p:extLst>
   </p:cSld>
@@ -5388,12 +6501,18 @@
 </p:sld>
 </file>
 
-<file path=ppt/slides/slide2.xml><?xml version="1.0" encoding="utf-8"?>
+<file path=ppt/slides/slide11.xml><?xml version="1.0" encoding="utf-8"?>
 <p:sld xmlns:a="http://schemas.openxmlformats.org/drawingml/2006/main" xmlns:r="http://schemas.openxmlformats.org/officeDocument/2006/relationships" xmlns:p="http://schemas.openxmlformats.org/presentationml/2006/main">
   <p:cSld>
     <p:spTree>
       <p:nvGrpSpPr>
-        <p:cNvPr id="1" name=""/>
+        <p:cNvPr id="1" name="">
+          <a:extLst>
+            <a:ext uri="{FF2B5EF4-FFF2-40B4-BE49-F238E27FC236}">
+              <a16:creationId xmlns:a16="http://schemas.microsoft.com/office/drawing/2014/main" id="{EF83E88E-F860-3317-AC79-849F00469609}"/>
+            </a:ext>
+          </a:extLst>
+        </p:cNvPr>
         <p:cNvGrpSpPr/>
         <p:nvPr/>
       </p:nvGrpSpPr>
@@ -5407,41 +6526,10 @@
       </p:grpSpPr>
       <p:pic>
         <p:nvPicPr>
-          <p:cNvPr id="3" name="Picture 2" descr="A graph with colored squares and lines&#10;&#10;AI-generated content may be incorrect.">
-            <a:extLst>
-              <a:ext uri="{FF2B5EF4-FFF2-40B4-BE49-F238E27FC236}">
-                <a16:creationId xmlns:a16="http://schemas.microsoft.com/office/drawing/2014/main" id="{861B5771-0ADE-4267-ABB8-7901CF22E9DF}"/>
-              </a:ext>
-            </a:extLst>
-          </p:cNvPr>
-          <p:cNvPicPr>
-            <a:picLocks noChangeAspect="1"/>
-          </p:cNvPicPr>
-          <p:nvPr/>
-        </p:nvPicPr>
-        <p:blipFill>
-          <a:blip r:embed="rId2"/>
-          <a:srcRect r="30282"/>
-          <a:stretch>
-            <a:fillRect/>
-          </a:stretch>
-        </p:blipFill>
-        <p:spPr>
-          <a:xfrm>
-            <a:off x="1389630" y="1933679"/>
-            <a:ext cx="3868170" cy="3963109"/>
-          </a:xfrm>
-          <a:prstGeom prst="rect">
-            <a:avLst/>
-          </a:prstGeom>
-        </p:spPr>
-      </p:pic>
-      <p:pic>
-        <p:nvPicPr>
-          <p:cNvPr id="5" name="Picture 4" descr="A diagram of a graph&#10;&#10;AI-generated content may be incorrect.">
-            <a:extLst>
-              <a:ext uri="{FF2B5EF4-FFF2-40B4-BE49-F238E27FC236}">
-                <a16:creationId xmlns:a16="http://schemas.microsoft.com/office/drawing/2014/main" id="{AD74FD3E-D347-4029-9909-84A90B38FE8E}"/>
+          <p:cNvPr id="3" name="Picture 2">
+            <a:extLst>
+              <a:ext uri="{FF2B5EF4-FFF2-40B4-BE49-F238E27FC236}">
+                <a16:creationId xmlns:a16="http://schemas.microsoft.com/office/drawing/2014/main" id="{51934409-B91A-2278-477C-692CF5B50C56}"/>
               </a:ext>
             </a:extLst>
           </p:cNvPr>
@@ -5452,27 +6540,54 @@
         </p:nvPicPr>
         <p:blipFill>
           <a:blip r:embed="rId3"/>
-          <a:srcRect r="30282"/>
-          <a:stretch>
-            <a:fillRect/>
-          </a:stretch>
+          <a:srcRect/>
+          <a:stretch/>
         </p:blipFill>
         <p:spPr>
           <a:xfrm>
-            <a:off x="6223740" y="1933679"/>
-            <a:ext cx="3868171" cy="3963109"/>
+            <a:off x="1073823" y="4817769"/>
+            <a:ext cx="5364589" cy="3824261"/>
           </a:xfrm>
           <a:prstGeom prst="rect">
             <a:avLst/>
           </a:prstGeom>
         </p:spPr>
       </p:pic>
+      <p:pic>
+        <p:nvPicPr>
+          <p:cNvPr id="5" name="Picture 4">
+            <a:extLst>
+              <a:ext uri="{FF2B5EF4-FFF2-40B4-BE49-F238E27FC236}">
+                <a16:creationId xmlns:a16="http://schemas.microsoft.com/office/drawing/2014/main" id="{A0F24959-E97A-31AB-3D7B-05C492C22C19}"/>
+              </a:ext>
+            </a:extLst>
+          </p:cNvPr>
+          <p:cNvPicPr>
+            <a:picLocks noChangeAspect="1"/>
+          </p:cNvPicPr>
+          <p:nvPr/>
+        </p:nvPicPr>
+        <p:blipFill>
+          <a:blip r:embed="rId4"/>
+          <a:srcRect/>
+          <a:stretch/>
+        </p:blipFill>
+        <p:spPr>
+          <a:xfrm>
+            <a:off x="934503" y="8205362"/>
+            <a:ext cx="5368839" cy="3834885"/>
+          </a:xfrm>
+          <a:prstGeom prst="rect">
+            <a:avLst/>
+          </a:prstGeom>
+        </p:spPr>
+      </p:pic>
       <p:sp>
         <p:nvSpPr>
           <p:cNvPr id="6" name="TextBox 5">
             <a:extLst>
               <a:ext uri="{FF2B5EF4-FFF2-40B4-BE49-F238E27FC236}">
-                <a16:creationId xmlns:a16="http://schemas.microsoft.com/office/drawing/2014/main" id="{C1EEF4CD-48FD-C125-735E-8EBB8268299B}"/>
+                <a16:creationId xmlns:a16="http://schemas.microsoft.com/office/drawing/2014/main" id="{94ADAC44-9D4A-8848-4874-776B7F6CD3DD}"/>
               </a:ext>
             </a:extLst>
           </p:cNvPr>
@@ -5481,7 +6596,7 @@
         </p:nvSpPr>
         <p:spPr>
           <a:xfrm>
-            <a:off x="947329" y="1933679"/>
+            <a:off x="843091" y="4807131"/>
             <a:ext cx="442301" cy="369012"/>
           </a:xfrm>
           <a:prstGeom prst="rect">
@@ -5510,7 +6625,7 @@
           <p:cNvPr id="7" name="TextBox 6">
             <a:extLst>
               <a:ext uri="{FF2B5EF4-FFF2-40B4-BE49-F238E27FC236}">
-                <a16:creationId xmlns:a16="http://schemas.microsoft.com/office/drawing/2014/main" id="{A3D8663F-4F79-CA2E-7905-065E52CFC6BD}"/>
+                <a16:creationId xmlns:a16="http://schemas.microsoft.com/office/drawing/2014/main" id="{FE4CF528-33AA-162F-5C24-44F624DEF18A}"/>
               </a:ext>
             </a:extLst>
           </p:cNvPr>
@@ -5519,7 +6634,7 @@
         </p:nvSpPr>
         <p:spPr>
           <a:xfrm>
-            <a:off x="5781440" y="1933679"/>
+            <a:off x="843091" y="8200036"/>
             <a:ext cx="442301" cy="369012"/>
           </a:xfrm>
           <a:prstGeom prst="rect">
@@ -5545,10 +6660,217 @@
       </p:sp>
       <p:sp>
         <p:nvSpPr>
-          <p:cNvPr id="8" name="Rectangle 7">
-            <a:extLst>
-              <a:ext uri="{FF2B5EF4-FFF2-40B4-BE49-F238E27FC236}">
-                <a16:creationId xmlns:a16="http://schemas.microsoft.com/office/drawing/2014/main" id="{FF4DAAF8-67AD-6E0D-CE23-6A1099CA2215}"/>
+          <p:cNvPr id="10" name="TextBox 9">
+            <a:extLst>
+              <a:ext uri="{FF2B5EF4-FFF2-40B4-BE49-F238E27FC236}">
+                <a16:creationId xmlns:a16="http://schemas.microsoft.com/office/drawing/2014/main" id="{EF4E4D66-D3A3-0646-1768-50DD81C51883}"/>
+              </a:ext>
+            </a:extLst>
+          </p:cNvPr>
+          <p:cNvSpPr txBox="1"/>
+          <p:nvPr/>
+        </p:nvSpPr>
+        <p:spPr>
+          <a:xfrm>
+            <a:off x="1994228" y="4945297"/>
+            <a:ext cx="2743200" cy="230832"/>
+          </a:xfrm>
+          <a:prstGeom prst="rect">
+            <a:avLst/>
+          </a:prstGeom>
+          <a:noFill/>
+        </p:spPr>
+        <p:txBody>
+          <a:bodyPr wrap="square" rtlCol="0">
+            <a:spAutoFit/>
+          </a:bodyPr>
+          <a:lstStyle/>
+          <a:p>
+            <a:r>
+              <a:rPr lang="en-US" sz="900" dirty="0">
+                <a:latin typeface="+mj-lt"/>
+              </a:rPr>
+              <a:t>Effect of state on AP frequency : p = 0.1553 </a:t>
+            </a:r>
+          </a:p>
+        </p:txBody>
+      </p:sp>
+    </p:spTree>
+    <p:extLst>
+      <p:ext uri="{BB962C8B-B14F-4D97-AF65-F5344CB8AC3E}">
+        <p14:creationId xmlns:p14="http://schemas.microsoft.com/office/powerpoint/2010/main" val="280750637"/>
+      </p:ext>
+    </p:extLst>
+  </p:cSld>
+  <p:clrMapOvr>
+    <a:masterClrMapping/>
+  </p:clrMapOvr>
+</p:sld>
+</file>
+
+<file path=ppt/slides/slide12.xml><?xml version="1.0" encoding="utf-8"?>
+<p:sld xmlns:a="http://schemas.openxmlformats.org/drawingml/2006/main" xmlns:r="http://schemas.openxmlformats.org/officeDocument/2006/relationships" xmlns:p="http://schemas.openxmlformats.org/presentationml/2006/main">
+  <p:cSld>
+    <p:spTree>
+      <p:nvGrpSpPr>
+        <p:cNvPr id="1" name="">
+          <a:extLst>
+            <a:ext uri="{FF2B5EF4-FFF2-40B4-BE49-F238E27FC236}">
+              <a16:creationId xmlns:a16="http://schemas.microsoft.com/office/drawing/2014/main" id="{93311EF0-7D9F-25AF-D16A-98F1CC435F21}"/>
+            </a:ext>
+          </a:extLst>
+        </p:cNvPr>
+        <p:cNvGrpSpPr/>
+        <p:nvPr/>
+      </p:nvGrpSpPr>
+      <p:grpSpPr>
+        <a:xfrm>
+          <a:off x="0" y="0"/>
+          <a:ext cx="0" cy="0"/>
+          <a:chOff x="0" y="0"/>
+          <a:chExt cx="0" cy="0"/>
+        </a:xfrm>
+      </p:grpSpPr>
+      <p:pic>
+        <p:nvPicPr>
+          <p:cNvPr id="3" name="Picture 2">
+            <a:extLst>
+              <a:ext uri="{FF2B5EF4-FFF2-40B4-BE49-F238E27FC236}">
+                <a16:creationId xmlns:a16="http://schemas.microsoft.com/office/drawing/2014/main" id="{C1FF5DEC-148D-7A58-29A5-FA6EE698E35D}"/>
+              </a:ext>
+            </a:extLst>
+          </p:cNvPr>
+          <p:cNvPicPr>
+            <a:picLocks noChangeAspect="1"/>
+          </p:cNvPicPr>
+          <p:nvPr/>
+        </p:nvPicPr>
+        <p:blipFill>
+          <a:blip r:embed="rId3"/>
+          <a:srcRect/>
+          <a:stretch/>
+        </p:blipFill>
+        <p:spPr>
+          <a:xfrm>
+            <a:off x="1078260" y="4817769"/>
+            <a:ext cx="5355715" cy="3824261"/>
+          </a:xfrm>
+          <a:prstGeom prst="rect">
+            <a:avLst/>
+          </a:prstGeom>
+        </p:spPr>
+      </p:pic>
+      <p:pic>
+        <p:nvPicPr>
+          <p:cNvPr id="5" name="Picture 4">
+            <a:extLst>
+              <a:ext uri="{FF2B5EF4-FFF2-40B4-BE49-F238E27FC236}">
+                <a16:creationId xmlns:a16="http://schemas.microsoft.com/office/drawing/2014/main" id="{7A81AE17-58B1-C29F-1E1A-DA85B686E822}"/>
+              </a:ext>
+            </a:extLst>
+          </p:cNvPr>
+          <p:cNvPicPr>
+            <a:picLocks noChangeAspect="1"/>
+          </p:cNvPicPr>
+          <p:nvPr/>
+        </p:nvPicPr>
+        <p:blipFill>
+          <a:blip r:embed="rId4"/>
+          <a:srcRect/>
+          <a:stretch/>
+        </p:blipFill>
+        <p:spPr>
+          <a:xfrm>
+            <a:off x="941939" y="8205362"/>
+            <a:ext cx="5353966" cy="3834885"/>
+          </a:xfrm>
+          <a:prstGeom prst="rect">
+            <a:avLst/>
+          </a:prstGeom>
+        </p:spPr>
+      </p:pic>
+      <p:sp>
+        <p:nvSpPr>
+          <p:cNvPr id="6" name="TextBox 5">
+            <a:extLst>
+              <a:ext uri="{FF2B5EF4-FFF2-40B4-BE49-F238E27FC236}">
+                <a16:creationId xmlns:a16="http://schemas.microsoft.com/office/drawing/2014/main" id="{A31D4A4F-D119-D588-7327-717981C4B37B}"/>
+              </a:ext>
+            </a:extLst>
+          </p:cNvPr>
+          <p:cNvSpPr txBox="1"/>
+          <p:nvPr/>
+        </p:nvSpPr>
+        <p:spPr>
+          <a:xfrm>
+            <a:off x="843091" y="4807131"/>
+            <a:ext cx="442301" cy="369012"/>
+          </a:xfrm>
+          <a:prstGeom prst="rect">
+            <a:avLst/>
+          </a:prstGeom>
+          <a:noFill/>
+        </p:spPr>
+        <p:txBody>
+          <a:bodyPr wrap="square" rtlCol="0">
+            <a:spAutoFit/>
+          </a:bodyPr>
+          <a:lstStyle/>
+          <a:p>
+            <a:r>
+              <a:rPr lang="en-US" sz="1798" b="1" dirty="0">
+                <a:latin typeface="Arial" panose="020B0604020202020204" pitchFamily="34" charset="0"/>
+                <a:cs typeface="Arial" panose="020B0604020202020204" pitchFamily="34" charset="0"/>
+              </a:rPr>
+              <a:t>A.</a:t>
+            </a:r>
+          </a:p>
+        </p:txBody>
+      </p:sp>
+      <p:sp>
+        <p:nvSpPr>
+          <p:cNvPr id="7" name="TextBox 6">
+            <a:extLst>
+              <a:ext uri="{FF2B5EF4-FFF2-40B4-BE49-F238E27FC236}">
+                <a16:creationId xmlns:a16="http://schemas.microsoft.com/office/drawing/2014/main" id="{07595082-2236-5A5E-687B-D1423D28059D}"/>
+              </a:ext>
+            </a:extLst>
+          </p:cNvPr>
+          <p:cNvSpPr txBox="1"/>
+          <p:nvPr/>
+        </p:nvSpPr>
+        <p:spPr>
+          <a:xfrm>
+            <a:off x="843091" y="8200036"/>
+            <a:ext cx="442301" cy="369012"/>
+          </a:xfrm>
+          <a:prstGeom prst="rect">
+            <a:avLst/>
+          </a:prstGeom>
+          <a:noFill/>
+        </p:spPr>
+        <p:txBody>
+          <a:bodyPr wrap="square" rtlCol="0">
+            <a:spAutoFit/>
+          </a:bodyPr>
+          <a:lstStyle/>
+          <a:p>
+            <a:r>
+              <a:rPr lang="en-US" sz="1798" b="1" dirty="0">
+                <a:latin typeface="Arial" panose="020B0604020202020204" pitchFamily="34" charset="0"/>
+                <a:cs typeface="Arial" panose="020B0604020202020204" pitchFamily="34" charset="0"/>
+              </a:rPr>
+              <a:t>B.</a:t>
+            </a:r>
+          </a:p>
+        </p:txBody>
+      </p:sp>
+      <p:sp>
+        <p:nvSpPr>
+          <p:cNvPr id="2" name="Rectangle 1">
+            <a:extLst>
+              <a:ext uri="{FF2B5EF4-FFF2-40B4-BE49-F238E27FC236}">
+                <a16:creationId xmlns:a16="http://schemas.microsoft.com/office/drawing/2014/main" id="{358AD1C2-A4F5-320A-65EA-E7DC77511F80}"/>
               </a:ext>
             </a:extLst>
           </p:cNvPr>
@@ -5557,8 +6879,8 @@
         </p:nvSpPr>
         <p:spPr>
           <a:xfrm>
-            <a:off x="3059723" y="2417885"/>
-            <a:ext cx="2488223" cy="342900"/>
+            <a:off x="3777521" y="6738079"/>
+            <a:ext cx="142407" cy="131164"/>
           </a:xfrm>
           <a:prstGeom prst="rect">
             <a:avLst/>
@@ -5599,10 +6921,10 @@
       </p:sp>
       <p:sp>
         <p:nvSpPr>
-          <p:cNvPr id="9" name="Rectangle 8">
-            <a:extLst>
-              <a:ext uri="{FF2B5EF4-FFF2-40B4-BE49-F238E27FC236}">
-                <a16:creationId xmlns:a16="http://schemas.microsoft.com/office/drawing/2014/main" id="{DB8E6A17-BAE3-ABAA-9AEA-94760D8DDBF6}"/>
+          <p:cNvPr id="4" name="Rectangle 3">
+            <a:extLst>
+              <a:ext uri="{FF2B5EF4-FFF2-40B4-BE49-F238E27FC236}">
+                <a16:creationId xmlns:a16="http://schemas.microsoft.com/office/drawing/2014/main" id="{301A51BD-9255-59E7-BA5B-D2875CFEFDD5}"/>
               </a:ext>
             </a:extLst>
           </p:cNvPr>
@@ -5611,8 +6933,8 @@
         </p:nvSpPr>
         <p:spPr>
           <a:xfrm>
-            <a:off x="7898423" y="2417885"/>
-            <a:ext cx="2488223" cy="342900"/>
+            <a:off x="4214734" y="6445984"/>
+            <a:ext cx="142407" cy="131164"/>
           </a:xfrm>
           <a:prstGeom prst="rect">
             <a:avLst/>
@@ -5651,10 +6973,1064 @@
           </a:p>
         </p:txBody>
       </p:sp>
+      <p:sp>
+        <p:nvSpPr>
+          <p:cNvPr id="8" name="Rectangle 7">
+            <a:extLst>
+              <a:ext uri="{FF2B5EF4-FFF2-40B4-BE49-F238E27FC236}">
+                <a16:creationId xmlns:a16="http://schemas.microsoft.com/office/drawing/2014/main" id="{10FDFABE-9947-5FA5-1DF7-55153609C029}"/>
+              </a:ext>
+            </a:extLst>
+          </p:cNvPr>
+          <p:cNvSpPr/>
+          <p:nvPr/>
+        </p:nvSpPr>
+        <p:spPr>
+          <a:xfrm>
+            <a:off x="4641954" y="6099748"/>
+            <a:ext cx="142407" cy="131164"/>
+          </a:xfrm>
+          <a:prstGeom prst="rect">
+            <a:avLst/>
+          </a:prstGeom>
+          <a:solidFill>
+            <a:schemeClr val="bg1"/>
+          </a:solidFill>
+          <a:ln>
+            <a:solidFill>
+              <a:schemeClr val="bg1"/>
+            </a:solidFill>
+          </a:ln>
+        </p:spPr>
+        <p:style>
+          <a:lnRef idx="2">
+            <a:schemeClr val="accent1">
+              <a:shade val="15000"/>
+            </a:schemeClr>
+          </a:lnRef>
+          <a:fillRef idx="1">
+            <a:schemeClr val="accent1"/>
+          </a:fillRef>
+          <a:effectRef idx="0">
+            <a:schemeClr val="accent1"/>
+          </a:effectRef>
+          <a:fontRef idx="minor">
+            <a:schemeClr val="lt1"/>
+          </a:fontRef>
+        </p:style>
+        <p:txBody>
+          <a:bodyPr rtlCol="0" anchor="ctr"/>
+          <a:lstStyle/>
+          <a:p>
+            <a:pPr algn="ctr"/>
+            <a:endParaRPr lang="en-US"/>
+          </a:p>
+        </p:txBody>
+      </p:sp>
+      <p:sp>
+        <p:nvSpPr>
+          <p:cNvPr id="9" name="Rectangle 8">
+            <a:extLst>
+              <a:ext uri="{FF2B5EF4-FFF2-40B4-BE49-F238E27FC236}">
+                <a16:creationId xmlns:a16="http://schemas.microsoft.com/office/drawing/2014/main" id="{E65E7665-3B2B-15B6-4D90-6BBDFBD94402}"/>
+              </a:ext>
+            </a:extLst>
+          </p:cNvPr>
+          <p:cNvSpPr/>
+          <p:nvPr/>
+        </p:nvSpPr>
+        <p:spPr>
+          <a:xfrm>
+            <a:off x="5031699" y="5732489"/>
+            <a:ext cx="142407" cy="131164"/>
+          </a:xfrm>
+          <a:prstGeom prst="rect">
+            <a:avLst/>
+          </a:prstGeom>
+          <a:solidFill>
+            <a:schemeClr val="bg1"/>
+          </a:solidFill>
+          <a:ln>
+            <a:solidFill>
+              <a:schemeClr val="bg1"/>
+            </a:solidFill>
+          </a:ln>
+        </p:spPr>
+        <p:style>
+          <a:lnRef idx="2">
+            <a:schemeClr val="accent1">
+              <a:shade val="15000"/>
+            </a:schemeClr>
+          </a:lnRef>
+          <a:fillRef idx="1">
+            <a:schemeClr val="accent1"/>
+          </a:fillRef>
+          <a:effectRef idx="0">
+            <a:schemeClr val="accent1"/>
+          </a:effectRef>
+          <a:fontRef idx="minor">
+            <a:schemeClr val="lt1"/>
+          </a:fontRef>
+        </p:style>
+        <p:txBody>
+          <a:bodyPr rtlCol="0" anchor="ctr"/>
+          <a:lstStyle/>
+          <a:p>
+            <a:pPr algn="ctr"/>
+            <a:endParaRPr lang="en-US"/>
+          </a:p>
+        </p:txBody>
+      </p:sp>
+      <p:sp>
+        <p:nvSpPr>
+          <p:cNvPr id="10" name="Rectangle 9">
+            <a:extLst>
+              <a:ext uri="{FF2B5EF4-FFF2-40B4-BE49-F238E27FC236}">
+                <a16:creationId xmlns:a16="http://schemas.microsoft.com/office/drawing/2014/main" id="{4C641CE3-EEC5-86B7-15D2-302A5D3BE15D}"/>
+              </a:ext>
+            </a:extLst>
+          </p:cNvPr>
+          <p:cNvSpPr/>
+          <p:nvPr/>
+        </p:nvSpPr>
+        <p:spPr>
+          <a:xfrm>
+            <a:off x="5473908" y="5500141"/>
+            <a:ext cx="142407" cy="131164"/>
+          </a:xfrm>
+          <a:prstGeom prst="rect">
+            <a:avLst/>
+          </a:prstGeom>
+          <a:solidFill>
+            <a:schemeClr val="bg1"/>
+          </a:solidFill>
+          <a:ln>
+            <a:solidFill>
+              <a:schemeClr val="bg1"/>
+            </a:solidFill>
+          </a:ln>
+        </p:spPr>
+        <p:style>
+          <a:lnRef idx="2">
+            <a:schemeClr val="accent1">
+              <a:shade val="15000"/>
+            </a:schemeClr>
+          </a:lnRef>
+          <a:fillRef idx="1">
+            <a:schemeClr val="accent1"/>
+          </a:fillRef>
+          <a:effectRef idx="0">
+            <a:schemeClr val="accent1"/>
+          </a:effectRef>
+          <a:fontRef idx="minor">
+            <a:schemeClr val="lt1"/>
+          </a:fontRef>
+        </p:style>
+        <p:txBody>
+          <a:bodyPr rtlCol="0" anchor="ctr"/>
+          <a:lstStyle/>
+          <a:p>
+            <a:pPr algn="ctr"/>
+            <a:endParaRPr lang="en-US"/>
+          </a:p>
+        </p:txBody>
+      </p:sp>
+      <p:sp>
+        <p:nvSpPr>
+          <p:cNvPr id="11" name="Rectangle 10">
+            <a:extLst>
+              <a:ext uri="{FF2B5EF4-FFF2-40B4-BE49-F238E27FC236}">
+                <a16:creationId xmlns:a16="http://schemas.microsoft.com/office/drawing/2014/main" id="{C20818ED-BE69-4EBE-8BC4-695E3E8CE8B5}"/>
+              </a:ext>
+            </a:extLst>
+          </p:cNvPr>
+          <p:cNvSpPr/>
+          <p:nvPr/>
+        </p:nvSpPr>
+        <p:spPr>
+          <a:xfrm>
+            <a:off x="5897380" y="5176143"/>
+            <a:ext cx="142407" cy="131164"/>
+          </a:xfrm>
+          <a:prstGeom prst="rect">
+            <a:avLst/>
+          </a:prstGeom>
+          <a:solidFill>
+            <a:schemeClr val="bg1"/>
+          </a:solidFill>
+          <a:ln>
+            <a:solidFill>
+              <a:schemeClr val="bg1"/>
+            </a:solidFill>
+          </a:ln>
+        </p:spPr>
+        <p:style>
+          <a:lnRef idx="2">
+            <a:schemeClr val="accent1">
+              <a:shade val="15000"/>
+            </a:schemeClr>
+          </a:lnRef>
+          <a:fillRef idx="1">
+            <a:schemeClr val="accent1"/>
+          </a:fillRef>
+          <a:effectRef idx="0">
+            <a:schemeClr val="accent1"/>
+          </a:effectRef>
+          <a:fontRef idx="minor">
+            <a:schemeClr val="lt1"/>
+          </a:fontRef>
+        </p:style>
+        <p:txBody>
+          <a:bodyPr rtlCol="0" anchor="ctr"/>
+          <a:lstStyle/>
+          <a:p>
+            <a:pPr algn="ctr"/>
+            <a:endParaRPr lang="en-US"/>
+          </a:p>
+        </p:txBody>
+      </p:sp>
+      <p:sp>
+        <p:nvSpPr>
+          <p:cNvPr id="12" name="TextBox 11">
+            <a:extLst>
+              <a:ext uri="{FF2B5EF4-FFF2-40B4-BE49-F238E27FC236}">
+                <a16:creationId xmlns:a16="http://schemas.microsoft.com/office/drawing/2014/main" id="{27327EE0-228E-63F8-7D86-EFED911973CB}"/>
+              </a:ext>
+            </a:extLst>
+          </p:cNvPr>
+          <p:cNvSpPr txBox="1"/>
+          <p:nvPr/>
+        </p:nvSpPr>
+        <p:spPr>
+          <a:xfrm>
+            <a:off x="1994228" y="4945297"/>
+            <a:ext cx="2743200" cy="230832"/>
+          </a:xfrm>
+          <a:prstGeom prst="rect">
+            <a:avLst/>
+          </a:prstGeom>
+          <a:noFill/>
+        </p:spPr>
+        <p:txBody>
+          <a:bodyPr wrap="square" rtlCol="0">
+            <a:spAutoFit/>
+          </a:bodyPr>
+          <a:lstStyle/>
+          <a:p>
+            <a:r>
+              <a:rPr lang="en-US" sz="900" dirty="0">
+                <a:latin typeface="+mj-lt"/>
+              </a:rPr>
+              <a:t>Effect of state on AP frequency : p &lt; 0.0001 </a:t>
+            </a:r>
+          </a:p>
+        </p:txBody>
+      </p:sp>
     </p:spTree>
     <p:extLst>
       <p:ext uri="{BB962C8B-B14F-4D97-AF65-F5344CB8AC3E}">
-        <p14:creationId xmlns:p14="http://schemas.microsoft.com/office/powerpoint/2010/main" val="3828515855"/>
+        <p14:creationId xmlns:p14="http://schemas.microsoft.com/office/powerpoint/2010/main" val="4253835982"/>
+      </p:ext>
+    </p:extLst>
+  </p:cSld>
+  <p:clrMapOvr>
+    <a:masterClrMapping/>
+  </p:clrMapOvr>
+</p:sld>
+</file>
+
+<file path=ppt/slides/slide13.xml><?xml version="1.0" encoding="utf-8"?>
+<p:sld xmlns:a="http://schemas.openxmlformats.org/drawingml/2006/main" xmlns:r="http://schemas.openxmlformats.org/officeDocument/2006/relationships" xmlns:p="http://schemas.openxmlformats.org/presentationml/2006/main">
+  <p:cSld>
+    <p:spTree>
+      <p:nvGrpSpPr>
+        <p:cNvPr id="1" name="">
+          <a:extLst>
+            <a:ext uri="{FF2B5EF4-FFF2-40B4-BE49-F238E27FC236}">
+              <a16:creationId xmlns:a16="http://schemas.microsoft.com/office/drawing/2014/main" id="{7DAE99D2-8527-8687-7260-D2B890AB3455}"/>
+            </a:ext>
+          </a:extLst>
+        </p:cNvPr>
+        <p:cNvGrpSpPr/>
+        <p:nvPr/>
+      </p:nvGrpSpPr>
+      <p:grpSpPr>
+        <a:xfrm>
+          <a:off x="0" y="0"/>
+          <a:ext cx="0" cy="0"/>
+          <a:chOff x="0" y="0"/>
+          <a:chExt cx="0" cy="0"/>
+        </a:xfrm>
+      </p:grpSpPr>
+      <p:pic>
+        <p:nvPicPr>
+          <p:cNvPr id="3" name="Picture 2">
+            <a:extLst>
+              <a:ext uri="{FF2B5EF4-FFF2-40B4-BE49-F238E27FC236}">
+                <a16:creationId xmlns:a16="http://schemas.microsoft.com/office/drawing/2014/main" id="{CC2EC5CA-E785-856D-FF1A-F418A1107FF5}"/>
+              </a:ext>
+            </a:extLst>
+          </p:cNvPr>
+          <p:cNvPicPr>
+            <a:picLocks noChangeAspect="1"/>
+          </p:cNvPicPr>
+          <p:nvPr/>
+        </p:nvPicPr>
+        <p:blipFill>
+          <a:blip r:embed="rId3"/>
+          <a:srcRect/>
+          <a:stretch/>
+        </p:blipFill>
+        <p:spPr>
+          <a:xfrm>
+            <a:off x="1080008" y="4817769"/>
+            <a:ext cx="5352219" cy="3824261"/>
+          </a:xfrm>
+          <a:prstGeom prst="rect">
+            <a:avLst/>
+          </a:prstGeom>
+        </p:spPr>
+      </p:pic>
+      <p:pic>
+        <p:nvPicPr>
+          <p:cNvPr id="5" name="Picture 4">
+            <a:extLst>
+              <a:ext uri="{FF2B5EF4-FFF2-40B4-BE49-F238E27FC236}">
+                <a16:creationId xmlns:a16="http://schemas.microsoft.com/office/drawing/2014/main" id="{BCF0EA66-C517-F80F-19C5-586A73D907F7}"/>
+              </a:ext>
+            </a:extLst>
+          </p:cNvPr>
+          <p:cNvPicPr>
+            <a:picLocks noChangeAspect="1"/>
+          </p:cNvPicPr>
+          <p:nvPr/>
+        </p:nvPicPr>
+        <p:blipFill>
+          <a:blip r:embed="rId4"/>
+          <a:srcRect/>
+          <a:stretch/>
+        </p:blipFill>
+        <p:spPr>
+          <a:xfrm>
+            <a:off x="941939" y="8214460"/>
+            <a:ext cx="5353966" cy="3816688"/>
+          </a:xfrm>
+          <a:prstGeom prst="rect">
+            <a:avLst/>
+          </a:prstGeom>
+        </p:spPr>
+      </p:pic>
+      <p:sp>
+        <p:nvSpPr>
+          <p:cNvPr id="6" name="TextBox 5">
+            <a:extLst>
+              <a:ext uri="{FF2B5EF4-FFF2-40B4-BE49-F238E27FC236}">
+                <a16:creationId xmlns:a16="http://schemas.microsoft.com/office/drawing/2014/main" id="{B5727B53-BE50-DED8-6407-37AC5897A12C}"/>
+              </a:ext>
+            </a:extLst>
+          </p:cNvPr>
+          <p:cNvSpPr txBox="1"/>
+          <p:nvPr/>
+        </p:nvSpPr>
+        <p:spPr>
+          <a:xfrm>
+            <a:off x="843091" y="4807131"/>
+            <a:ext cx="442301" cy="369012"/>
+          </a:xfrm>
+          <a:prstGeom prst="rect">
+            <a:avLst/>
+          </a:prstGeom>
+          <a:noFill/>
+        </p:spPr>
+        <p:txBody>
+          <a:bodyPr wrap="square" rtlCol="0">
+            <a:spAutoFit/>
+          </a:bodyPr>
+          <a:lstStyle/>
+          <a:p>
+            <a:r>
+              <a:rPr lang="en-US" sz="1798" b="1" dirty="0">
+                <a:latin typeface="Arial" panose="020B0604020202020204" pitchFamily="34" charset="0"/>
+                <a:cs typeface="Arial" panose="020B0604020202020204" pitchFamily="34" charset="0"/>
+              </a:rPr>
+              <a:t>A.</a:t>
+            </a:r>
+          </a:p>
+        </p:txBody>
+      </p:sp>
+      <p:sp>
+        <p:nvSpPr>
+          <p:cNvPr id="7" name="TextBox 6">
+            <a:extLst>
+              <a:ext uri="{FF2B5EF4-FFF2-40B4-BE49-F238E27FC236}">
+                <a16:creationId xmlns:a16="http://schemas.microsoft.com/office/drawing/2014/main" id="{59FBE90A-BF18-1AD4-0839-7E628EA454F2}"/>
+              </a:ext>
+            </a:extLst>
+          </p:cNvPr>
+          <p:cNvSpPr txBox="1"/>
+          <p:nvPr/>
+        </p:nvSpPr>
+        <p:spPr>
+          <a:xfrm>
+            <a:off x="843091" y="8200036"/>
+            <a:ext cx="442301" cy="369012"/>
+          </a:xfrm>
+          <a:prstGeom prst="rect">
+            <a:avLst/>
+          </a:prstGeom>
+          <a:noFill/>
+        </p:spPr>
+        <p:txBody>
+          <a:bodyPr wrap="square" rtlCol="0">
+            <a:spAutoFit/>
+          </a:bodyPr>
+          <a:lstStyle/>
+          <a:p>
+            <a:r>
+              <a:rPr lang="en-US" sz="1798" b="1" dirty="0">
+                <a:latin typeface="Arial" panose="020B0604020202020204" pitchFamily="34" charset="0"/>
+                <a:cs typeface="Arial" panose="020B0604020202020204" pitchFamily="34" charset="0"/>
+              </a:rPr>
+              <a:t>B.</a:t>
+            </a:r>
+          </a:p>
+        </p:txBody>
+      </p:sp>
+      <p:sp>
+        <p:nvSpPr>
+          <p:cNvPr id="2" name="TextBox 1">
+            <a:extLst>
+              <a:ext uri="{FF2B5EF4-FFF2-40B4-BE49-F238E27FC236}">
+                <a16:creationId xmlns:a16="http://schemas.microsoft.com/office/drawing/2014/main" id="{68D77E8E-92A3-EF7B-A85B-214A19008549}"/>
+              </a:ext>
+            </a:extLst>
+          </p:cNvPr>
+          <p:cNvSpPr txBox="1"/>
+          <p:nvPr/>
+        </p:nvSpPr>
+        <p:spPr>
+          <a:xfrm>
+            <a:off x="1994228" y="4945297"/>
+            <a:ext cx="2743200" cy="230832"/>
+          </a:xfrm>
+          <a:prstGeom prst="rect">
+            <a:avLst/>
+          </a:prstGeom>
+          <a:noFill/>
+        </p:spPr>
+        <p:txBody>
+          <a:bodyPr wrap="square" rtlCol="0">
+            <a:spAutoFit/>
+          </a:bodyPr>
+          <a:lstStyle/>
+          <a:p>
+            <a:r>
+              <a:rPr lang="en-US" sz="900" dirty="0">
+                <a:latin typeface="+mj-lt"/>
+              </a:rPr>
+              <a:t>Effect of state on AP frequency : p = 0.2245 </a:t>
+            </a:r>
+          </a:p>
+        </p:txBody>
+      </p:sp>
+    </p:spTree>
+    <p:extLst>
+      <p:ext uri="{BB962C8B-B14F-4D97-AF65-F5344CB8AC3E}">
+        <p14:creationId xmlns:p14="http://schemas.microsoft.com/office/powerpoint/2010/main" val="3654923657"/>
+      </p:ext>
+    </p:extLst>
+  </p:cSld>
+  <p:clrMapOvr>
+    <a:masterClrMapping/>
+  </p:clrMapOvr>
+</p:sld>
+</file>
+
+<file path=ppt/slides/slide14.xml><?xml version="1.0" encoding="utf-8"?>
+<p:sld xmlns:a="http://schemas.openxmlformats.org/drawingml/2006/main" xmlns:r="http://schemas.openxmlformats.org/officeDocument/2006/relationships" xmlns:p="http://schemas.openxmlformats.org/presentationml/2006/main">
+  <p:cSld>
+    <p:spTree>
+      <p:nvGrpSpPr>
+        <p:cNvPr id="1" name="">
+          <a:extLst>
+            <a:ext uri="{FF2B5EF4-FFF2-40B4-BE49-F238E27FC236}">
+              <a16:creationId xmlns:a16="http://schemas.microsoft.com/office/drawing/2014/main" id="{E8D55E25-9780-FED9-E3AD-0646A12F74DE}"/>
+            </a:ext>
+          </a:extLst>
+        </p:cNvPr>
+        <p:cNvGrpSpPr/>
+        <p:nvPr/>
+      </p:nvGrpSpPr>
+      <p:grpSpPr>
+        <a:xfrm>
+          <a:off x="0" y="0"/>
+          <a:ext cx="0" cy="0"/>
+          <a:chOff x="0" y="0"/>
+          <a:chExt cx="0" cy="0"/>
+        </a:xfrm>
+      </p:grpSpPr>
+      <p:pic>
+        <p:nvPicPr>
+          <p:cNvPr id="3" name="Picture 2">
+            <a:extLst>
+              <a:ext uri="{FF2B5EF4-FFF2-40B4-BE49-F238E27FC236}">
+                <a16:creationId xmlns:a16="http://schemas.microsoft.com/office/drawing/2014/main" id="{DC997DF7-AF3A-486C-22EE-F8B93AD19A1E}"/>
+              </a:ext>
+            </a:extLst>
+          </p:cNvPr>
+          <p:cNvPicPr>
+            <a:picLocks noChangeAspect="1"/>
+          </p:cNvPicPr>
+          <p:nvPr/>
+        </p:nvPicPr>
+        <p:blipFill>
+          <a:blip r:embed="rId3"/>
+          <a:srcRect/>
+          <a:stretch/>
+        </p:blipFill>
+        <p:spPr>
+          <a:xfrm>
+            <a:off x="1080008" y="4819017"/>
+            <a:ext cx="5352219" cy="3821764"/>
+          </a:xfrm>
+          <a:prstGeom prst="rect">
+            <a:avLst/>
+          </a:prstGeom>
+        </p:spPr>
+      </p:pic>
+      <p:pic>
+        <p:nvPicPr>
+          <p:cNvPr id="5" name="Picture 4">
+            <a:extLst>
+              <a:ext uri="{FF2B5EF4-FFF2-40B4-BE49-F238E27FC236}">
+                <a16:creationId xmlns:a16="http://schemas.microsoft.com/office/drawing/2014/main" id="{2F4E0C5A-6951-2127-EBFB-511503777630}"/>
+              </a:ext>
+            </a:extLst>
+          </p:cNvPr>
+          <p:cNvPicPr>
+            <a:picLocks noChangeAspect="1"/>
+          </p:cNvPicPr>
+          <p:nvPr/>
+        </p:nvPicPr>
+        <p:blipFill>
+          <a:blip r:embed="rId4"/>
+          <a:srcRect/>
+          <a:stretch/>
+        </p:blipFill>
+        <p:spPr>
+          <a:xfrm>
+            <a:off x="947240" y="8214460"/>
+            <a:ext cx="5343363" cy="3816688"/>
+          </a:xfrm>
+          <a:prstGeom prst="rect">
+            <a:avLst/>
+          </a:prstGeom>
+        </p:spPr>
+      </p:pic>
+      <p:sp>
+        <p:nvSpPr>
+          <p:cNvPr id="6" name="TextBox 5">
+            <a:extLst>
+              <a:ext uri="{FF2B5EF4-FFF2-40B4-BE49-F238E27FC236}">
+                <a16:creationId xmlns:a16="http://schemas.microsoft.com/office/drawing/2014/main" id="{40B6B9B7-78DD-614C-5F4A-5CEF07D7CE3B}"/>
+              </a:ext>
+            </a:extLst>
+          </p:cNvPr>
+          <p:cNvSpPr txBox="1"/>
+          <p:nvPr/>
+        </p:nvSpPr>
+        <p:spPr>
+          <a:xfrm>
+            <a:off x="843091" y="4807131"/>
+            <a:ext cx="442301" cy="369012"/>
+          </a:xfrm>
+          <a:prstGeom prst="rect">
+            <a:avLst/>
+          </a:prstGeom>
+          <a:noFill/>
+        </p:spPr>
+        <p:txBody>
+          <a:bodyPr wrap="square" rtlCol="0">
+            <a:spAutoFit/>
+          </a:bodyPr>
+          <a:lstStyle/>
+          <a:p>
+            <a:r>
+              <a:rPr lang="en-US" sz="1798" b="1" dirty="0">
+                <a:latin typeface="Arial" panose="020B0604020202020204" pitchFamily="34" charset="0"/>
+                <a:cs typeface="Arial" panose="020B0604020202020204" pitchFamily="34" charset="0"/>
+              </a:rPr>
+              <a:t>A.</a:t>
+            </a:r>
+          </a:p>
+        </p:txBody>
+      </p:sp>
+      <p:sp>
+        <p:nvSpPr>
+          <p:cNvPr id="7" name="TextBox 6">
+            <a:extLst>
+              <a:ext uri="{FF2B5EF4-FFF2-40B4-BE49-F238E27FC236}">
+                <a16:creationId xmlns:a16="http://schemas.microsoft.com/office/drawing/2014/main" id="{39A02CF8-4B13-B38F-C081-1F73DA023BD4}"/>
+              </a:ext>
+            </a:extLst>
+          </p:cNvPr>
+          <p:cNvSpPr txBox="1"/>
+          <p:nvPr/>
+        </p:nvSpPr>
+        <p:spPr>
+          <a:xfrm>
+            <a:off x="843091" y="8200036"/>
+            <a:ext cx="442301" cy="369012"/>
+          </a:xfrm>
+          <a:prstGeom prst="rect">
+            <a:avLst/>
+          </a:prstGeom>
+          <a:noFill/>
+        </p:spPr>
+        <p:txBody>
+          <a:bodyPr wrap="square" rtlCol="0">
+            <a:spAutoFit/>
+          </a:bodyPr>
+          <a:lstStyle/>
+          <a:p>
+            <a:r>
+              <a:rPr lang="en-US" sz="1798" b="1" dirty="0">
+                <a:latin typeface="Arial" panose="020B0604020202020204" pitchFamily="34" charset="0"/>
+                <a:cs typeface="Arial" panose="020B0604020202020204" pitchFamily="34" charset="0"/>
+              </a:rPr>
+              <a:t>B.</a:t>
+            </a:r>
+          </a:p>
+        </p:txBody>
+      </p:sp>
+      <p:sp>
+        <p:nvSpPr>
+          <p:cNvPr id="2" name="TextBox 1">
+            <a:extLst>
+              <a:ext uri="{FF2B5EF4-FFF2-40B4-BE49-F238E27FC236}">
+                <a16:creationId xmlns:a16="http://schemas.microsoft.com/office/drawing/2014/main" id="{F5B4A8F7-330C-B435-AB37-227B4A251541}"/>
+              </a:ext>
+            </a:extLst>
+          </p:cNvPr>
+          <p:cNvSpPr txBox="1"/>
+          <p:nvPr/>
+        </p:nvSpPr>
+        <p:spPr>
+          <a:xfrm>
+            <a:off x="1994228" y="4945297"/>
+            <a:ext cx="2743200" cy="230832"/>
+          </a:xfrm>
+          <a:prstGeom prst="rect">
+            <a:avLst/>
+          </a:prstGeom>
+          <a:noFill/>
+        </p:spPr>
+        <p:txBody>
+          <a:bodyPr wrap="square" rtlCol="0">
+            <a:spAutoFit/>
+          </a:bodyPr>
+          <a:lstStyle/>
+          <a:p>
+            <a:r>
+              <a:rPr lang="en-US" sz="900" dirty="0">
+                <a:latin typeface="+mj-lt"/>
+              </a:rPr>
+              <a:t>Effect of state on AP frequency : p = 0.1197 </a:t>
+            </a:r>
+          </a:p>
+        </p:txBody>
+      </p:sp>
+    </p:spTree>
+    <p:extLst>
+      <p:ext uri="{BB962C8B-B14F-4D97-AF65-F5344CB8AC3E}">
+        <p14:creationId xmlns:p14="http://schemas.microsoft.com/office/powerpoint/2010/main" val="252563948"/>
+      </p:ext>
+    </p:extLst>
+  </p:cSld>
+  <p:clrMapOvr>
+    <a:masterClrMapping/>
+  </p:clrMapOvr>
+</p:sld>
+</file>
+
+<file path=ppt/slides/slide2.xml><?xml version="1.0" encoding="utf-8"?>
+<p:sld xmlns:a="http://schemas.openxmlformats.org/drawingml/2006/main" xmlns:r="http://schemas.openxmlformats.org/officeDocument/2006/relationships" xmlns:p="http://schemas.openxmlformats.org/presentationml/2006/main">
+  <p:cSld>
+    <p:spTree>
+      <p:nvGrpSpPr>
+        <p:cNvPr id="1" name="">
+          <a:extLst>
+            <a:ext uri="{FF2B5EF4-FFF2-40B4-BE49-F238E27FC236}">
+              <a16:creationId xmlns:a16="http://schemas.microsoft.com/office/drawing/2014/main" id="{32B9C43C-5C65-95C5-969B-86DE3E4F02E1}"/>
+            </a:ext>
+          </a:extLst>
+        </p:cNvPr>
+        <p:cNvGrpSpPr/>
+        <p:nvPr/>
+      </p:nvGrpSpPr>
+      <p:grpSpPr>
+        <a:xfrm>
+          <a:off x="0" y="0"/>
+          <a:ext cx="0" cy="0"/>
+          <a:chOff x="0" y="0"/>
+          <a:chExt cx="0" cy="0"/>
+        </a:xfrm>
+      </p:grpSpPr>
+      <p:pic>
+        <p:nvPicPr>
+          <p:cNvPr id="3" name="Picture 2">
+            <a:extLst>
+              <a:ext uri="{FF2B5EF4-FFF2-40B4-BE49-F238E27FC236}">
+                <a16:creationId xmlns:a16="http://schemas.microsoft.com/office/drawing/2014/main" id="{BC9D94E3-6C86-5283-7242-23AA3F079501}"/>
+              </a:ext>
+            </a:extLst>
+          </p:cNvPr>
+          <p:cNvPicPr>
+            <a:picLocks noChangeAspect="1"/>
+          </p:cNvPicPr>
+          <p:nvPr/>
+        </p:nvPicPr>
+        <p:blipFill>
+          <a:blip r:embed="rId3"/>
+          <a:srcRect/>
+          <a:stretch/>
+        </p:blipFill>
+        <p:spPr>
+          <a:xfrm>
+            <a:off x="2753736" y="7801578"/>
+            <a:ext cx="6383069" cy="4572000"/>
+          </a:xfrm>
+          <a:prstGeom prst="rect">
+            <a:avLst/>
+          </a:prstGeom>
+        </p:spPr>
+      </p:pic>
+      <p:pic>
+        <p:nvPicPr>
+          <p:cNvPr id="7" name="Picture 6">
+            <a:extLst>
+              <a:ext uri="{FF2B5EF4-FFF2-40B4-BE49-F238E27FC236}">
+                <a16:creationId xmlns:a16="http://schemas.microsoft.com/office/drawing/2014/main" id="{30157340-872C-95D4-9740-2DB9842B9109}"/>
+              </a:ext>
+            </a:extLst>
+          </p:cNvPr>
+          <p:cNvPicPr>
+            <a:picLocks noChangeAspect="1"/>
+          </p:cNvPicPr>
+          <p:nvPr/>
+        </p:nvPicPr>
+        <p:blipFill>
+          <a:blip r:embed="rId4"/>
+          <a:srcRect/>
+          <a:stretch/>
+        </p:blipFill>
+        <p:spPr>
+          <a:xfrm>
+            <a:off x="2766401" y="3720446"/>
+            <a:ext cx="6357739" cy="4572000"/>
+          </a:xfrm>
+          <a:prstGeom prst="rect">
+            <a:avLst/>
+          </a:prstGeom>
+        </p:spPr>
+      </p:pic>
+      <p:sp>
+        <p:nvSpPr>
+          <p:cNvPr id="8" name="TextBox 7">
+            <a:extLst>
+              <a:ext uri="{FF2B5EF4-FFF2-40B4-BE49-F238E27FC236}">
+                <a16:creationId xmlns:a16="http://schemas.microsoft.com/office/drawing/2014/main" id="{0DE81064-FA12-95B5-59C8-C164AB4CA9E2}"/>
+              </a:ext>
+            </a:extLst>
+          </p:cNvPr>
+          <p:cNvSpPr txBox="1"/>
+          <p:nvPr/>
+        </p:nvSpPr>
+        <p:spPr>
+          <a:xfrm>
+            <a:off x="2523718" y="3535940"/>
+            <a:ext cx="442301" cy="369012"/>
+          </a:xfrm>
+          <a:prstGeom prst="rect">
+            <a:avLst/>
+          </a:prstGeom>
+          <a:noFill/>
+        </p:spPr>
+        <p:txBody>
+          <a:bodyPr wrap="square" rtlCol="0">
+            <a:spAutoFit/>
+          </a:bodyPr>
+          <a:lstStyle/>
+          <a:p>
+            <a:r>
+              <a:rPr lang="en-US" sz="1798" b="1" dirty="0">
+                <a:latin typeface="Arial" panose="020B0604020202020204" pitchFamily="34" charset="0"/>
+                <a:cs typeface="Arial" panose="020B0604020202020204" pitchFamily="34" charset="0"/>
+              </a:rPr>
+              <a:t>B.</a:t>
+            </a:r>
+          </a:p>
+        </p:txBody>
+      </p:sp>
+      <p:sp>
+        <p:nvSpPr>
+          <p:cNvPr id="19" name="TextBox 18">
+            <a:extLst>
+              <a:ext uri="{FF2B5EF4-FFF2-40B4-BE49-F238E27FC236}">
+                <a16:creationId xmlns:a16="http://schemas.microsoft.com/office/drawing/2014/main" id="{0F09E54D-5719-3DD7-015D-F830CF43F403}"/>
+              </a:ext>
+            </a:extLst>
+          </p:cNvPr>
+          <p:cNvSpPr txBox="1"/>
+          <p:nvPr/>
+        </p:nvSpPr>
+        <p:spPr>
+          <a:xfrm>
+            <a:off x="4144919" y="2540155"/>
+            <a:ext cx="951229" cy="338554"/>
+          </a:xfrm>
+          <a:prstGeom prst="rect">
+            <a:avLst/>
+          </a:prstGeom>
+          <a:noFill/>
+        </p:spPr>
+        <p:txBody>
+          <a:bodyPr wrap="square" rtlCol="0">
+            <a:spAutoFit/>
+          </a:bodyPr>
+          <a:lstStyle/>
+          <a:p>
+            <a:pPr algn="ctr"/>
+            <a:r>
+              <a:rPr lang="en-US" sz="1600" dirty="0">
+                <a:latin typeface="Segoe UI" panose="020B0502040204020203" pitchFamily="34" charset="0"/>
+                <a:cs typeface="Segoe UI" panose="020B0502040204020203" pitchFamily="34" charset="0"/>
+              </a:rPr>
+              <a:t>Baseline</a:t>
+            </a:r>
+            <a:endParaRPr lang="en-US" dirty="0">
+              <a:latin typeface="Segoe UI" panose="020B0502040204020203" pitchFamily="34" charset="0"/>
+              <a:cs typeface="Segoe UI" panose="020B0502040204020203" pitchFamily="34" charset="0"/>
+            </a:endParaRPr>
+          </a:p>
+        </p:txBody>
+      </p:sp>
+      <p:sp>
+        <p:nvSpPr>
+          <p:cNvPr id="20" name="TextBox 19">
+            <a:extLst>
+              <a:ext uri="{FF2B5EF4-FFF2-40B4-BE49-F238E27FC236}">
+                <a16:creationId xmlns:a16="http://schemas.microsoft.com/office/drawing/2014/main" id="{E5EB1089-87E0-A4AA-B132-A353B751218D}"/>
+              </a:ext>
+            </a:extLst>
+          </p:cNvPr>
+          <p:cNvSpPr txBox="1"/>
+          <p:nvPr/>
+        </p:nvSpPr>
+        <p:spPr>
+          <a:xfrm>
+            <a:off x="7099350" y="2540155"/>
+            <a:ext cx="1071546" cy="338554"/>
+          </a:xfrm>
+          <a:prstGeom prst="rect">
+            <a:avLst/>
+          </a:prstGeom>
+          <a:noFill/>
+        </p:spPr>
+        <p:txBody>
+          <a:bodyPr wrap="square" rtlCol="0">
+            <a:spAutoFit/>
+          </a:bodyPr>
+          <a:lstStyle/>
+          <a:p>
+            <a:pPr algn="ctr"/>
+            <a:r>
+              <a:rPr lang="en-US" sz="1600" dirty="0">
+                <a:latin typeface="Segoe UI" panose="020B0502040204020203" pitchFamily="34" charset="0"/>
+                <a:cs typeface="Segoe UI" panose="020B0502040204020203" pitchFamily="34" charset="0"/>
+              </a:rPr>
+              <a:t>Post-HFS</a:t>
+            </a:r>
+            <a:endParaRPr lang="en-US" dirty="0">
+              <a:latin typeface="Segoe UI" panose="020B0502040204020203" pitchFamily="34" charset="0"/>
+              <a:cs typeface="Segoe UI" panose="020B0502040204020203" pitchFamily="34" charset="0"/>
+            </a:endParaRPr>
+          </a:p>
+        </p:txBody>
+      </p:sp>
+      <p:sp>
+        <p:nvSpPr>
+          <p:cNvPr id="21" name="TextBox 20">
+            <a:extLst>
+              <a:ext uri="{FF2B5EF4-FFF2-40B4-BE49-F238E27FC236}">
+                <a16:creationId xmlns:a16="http://schemas.microsoft.com/office/drawing/2014/main" id="{90CA5F31-034D-2765-27E9-BF96D4DF2763}"/>
+              </a:ext>
+            </a:extLst>
+          </p:cNvPr>
+          <p:cNvSpPr txBox="1"/>
+          <p:nvPr/>
+        </p:nvSpPr>
+        <p:spPr>
+          <a:xfrm>
+            <a:off x="2523718" y="7524478"/>
+            <a:ext cx="442301" cy="369012"/>
+          </a:xfrm>
+          <a:prstGeom prst="rect">
+            <a:avLst/>
+          </a:prstGeom>
+          <a:noFill/>
+        </p:spPr>
+        <p:txBody>
+          <a:bodyPr wrap="square" rtlCol="0">
+            <a:spAutoFit/>
+          </a:bodyPr>
+          <a:lstStyle/>
+          <a:p>
+            <a:r>
+              <a:rPr lang="en-US" sz="1798" b="1" dirty="0">
+                <a:latin typeface="Arial" panose="020B0604020202020204" pitchFamily="34" charset="0"/>
+                <a:cs typeface="Arial" panose="020B0604020202020204" pitchFamily="34" charset="0"/>
+              </a:rPr>
+              <a:t>C.</a:t>
+            </a:r>
+          </a:p>
+        </p:txBody>
+      </p:sp>
+      <p:sp>
+        <p:nvSpPr>
+          <p:cNvPr id="11" name="TextBox 10">
+            <a:extLst>
+              <a:ext uri="{FF2B5EF4-FFF2-40B4-BE49-F238E27FC236}">
+                <a16:creationId xmlns:a16="http://schemas.microsoft.com/office/drawing/2014/main" id="{2C62B134-7FCF-1DCD-C733-983E3795352C}"/>
+              </a:ext>
+            </a:extLst>
+          </p:cNvPr>
+          <p:cNvSpPr txBox="1"/>
+          <p:nvPr/>
+        </p:nvSpPr>
+        <p:spPr>
+          <a:xfrm>
+            <a:off x="2523718" y="2340419"/>
+            <a:ext cx="442301" cy="369012"/>
+          </a:xfrm>
+          <a:prstGeom prst="rect">
+            <a:avLst/>
+          </a:prstGeom>
+          <a:noFill/>
+        </p:spPr>
+        <p:txBody>
+          <a:bodyPr wrap="square" rtlCol="0">
+            <a:spAutoFit/>
+          </a:bodyPr>
+          <a:lstStyle/>
+          <a:p>
+            <a:r>
+              <a:rPr lang="en-US" sz="1798" b="1" dirty="0">
+                <a:latin typeface="Arial" panose="020B0604020202020204" pitchFamily="34" charset="0"/>
+                <a:cs typeface="Arial" panose="020B0604020202020204" pitchFamily="34" charset="0"/>
+              </a:rPr>
+              <a:t>A.</a:t>
+            </a:r>
+          </a:p>
+        </p:txBody>
+      </p:sp>
+      <p:pic>
+        <p:nvPicPr>
+          <p:cNvPr id="5" name="Picture 4">
+            <a:extLst>
+              <a:ext uri="{FF2B5EF4-FFF2-40B4-BE49-F238E27FC236}">
+                <a16:creationId xmlns:a16="http://schemas.microsoft.com/office/drawing/2014/main" id="{DD05573B-F6E7-A3DE-3862-875505E022DC}"/>
+              </a:ext>
+            </a:extLst>
+          </p:cNvPr>
+          <p:cNvPicPr>
+            <a:picLocks noChangeAspect="1"/>
+          </p:cNvPicPr>
+          <p:nvPr/>
+        </p:nvPicPr>
+        <p:blipFill>
+          <a:blip r:embed="rId5"/>
+          <a:srcRect l="10293" t="31070" r="28617" b="48767"/>
+          <a:stretch>
+            <a:fillRect/>
+          </a:stretch>
+        </p:blipFill>
+        <p:spPr>
+          <a:xfrm>
+            <a:off x="4144919" y="2847982"/>
+            <a:ext cx="1441998" cy="1004492"/>
+          </a:xfrm>
+          <a:prstGeom prst="rect">
+            <a:avLst/>
+          </a:prstGeom>
+        </p:spPr>
+      </p:pic>
+      <p:pic>
+        <p:nvPicPr>
+          <p:cNvPr id="9" name="Picture 8">
+            <a:extLst>
+              <a:ext uri="{FF2B5EF4-FFF2-40B4-BE49-F238E27FC236}">
+                <a16:creationId xmlns:a16="http://schemas.microsoft.com/office/drawing/2014/main" id="{764CC24C-65E8-8746-F967-B5D3588C9DF0}"/>
+              </a:ext>
+            </a:extLst>
+          </p:cNvPr>
+          <p:cNvPicPr>
+            <a:picLocks noChangeAspect="1"/>
+          </p:cNvPicPr>
+          <p:nvPr/>
+        </p:nvPicPr>
+        <p:blipFill>
+          <a:blip r:embed="rId5"/>
+          <a:srcRect l="8424" t="58357" r="21932" b="21481"/>
+          <a:stretch>
+            <a:fillRect/>
+          </a:stretch>
+        </p:blipFill>
+        <p:spPr>
+          <a:xfrm>
+            <a:off x="7099350" y="2847982"/>
+            <a:ext cx="1643970" cy="1004492"/>
+          </a:xfrm>
+          <a:prstGeom prst="rect">
+            <a:avLst/>
+          </a:prstGeom>
+        </p:spPr>
+      </p:pic>
+      <p:pic>
+        <p:nvPicPr>
+          <p:cNvPr id="2" name="Picture 1">
+            <a:extLst>
+              <a:ext uri="{FF2B5EF4-FFF2-40B4-BE49-F238E27FC236}">
+                <a16:creationId xmlns:a16="http://schemas.microsoft.com/office/drawing/2014/main" id="{9BDFD579-4E26-3D76-7597-E6F245B9DECA}"/>
+              </a:ext>
+            </a:extLst>
+          </p:cNvPr>
+          <p:cNvPicPr>
+            <a:picLocks noChangeAspect="1"/>
+          </p:cNvPicPr>
+          <p:nvPr/>
+        </p:nvPicPr>
+        <p:blipFill>
+          <a:blip r:embed="rId5"/>
+          <a:srcRect l="75712" t="58357" r="7340" b="21481"/>
+          <a:stretch>
+            <a:fillRect/>
+          </a:stretch>
+        </p:blipFill>
+        <p:spPr>
+          <a:xfrm>
+            <a:off x="9366823" y="2847982"/>
+            <a:ext cx="400049" cy="1004492"/>
+          </a:xfrm>
+          <a:prstGeom prst="rect">
+            <a:avLst/>
+          </a:prstGeom>
+        </p:spPr>
+      </p:pic>
+    </p:spTree>
+    <p:extLst>
+      <p:ext uri="{BB962C8B-B14F-4D97-AF65-F5344CB8AC3E}">
+        <p14:creationId xmlns:p14="http://schemas.microsoft.com/office/powerpoint/2010/main" val="3074692554"/>
       </p:ext>
     </p:extLst>
   </p:cSld>
@@ -5672,7 +8048,392 @@
         <p:cNvPr id="1" name="">
           <a:extLst>
             <a:ext uri="{FF2B5EF4-FFF2-40B4-BE49-F238E27FC236}">
-              <a16:creationId xmlns:a16="http://schemas.microsoft.com/office/drawing/2014/main" id="{07899FC8-5B33-9669-DD28-CF8E380301B3}"/>
+              <a16:creationId xmlns:a16="http://schemas.microsoft.com/office/drawing/2014/main" id="{CC4ED864-F9B9-8CFE-8647-548676BA18D0}"/>
+            </a:ext>
+          </a:extLst>
+        </p:cNvPr>
+        <p:cNvGrpSpPr/>
+        <p:nvPr/>
+      </p:nvGrpSpPr>
+      <p:grpSpPr>
+        <a:xfrm>
+          <a:off x="0" y="0"/>
+          <a:ext cx="0" cy="0"/>
+          <a:chOff x="0" y="0"/>
+          <a:chExt cx="0" cy="0"/>
+        </a:xfrm>
+      </p:grpSpPr>
+      <p:pic>
+        <p:nvPicPr>
+          <p:cNvPr id="3" name="Picture 2">
+            <a:extLst>
+              <a:ext uri="{FF2B5EF4-FFF2-40B4-BE49-F238E27FC236}">
+                <a16:creationId xmlns:a16="http://schemas.microsoft.com/office/drawing/2014/main" id="{AFA8ECAD-A795-A6E4-A897-6E187209B6DF}"/>
+              </a:ext>
+            </a:extLst>
+          </p:cNvPr>
+          <p:cNvPicPr>
+            <a:picLocks noChangeAspect="1"/>
+          </p:cNvPicPr>
+          <p:nvPr/>
+        </p:nvPicPr>
+        <p:blipFill>
+          <a:blip r:embed="rId3"/>
+          <a:srcRect/>
+          <a:stretch/>
+        </p:blipFill>
+        <p:spPr>
+          <a:xfrm>
+            <a:off x="2766401" y="7801578"/>
+            <a:ext cx="6357739" cy="4572000"/>
+          </a:xfrm>
+          <a:prstGeom prst="rect">
+            <a:avLst/>
+          </a:prstGeom>
+        </p:spPr>
+      </p:pic>
+      <p:pic>
+        <p:nvPicPr>
+          <p:cNvPr id="7" name="Picture 6">
+            <a:extLst>
+              <a:ext uri="{FF2B5EF4-FFF2-40B4-BE49-F238E27FC236}">
+                <a16:creationId xmlns:a16="http://schemas.microsoft.com/office/drawing/2014/main" id="{73F676DC-CDFF-E5E2-EBE9-1C19CE1B14F3}"/>
+              </a:ext>
+            </a:extLst>
+          </p:cNvPr>
+          <p:cNvPicPr>
+            <a:picLocks noChangeAspect="1"/>
+          </p:cNvPicPr>
+          <p:nvPr/>
+        </p:nvPicPr>
+        <p:blipFill>
+          <a:blip r:embed="rId4"/>
+          <a:srcRect/>
+          <a:stretch/>
+        </p:blipFill>
+        <p:spPr>
+          <a:xfrm>
+            <a:off x="2770270" y="3720446"/>
+            <a:ext cx="6350000" cy="4572000"/>
+          </a:xfrm>
+          <a:prstGeom prst="rect">
+            <a:avLst/>
+          </a:prstGeom>
+        </p:spPr>
+      </p:pic>
+      <p:sp>
+        <p:nvSpPr>
+          <p:cNvPr id="8" name="TextBox 7">
+            <a:extLst>
+              <a:ext uri="{FF2B5EF4-FFF2-40B4-BE49-F238E27FC236}">
+                <a16:creationId xmlns:a16="http://schemas.microsoft.com/office/drawing/2014/main" id="{7C7E5796-D0E3-E469-FE2C-A24EF8330A26}"/>
+              </a:ext>
+            </a:extLst>
+          </p:cNvPr>
+          <p:cNvSpPr txBox="1"/>
+          <p:nvPr/>
+        </p:nvSpPr>
+        <p:spPr>
+          <a:xfrm>
+            <a:off x="2523718" y="3535940"/>
+            <a:ext cx="442301" cy="369012"/>
+          </a:xfrm>
+          <a:prstGeom prst="rect">
+            <a:avLst/>
+          </a:prstGeom>
+          <a:noFill/>
+        </p:spPr>
+        <p:txBody>
+          <a:bodyPr wrap="square" rtlCol="0">
+            <a:spAutoFit/>
+          </a:bodyPr>
+          <a:lstStyle/>
+          <a:p>
+            <a:r>
+              <a:rPr lang="en-US" sz="1798" b="1" dirty="0">
+                <a:latin typeface="Arial" panose="020B0604020202020204" pitchFamily="34" charset="0"/>
+                <a:cs typeface="Arial" panose="020B0604020202020204" pitchFamily="34" charset="0"/>
+              </a:rPr>
+              <a:t>B.</a:t>
+            </a:r>
+          </a:p>
+        </p:txBody>
+      </p:sp>
+      <p:sp>
+        <p:nvSpPr>
+          <p:cNvPr id="19" name="TextBox 18">
+            <a:extLst>
+              <a:ext uri="{FF2B5EF4-FFF2-40B4-BE49-F238E27FC236}">
+                <a16:creationId xmlns:a16="http://schemas.microsoft.com/office/drawing/2014/main" id="{EABC55F7-CFE5-FB85-5135-CDA3030DABDF}"/>
+              </a:ext>
+            </a:extLst>
+          </p:cNvPr>
+          <p:cNvSpPr txBox="1"/>
+          <p:nvPr/>
+        </p:nvSpPr>
+        <p:spPr>
+          <a:xfrm>
+            <a:off x="3920069" y="2195384"/>
+            <a:ext cx="951229" cy="338554"/>
+          </a:xfrm>
+          <a:prstGeom prst="rect">
+            <a:avLst/>
+          </a:prstGeom>
+          <a:noFill/>
+        </p:spPr>
+        <p:txBody>
+          <a:bodyPr wrap="square" rtlCol="0">
+            <a:spAutoFit/>
+          </a:bodyPr>
+          <a:lstStyle/>
+          <a:p>
+            <a:pPr algn="ctr"/>
+            <a:r>
+              <a:rPr lang="en-US" sz="1600" dirty="0">
+                <a:latin typeface="Segoe UI" panose="020B0502040204020203" pitchFamily="34" charset="0"/>
+                <a:cs typeface="Segoe UI" panose="020B0502040204020203" pitchFamily="34" charset="0"/>
+              </a:rPr>
+              <a:t>Baseline</a:t>
+            </a:r>
+            <a:endParaRPr lang="en-US" dirty="0">
+              <a:latin typeface="Segoe UI" panose="020B0502040204020203" pitchFamily="34" charset="0"/>
+              <a:cs typeface="Segoe UI" panose="020B0502040204020203" pitchFamily="34" charset="0"/>
+            </a:endParaRPr>
+          </a:p>
+        </p:txBody>
+      </p:sp>
+      <p:sp>
+        <p:nvSpPr>
+          <p:cNvPr id="20" name="TextBox 19">
+            <a:extLst>
+              <a:ext uri="{FF2B5EF4-FFF2-40B4-BE49-F238E27FC236}">
+                <a16:creationId xmlns:a16="http://schemas.microsoft.com/office/drawing/2014/main" id="{9988693F-5748-946D-9D12-F70191E83A5D}"/>
+              </a:ext>
+            </a:extLst>
+          </p:cNvPr>
+          <p:cNvSpPr txBox="1"/>
+          <p:nvPr/>
+        </p:nvSpPr>
+        <p:spPr>
+          <a:xfrm>
+            <a:off x="7099350" y="2195384"/>
+            <a:ext cx="1071546" cy="338554"/>
+          </a:xfrm>
+          <a:prstGeom prst="rect">
+            <a:avLst/>
+          </a:prstGeom>
+          <a:noFill/>
+        </p:spPr>
+        <p:txBody>
+          <a:bodyPr wrap="square" rtlCol="0">
+            <a:spAutoFit/>
+          </a:bodyPr>
+          <a:lstStyle/>
+          <a:p>
+            <a:pPr algn="ctr"/>
+            <a:r>
+              <a:rPr lang="en-US" sz="1600" dirty="0">
+                <a:latin typeface="Segoe UI" panose="020B0502040204020203" pitchFamily="34" charset="0"/>
+                <a:cs typeface="Segoe UI" panose="020B0502040204020203" pitchFamily="34" charset="0"/>
+              </a:rPr>
+              <a:t>Post-HFS</a:t>
+            </a:r>
+            <a:endParaRPr lang="en-US" dirty="0">
+              <a:latin typeface="Segoe UI" panose="020B0502040204020203" pitchFamily="34" charset="0"/>
+              <a:cs typeface="Segoe UI" panose="020B0502040204020203" pitchFamily="34" charset="0"/>
+            </a:endParaRPr>
+          </a:p>
+        </p:txBody>
+      </p:sp>
+      <p:sp>
+        <p:nvSpPr>
+          <p:cNvPr id="21" name="TextBox 20">
+            <a:extLst>
+              <a:ext uri="{FF2B5EF4-FFF2-40B4-BE49-F238E27FC236}">
+                <a16:creationId xmlns:a16="http://schemas.microsoft.com/office/drawing/2014/main" id="{92885C22-402E-2BEA-C6F7-68E262B64A6F}"/>
+              </a:ext>
+            </a:extLst>
+          </p:cNvPr>
+          <p:cNvSpPr txBox="1"/>
+          <p:nvPr/>
+        </p:nvSpPr>
+        <p:spPr>
+          <a:xfrm>
+            <a:off x="2523718" y="7524478"/>
+            <a:ext cx="442301" cy="369012"/>
+          </a:xfrm>
+          <a:prstGeom prst="rect">
+            <a:avLst/>
+          </a:prstGeom>
+          <a:noFill/>
+        </p:spPr>
+        <p:txBody>
+          <a:bodyPr wrap="square" rtlCol="0">
+            <a:spAutoFit/>
+          </a:bodyPr>
+          <a:lstStyle/>
+          <a:p>
+            <a:r>
+              <a:rPr lang="en-US" sz="1798" b="1" dirty="0">
+                <a:latin typeface="Arial" panose="020B0604020202020204" pitchFamily="34" charset="0"/>
+                <a:cs typeface="Arial" panose="020B0604020202020204" pitchFamily="34" charset="0"/>
+              </a:rPr>
+              <a:t>C.</a:t>
+            </a:r>
+          </a:p>
+        </p:txBody>
+      </p:sp>
+      <p:sp>
+        <p:nvSpPr>
+          <p:cNvPr id="11" name="TextBox 10">
+            <a:extLst>
+              <a:ext uri="{FF2B5EF4-FFF2-40B4-BE49-F238E27FC236}">
+                <a16:creationId xmlns:a16="http://schemas.microsoft.com/office/drawing/2014/main" id="{231B6520-831E-6F7F-C175-B488C2A2B043}"/>
+              </a:ext>
+            </a:extLst>
+          </p:cNvPr>
+          <p:cNvSpPr txBox="1"/>
+          <p:nvPr/>
+        </p:nvSpPr>
+        <p:spPr>
+          <a:xfrm>
+            <a:off x="2523718" y="2145549"/>
+            <a:ext cx="442301" cy="369012"/>
+          </a:xfrm>
+          <a:prstGeom prst="rect">
+            <a:avLst/>
+          </a:prstGeom>
+          <a:noFill/>
+        </p:spPr>
+        <p:txBody>
+          <a:bodyPr wrap="square" rtlCol="0">
+            <a:spAutoFit/>
+          </a:bodyPr>
+          <a:lstStyle/>
+          <a:p>
+            <a:r>
+              <a:rPr lang="en-US" sz="1798" b="1" dirty="0">
+                <a:latin typeface="Arial" panose="020B0604020202020204" pitchFamily="34" charset="0"/>
+                <a:cs typeface="Arial" panose="020B0604020202020204" pitchFamily="34" charset="0"/>
+              </a:rPr>
+              <a:t>A.</a:t>
+            </a:r>
+          </a:p>
+        </p:txBody>
+      </p:sp>
+      <p:pic>
+        <p:nvPicPr>
+          <p:cNvPr id="10" name="Picture 9">
+            <a:extLst>
+              <a:ext uri="{FF2B5EF4-FFF2-40B4-BE49-F238E27FC236}">
+                <a16:creationId xmlns:a16="http://schemas.microsoft.com/office/drawing/2014/main" id="{9BE24659-B423-622B-264A-8090E48CC80E}"/>
+              </a:ext>
+            </a:extLst>
+          </p:cNvPr>
+          <p:cNvPicPr>
+            <a:picLocks noChangeAspect="1"/>
+          </p:cNvPicPr>
+          <p:nvPr/>
+        </p:nvPicPr>
+        <p:blipFill>
+          <a:blip r:embed="rId5"/>
+          <a:srcRect l="14630" r="14630"/>
+          <a:stretch/>
+        </p:blipFill>
+        <p:spPr>
+          <a:xfrm>
+            <a:off x="3920069" y="2533938"/>
+            <a:ext cx="1083902" cy="1146690"/>
+          </a:xfrm>
+          <a:prstGeom prst="rect">
+            <a:avLst/>
+          </a:prstGeom>
+        </p:spPr>
+      </p:pic>
+      <p:pic>
+        <p:nvPicPr>
+          <p:cNvPr id="12" name="Picture 11">
+            <a:extLst>
+              <a:ext uri="{FF2B5EF4-FFF2-40B4-BE49-F238E27FC236}">
+                <a16:creationId xmlns:a16="http://schemas.microsoft.com/office/drawing/2014/main" id="{0A50E931-DD4C-4E70-46FE-7338F780025D}"/>
+              </a:ext>
+            </a:extLst>
+          </p:cNvPr>
+          <p:cNvPicPr>
+            <a:picLocks noChangeAspect="1"/>
+          </p:cNvPicPr>
+          <p:nvPr/>
+        </p:nvPicPr>
+        <p:blipFill>
+          <a:blip r:embed="rId6"/>
+          <a:srcRect l="3386" r="43965"/>
+          <a:stretch>
+            <a:fillRect/>
+          </a:stretch>
+        </p:blipFill>
+        <p:spPr>
+          <a:xfrm>
+            <a:off x="7142278" y="2528536"/>
+            <a:ext cx="1360721" cy="1146690"/>
+          </a:xfrm>
+          <a:prstGeom prst="rect">
+            <a:avLst/>
+          </a:prstGeom>
+        </p:spPr>
+      </p:pic>
+      <p:pic>
+        <p:nvPicPr>
+          <p:cNvPr id="13" name="Picture 12">
+            <a:extLst>
+              <a:ext uri="{FF2B5EF4-FFF2-40B4-BE49-F238E27FC236}">
+                <a16:creationId xmlns:a16="http://schemas.microsoft.com/office/drawing/2014/main" id="{9F753F04-A602-A00C-4FF7-53DAA273E02F}"/>
+              </a:ext>
+            </a:extLst>
+          </p:cNvPr>
+          <p:cNvPicPr>
+            <a:picLocks noChangeAspect="1"/>
+          </p:cNvPicPr>
+          <p:nvPr/>
+        </p:nvPicPr>
+        <p:blipFill>
+          <a:blip r:embed="rId6"/>
+          <a:srcRect l="50805" r="15044"/>
+          <a:stretch>
+            <a:fillRect/>
+          </a:stretch>
+        </p:blipFill>
+        <p:spPr>
+          <a:xfrm>
+            <a:off x="9120270" y="2791484"/>
+            <a:ext cx="882650" cy="1146690"/>
+          </a:xfrm>
+          <a:prstGeom prst="rect">
+            <a:avLst/>
+          </a:prstGeom>
+        </p:spPr>
+      </p:pic>
+    </p:spTree>
+    <p:extLst>
+      <p:ext uri="{BB962C8B-B14F-4D97-AF65-F5344CB8AC3E}">
+        <p14:creationId xmlns:p14="http://schemas.microsoft.com/office/powerpoint/2010/main" val="1268561132"/>
+      </p:ext>
+    </p:extLst>
+  </p:cSld>
+  <p:clrMapOvr>
+    <a:masterClrMapping/>
+  </p:clrMapOvr>
+</p:sld>
+</file>
+
+<file path=ppt/slides/slide4.xml><?xml version="1.0" encoding="utf-8"?>
+<p:sld xmlns:a="http://schemas.openxmlformats.org/drawingml/2006/main" xmlns:r="http://schemas.openxmlformats.org/officeDocument/2006/relationships" xmlns:p="http://schemas.openxmlformats.org/presentationml/2006/main">
+  <p:cSld>
+    <p:spTree>
+      <p:nvGrpSpPr>
+        <p:cNvPr id="1" name="">
+          <a:extLst>
+            <a:ext uri="{FF2B5EF4-FFF2-40B4-BE49-F238E27FC236}">
+              <a16:creationId xmlns:a16="http://schemas.microsoft.com/office/drawing/2014/main" id="{23C09D35-60BA-45B9-71BE-22F43D55CEDC}"/>
             </a:ext>
           </a:extLst>
         </p:cNvPr>
@@ -5692,7 +8453,7 @@
           <p:cNvPr id="2" name="Picture 1">
             <a:extLst>
               <a:ext uri="{FF2B5EF4-FFF2-40B4-BE49-F238E27FC236}">
-                <a16:creationId xmlns:a16="http://schemas.microsoft.com/office/drawing/2014/main" id="{1FE1508D-A100-3996-43CB-44765ACF5297}"/>
+                <a16:creationId xmlns:a16="http://schemas.microsoft.com/office/drawing/2014/main" id="{498E7C33-6420-0704-6F85-2EF92EF28064}"/>
               </a:ext>
             </a:extLst>
           </p:cNvPr>
@@ -5703,13 +8464,13 @@
         </p:nvPicPr>
         <p:blipFill>
           <a:blip r:embed="rId3"/>
-          <a:srcRect/>
+          <a:srcRect l="13167" r="13167"/>
           <a:stretch/>
         </p:blipFill>
         <p:spPr>
           <a:xfrm>
-            <a:off x="1389627" y="1747024"/>
-            <a:ext cx="5164400" cy="3696090"/>
+            <a:off x="3878365" y="2008531"/>
+            <a:ext cx="1016570" cy="1768987"/>
           </a:xfrm>
           <a:prstGeom prst="rect">
             <a:avLst/>
@@ -5718,10 +8479,10 @@
       </p:pic>
       <p:pic>
         <p:nvPicPr>
-          <p:cNvPr id="3" name="Picture 2">
-            <a:extLst>
-              <a:ext uri="{FF2B5EF4-FFF2-40B4-BE49-F238E27FC236}">
-                <a16:creationId xmlns:a16="http://schemas.microsoft.com/office/drawing/2014/main" id="{F77CDBB3-E172-75D7-14EA-205914823FFD}"/>
+          <p:cNvPr id="4" name="Picture 3">
+            <a:extLst>
+              <a:ext uri="{FF2B5EF4-FFF2-40B4-BE49-F238E27FC236}">
+                <a16:creationId xmlns:a16="http://schemas.microsoft.com/office/drawing/2014/main" id="{E3F349DA-EA52-D881-F09E-6F349A50DB37}"/>
               </a:ext>
             </a:extLst>
           </p:cNvPr>
@@ -5732,139 +8493,58 @@
         </p:nvPicPr>
         <p:blipFill>
           <a:blip r:embed="rId4"/>
-          <a:srcRect/>
-          <a:stretch/>
+          <a:srcRect t="915" r="48586" b="915"/>
+          <a:stretch>
+            <a:fillRect/>
+          </a:stretch>
         </p:blipFill>
         <p:spPr>
           <a:xfrm>
-            <a:off x="1389627" y="5156572"/>
-            <a:ext cx="4177770" cy="2983146"/>
+            <a:off x="7135321" y="2008531"/>
+            <a:ext cx="1016570" cy="1768987"/>
           </a:xfrm>
           <a:prstGeom prst="rect">
             <a:avLst/>
           </a:prstGeom>
         </p:spPr>
       </p:pic>
-      <p:sp>
-        <p:nvSpPr>
-          <p:cNvPr id="5" name="TextBox 4">
-            <a:extLst>
-              <a:ext uri="{FF2B5EF4-FFF2-40B4-BE49-F238E27FC236}">
-                <a16:creationId xmlns:a16="http://schemas.microsoft.com/office/drawing/2014/main" id="{14B561BB-538A-1DB0-82E5-B109C76BD58D}"/>
-              </a:ext>
-            </a:extLst>
-          </p:cNvPr>
-          <p:cNvSpPr txBox="1"/>
+      <p:pic>
+        <p:nvPicPr>
+          <p:cNvPr id="5" name="Picture 4">
+            <a:extLst>
+              <a:ext uri="{FF2B5EF4-FFF2-40B4-BE49-F238E27FC236}">
+                <a16:creationId xmlns:a16="http://schemas.microsoft.com/office/drawing/2014/main" id="{A5DE1026-5CD6-E04D-648A-B6A6F27397E9}"/>
+              </a:ext>
+            </a:extLst>
+          </p:cNvPr>
+          <p:cNvPicPr>
+            <a:picLocks noChangeAspect="1"/>
+          </p:cNvPicPr>
           <p:nvPr/>
-        </p:nvSpPr>
-        <p:spPr>
-          <a:xfrm>
-            <a:off x="947329" y="1933679"/>
-            <a:ext cx="442301" cy="369012"/>
+        </p:nvPicPr>
+        <p:blipFill>
+          <a:blip r:embed="rId4"/>
+          <a:srcRect l="48586" t="915" b="915"/>
+          <a:stretch>
+            <a:fillRect/>
+          </a:stretch>
+        </p:blipFill>
+        <p:spPr>
+          <a:xfrm>
+            <a:off x="8672017" y="2015504"/>
+            <a:ext cx="1016571" cy="1768987"/>
           </a:xfrm>
           <a:prstGeom prst="rect">
             <a:avLst/>
           </a:prstGeom>
-          <a:noFill/>
-        </p:spPr>
-        <p:txBody>
-          <a:bodyPr wrap="square" rtlCol="0">
-            <a:spAutoFit/>
-          </a:bodyPr>
-          <a:lstStyle/>
-          <a:p>
-            <a:r>
-              <a:rPr lang="en-US" sz="1798" b="1" dirty="0">
-                <a:latin typeface="Arial" panose="020B0604020202020204" pitchFamily="34" charset="0"/>
-                <a:cs typeface="Arial" panose="020B0604020202020204" pitchFamily="34" charset="0"/>
-              </a:rPr>
-              <a:t>A.</a:t>
-            </a:r>
-          </a:p>
-        </p:txBody>
-      </p:sp>
-      <p:sp>
-        <p:nvSpPr>
-          <p:cNvPr id="7" name="TextBox 6">
-            <a:extLst>
-              <a:ext uri="{FF2B5EF4-FFF2-40B4-BE49-F238E27FC236}">
-                <a16:creationId xmlns:a16="http://schemas.microsoft.com/office/drawing/2014/main" id="{D743C77F-2167-9F93-B754-4AA4A027AF7B}"/>
-              </a:ext>
-            </a:extLst>
-          </p:cNvPr>
-          <p:cNvSpPr txBox="1"/>
-          <p:nvPr/>
-        </p:nvSpPr>
-        <p:spPr>
-          <a:xfrm>
-            <a:off x="947329" y="5334604"/>
-            <a:ext cx="442301" cy="369012"/>
-          </a:xfrm>
-          <a:prstGeom prst="rect">
-            <a:avLst/>
-          </a:prstGeom>
-          <a:noFill/>
-        </p:spPr>
-        <p:txBody>
-          <a:bodyPr wrap="square" rtlCol="0">
-            <a:spAutoFit/>
-          </a:bodyPr>
-          <a:lstStyle/>
-          <a:p>
-            <a:r>
-              <a:rPr lang="en-US" sz="1798" b="1" dirty="0">
-                <a:latin typeface="Arial" panose="020B0604020202020204" pitchFamily="34" charset="0"/>
-                <a:cs typeface="Arial" panose="020B0604020202020204" pitchFamily="34" charset="0"/>
-              </a:rPr>
-              <a:t>B.</a:t>
-            </a:r>
-          </a:p>
-        </p:txBody>
-      </p:sp>
-      <p:sp>
-        <p:nvSpPr>
-          <p:cNvPr id="13" name="TextBox 12">
-            <a:extLst>
-              <a:ext uri="{FF2B5EF4-FFF2-40B4-BE49-F238E27FC236}">
-                <a16:creationId xmlns:a16="http://schemas.microsoft.com/office/drawing/2014/main" id="{1C6FA95B-342B-86FD-CF7F-8AF7A5999D58}"/>
-              </a:ext>
-            </a:extLst>
-          </p:cNvPr>
-          <p:cNvSpPr txBox="1"/>
-          <p:nvPr/>
-        </p:nvSpPr>
-        <p:spPr>
-          <a:xfrm>
-            <a:off x="5781440" y="5334604"/>
-            <a:ext cx="442301" cy="369012"/>
-          </a:xfrm>
-          <a:prstGeom prst="rect">
-            <a:avLst/>
-          </a:prstGeom>
-          <a:noFill/>
-        </p:spPr>
-        <p:txBody>
-          <a:bodyPr wrap="square" rtlCol="0">
-            <a:spAutoFit/>
-          </a:bodyPr>
-          <a:lstStyle/>
-          <a:p>
-            <a:r>
-              <a:rPr lang="en-US" sz="1798" b="1" dirty="0">
-                <a:latin typeface="Arial" panose="020B0604020202020204" pitchFamily="34" charset="0"/>
-                <a:cs typeface="Arial" panose="020B0604020202020204" pitchFamily="34" charset="0"/>
-              </a:rPr>
-              <a:t>C.</a:t>
-            </a:r>
-          </a:p>
-        </p:txBody>
-      </p:sp>
+        </p:spPr>
+      </p:pic>
       <p:pic>
         <p:nvPicPr>
-          <p:cNvPr id="15" name="Picture 14">
-            <a:extLst>
-              <a:ext uri="{FF2B5EF4-FFF2-40B4-BE49-F238E27FC236}">
-                <a16:creationId xmlns:a16="http://schemas.microsoft.com/office/drawing/2014/main" id="{5278A236-1A7B-D7DA-B811-DD9AD6717E2E}"/>
+          <p:cNvPr id="3" name="Picture 2">
+            <a:extLst>
+              <a:ext uri="{FF2B5EF4-FFF2-40B4-BE49-F238E27FC236}">
+                <a16:creationId xmlns:a16="http://schemas.microsoft.com/office/drawing/2014/main" id="{E65DC753-EC24-19B5-A862-B3D0E669DFF9}"/>
               </a:ext>
             </a:extLst>
           </p:cNvPr>
@@ -5880,110 +8560,20 @@
         </p:blipFill>
         <p:spPr>
           <a:xfrm>
-            <a:off x="6223739" y="5160606"/>
-            <a:ext cx="4177770" cy="2975078"/>
+            <a:off x="2766401" y="7801578"/>
+            <a:ext cx="6357739" cy="4571999"/>
           </a:xfrm>
           <a:prstGeom prst="rect">
             <a:avLst/>
           </a:prstGeom>
         </p:spPr>
       </p:pic>
-      <p:sp>
-        <p:nvSpPr>
-          <p:cNvPr id="18" name="Rectangle 17">
-            <a:extLst>
-              <a:ext uri="{FF2B5EF4-FFF2-40B4-BE49-F238E27FC236}">
-                <a16:creationId xmlns:a16="http://schemas.microsoft.com/office/drawing/2014/main" id="{C2FA7343-858C-C2C7-03E9-ECB375C1A9A9}"/>
-              </a:ext>
-            </a:extLst>
-          </p:cNvPr>
-          <p:cNvSpPr/>
-          <p:nvPr/>
-        </p:nvSpPr>
-        <p:spPr>
-          <a:xfrm>
-            <a:off x="4343400" y="2302691"/>
-            <a:ext cx="1023257" cy="538480"/>
-          </a:xfrm>
-          <a:prstGeom prst="rect">
-            <a:avLst/>
-          </a:prstGeom>
-          <a:solidFill>
-            <a:schemeClr val="bg1"/>
-          </a:solidFill>
-          <a:ln>
-            <a:solidFill>
-              <a:schemeClr val="bg1"/>
-            </a:solidFill>
-          </a:ln>
-        </p:spPr>
-        <p:style>
-          <a:lnRef idx="2">
-            <a:schemeClr val="accent1">
-              <a:shade val="15000"/>
-            </a:schemeClr>
-          </a:lnRef>
-          <a:fillRef idx="1">
-            <a:schemeClr val="accent1"/>
-          </a:fillRef>
-          <a:effectRef idx="0">
-            <a:schemeClr val="accent1"/>
-          </a:effectRef>
-          <a:fontRef idx="minor">
-            <a:schemeClr val="lt1"/>
-          </a:fontRef>
-        </p:style>
-        <p:txBody>
-          <a:bodyPr rtlCol="0" anchor="ctr"/>
-          <a:lstStyle/>
-          <a:p>
-            <a:pPr algn="ctr"/>
-            <a:endParaRPr lang="en-US"/>
-          </a:p>
-        </p:txBody>
-      </p:sp>
-    </p:spTree>
-    <p:extLst>
-      <p:ext uri="{BB962C8B-B14F-4D97-AF65-F5344CB8AC3E}">
-        <p14:creationId xmlns:p14="http://schemas.microsoft.com/office/powerpoint/2010/main" val="1679164209"/>
-      </p:ext>
-    </p:extLst>
-  </p:cSld>
-  <p:clrMapOvr>
-    <a:masterClrMapping/>
-  </p:clrMapOvr>
-</p:sld>
-</file>
-
-<file path=ppt/slides/slide4.xml><?xml version="1.0" encoding="utf-8"?>
-<p:sld xmlns:a="http://schemas.openxmlformats.org/drawingml/2006/main" xmlns:r="http://schemas.openxmlformats.org/officeDocument/2006/relationships" xmlns:p="http://schemas.openxmlformats.org/presentationml/2006/main">
-  <p:cSld>
-    <p:spTree>
-      <p:nvGrpSpPr>
-        <p:cNvPr id="1" name="">
-          <a:extLst>
-            <a:ext uri="{FF2B5EF4-FFF2-40B4-BE49-F238E27FC236}">
-              <a16:creationId xmlns:a16="http://schemas.microsoft.com/office/drawing/2014/main" id="{AA05544D-9ABD-5350-856E-F20BB995466A}"/>
-            </a:ext>
-          </a:extLst>
-        </p:cNvPr>
-        <p:cNvGrpSpPr/>
-        <p:nvPr/>
-      </p:nvGrpSpPr>
-      <p:grpSpPr>
-        <a:xfrm>
-          <a:off x="0" y="0"/>
-          <a:ext cx="0" cy="0"/>
-          <a:chOff x="0" y="0"/>
-          <a:chExt cx="0" cy="0"/>
-        </a:xfrm>
-      </p:grpSpPr>
       <p:pic>
         <p:nvPicPr>
-          <p:cNvPr id="2" name="Picture 1">
-            <a:extLst>
-              <a:ext uri="{FF2B5EF4-FFF2-40B4-BE49-F238E27FC236}">
-                <a16:creationId xmlns:a16="http://schemas.microsoft.com/office/drawing/2014/main" id="{7E3804BF-F94F-C32A-445D-9CE8975C9A85}"/>
+          <p:cNvPr id="7" name="Picture 6">
+            <a:extLst>
+              <a:ext uri="{FF2B5EF4-FFF2-40B4-BE49-F238E27FC236}">
+                <a16:creationId xmlns:a16="http://schemas.microsoft.com/office/drawing/2014/main" id="{7B998DCE-57C0-63CD-4921-E820BB468C64}"/>
               </a:ext>
             </a:extLst>
           </p:cNvPr>
@@ -5993,55 +8583,64 @@
           <p:nvPr/>
         </p:nvPicPr>
         <p:blipFill>
-          <a:blip r:embed="rId3"/>
+          <a:blip r:embed="rId6"/>
           <a:srcRect/>
           <a:stretch/>
         </p:blipFill>
         <p:spPr>
           <a:xfrm>
-            <a:off x="1389627" y="1751243"/>
-            <a:ext cx="5164400" cy="3687651"/>
+            <a:off x="2770270" y="3720446"/>
+            <a:ext cx="6350000" cy="4572000"/>
           </a:xfrm>
           <a:prstGeom prst="rect">
             <a:avLst/>
           </a:prstGeom>
         </p:spPr>
       </p:pic>
-      <p:pic>
-        <p:nvPicPr>
-          <p:cNvPr id="3" name="Picture 2">
-            <a:extLst>
-              <a:ext uri="{FF2B5EF4-FFF2-40B4-BE49-F238E27FC236}">
-                <a16:creationId xmlns:a16="http://schemas.microsoft.com/office/drawing/2014/main" id="{1D98B766-F7F7-D7B3-B5D8-8573FD334473}"/>
-              </a:ext>
-            </a:extLst>
-          </p:cNvPr>
-          <p:cNvPicPr>
-            <a:picLocks noChangeAspect="1"/>
-          </p:cNvPicPr>
+      <p:sp>
+        <p:nvSpPr>
+          <p:cNvPr id="8" name="TextBox 7">
+            <a:extLst>
+              <a:ext uri="{FF2B5EF4-FFF2-40B4-BE49-F238E27FC236}">
+                <a16:creationId xmlns:a16="http://schemas.microsoft.com/office/drawing/2014/main" id="{0761FF33-AD5D-8C57-E767-EF832C2B9E1B}"/>
+              </a:ext>
+            </a:extLst>
+          </p:cNvPr>
+          <p:cNvSpPr txBox="1"/>
           <p:nvPr/>
-        </p:nvPicPr>
-        <p:blipFill>
-          <a:blip r:embed="rId4"/>
-          <a:srcRect/>
-          <a:stretch/>
-        </p:blipFill>
-        <p:spPr>
-          <a:xfrm>
-            <a:off x="1390309" y="5156571"/>
-            <a:ext cx="4997791" cy="3569851"/>
+        </p:nvSpPr>
+        <p:spPr>
+          <a:xfrm>
+            <a:off x="2523718" y="3535940"/>
+            <a:ext cx="442301" cy="369012"/>
           </a:xfrm>
           <a:prstGeom prst="rect">
             <a:avLst/>
           </a:prstGeom>
-        </p:spPr>
-      </p:pic>
-      <p:sp>
-        <p:nvSpPr>
-          <p:cNvPr id="5" name="TextBox 4">
-            <a:extLst>
-              <a:ext uri="{FF2B5EF4-FFF2-40B4-BE49-F238E27FC236}">
-                <a16:creationId xmlns:a16="http://schemas.microsoft.com/office/drawing/2014/main" id="{8F717B7C-55CD-9C21-C2D2-C6352086D031}"/>
+          <a:noFill/>
+        </p:spPr>
+        <p:txBody>
+          <a:bodyPr wrap="square" rtlCol="0">
+            <a:spAutoFit/>
+          </a:bodyPr>
+          <a:lstStyle/>
+          <a:p>
+            <a:r>
+              <a:rPr lang="en-US" sz="1798" b="1" dirty="0">
+                <a:latin typeface="Arial" panose="020B0604020202020204" pitchFamily="34" charset="0"/>
+                <a:cs typeface="Arial" panose="020B0604020202020204" pitchFamily="34" charset="0"/>
+              </a:rPr>
+              <a:t>B.</a:t>
+            </a:r>
+          </a:p>
+        </p:txBody>
+      </p:sp>
+      <p:sp>
+        <p:nvSpPr>
+          <p:cNvPr id="19" name="TextBox 18">
+            <a:extLst>
+              <a:ext uri="{FF2B5EF4-FFF2-40B4-BE49-F238E27FC236}">
+                <a16:creationId xmlns:a16="http://schemas.microsoft.com/office/drawing/2014/main" id="{5E1F7B0C-20B5-C2C2-151E-2601A4B1BB63}"/>
               </a:ext>
             </a:extLst>
           </p:cNvPr>
@@ -6050,7 +8649,131 @@
         </p:nvSpPr>
         <p:spPr>
           <a:xfrm>
-            <a:off x="947329" y="1933679"/>
+            <a:off x="3920069" y="2015504"/>
+            <a:ext cx="951229" cy="338554"/>
+          </a:xfrm>
+          <a:prstGeom prst="rect">
+            <a:avLst/>
+          </a:prstGeom>
+          <a:noFill/>
+        </p:spPr>
+        <p:txBody>
+          <a:bodyPr wrap="square" rtlCol="0">
+            <a:spAutoFit/>
+          </a:bodyPr>
+          <a:lstStyle/>
+          <a:p>
+            <a:pPr algn="ctr"/>
+            <a:r>
+              <a:rPr lang="en-US" sz="1600" dirty="0">
+                <a:latin typeface="Segoe UI" panose="020B0502040204020203" pitchFamily="34" charset="0"/>
+                <a:cs typeface="Segoe UI" panose="020B0502040204020203" pitchFamily="34" charset="0"/>
+              </a:rPr>
+              <a:t>Baseline</a:t>
+            </a:r>
+            <a:endParaRPr lang="en-US" dirty="0">
+              <a:latin typeface="Segoe UI" panose="020B0502040204020203" pitchFamily="34" charset="0"/>
+              <a:cs typeface="Segoe UI" panose="020B0502040204020203" pitchFamily="34" charset="0"/>
+            </a:endParaRPr>
+          </a:p>
+        </p:txBody>
+      </p:sp>
+      <p:sp>
+        <p:nvSpPr>
+          <p:cNvPr id="20" name="TextBox 19">
+            <a:extLst>
+              <a:ext uri="{FF2B5EF4-FFF2-40B4-BE49-F238E27FC236}">
+                <a16:creationId xmlns:a16="http://schemas.microsoft.com/office/drawing/2014/main" id="{C1D256BE-03EA-39EA-BA8B-2350AD9E613B}"/>
+              </a:ext>
+            </a:extLst>
+          </p:cNvPr>
+          <p:cNvSpPr txBox="1"/>
+          <p:nvPr/>
+        </p:nvSpPr>
+        <p:spPr>
+          <a:xfrm>
+            <a:off x="7099350" y="2015504"/>
+            <a:ext cx="1071546" cy="338554"/>
+          </a:xfrm>
+          <a:prstGeom prst="rect">
+            <a:avLst/>
+          </a:prstGeom>
+          <a:noFill/>
+        </p:spPr>
+        <p:txBody>
+          <a:bodyPr wrap="square" rtlCol="0">
+            <a:spAutoFit/>
+          </a:bodyPr>
+          <a:lstStyle/>
+          <a:p>
+            <a:pPr algn="ctr"/>
+            <a:r>
+              <a:rPr lang="en-US" sz="1600" dirty="0">
+                <a:latin typeface="Segoe UI" panose="020B0502040204020203" pitchFamily="34" charset="0"/>
+                <a:cs typeface="Segoe UI" panose="020B0502040204020203" pitchFamily="34" charset="0"/>
+              </a:rPr>
+              <a:t>Post-HFS</a:t>
+            </a:r>
+            <a:endParaRPr lang="en-US" dirty="0">
+              <a:latin typeface="Segoe UI" panose="020B0502040204020203" pitchFamily="34" charset="0"/>
+              <a:cs typeface="Segoe UI" panose="020B0502040204020203" pitchFamily="34" charset="0"/>
+            </a:endParaRPr>
+          </a:p>
+        </p:txBody>
+      </p:sp>
+      <p:sp>
+        <p:nvSpPr>
+          <p:cNvPr id="21" name="TextBox 20">
+            <a:extLst>
+              <a:ext uri="{FF2B5EF4-FFF2-40B4-BE49-F238E27FC236}">
+                <a16:creationId xmlns:a16="http://schemas.microsoft.com/office/drawing/2014/main" id="{9A700A32-97C8-DA99-BA3A-3F11695D35BE}"/>
+              </a:ext>
+            </a:extLst>
+          </p:cNvPr>
+          <p:cNvSpPr txBox="1"/>
+          <p:nvPr/>
+        </p:nvSpPr>
+        <p:spPr>
+          <a:xfrm>
+            <a:off x="2523718" y="7524478"/>
+            <a:ext cx="442301" cy="369012"/>
+          </a:xfrm>
+          <a:prstGeom prst="rect">
+            <a:avLst/>
+          </a:prstGeom>
+          <a:noFill/>
+        </p:spPr>
+        <p:txBody>
+          <a:bodyPr wrap="square" rtlCol="0">
+            <a:spAutoFit/>
+          </a:bodyPr>
+          <a:lstStyle/>
+          <a:p>
+            <a:r>
+              <a:rPr lang="en-US" sz="1798" b="1" dirty="0">
+                <a:latin typeface="Arial" panose="020B0604020202020204" pitchFamily="34" charset="0"/>
+                <a:cs typeface="Arial" panose="020B0604020202020204" pitchFamily="34" charset="0"/>
+              </a:rPr>
+              <a:t>C.</a:t>
+            </a:r>
+          </a:p>
+        </p:txBody>
+      </p:sp>
+      <p:sp>
+        <p:nvSpPr>
+          <p:cNvPr id="11" name="TextBox 10">
+            <a:extLst>
+              <a:ext uri="{FF2B5EF4-FFF2-40B4-BE49-F238E27FC236}">
+                <a16:creationId xmlns:a16="http://schemas.microsoft.com/office/drawing/2014/main" id="{9EB54FA6-337A-1C7E-0CC8-3028AA7FC15B}"/>
+              </a:ext>
+            </a:extLst>
+          </p:cNvPr>
+          <p:cNvSpPr txBox="1"/>
+          <p:nvPr/>
+        </p:nvSpPr>
+        <p:spPr>
+          <a:xfrm>
+            <a:off x="2523718" y="1995649"/>
             <a:ext cx="442301" cy="369012"/>
           </a:xfrm>
           <a:prstGeom prst="rect">
@@ -6074,48 +8797,10 @@
           </a:p>
         </p:txBody>
       </p:sp>
-      <p:sp>
-        <p:nvSpPr>
-          <p:cNvPr id="7" name="TextBox 6">
-            <a:extLst>
-              <a:ext uri="{FF2B5EF4-FFF2-40B4-BE49-F238E27FC236}">
-                <a16:creationId xmlns:a16="http://schemas.microsoft.com/office/drawing/2014/main" id="{0E22B5E4-1C11-AA2A-24AB-013AE75006D1}"/>
-              </a:ext>
-            </a:extLst>
-          </p:cNvPr>
-          <p:cNvSpPr txBox="1"/>
-          <p:nvPr/>
-        </p:nvSpPr>
-        <p:spPr>
-          <a:xfrm>
-            <a:off x="947329" y="5334604"/>
-            <a:ext cx="442301" cy="369012"/>
-          </a:xfrm>
-          <a:prstGeom prst="rect">
-            <a:avLst/>
-          </a:prstGeom>
-          <a:noFill/>
-        </p:spPr>
-        <p:txBody>
-          <a:bodyPr wrap="square" rtlCol="0">
-            <a:spAutoFit/>
-          </a:bodyPr>
-          <a:lstStyle/>
-          <a:p>
-            <a:r>
-              <a:rPr lang="en-US" sz="1798" b="1" dirty="0">
-                <a:latin typeface="Arial" panose="020B0604020202020204" pitchFamily="34" charset="0"/>
-                <a:cs typeface="Arial" panose="020B0604020202020204" pitchFamily="34" charset="0"/>
-              </a:rPr>
-              <a:t>B.</a:t>
-            </a:r>
-          </a:p>
-        </p:txBody>
-      </p:sp>
     </p:spTree>
     <p:extLst>
       <p:ext uri="{BB962C8B-B14F-4D97-AF65-F5344CB8AC3E}">
-        <p14:creationId xmlns:p14="http://schemas.microsoft.com/office/powerpoint/2010/main" val="2686138209"/>
+        <p14:creationId xmlns:p14="http://schemas.microsoft.com/office/powerpoint/2010/main" val="1186625376"/>
       </p:ext>
     </p:extLst>
   </p:cSld>
@@ -6133,7 +8818,7 @@
         <p:cNvPr id="1" name="">
           <a:extLst>
             <a:ext uri="{FF2B5EF4-FFF2-40B4-BE49-F238E27FC236}">
-              <a16:creationId xmlns:a16="http://schemas.microsoft.com/office/drawing/2014/main" id="{4A38CFB1-BC09-A4AC-9155-613B6F0D8F4E}"/>
+              <a16:creationId xmlns:a16="http://schemas.microsoft.com/office/drawing/2014/main" id="{D7AB3326-0A0B-D82A-C061-64DC8FEFFCD3}"/>
             </a:ext>
           </a:extLst>
         </p:cNvPr>
@@ -6150,10 +8835,10 @@
       </p:grpSpPr>
       <p:pic>
         <p:nvPicPr>
-          <p:cNvPr id="2" name="Picture 1">
-            <a:extLst>
-              <a:ext uri="{FF2B5EF4-FFF2-40B4-BE49-F238E27FC236}">
-                <a16:creationId xmlns:a16="http://schemas.microsoft.com/office/drawing/2014/main" id="{856DB650-7D74-0342-72CA-571144E6A9D2}"/>
+          <p:cNvPr id="3" name="Picture 2">
+            <a:extLst>
+              <a:ext uri="{FF2B5EF4-FFF2-40B4-BE49-F238E27FC236}">
+                <a16:creationId xmlns:a16="http://schemas.microsoft.com/office/drawing/2014/main" id="{3F5B0C7C-CA46-F9AC-09CD-3BFC7832DE1E}"/>
               </a:ext>
             </a:extLst>
           </p:cNvPr>
@@ -6169,8 +8854,8 @@
         </p:blipFill>
         <p:spPr>
           <a:xfrm>
-            <a:off x="1389627" y="1751243"/>
-            <a:ext cx="5164399" cy="3687651"/>
+            <a:off x="1066372" y="4807131"/>
+            <a:ext cx="5379492" cy="3845537"/>
           </a:xfrm>
           <a:prstGeom prst="rect">
             <a:avLst/>
@@ -6179,10 +8864,10 @@
       </p:pic>
       <p:pic>
         <p:nvPicPr>
-          <p:cNvPr id="3" name="Picture 2">
-            <a:extLst>
-              <a:ext uri="{FF2B5EF4-FFF2-40B4-BE49-F238E27FC236}">
-                <a16:creationId xmlns:a16="http://schemas.microsoft.com/office/drawing/2014/main" id="{208CBAC7-EFD5-70FF-250B-FAB43DBCD0E3}"/>
+          <p:cNvPr id="5" name="Picture 4">
+            <a:extLst>
+              <a:ext uri="{FF2B5EF4-FFF2-40B4-BE49-F238E27FC236}">
+                <a16:creationId xmlns:a16="http://schemas.microsoft.com/office/drawing/2014/main" id="{175C98CB-A033-2A0D-BA91-0B6764FC1636}"/>
               </a:ext>
             </a:extLst>
           </p:cNvPr>
@@ -6198,8 +8883,8 @@
         </p:blipFill>
         <p:spPr>
           <a:xfrm>
-            <a:off x="1392287" y="5156571"/>
-            <a:ext cx="4993835" cy="3569851"/>
+            <a:off x="6183193" y="4799894"/>
+            <a:ext cx="5368839" cy="3845538"/>
           </a:xfrm>
           <a:prstGeom prst="rect">
             <a:avLst/>
@@ -6208,10 +8893,10 @@
       </p:pic>
       <p:sp>
         <p:nvSpPr>
-          <p:cNvPr id="5" name="TextBox 4">
-            <a:extLst>
-              <a:ext uri="{FF2B5EF4-FFF2-40B4-BE49-F238E27FC236}">
-                <a16:creationId xmlns:a16="http://schemas.microsoft.com/office/drawing/2014/main" id="{7C4299FE-F358-CB04-DFB1-4C20801CC3E1}"/>
+          <p:cNvPr id="6" name="TextBox 5">
+            <a:extLst>
+              <a:ext uri="{FF2B5EF4-FFF2-40B4-BE49-F238E27FC236}">
+                <a16:creationId xmlns:a16="http://schemas.microsoft.com/office/drawing/2014/main" id="{36BE50ED-ADCF-80A3-9626-11BE9628F85D}"/>
               </a:ext>
             </a:extLst>
           </p:cNvPr>
@@ -6220,7 +8905,7 @@
         </p:nvSpPr>
         <p:spPr>
           <a:xfrm>
-            <a:off x="947329" y="1933679"/>
+            <a:off x="843091" y="4807131"/>
             <a:ext cx="442301" cy="369012"/>
           </a:xfrm>
           <a:prstGeom prst="rect">
@@ -6249,7 +8934,7 @@
           <p:cNvPr id="7" name="TextBox 6">
             <a:extLst>
               <a:ext uri="{FF2B5EF4-FFF2-40B4-BE49-F238E27FC236}">
-                <a16:creationId xmlns:a16="http://schemas.microsoft.com/office/drawing/2014/main" id="{B70EECBD-0FFF-A464-B00E-F1BFE20D9C32}"/>
+                <a16:creationId xmlns:a16="http://schemas.microsoft.com/office/drawing/2014/main" id="{A0E7A53E-D3E7-6AFB-3983-40A38277B4AB}"/>
               </a:ext>
             </a:extLst>
           </p:cNvPr>
@@ -6258,7 +8943,7 @@
         </p:nvSpPr>
         <p:spPr>
           <a:xfrm>
-            <a:off x="947329" y="5334604"/>
+            <a:off x="6089650" y="4807131"/>
             <a:ext cx="442301" cy="369012"/>
           </a:xfrm>
           <a:prstGeom prst="rect">
@@ -6285,7 +8970,7 @@
     </p:spTree>
     <p:extLst>
       <p:ext uri="{BB962C8B-B14F-4D97-AF65-F5344CB8AC3E}">
-        <p14:creationId xmlns:p14="http://schemas.microsoft.com/office/powerpoint/2010/main" val="2122650455"/>
+        <p14:creationId xmlns:p14="http://schemas.microsoft.com/office/powerpoint/2010/main" val="76598409"/>
       </p:ext>
     </p:extLst>
   </p:cSld>
@@ -6303,7 +8988,7 @@
         <p:cNvPr id="1" name="">
           <a:extLst>
             <a:ext uri="{FF2B5EF4-FFF2-40B4-BE49-F238E27FC236}">
-              <a16:creationId xmlns:a16="http://schemas.microsoft.com/office/drawing/2014/main" id="{08BD6F1C-62FC-C37A-9DAA-1FF3E97F5845}"/>
+              <a16:creationId xmlns:a16="http://schemas.microsoft.com/office/drawing/2014/main" id="{727B791B-B2A0-4985-CD6C-78FAFD3FB88B}"/>
             </a:ext>
           </a:extLst>
         </p:cNvPr>
@@ -6320,10 +9005,10 @@
       </p:grpSpPr>
       <p:pic>
         <p:nvPicPr>
-          <p:cNvPr id="2" name="Picture 1">
-            <a:extLst>
-              <a:ext uri="{FF2B5EF4-FFF2-40B4-BE49-F238E27FC236}">
-                <a16:creationId xmlns:a16="http://schemas.microsoft.com/office/drawing/2014/main" id="{450E4CBA-9BA2-2C58-BEA0-74E8595EB2A7}"/>
+          <p:cNvPr id="3" name="Picture 2">
+            <a:extLst>
+              <a:ext uri="{FF2B5EF4-FFF2-40B4-BE49-F238E27FC236}">
+                <a16:creationId xmlns:a16="http://schemas.microsoft.com/office/drawing/2014/main" id="{E294F8AE-98D0-737B-1F8D-F2EF165215E3}"/>
               </a:ext>
             </a:extLst>
           </p:cNvPr>
@@ -6339,8 +9024,8 @@
         </p:blipFill>
         <p:spPr>
           <a:xfrm>
-            <a:off x="1389627" y="1747024"/>
-            <a:ext cx="5164400" cy="3696090"/>
+            <a:off x="1066372" y="4812457"/>
+            <a:ext cx="5379492" cy="3834885"/>
           </a:xfrm>
           <a:prstGeom prst="rect">
             <a:avLst/>
@@ -6349,10 +9034,10 @@
       </p:pic>
       <p:pic>
         <p:nvPicPr>
-          <p:cNvPr id="3" name="Picture 2">
-            <a:extLst>
-              <a:ext uri="{FF2B5EF4-FFF2-40B4-BE49-F238E27FC236}">
-                <a16:creationId xmlns:a16="http://schemas.microsoft.com/office/drawing/2014/main" id="{72CE2206-F654-7EF3-A541-178B0B307326}"/>
+          <p:cNvPr id="5" name="Picture 4">
+            <a:extLst>
+              <a:ext uri="{FF2B5EF4-FFF2-40B4-BE49-F238E27FC236}">
+                <a16:creationId xmlns:a16="http://schemas.microsoft.com/office/drawing/2014/main" id="{22A0DDA8-2753-77BC-4FA8-723D7CDBA1EB}"/>
               </a:ext>
             </a:extLst>
           </p:cNvPr>
@@ -6368,8 +9053,8 @@
         </p:blipFill>
         <p:spPr>
           <a:xfrm>
-            <a:off x="1389627" y="5156572"/>
-            <a:ext cx="4177770" cy="2983146"/>
+            <a:off x="6175736" y="4812457"/>
+            <a:ext cx="5379492" cy="3834885"/>
           </a:xfrm>
           <a:prstGeom prst="rect">
             <a:avLst/>
@@ -6378,10 +9063,10 @@
       </p:pic>
       <p:sp>
         <p:nvSpPr>
-          <p:cNvPr id="5" name="TextBox 4">
-            <a:extLst>
-              <a:ext uri="{FF2B5EF4-FFF2-40B4-BE49-F238E27FC236}">
-                <a16:creationId xmlns:a16="http://schemas.microsoft.com/office/drawing/2014/main" id="{9935F3B6-0098-F37E-B74B-FE6710DEB06A}"/>
+          <p:cNvPr id="6" name="TextBox 5">
+            <a:extLst>
+              <a:ext uri="{FF2B5EF4-FFF2-40B4-BE49-F238E27FC236}">
+                <a16:creationId xmlns:a16="http://schemas.microsoft.com/office/drawing/2014/main" id="{B92DA5D3-2CDB-B806-FE55-33836CE5612A}"/>
               </a:ext>
             </a:extLst>
           </p:cNvPr>
@@ -6390,7 +9075,7 @@
         </p:nvSpPr>
         <p:spPr>
           <a:xfrm>
-            <a:off x="947329" y="1933679"/>
+            <a:off x="843091" y="4807131"/>
             <a:ext cx="442301" cy="369012"/>
           </a:xfrm>
           <a:prstGeom prst="rect">
@@ -6419,7 +9104,7 @@
           <p:cNvPr id="7" name="TextBox 6">
             <a:extLst>
               <a:ext uri="{FF2B5EF4-FFF2-40B4-BE49-F238E27FC236}">
-                <a16:creationId xmlns:a16="http://schemas.microsoft.com/office/drawing/2014/main" id="{9BE8AB90-1862-5AB5-6EE4-089E08730372}"/>
+                <a16:creationId xmlns:a16="http://schemas.microsoft.com/office/drawing/2014/main" id="{685FAAA3-E9CC-B12C-8B09-967CD7CEA220}"/>
               </a:ext>
             </a:extLst>
           </p:cNvPr>
@@ -6428,7 +9113,7 @@
         </p:nvSpPr>
         <p:spPr>
           <a:xfrm>
-            <a:off x="947329" y="5334604"/>
+            <a:off x="6089650" y="4807131"/>
             <a:ext cx="442301" cy="369012"/>
           </a:xfrm>
           <a:prstGeom prst="rect">
@@ -6452,77 +9137,10 @@
           </a:p>
         </p:txBody>
       </p:sp>
-      <p:sp>
-        <p:nvSpPr>
-          <p:cNvPr id="13" name="TextBox 12">
-            <a:extLst>
-              <a:ext uri="{FF2B5EF4-FFF2-40B4-BE49-F238E27FC236}">
-                <a16:creationId xmlns:a16="http://schemas.microsoft.com/office/drawing/2014/main" id="{D1310423-CA50-C502-AD86-0FC176A7822C}"/>
-              </a:ext>
-            </a:extLst>
-          </p:cNvPr>
-          <p:cNvSpPr txBox="1"/>
-          <p:nvPr/>
-        </p:nvSpPr>
-        <p:spPr>
-          <a:xfrm>
-            <a:off x="5781440" y="5334604"/>
-            <a:ext cx="442301" cy="369012"/>
-          </a:xfrm>
-          <a:prstGeom prst="rect">
-            <a:avLst/>
-          </a:prstGeom>
-          <a:noFill/>
-        </p:spPr>
-        <p:txBody>
-          <a:bodyPr wrap="square" rtlCol="0">
-            <a:spAutoFit/>
-          </a:bodyPr>
-          <a:lstStyle/>
-          <a:p>
-            <a:r>
-              <a:rPr lang="en-US" sz="1798" b="1" dirty="0">
-                <a:latin typeface="Arial" panose="020B0604020202020204" pitchFamily="34" charset="0"/>
-                <a:cs typeface="Arial" panose="020B0604020202020204" pitchFamily="34" charset="0"/>
-              </a:rPr>
-              <a:t>C.</a:t>
-            </a:r>
-          </a:p>
-        </p:txBody>
-      </p:sp>
-      <p:pic>
-        <p:nvPicPr>
-          <p:cNvPr id="15" name="Picture 14">
-            <a:extLst>
-              <a:ext uri="{FF2B5EF4-FFF2-40B4-BE49-F238E27FC236}">
-                <a16:creationId xmlns:a16="http://schemas.microsoft.com/office/drawing/2014/main" id="{1E570686-3F28-B3CE-8FBB-5C2A7424380A}"/>
-              </a:ext>
-            </a:extLst>
-          </p:cNvPr>
-          <p:cNvPicPr>
-            <a:picLocks noChangeAspect="1"/>
-          </p:cNvPicPr>
-          <p:nvPr/>
-        </p:nvPicPr>
-        <p:blipFill>
-          <a:blip r:embed="rId5"/>
-          <a:srcRect/>
-          <a:stretch/>
-        </p:blipFill>
-        <p:spPr>
-          <a:xfrm>
-            <a:off x="6223739" y="5156572"/>
-            <a:ext cx="4177770" cy="2983146"/>
-          </a:xfrm>
-          <a:prstGeom prst="rect">
-            <a:avLst/>
-          </a:prstGeom>
-        </p:spPr>
-      </p:pic>
     </p:spTree>
     <p:extLst>
       <p:ext uri="{BB962C8B-B14F-4D97-AF65-F5344CB8AC3E}">
-        <p14:creationId xmlns:p14="http://schemas.microsoft.com/office/powerpoint/2010/main" val="4168312661"/>
+        <p14:creationId xmlns:p14="http://schemas.microsoft.com/office/powerpoint/2010/main" val="1041711058"/>
       </p:ext>
     </p:extLst>
   </p:cSld>
@@ -6554,7 +9172,7 @@
           <p:cNvPr id="3" name="Picture 2">
             <a:extLst>
               <a:ext uri="{FF2B5EF4-FFF2-40B4-BE49-F238E27FC236}">
-                <a16:creationId xmlns:a16="http://schemas.microsoft.com/office/drawing/2014/main" id="{139E3991-F91C-0A33-8B5F-3BFF95493073}"/>
+                <a16:creationId xmlns:a16="http://schemas.microsoft.com/office/drawing/2014/main" id="{05E55FFC-492F-A410-3A60-CEC7F1B66229}"/>
               </a:ext>
             </a:extLst>
           </p:cNvPr>
@@ -6571,8 +9189,8 @@
         </p:blipFill>
         <p:spPr>
           <a:xfrm>
-            <a:off x="2744871" y="8161338"/>
-            <a:ext cx="6400800" cy="4572000"/>
+            <a:off x="1064242" y="4807131"/>
+            <a:ext cx="5383753" cy="3845538"/>
           </a:xfrm>
           <a:prstGeom prst="rect">
             <a:avLst/>
@@ -6581,10 +9199,10 @@
       </p:pic>
       <p:pic>
         <p:nvPicPr>
-          <p:cNvPr id="7" name="Picture 6">
-            <a:extLst>
-              <a:ext uri="{FF2B5EF4-FFF2-40B4-BE49-F238E27FC236}">
-                <a16:creationId xmlns:a16="http://schemas.microsoft.com/office/drawing/2014/main" id="{83014362-6086-BB23-ABD3-D492511B7670}"/>
+          <p:cNvPr id="5" name="Picture 4">
+            <a:extLst>
+              <a:ext uri="{FF2B5EF4-FFF2-40B4-BE49-F238E27FC236}">
+                <a16:creationId xmlns:a16="http://schemas.microsoft.com/office/drawing/2014/main" id="{DC5EF4CA-D5E2-63A8-DEF8-7F7B9F761990}"/>
               </a:ext>
             </a:extLst>
           </p:cNvPr>
@@ -6601,8 +9219,8 @@
         </p:blipFill>
         <p:spPr>
           <a:xfrm>
-            <a:off x="2744871" y="1794669"/>
-            <a:ext cx="6400800" cy="4572000"/>
+            <a:off x="6173606" y="4807131"/>
+            <a:ext cx="5383753" cy="3845538"/>
           </a:xfrm>
           <a:prstGeom prst="rect">
             <a:avLst/>
@@ -6611,10 +9229,10 @@
       </p:pic>
       <p:sp>
         <p:nvSpPr>
-          <p:cNvPr id="8" name="TextBox 7">
-            <a:extLst>
-              <a:ext uri="{FF2B5EF4-FFF2-40B4-BE49-F238E27FC236}">
-                <a16:creationId xmlns:a16="http://schemas.microsoft.com/office/drawing/2014/main" id="{518656C9-7DDE-AA92-9A6F-B86984C97952}"/>
+          <p:cNvPr id="6" name="TextBox 5">
+            <a:extLst>
+              <a:ext uri="{FF2B5EF4-FFF2-40B4-BE49-F238E27FC236}">
+                <a16:creationId xmlns:a16="http://schemas.microsoft.com/office/drawing/2014/main" id="{2E530E5F-A9F9-0E0B-BF02-0AE993CF8549}"/>
               </a:ext>
             </a:extLst>
           </p:cNvPr>
@@ -6623,7 +9241,7 @@
         </p:nvSpPr>
         <p:spPr>
           <a:xfrm>
-            <a:off x="2523718" y="1610163"/>
+            <a:off x="843091" y="4807131"/>
             <a:ext cx="442301" cy="369012"/>
           </a:xfrm>
           <a:prstGeom prst="rect">
@@ -6649,10 +9267,10 @@
       </p:sp>
       <p:sp>
         <p:nvSpPr>
-          <p:cNvPr id="9" name="TextBox 8">
-            <a:extLst>
-              <a:ext uri="{FF2B5EF4-FFF2-40B4-BE49-F238E27FC236}">
-                <a16:creationId xmlns:a16="http://schemas.microsoft.com/office/drawing/2014/main" id="{8F33D50D-3EDA-3259-F433-6359C59353A2}"/>
+          <p:cNvPr id="7" name="TextBox 6">
+            <a:extLst>
+              <a:ext uri="{FF2B5EF4-FFF2-40B4-BE49-F238E27FC236}">
+                <a16:creationId xmlns:a16="http://schemas.microsoft.com/office/drawing/2014/main" id="{E004ED4C-3252-AB01-6529-035B248A68DF}"/>
               </a:ext>
             </a:extLst>
           </p:cNvPr>
@@ -6661,7 +9279,7 @@
         </p:nvSpPr>
         <p:spPr>
           <a:xfrm>
-            <a:off x="2523718" y="5997657"/>
+            <a:off x="6089650" y="4807131"/>
             <a:ext cx="442301" cy="369012"/>
           </a:xfrm>
           <a:prstGeom prst="rect">
@@ -6685,163 +9303,10 @@
           </a:p>
         </p:txBody>
       </p:sp>
-      <p:pic>
-        <p:nvPicPr>
-          <p:cNvPr id="18" name="Picture 17">
-            <a:extLst>
-              <a:ext uri="{FF2B5EF4-FFF2-40B4-BE49-F238E27FC236}">
-                <a16:creationId xmlns:a16="http://schemas.microsoft.com/office/drawing/2014/main" id="{EC68AC3F-A8D5-5784-E4E3-2E49AB381641}"/>
-              </a:ext>
-            </a:extLst>
-          </p:cNvPr>
-          <p:cNvPicPr>
-            <a:picLocks noChangeAspect="1"/>
-          </p:cNvPicPr>
-          <p:nvPr/>
-        </p:nvPicPr>
-        <p:blipFill>
-          <a:blip r:embed="rId5"/>
-          <a:srcRect/>
-          <a:stretch/>
-        </p:blipFill>
-        <p:spPr>
-          <a:xfrm>
-            <a:off x="4013105" y="6617872"/>
-            <a:ext cx="5132566" cy="1450872"/>
-          </a:xfrm>
-          <a:prstGeom prst="rect">
-            <a:avLst/>
-          </a:prstGeom>
-        </p:spPr>
-      </p:pic>
-      <p:sp>
-        <p:nvSpPr>
-          <p:cNvPr id="19" name="TextBox 18">
-            <a:extLst>
-              <a:ext uri="{FF2B5EF4-FFF2-40B4-BE49-F238E27FC236}">
-                <a16:creationId xmlns:a16="http://schemas.microsoft.com/office/drawing/2014/main" id="{315674EE-39E8-5A0E-4840-41FF5FCBE0D3}"/>
-              </a:ext>
-            </a:extLst>
-          </p:cNvPr>
-          <p:cNvSpPr txBox="1"/>
-          <p:nvPr/>
-        </p:nvSpPr>
-        <p:spPr>
-          <a:xfrm>
-            <a:off x="4218657" y="6448595"/>
-            <a:ext cx="951229" cy="338554"/>
-          </a:xfrm>
-          <a:prstGeom prst="rect">
-            <a:avLst/>
-          </a:prstGeom>
-          <a:noFill/>
-        </p:spPr>
-        <p:txBody>
-          <a:bodyPr wrap="square" rtlCol="0">
-            <a:spAutoFit/>
-          </a:bodyPr>
-          <a:lstStyle/>
-          <a:p>
-            <a:pPr algn="ctr"/>
-            <a:r>
-              <a:rPr lang="en-US" sz="1600" dirty="0">
-                <a:latin typeface="Segoe UI" panose="020B0502040204020203" pitchFamily="34" charset="0"/>
-                <a:cs typeface="Segoe UI" panose="020B0502040204020203" pitchFamily="34" charset="0"/>
-              </a:rPr>
-              <a:t>Baseline</a:t>
-            </a:r>
-            <a:endParaRPr lang="en-US" dirty="0">
-              <a:latin typeface="Segoe UI" panose="020B0502040204020203" pitchFamily="34" charset="0"/>
-              <a:cs typeface="Segoe UI" panose="020B0502040204020203" pitchFamily="34" charset="0"/>
-            </a:endParaRPr>
-          </a:p>
-        </p:txBody>
-      </p:sp>
-      <p:sp>
-        <p:nvSpPr>
-          <p:cNvPr id="20" name="TextBox 19">
-            <a:extLst>
-              <a:ext uri="{FF2B5EF4-FFF2-40B4-BE49-F238E27FC236}">
-                <a16:creationId xmlns:a16="http://schemas.microsoft.com/office/drawing/2014/main" id="{98FB0E35-D2B3-A754-A053-6C9AE9B2B42C}"/>
-              </a:ext>
-            </a:extLst>
-          </p:cNvPr>
-          <p:cNvSpPr txBox="1"/>
-          <p:nvPr/>
-        </p:nvSpPr>
-        <p:spPr>
-          <a:xfrm>
-            <a:off x="6184287" y="6448595"/>
-            <a:ext cx="1071546" cy="338554"/>
-          </a:xfrm>
-          <a:prstGeom prst="rect">
-            <a:avLst/>
-          </a:prstGeom>
-          <a:noFill/>
-        </p:spPr>
-        <p:txBody>
-          <a:bodyPr wrap="square" rtlCol="0">
-            <a:spAutoFit/>
-          </a:bodyPr>
-          <a:lstStyle/>
-          <a:p>
-            <a:pPr algn="ctr"/>
-            <a:r>
-              <a:rPr lang="en-US" sz="1600" dirty="0">
-                <a:latin typeface="Segoe UI" panose="020B0502040204020203" pitchFamily="34" charset="0"/>
-                <a:cs typeface="Segoe UI" panose="020B0502040204020203" pitchFamily="34" charset="0"/>
-              </a:rPr>
-              <a:t>Post-HFS</a:t>
-            </a:r>
-            <a:endParaRPr lang="en-US" dirty="0">
-              <a:latin typeface="Segoe UI" panose="020B0502040204020203" pitchFamily="34" charset="0"/>
-              <a:cs typeface="Segoe UI" panose="020B0502040204020203" pitchFamily="34" charset="0"/>
-            </a:endParaRPr>
-          </a:p>
-        </p:txBody>
-      </p:sp>
-      <p:sp>
-        <p:nvSpPr>
-          <p:cNvPr id="21" name="TextBox 20">
-            <a:extLst>
-              <a:ext uri="{FF2B5EF4-FFF2-40B4-BE49-F238E27FC236}">
-                <a16:creationId xmlns:a16="http://schemas.microsoft.com/office/drawing/2014/main" id="{AE3CC6D3-AB43-1E7F-F8F4-EB407E5FEAD4}"/>
-              </a:ext>
-            </a:extLst>
-          </p:cNvPr>
-          <p:cNvSpPr txBox="1"/>
-          <p:nvPr/>
-        </p:nvSpPr>
-        <p:spPr>
-          <a:xfrm>
-            <a:off x="2523718" y="7884238"/>
-            <a:ext cx="442301" cy="369012"/>
-          </a:xfrm>
-          <a:prstGeom prst="rect">
-            <a:avLst/>
-          </a:prstGeom>
-          <a:noFill/>
-        </p:spPr>
-        <p:txBody>
-          <a:bodyPr wrap="square" rtlCol="0">
-            <a:spAutoFit/>
-          </a:bodyPr>
-          <a:lstStyle/>
-          <a:p>
-            <a:r>
-              <a:rPr lang="en-US" sz="1798" b="1" dirty="0">
-                <a:latin typeface="Arial" panose="020B0604020202020204" pitchFamily="34" charset="0"/>
-                <a:cs typeface="Arial" panose="020B0604020202020204" pitchFamily="34" charset="0"/>
-              </a:rPr>
-              <a:t>C.</a:t>
-            </a:r>
-          </a:p>
-        </p:txBody>
-      </p:sp>
     </p:spTree>
     <p:extLst>
       <p:ext uri="{BB962C8B-B14F-4D97-AF65-F5344CB8AC3E}">
-        <p14:creationId xmlns:p14="http://schemas.microsoft.com/office/powerpoint/2010/main" val="1340584193"/>
+        <p14:creationId xmlns:p14="http://schemas.microsoft.com/office/powerpoint/2010/main" val="2041815030"/>
       </p:ext>
     </p:extLst>
   </p:cSld>
@@ -6859,7 +9324,7 @@
         <p:cNvPr id="1" name="">
           <a:extLst>
             <a:ext uri="{FF2B5EF4-FFF2-40B4-BE49-F238E27FC236}">
-              <a16:creationId xmlns:a16="http://schemas.microsoft.com/office/drawing/2014/main" id="{AE009488-6750-E636-3C4C-84FDBBF1783E}"/>
+              <a16:creationId xmlns:a16="http://schemas.microsoft.com/office/drawing/2014/main" id="{E0B923B5-F785-A725-4AD2-E7394016CD04}"/>
             </a:ext>
           </a:extLst>
         </p:cNvPr>
@@ -6879,7 +9344,7 @@
           <p:cNvPr id="3" name="Picture 2">
             <a:extLst>
               <a:ext uri="{FF2B5EF4-FFF2-40B4-BE49-F238E27FC236}">
-                <a16:creationId xmlns:a16="http://schemas.microsoft.com/office/drawing/2014/main" id="{9B69B228-8A4E-137F-FD80-E00059299F6E}"/>
+                <a16:creationId xmlns:a16="http://schemas.microsoft.com/office/drawing/2014/main" id="{1D0B75F9-6335-0CF1-7517-A754C951F060}"/>
               </a:ext>
             </a:extLst>
           </p:cNvPr>
@@ -6895,8 +9360,8 @@
         </p:blipFill>
         <p:spPr>
           <a:xfrm>
-            <a:off x="2753736" y="8161338"/>
-            <a:ext cx="6383069" cy="4572000"/>
+            <a:off x="1066372" y="4807131"/>
+            <a:ext cx="5379492" cy="3845538"/>
           </a:xfrm>
           <a:prstGeom prst="rect">
             <a:avLst/>
@@ -6905,10 +9370,10 @@
       </p:pic>
       <p:pic>
         <p:nvPicPr>
-          <p:cNvPr id="7" name="Picture 6">
-            <a:extLst>
-              <a:ext uri="{FF2B5EF4-FFF2-40B4-BE49-F238E27FC236}">
-                <a16:creationId xmlns:a16="http://schemas.microsoft.com/office/drawing/2014/main" id="{CC6EADE1-4E2A-F6B0-4F2B-184978D6A847}"/>
+          <p:cNvPr id="5" name="Picture 4">
+            <a:extLst>
+              <a:ext uri="{FF2B5EF4-FFF2-40B4-BE49-F238E27FC236}">
+                <a16:creationId xmlns:a16="http://schemas.microsoft.com/office/drawing/2014/main" id="{E676F402-DE50-3A8E-4D36-E3CDA2A13EA6}"/>
               </a:ext>
             </a:extLst>
           </p:cNvPr>
@@ -6924,8 +9389,8 @@
         </p:blipFill>
         <p:spPr>
           <a:xfrm>
-            <a:off x="2760069" y="1794669"/>
-            <a:ext cx="6370404" cy="4572000"/>
+            <a:off x="6175736" y="4807131"/>
+            <a:ext cx="5379492" cy="3845538"/>
           </a:xfrm>
           <a:prstGeom prst="rect">
             <a:avLst/>
@@ -6934,10 +9399,10 @@
       </p:pic>
       <p:sp>
         <p:nvSpPr>
-          <p:cNvPr id="8" name="TextBox 7">
-            <a:extLst>
-              <a:ext uri="{FF2B5EF4-FFF2-40B4-BE49-F238E27FC236}">
-                <a16:creationId xmlns:a16="http://schemas.microsoft.com/office/drawing/2014/main" id="{526FF42C-EE63-A09B-8579-3C3FC82A4FC4}"/>
+          <p:cNvPr id="6" name="TextBox 5">
+            <a:extLst>
+              <a:ext uri="{FF2B5EF4-FFF2-40B4-BE49-F238E27FC236}">
+                <a16:creationId xmlns:a16="http://schemas.microsoft.com/office/drawing/2014/main" id="{02C69004-D231-8902-700A-8C42A84D1F8D}"/>
               </a:ext>
             </a:extLst>
           </p:cNvPr>
@@ -6946,7 +9411,7 @@
         </p:nvSpPr>
         <p:spPr>
           <a:xfrm>
-            <a:off x="2523718" y="1610163"/>
+            <a:off x="843091" y="4807131"/>
             <a:ext cx="442301" cy="369012"/>
           </a:xfrm>
           <a:prstGeom prst="rect">
@@ -6972,10 +9437,10 @@
       </p:sp>
       <p:sp>
         <p:nvSpPr>
-          <p:cNvPr id="9" name="TextBox 8">
-            <a:extLst>
-              <a:ext uri="{FF2B5EF4-FFF2-40B4-BE49-F238E27FC236}">
-                <a16:creationId xmlns:a16="http://schemas.microsoft.com/office/drawing/2014/main" id="{9F228C08-5C6D-C0AB-EB74-B5B4098C7CF0}"/>
+          <p:cNvPr id="7" name="TextBox 6">
+            <a:extLst>
+              <a:ext uri="{FF2B5EF4-FFF2-40B4-BE49-F238E27FC236}">
+                <a16:creationId xmlns:a16="http://schemas.microsoft.com/office/drawing/2014/main" id="{35637BDC-C513-EB64-4607-61981FB2ED65}"/>
               </a:ext>
             </a:extLst>
           </p:cNvPr>
@@ -6984,7 +9449,7 @@
         </p:nvSpPr>
         <p:spPr>
           <a:xfrm>
-            <a:off x="2523718" y="5997657"/>
+            <a:off x="6089650" y="4807131"/>
             <a:ext cx="442301" cy="369012"/>
           </a:xfrm>
           <a:prstGeom prst="rect">
@@ -7008,163 +9473,10 @@
           </a:p>
         </p:txBody>
       </p:sp>
-      <p:pic>
-        <p:nvPicPr>
-          <p:cNvPr id="18" name="Picture 17">
-            <a:extLst>
-              <a:ext uri="{FF2B5EF4-FFF2-40B4-BE49-F238E27FC236}">
-                <a16:creationId xmlns:a16="http://schemas.microsoft.com/office/drawing/2014/main" id="{6C336446-D2F9-1E17-EA9E-59D98FEBE412}"/>
-              </a:ext>
-            </a:extLst>
-          </p:cNvPr>
-          <p:cNvPicPr>
-            <a:picLocks noChangeAspect="1"/>
-          </p:cNvPicPr>
-          <p:nvPr/>
-        </p:nvPicPr>
-        <p:blipFill>
-          <a:blip r:embed="rId5"/>
-          <a:srcRect/>
-          <a:stretch/>
-        </p:blipFill>
-        <p:spPr>
-          <a:xfrm>
-            <a:off x="4013105" y="6619159"/>
-            <a:ext cx="5132566" cy="1448298"/>
-          </a:xfrm>
-          <a:prstGeom prst="rect">
-            <a:avLst/>
-          </a:prstGeom>
-        </p:spPr>
-      </p:pic>
-      <p:sp>
-        <p:nvSpPr>
-          <p:cNvPr id="19" name="TextBox 18">
-            <a:extLst>
-              <a:ext uri="{FF2B5EF4-FFF2-40B4-BE49-F238E27FC236}">
-                <a16:creationId xmlns:a16="http://schemas.microsoft.com/office/drawing/2014/main" id="{F464DBB6-D776-53EC-FB5D-31636CA75ED9}"/>
-              </a:ext>
-            </a:extLst>
-          </p:cNvPr>
-          <p:cNvSpPr txBox="1"/>
-          <p:nvPr/>
-        </p:nvSpPr>
-        <p:spPr>
-          <a:xfrm>
-            <a:off x="4218657" y="6448595"/>
-            <a:ext cx="951229" cy="338554"/>
-          </a:xfrm>
-          <a:prstGeom prst="rect">
-            <a:avLst/>
-          </a:prstGeom>
-          <a:noFill/>
-        </p:spPr>
-        <p:txBody>
-          <a:bodyPr wrap="square" rtlCol="0">
-            <a:spAutoFit/>
-          </a:bodyPr>
-          <a:lstStyle/>
-          <a:p>
-            <a:pPr algn="ctr"/>
-            <a:r>
-              <a:rPr lang="en-US" sz="1600" dirty="0">
-                <a:latin typeface="Segoe UI" panose="020B0502040204020203" pitchFamily="34" charset="0"/>
-                <a:cs typeface="Segoe UI" panose="020B0502040204020203" pitchFamily="34" charset="0"/>
-              </a:rPr>
-              <a:t>Baseline</a:t>
-            </a:r>
-            <a:endParaRPr lang="en-US" dirty="0">
-              <a:latin typeface="Segoe UI" panose="020B0502040204020203" pitchFamily="34" charset="0"/>
-              <a:cs typeface="Segoe UI" panose="020B0502040204020203" pitchFamily="34" charset="0"/>
-            </a:endParaRPr>
-          </a:p>
-        </p:txBody>
-      </p:sp>
-      <p:sp>
-        <p:nvSpPr>
-          <p:cNvPr id="20" name="TextBox 19">
-            <a:extLst>
-              <a:ext uri="{FF2B5EF4-FFF2-40B4-BE49-F238E27FC236}">
-                <a16:creationId xmlns:a16="http://schemas.microsoft.com/office/drawing/2014/main" id="{43510C4B-0301-8885-455B-D20AAD1D85B6}"/>
-              </a:ext>
-            </a:extLst>
-          </p:cNvPr>
-          <p:cNvSpPr txBox="1"/>
-          <p:nvPr/>
-        </p:nvSpPr>
-        <p:spPr>
-          <a:xfrm>
-            <a:off x="6184287" y="6448595"/>
-            <a:ext cx="1071546" cy="338554"/>
-          </a:xfrm>
-          <a:prstGeom prst="rect">
-            <a:avLst/>
-          </a:prstGeom>
-          <a:noFill/>
-        </p:spPr>
-        <p:txBody>
-          <a:bodyPr wrap="square" rtlCol="0">
-            <a:spAutoFit/>
-          </a:bodyPr>
-          <a:lstStyle/>
-          <a:p>
-            <a:pPr algn="ctr"/>
-            <a:r>
-              <a:rPr lang="en-US" sz="1600" dirty="0">
-                <a:latin typeface="Segoe UI" panose="020B0502040204020203" pitchFamily="34" charset="0"/>
-                <a:cs typeface="Segoe UI" panose="020B0502040204020203" pitchFamily="34" charset="0"/>
-              </a:rPr>
-              <a:t>Post-HFS</a:t>
-            </a:r>
-            <a:endParaRPr lang="en-US" dirty="0">
-              <a:latin typeface="Segoe UI" panose="020B0502040204020203" pitchFamily="34" charset="0"/>
-              <a:cs typeface="Segoe UI" panose="020B0502040204020203" pitchFamily="34" charset="0"/>
-            </a:endParaRPr>
-          </a:p>
-        </p:txBody>
-      </p:sp>
-      <p:sp>
-        <p:nvSpPr>
-          <p:cNvPr id="21" name="TextBox 20">
-            <a:extLst>
-              <a:ext uri="{FF2B5EF4-FFF2-40B4-BE49-F238E27FC236}">
-                <a16:creationId xmlns:a16="http://schemas.microsoft.com/office/drawing/2014/main" id="{7BFE4CEA-0832-699F-3D66-4159DC369D7F}"/>
-              </a:ext>
-            </a:extLst>
-          </p:cNvPr>
-          <p:cNvSpPr txBox="1"/>
-          <p:nvPr/>
-        </p:nvSpPr>
-        <p:spPr>
-          <a:xfrm>
-            <a:off x="2523718" y="7884238"/>
-            <a:ext cx="442301" cy="369012"/>
-          </a:xfrm>
-          <a:prstGeom prst="rect">
-            <a:avLst/>
-          </a:prstGeom>
-          <a:noFill/>
-        </p:spPr>
-        <p:txBody>
-          <a:bodyPr wrap="square" rtlCol="0">
-            <a:spAutoFit/>
-          </a:bodyPr>
-          <a:lstStyle/>
-          <a:p>
-            <a:r>
-              <a:rPr lang="en-US" sz="1798" b="1" dirty="0">
-                <a:latin typeface="Arial" panose="020B0604020202020204" pitchFamily="34" charset="0"/>
-                <a:cs typeface="Arial" panose="020B0604020202020204" pitchFamily="34" charset="0"/>
-              </a:rPr>
-              <a:t>C.</a:t>
-            </a:r>
-          </a:p>
-        </p:txBody>
-      </p:sp>
     </p:spTree>
     <p:extLst>
       <p:ext uri="{BB962C8B-B14F-4D97-AF65-F5344CB8AC3E}">
-        <p14:creationId xmlns:p14="http://schemas.microsoft.com/office/powerpoint/2010/main" val="2689135982"/>
+        <p14:creationId xmlns:p14="http://schemas.microsoft.com/office/powerpoint/2010/main" val="2656720397"/>
       </p:ext>
     </p:extLst>
   </p:cSld>
@@ -7182,7 +9494,7 @@
         <p:cNvPr id="1" name="">
           <a:extLst>
             <a:ext uri="{FF2B5EF4-FFF2-40B4-BE49-F238E27FC236}">
-              <a16:creationId xmlns:a16="http://schemas.microsoft.com/office/drawing/2014/main" id="{A062D1D4-6826-F620-B10A-784FC5BF51AC}"/>
+              <a16:creationId xmlns:a16="http://schemas.microsoft.com/office/drawing/2014/main" id="{43A9A5B9-AB47-E0B0-AE73-A0E9A8FCC415}"/>
             </a:ext>
           </a:extLst>
         </p:cNvPr>
@@ -7202,7 +9514,7 @@
           <p:cNvPr id="3" name="Picture 2">
             <a:extLst>
               <a:ext uri="{FF2B5EF4-FFF2-40B4-BE49-F238E27FC236}">
-                <a16:creationId xmlns:a16="http://schemas.microsoft.com/office/drawing/2014/main" id="{DCA7BD25-3893-16E8-50D3-96F5DC450AB5}"/>
+                <a16:creationId xmlns:a16="http://schemas.microsoft.com/office/drawing/2014/main" id="{2857237E-BCCC-9064-1B93-795CC941C0E5}"/>
               </a:ext>
             </a:extLst>
           </p:cNvPr>
@@ -7218,8 +9530,8 @@
         </p:blipFill>
         <p:spPr>
           <a:xfrm>
-            <a:off x="2753736" y="8161338"/>
-            <a:ext cx="6383069" cy="4571999"/>
+            <a:off x="1066372" y="4812457"/>
+            <a:ext cx="5379492" cy="3834885"/>
           </a:xfrm>
           <a:prstGeom prst="rect">
             <a:avLst/>
@@ -7228,10 +9540,10 @@
       </p:pic>
       <p:pic>
         <p:nvPicPr>
-          <p:cNvPr id="7" name="Picture 6">
-            <a:extLst>
-              <a:ext uri="{FF2B5EF4-FFF2-40B4-BE49-F238E27FC236}">
-                <a16:creationId xmlns:a16="http://schemas.microsoft.com/office/drawing/2014/main" id="{26442BF3-2E38-C0D4-F101-98AC5033DE28}"/>
+          <p:cNvPr id="5" name="Picture 4">
+            <a:extLst>
+              <a:ext uri="{FF2B5EF4-FFF2-40B4-BE49-F238E27FC236}">
+                <a16:creationId xmlns:a16="http://schemas.microsoft.com/office/drawing/2014/main" id="{5BD159E1-0457-EFE1-81D7-9675B91F926F}"/>
               </a:ext>
             </a:extLst>
           </p:cNvPr>
@@ -7247,8 +9559,8 @@
         </p:blipFill>
         <p:spPr>
           <a:xfrm>
-            <a:off x="2766401" y="1794669"/>
-            <a:ext cx="6357739" cy="4572000"/>
+            <a:off x="6175736" y="4812457"/>
+            <a:ext cx="5379492" cy="3834885"/>
           </a:xfrm>
           <a:prstGeom prst="rect">
             <a:avLst/>
@@ -7257,10 +9569,10 @@
       </p:pic>
       <p:sp>
         <p:nvSpPr>
-          <p:cNvPr id="8" name="TextBox 7">
-            <a:extLst>
-              <a:ext uri="{FF2B5EF4-FFF2-40B4-BE49-F238E27FC236}">
-                <a16:creationId xmlns:a16="http://schemas.microsoft.com/office/drawing/2014/main" id="{A56BEC6A-47CB-F436-4913-67FCED4CB003}"/>
+          <p:cNvPr id="6" name="TextBox 5">
+            <a:extLst>
+              <a:ext uri="{FF2B5EF4-FFF2-40B4-BE49-F238E27FC236}">
+                <a16:creationId xmlns:a16="http://schemas.microsoft.com/office/drawing/2014/main" id="{AC080979-31D0-650E-2832-A68EEAA21C48}"/>
               </a:ext>
             </a:extLst>
           </p:cNvPr>
@@ -7269,7 +9581,7 @@
         </p:nvSpPr>
         <p:spPr>
           <a:xfrm>
-            <a:off x="2523718" y="1610163"/>
+            <a:off x="843091" y="4807131"/>
             <a:ext cx="442301" cy="369012"/>
           </a:xfrm>
           <a:prstGeom prst="rect">
@@ -7295,10 +9607,10 @@
       </p:sp>
       <p:sp>
         <p:nvSpPr>
-          <p:cNvPr id="9" name="TextBox 8">
-            <a:extLst>
-              <a:ext uri="{FF2B5EF4-FFF2-40B4-BE49-F238E27FC236}">
-                <a16:creationId xmlns:a16="http://schemas.microsoft.com/office/drawing/2014/main" id="{49E28428-4C66-9E54-C23C-52FF8C2B8609}"/>
+          <p:cNvPr id="7" name="TextBox 6">
+            <a:extLst>
+              <a:ext uri="{FF2B5EF4-FFF2-40B4-BE49-F238E27FC236}">
+                <a16:creationId xmlns:a16="http://schemas.microsoft.com/office/drawing/2014/main" id="{226CC036-8670-95BF-5D2D-DD0ECAE07C2F}"/>
               </a:ext>
             </a:extLst>
           </p:cNvPr>
@@ -7307,7 +9619,7 @@
         </p:nvSpPr>
         <p:spPr>
           <a:xfrm>
-            <a:off x="2523718" y="5997657"/>
+            <a:off x="6089650" y="4807131"/>
             <a:ext cx="442301" cy="369012"/>
           </a:xfrm>
           <a:prstGeom prst="rect">
@@ -7331,163 +9643,10 @@
           </a:p>
         </p:txBody>
       </p:sp>
-      <p:pic>
-        <p:nvPicPr>
-          <p:cNvPr id="18" name="Picture 17">
-            <a:extLst>
-              <a:ext uri="{FF2B5EF4-FFF2-40B4-BE49-F238E27FC236}">
-                <a16:creationId xmlns:a16="http://schemas.microsoft.com/office/drawing/2014/main" id="{9FFCC96E-5C71-5BD9-2B52-2755E50BAF35}"/>
-              </a:ext>
-            </a:extLst>
-          </p:cNvPr>
-          <p:cNvPicPr>
-            <a:picLocks noChangeAspect="1"/>
-          </p:cNvPicPr>
-          <p:nvPr/>
-        </p:nvPicPr>
-        <p:blipFill>
-          <a:blip r:embed="rId5"/>
-          <a:srcRect/>
-          <a:stretch/>
-        </p:blipFill>
-        <p:spPr>
-          <a:xfrm>
-            <a:off x="4013106" y="6619159"/>
-            <a:ext cx="5132564" cy="1448298"/>
-          </a:xfrm>
-          <a:prstGeom prst="rect">
-            <a:avLst/>
-          </a:prstGeom>
-        </p:spPr>
-      </p:pic>
-      <p:sp>
-        <p:nvSpPr>
-          <p:cNvPr id="19" name="TextBox 18">
-            <a:extLst>
-              <a:ext uri="{FF2B5EF4-FFF2-40B4-BE49-F238E27FC236}">
-                <a16:creationId xmlns:a16="http://schemas.microsoft.com/office/drawing/2014/main" id="{21C6AE5F-E412-D9D1-BA87-282802AC0C2E}"/>
-              </a:ext>
-            </a:extLst>
-          </p:cNvPr>
-          <p:cNvSpPr txBox="1"/>
-          <p:nvPr/>
-        </p:nvSpPr>
-        <p:spPr>
-          <a:xfrm>
-            <a:off x="4218657" y="6448595"/>
-            <a:ext cx="951229" cy="338554"/>
-          </a:xfrm>
-          <a:prstGeom prst="rect">
-            <a:avLst/>
-          </a:prstGeom>
-          <a:noFill/>
-        </p:spPr>
-        <p:txBody>
-          <a:bodyPr wrap="square" rtlCol="0">
-            <a:spAutoFit/>
-          </a:bodyPr>
-          <a:lstStyle/>
-          <a:p>
-            <a:pPr algn="ctr"/>
-            <a:r>
-              <a:rPr lang="en-US" sz="1600" dirty="0">
-                <a:latin typeface="Segoe UI" panose="020B0502040204020203" pitchFamily="34" charset="0"/>
-                <a:cs typeface="Segoe UI" panose="020B0502040204020203" pitchFamily="34" charset="0"/>
-              </a:rPr>
-              <a:t>Baseline</a:t>
-            </a:r>
-            <a:endParaRPr lang="en-US" dirty="0">
-              <a:latin typeface="Segoe UI" panose="020B0502040204020203" pitchFamily="34" charset="0"/>
-              <a:cs typeface="Segoe UI" panose="020B0502040204020203" pitchFamily="34" charset="0"/>
-            </a:endParaRPr>
-          </a:p>
-        </p:txBody>
-      </p:sp>
-      <p:sp>
-        <p:nvSpPr>
-          <p:cNvPr id="20" name="TextBox 19">
-            <a:extLst>
-              <a:ext uri="{FF2B5EF4-FFF2-40B4-BE49-F238E27FC236}">
-                <a16:creationId xmlns:a16="http://schemas.microsoft.com/office/drawing/2014/main" id="{81178A97-7400-7D29-1E61-2ABC3D1A78D0}"/>
-              </a:ext>
-            </a:extLst>
-          </p:cNvPr>
-          <p:cNvSpPr txBox="1"/>
-          <p:nvPr/>
-        </p:nvSpPr>
-        <p:spPr>
-          <a:xfrm>
-            <a:off x="6184287" y="6448595"/>
-            <a:ext cx="1071546" cy="338554"/>
-          </a:xfrm>
-          <a:prstGeom prst="rect">
-            <a:avLst/>
-          </a:prstGeom>
-          <a:noFill/>
-        </p:spPr>
-        <p:txBody>
-          <a:bodyPr wrap="square" rtlCol="0">
-            <a:spAutoFit/>
-          </a:bodyPr>
-          <a:lstStyle/>
-          <a:p>
-            <a:pPr algn="ctr"/>
-            <a:r>
-              <a:rPr lang="en-US" sz="1600" dirty="0">
-                <a:latin typeface="Segoe UI" panose="020B0502040204020203" pitchFamily="34" charset="0"/>
-                <a:cs typeface="Segoe UI" panose="020B0502040204020203" pitchFamily="34" charset="0"/>
-              </a:rPr>
-              <a:t>Post-HFS</a:t>
-            </a:r>
-            <a:endParaRPr lang="en-US" dirty="0">
-              <a:latin typeface="Segoe UI" panose="020B0502040204020203" pitchFamily="34" charset="0"/>
-              <a:cs typeface="Segoe UI" panose="020B0502040204020203" pitchFamily="34" charset="0"/>
-            </a:endParaRPr>
-          </a:p>
-        </p:txBody>
-      </p:sp>
-      <p:sp>
-        <p:nvSpPr>
-          <p:cNvPr id="21" name="TextBox 20">
-            <a:extLst>
-              <a:ext uri="{FF2B5EF4-FFF2-40B4-BE49-F238E27FC236}">
-                <a16:creationId xmlns:a16="http://schemas.microsoft.com/office/drawing/2014/main" id="{BA15E6DA-046A-1350-2D59-07A0A5115FCE}"/>
-              </a:ext>
-            </a:extLst>
-          </p:cNvPr>
-          <p:cNvSpPr txBox="1"/>
-          <p:nvPr/>
-        </p:nvSpPr>
-        <p:spPr>
-          <a:xfrm>
-            <a:off x="2523718" y="7884238"/>
-            <a:ext cx="442301" cy="369012"/>
-          </a:xfrm>
-          <a:prstGeom prst="rect">
-            <a:avLst/>
-          </a:prstGeom>
-          <a:noFill/>
-        </p:spPr>
-        <p:txBody>
-          <a:bodyPr wrap="square" rtlCol="0">
-            <a:spAutoFit/>
-          </a:bodyPr>
-          <a:lstStyle/>
-          <a:p>
-            <a:r>
-              <a:rPr lang="en-US" sz="1798" b="1" dirty="0">
-                <a:latin typeface="Arial" panose="020B0604020202020204" pitchFamily="34" charset="0"/>
-                <a:cs typeface="Arial" panose="020B0604020202020204" pitchFamily="34" charset="0"/>
-              </a:rPr>
-              <a:t>C.</a:t>
-            </a:r>
-          </a:p>
-        </p:txBody>
-      </p:sp>
     </p:spTree>
     <p:extLst>
       <p:ext uri="{BB962C8B-B14F-4D97-AF65-F5344CB8AC3E}">
-        <p14:creationId xmlns:p14="http://schemas.microsoft.com/office/powerpoint/2010/main" val="2874536972"/>
+        <p14:creationId xmlns:p14="http://schemas.microsoft.com/office/powerpoint/2010/main" val="3281549095"/>
       </p:ext>
     </p:extLst>
   </p:cSld>
